--- a/ADG/07장/7장_RedoApply기동과동기화검증.pptx
+++ b/ADG/07장/7장_RedoApply기동과동기화검증.pptx
@@ -5615,7 +5615,35 @@
                 </a:solidFill>
                 <a:latin typeface="맑은 고딕"/>
               </a:rPr>
-              <a:t>•  멈춰 있는데 CANCEL → **ORA-16136** `Managed Standby Recovery not active`</a:t>
+              <a:t>•  멈춰 있는데 CANCEL → </a:t>
+            </a:r>
+            <a:r>
+              <a:rPr sz="1700" b="1">
+                <a:solidFill>
+                  <a:srgbClr val="222222"/>
+                </a:solidFill>
+                <a:latin typeface="맑은 고딕"/>
+              </a:rPr>
+              <a:t>ORA-16136</a:t>
+            </a:r>
+            <a:r>
+              <a:rPr sz="1700" b="0">
+                <a:solidFill>
+                  <a:srgbClr val="222222"/>
+                </a:solidFill>
+                <a:latin typeface="맑은 고딕"/>
+              </a:rPr>
+              <a:t> </a:t>
+            </a:r>
+            <a:r>
+              <a:rPr sz="1700" b="0">
+                <a:solidFill>
+                  <a:srgbClr val="222222"/>
+                </a:solidFill>
+                <a:latin typeface="Consolas"/>
+                <a:cs typeface="Consolas"/>
+              </a:rPr>
+              <a:t>Managed Standby Recovery not active</a:t>
             </a:r>
           </a:p>
           <a:p>
@@ -5631,7 +5659,35 @@
                 </a:solidFill>
                 <a:latin typeface="맑은 고딕"/>
               </a:rPr>
-              <a:t>•  돌고 있는데 기동 → **ORA-01153** `an incompatible media recovery is active`</a:t>
+              <a:t>•  돌고 있는데 기동 → </a:t>
+            </a:r>
+            <a:r>
+              <a:rPr sz="1700" b="1">
+                <a:solidFill>
+                  <a:srgbClr val="222222"/>
+                </a:solidFill>
+                <a:latin typeface="맑은 고딕"/>
+              </a:rPr>
+              <a:t>ORA-01153</a:t>
+            </a:r>
+            <a:r>
+              <a:rPr sz="1700" b="0">
+                <a:solidFill>
+                  <a:srgbClr val="222222"/>
+                </a:solidFill>
+                <a:latin typeface="맑은 고딕"/>
+              </a:rPr>
+              <a:t> </a:t>
+            </a:r>
+            <a:r>
+              <a:rPr sz="1700" b="0">
+                <a:solidFill>
+                  <a:srgbClr val="222222"/>
+                </a:solidFill>
+                <a:latin typeface="Consolas"/>
+                <a:cs typeface="Consolas"/>
+              </a:rPr>
+              <a:t>an incompatible media recovery is active</a:t>
             </a:r>
           </a:p>
           <a:p>
@@ -5647,7 +5703,26 @@
                 </a:solidFill>
                 <a:latin typeface="맑은 고딕"/>
               </a:rPr>
-              <a:t>•  `USING CURRENT LOGFILE` 유무와 무관하게 같은 오류</a:t>
+              <a:t>•  </a:t>
+            </a:r>
+            <a:r>
+              <a:rPr sz="1700" b="0">
+                <a:solidFill>
+                  <a:srgbClr val="222222"/>
+                </a:solidFill>
+                <a:latin typeface="Consolas"/>
+                <a:cs typeface="Consolas"/>
+              </a:rPr>
+              <a:t>USING CURRENT LOGFILE</a:t>
+            </a:r>
+            <a:r>
+              <a:rPr sz="1700" b="0">
+                <a:solidFill>
+                  <a:srgbClr val="222222"/>
+                </a:solidFill>
+                <a:latin typeface="맑은 고딕"/>
+              </a:rPr>
+              <a:t> 유무와 무관하게 같은 오류</a:t>
             </a:r>
           </a:p>
           <a:p>
@@ -5663,7 +5738,16 @@
                 </a:solidFill>
                 <a:latin typeface="맑은 고딕"/>
               </a:rPr>
-              <a:t>•  둘 다 **상태를 바꾸지 않는다**</a:t>
+              <a:t>•  둘 다 </a:t>
+            </a:r>
+            <a:r>
+              <a:rPr sz="1700" b="1">
+                <a:solidFill>
+                  <a:srgbClr val="222222"/>
+                </a:solidFill>
+                <a:latin typeface="맑은 고딕"/>
+              </a:rPr>
+              <a:t>상태를 바꾸지 않는다</a:t>
             </a:r>
           </a:p>
         </p:txBody>
@@ -6324,7 +6408,17 @@
                 </a:solidFill>
                 <a:latin typeface="맑은 고딕"/>
               </a:rPr>
-              <a:t>•  `1 LOG_ARCHIVE_DEST_1  (빈칸)  BAD PARAM  IDLE`</a:t>
+              <a:t>•  </a:t>
+            </a:r>
+            <a:r>
+              <a:rPr sz="1700" b="0">
+                <a:solidFill>
+                  <a:srgbClr val="222222"/>
+                </a:solidFill>
+                <a:latin typeface="Consolas"/>
+                <a:cs typeface="Consolas"/>
+              </a:rPr>
+              <a:t>1 LOG_ARCHIVE_DEST_1  (빈칸)  BAD PARAM  IDLE</a:t>
             </a:r>
           </a:p>
           <a:p>
@@ -6340,7 +6434,27 @@
                 </a:solidFill>
                 <a:latin typeface="맑은 고딕"/>
               </a:rPr>
-              <a:t>•  파라미터 값 : `... db_unique_name=**chicago**`</a:t>
+              <a:t>•  파라미터 값 : </a:t>
+            </a:r>
+            <a:r>
+              <a:rPr sz="1700" b="0">
+                <a:solidFill>
+                  <a:srgbClr val="222222"/>
+                </a:solidFill>
+                <a:latin typeface="Consolas"/>
+                <a:cs typeface="Consolas"/>
+              </a:rPr>
+              <a:t>... db_unique_name=</a:t>
+            </a:r>
+            <a:r>
+              <a:rPr sz="1700" b="1">
+                <a:solidFill>
+                  <a:srgbClr val="222222"/>
+                </a:solidFill>
+                <a:latin typeface="Consolas"/>
+                <a:cs typeface="Consolas"/>
+              </a:rPr>
+              <a:t>chicago</a:t>
             </a:r>
           </a:p>
           <a:p>
@@ -6356,7 +6470,36 @@
                 </a:solidFill>
                 <a:latin typeface="맑은 고딕"/>
               </a:rPr>
-              <a:t>•  이 데이터베이스의 `DB_UNIQUE_NAME`은 `boston`</a:t>
+              <a:t>•  이 데이터베이스의 </a:t>
+            </a:r>
+            <a:r>
+              <a:rPr sz="1700" b="0">
+                <a:solidFill>
+                  <a:srgbClr val="222222"/>
+                </a:solidFill>
+                <a:latin typeface="Consolas"/>
+                <a:cs typeface="Consolas"/>
+              </a:rPr>
+              <a:t>DB_UNIQUE_NAME</a:t>
+            </a:r>
+            <a:r>
+              <a:rPr sz="1700" b="0">
+                <a:solidFill>
+                  <a:srgbClr val="222222"/>
+                </a:solidFill>
+                <a:latin typeface="맑은 고딕"/>
+              </a:rPr>
+              <a:t>은 </a:t>
+            </a:r>
+            <a:r>
+              <a:rPr sz="1700" b="0">
+                <a:solidFill>
+                  <a:srgbClr val="222222"/>
+                </a:solidFill>
+                <a:latin typeface="Consolas"/>
+                <a:cs typeface="Consolas"/>
+              </a:rPr>
+              <a:t>boston</a:t>
             </a:r>
           </a:p>
           <a:p>
@@ -6372,7 +6515,25 @@
                 </a:solidFill>
                 <a:latin typeface="맑은 고딕"/>
               </a:rPr>
-              <a:t>•  원인은 **파라미터 상속** — 6장 컨트롤 파일과 같은 구조</a:t>
+              <a:t>•  원인은 </a:t>
+            </a:r>
+            <a:r>
+              <a:rPr sz="1700" b="1">
+                <a:solidFill>
+                  <a:srgbClr val="222222"/>
+                </a:solidFill>
+                <a:latin typeface="맑은 고딕"/>
+              </a:rPr>
+              <a:t>파라미터 상속</a:t>
+            </a:r>
+            <a:r>
+              <a:rPr sz="1700" b="0">
+                <a:solidFill>
+                  <a:srgbClr val="222222"/>
+                </a:solidFill>
+                <a:latin typeface="맑은 고딕"/>
+              </a:rPr>
+              <a:t> — 6장 컨트롤 파일과 같은 구조</a:t>
             </a:r>
           </a:p>
         </p:txBody>
@@ -6567,7 +6728,26 @@
                 </a:solidFill>
                 <a:latin typeface="맑은 고딕"/>
               </a:rPr>
-              <a:t>•  `DB_RECOVERY_FILE_DEST`가 있어 아카이브는 FRA로 갔다</a:t>
+              <a:t>•  </a:t>
+            </a:r>
+            <a:r>
+              <a:rPr sz="1700" b="0">
+                <a:solidFill>
+                  <a:srgbClr val="222222"/>
+                </a:solidFill>
+                <a:latin typeface="Consolas"/>
+                <a:cs typeface="Consolas"/>
+              </a:rPr>
+              <a:t>DB_RECOVERY_FILE_DEST</a:t>
+            </a:r>
+            <a:r>
+              <a:rPr sz="1700" b="0">
+                <a:solidFill>
+                  <a:srgbClr val="222222"/>
+                </a:solidFill>
+                <a:latin typeface="맑은 고딕"/>
+              </a:rPr>
+              <a:t>가 있어 아카이브는 FRA로 갔다</a:t>
             </a:r>
           </a:p>
           <a:p>
@@ -6583,7 +6763,17 @@
                 </a:solidFill>
                 <a:latin typeface="맑은 고딕"/>
               </a:rPr>
-              <a:t>•  실측 : `.../fast_recovery_area/BOSTON/archivelog/2026_08_27/o1_mf_1_66_...arc`</a:t>
+              <a:t>•  실측 : </a:t>
+            </a:r>
+            <a:r>
+              <a:rPr sz="1700" b="0">
+                <a:solidFill>
+                  <a:srgbClr val="222222"/>
+                </a:solidFill>
+                <a:latin typeface="Consolas"/>
+                <a:cs typeface="Consolas"/>
+              </a:rPr>
+              <a:t>.../fast_recovery_area/BOSTON/archivelog/2026_08_27/o1_mf_1_66_...arc</a:t>
             </a:r>
           </a:p>
           <a:p>
@@ -6599,7 +6789,16 @@
                 </a:solidFill>
                 <a:latin typeface="맑은 고딕"/>
               </a:rPr>
-              <a:t>•  **기능은 동작하고 상태 열만 비정상**</a:t>
+              <a:t>•  </a:t>
+            </a:r>
+            <a:r>
+              <a:rPr sz="1700" b="1">
+                <a:solidFill>
+                  <a:srgbClr val="222222"/>
+                </a:solidFill>
+                <a:latin typeface="맑은 고딕"/>
+              </a:rPr>
+              <a:t>기능은 동작하고 상태 열만 비정상</a:t>
             </a:r>
           </a:p>
         </p:txBody>
@@ -6778,7 +6977,36 @@
                 </a:solidFill>
                 <a:latin typeface="맑은 고딕"/>
               </a:rPr>
-              <a:t>•  `db_unique_name=boston`으로 수정, `SCOPE=BOTH`</a:t>
+              <a:t>•  </a:t>
+            </a:r>
+            <a:r>
+              <a:rPr sz="1700" b="0">
+                <a:solidFill>
+                  <a:srgbClr val="222222"/>
+                </a:solidFill>
+                <a:latin typeface="Consolas"/>
+                <a:cs typeface="Consolas"/>
+              </a:rPr>
+              <a:t>db_unique_name=boston</a:t>
+            </a:r>
+            <a:r>
+              <a:rPr sz="1700" b="0">
+                <a:solidFill>
+                  <a:srgbClr val="222222"/>
+                </a:solidFill>
+                <a:latin typeface="맑은 고딕"/>
+              </a:rPr>
+              <a:t>으로 수정, </a:t>
+            </a:r>
+            <a:r>
+              <a:rPr sz="1700" b="0">
+                <a:solidFill>
+                  <a:srgbClr val="222222"/>
+                </a:solidFill>
+                <a:latin typeface="Consolas"/>
+                <a:cs typeface="Consolas"/>
+              </a:rPr>
+              <a:t>SCOPE=BOTH</a:t>
             </a:r>
           </a:p>
           <a:p>
@@ -6794,7 +7022,35 @@
                 </a:solidFill>
                 <a:latin typeface="맑은 고딕"/>
               </a:rPr>
-              <a:t>•  `STATUS` : BAD PARAM → **VALID**</a:t>
+              <a:t>•  </a:t>
+            </a:r>
+            <a:r>
+              <a:rPr sz="1700" b="0">
+                <a:solidFill>
+                  <a:srgbClr val="222222"/>
+                </a:solidFill>
+                <a:latin typeface="Consolas"/>
+                <a:cs typeface="Consolas"/>
+              </a:rPr>
+              <a:t>STATUS</a:t>
+            </a:r>
+            <a:r>
+              <a:rPr sz="1700" b="0">
+                <a:solidFill>
+                  <a:srgbClr val="222222"/>
+                </a:solidFill>
+                <a:latin typeface="맑은 고딕"/>
+              </a:rPr>
+              <a:t> : BAD PARAM → </a:t>
+            </a:r>
+            <a:r>
+              <a:rPr sz="1700" b="1">
+                <a:solidFill>
+                  <a:srgbClr val="222222"/>
+                </a:solidFill>
+                <a:latin typeface="맑은 고딕"/>
+              </a:rPr>
+              <a:t>VALID</a:t>
             </a:r>
           </a:p>
           <a:p>
@@ -6810,7 +7066,35 @@
                 </a:solidFill>
                 <a:latin typeface="맑은 고딕"/>
               </a:rPr>
-              <a:t>•  `RECOVERY_MODE` : IDLE → **MANAGED REAL TIME APPLY**</a:t>
+              <a:t>•  </a:t>
+            </a:r>
+            <a:r>
+              <a:rPr sz="1700" b="0">
+                <a:solidFill>
+                  <a:srgbClr val="222222"/>
+                </a:solidFill>
+                <a:latin typeface="Consolas"/>
+                <a:cs typeface="Consolas"/>
+              </a:rPr>
+              <a:t>RECOVERY_MODE</a:t>
+            </a:r>
+            <a:r>
+              <a:rPr sz="1700" b="0">
+                <a:solidFill>
+                  <a:srgbClr val="222222"/>
+                </a:solidFill>
+                <a:latin typeface="맑은 고딕"/>
+              </a:rPr>
+              <a:t> : IDLE → </a:t>
+            </a:r>
+            <a:r>
+              <a:rPr sz="1700" b="1">
+                <a:solidFill>
+                  <a:srgbClr val="222222"/>
+                </a:solidFill>
+                <a:latin typeface="맑은 고딕"/>
+              </a:rPr>
+              <a:t>MANAGED REAL TIME APPLY</a:t>
             </a:r>
           </a:p>
           <a:p>
@@ -7005,7 +7289,17 @@
                 </a:solidFill>
                 <a:latin typeface="맑은 고딕"/>
               </a:rPr>
-              <a:t>•  `2 ... VALID  REMOTE  WRONG VALID_TYPE`</a:t>
+              <a:t>•  </a:t>
+            </a:r>
+            <a:r>
+              <a:rPr sz="1700" b="0">
+                <a:solidFill>
+                  <a:srgbClr val="222222"/>
+                </a:solidFill>
+                <a:latin typeface="Consolas"/>
+                <a:cs typeface="Consolas"/>
+              </a:rPr>
+              <a:t>2 ... VALID  REMOTE  WRONG VALID_TYPE</a:t>
             </a:r>
           </a:p>
           <a:p>
@@ -7021,7 +7315,37 @@
                 </a:solidFill>
                 <a:latin typeface="맑은 고딕"/>
               </a:rPr>
-              <a:t>•  boston의 목적지 2번 : `valid_for=(online_logfile,**primary_role**)`</a:t>
+              <a:t>•  boston의 목적지 2번 : </a:t>
+            </a:r>
+            <a:r>
+              <a:rPr sz="1700" b="0">
+                <a:solidFill>
+                  <a:srgbClr val="222222"/>
+                </a:solidFill>
+                <a:latin typeface="Consolas"/>
+                <a:cs typeface="Consolas"/>
+              </a:rPr>
+              <a:t>valid_for=(online_logfile,</a:t>
+            </a:r>
+            <a:r>
+              <a:rPr sz="1700" b="1">
+                <a:solidFill>
+                  <a:srgbClr val="222222"/>
+                </a:solidFill>
+                <a:latin typeface="Consolas"/>
+                <a:cs typeface="Consolas"/>
+              </a:rPr>
+              <a:t>primary_role</a:t>
+            </a:r>
+            <a:r>
+              <a:rPr sz="1700" b="0">
+                <a:solidFill>
+                  <a:srgbClr val="222222"/>
+                </a:solidFill>
+                <a:latin typeface="Consolas"/>
+                <a:cs typeface="Consolas"/>
+              </a:rPr>
+              <a:t>)</a:t>
             </a:r>
           </a:p>
           <a:p>
@@ -7232,7 +7556,26 @@
                 </a:solidFill>
                 <a:latin typeface="맑은 고딕"/>
               </a:rPr>
-              <a:t>•  `CONTROL_FILES` (6장) — Standby에 Chicago 디렉터리</a:t>
+              <a:t>•  </a:t>
+            </a:r>
+            <a:r>
+              <a:rPr sz="1700" b="0">
+                <a:solidFill>
+                  <a:srgbClr val="222222"/>
+                </a:solidFill>
+                <a:latin typeface="Consolas"/>
+                <a:cs typeface="Consolas"/>
+              </a:rPr>
+              <a:t>CONTROL_FILES</a:t>
+            </a:r>
+            <a:r>
+              <a:rPr sz="1700" b="0">
+                <a:solidFill>
+                  <a:srgbClr val="222222"/>
+                </a:solidFill>
+                <a:latin typeface="맑은 고딕"/>
+              </a:rPr>
+              <a:t> (6장) — Standby에 Chicago 디렉터리</a:t>
             </a:r>
           </a:p>
           <a:p>
@@ -7248,7 +7591,26 @@
                 </a:solidFill>
                 <a:latin typeface="맑은 고딕"/>
               </a:rPr>
-              <a:t>•  `LOG_ARCHIVE_DEST_1` (7장) — BAD PARAM</a:t>
+              <a:t>•  </a:t>
+            </a:r>
+            <a:r>
+              <a:rPr sz="1700" b="0">
+                <a:solidFill>
+                  <a:srgbClr val="222222"/>
+                </a:solidFill>
+                <a:latin typeface="Consolas"/>
+                <a:cs typeface="Consolas"/>
+              </a:rPr>
+              <a:t>LOG_ARCHIVE_DEST_1</a:t>
+            </a:r>
+            <a:r>
+              <a:rPr sz="1700" b="0">
+                <a:solidFill>
+                  <a:srgbClr val="222222"/>
+                </a:solidFill>
+                <a:latin typeface="맑은 고딕"/>
+              </a:rPr>
+              <a:t> (7장) — BAD PARAM</a:t>
             </a:r>
           </a:p>
           <a:p>
@@ -7264,7 +7626,44 @@
                 </a:solidFill>
                 <a:latin typeface="맑은 고딕"/>
               </a:rPr>
-              <a:t>•  `FAL_CLIENT` (7장) — **증상 없음.** 값이 chicago였다</a:t>
+              <a:t>•  </a:t>
+            </a:r>
+            <a:r>
+              <a:rPr sz="1700" b="0">
+                <a:solidFill>
+                  <a:srgbClr val="222222"/>
+                </a:solidFill>
+                <a:latin typeface="Consolas"/>
+                <a:cs typeface="Consolas"/>
+              </a:rPr>
+              <a:t>FAL_CLIENT</a:t>
+            </a:r>
+            <a:r>
+              <a:rPr sz="1700" b="0">
+                <a:solidFill>
+                  <a:srgbClr val="222222"/>
+                </a:solidFill>
+                <a:latin typeface="맑은 고딕"/>
+              </a:rPr>
+              <a:t> (7장) — </a:t>
+            </a:r>
+            <a:r>
+              <a:rPr sz="1700" b="1">
+                <a:solidFill>
+                  <a:srgbClr val="222222"/>
+                </a:solidFill>
+                <a:latin typeface="맑은 고딕"/>
+              </a:rPr>
+              <a:t>증상 없음.</a:t>
+            </a:r>
+            <a:r>
+              <a:rPr sz="1700" b="0">
+                <a:solidFill>
+                  <a:srgbClr val="222222"/>
+                </a:solidFill>
+                <a:latin typeface="맑은 고딕"/>
+              </a:rPr>
+              <a:t> 값이 chicago였다</a:t>
             </a:r>
           </a:p>
           <a:p>
@@ -7280,7 +7679,45 @@
                 </a:solidFill>
                 <a:latin typeface="맑은 고딕"/>
               </a:rPr>
-              <a:t>•  `DB_NAME` (5장) — 스크립트가 `set db_name`으로 막아 냈다</a:t>
+              <a:t>•  </a:t>
+            </a:r>
+            <a:r>
+              <a:rPr sz="1700" b="0">
+                <a:solidFill>
+                  <a:srgbClr val="222222"/>
+                </a:solidFill>
+                <a:latin typeface="Consolas"/>
+                <a:cs typeface="Consolas"/>
+              </a:rPr>
+              <a:t>DB_NAME</a:t>
+            </a:r>
+            <a:r>
+              <a:rPr sz="1700" b="0">
+                <a:solidFill>
+                  <a:srgbClr val="222222"/>
+                </a:solidFill>
+                <a:latin typeface="맑은 고딕"/>
+              </a:rPr>
+              <a:t> (5장) — 스크립트가 </a:t>
+            </a:r>
+            <a:r>
+              <a:rPr sz="1700" b="0">
+                <a:solidFill>
+                  <a:srgbClr val="222222"/>
+                </a:solidFill>
+                <a:latin typeface="Consolas"/>
+                <a:cs typeface="Consolas"/>
+              </a:rPr>
+              <a:t>set db_name</a:t>
+            </a:r>
+            <a:r>
+              <a:rPr sz="1700" b="0">
+                <a:solidFill>
+                  <a:srgbClr val="222222"/>
+                </a:solidFill>
+                <a:latin typeface="맑은 고딕"/>
+              </a:rPr>
+              <a:t>으로 막아 냈다</a:t>
             </a:r>
           </a:p>
         </p:txBody>
@@ -7730,7 +8167,25 @@
                 </a:solidFill>
                 <a:latin typeface="맑은 고딕"/>
               </a:rPr>
-              <a:t>•  그러므로 : **로그를 전환하지 않고** 커밋한 행이 Standby에서 보이면 실시간</a:t>
+              <a:t>•  그러므로 : </a:t>
+            </a:r>
+            <a:r>
+              <a:rPr sz="1700" b="1">
+                <a:solidFill>
+                  <a:srgbClr val="222222"/>
+                </a:solidFill>
+                <a:latin typeface="맑은 고딕"/>
+              </a:rPr>
+              <a:t>로그를 전환하지 않고</a:t>
+            </a:r>
+            <a:r>
+              <a:rPr sz="1700" b="0">
+                <a:solidFill>
+                  <a:srgbClr val="222222"/>
+                </a:solidFill>
+                <a:latin typeface="맑은 고딕"/>
+              </a:rPr>
+              <a:t> 커밋한 행이 Standby에서 보이면 실시간</a:t>
             </a:r>
           </a:p>
           <a:p>
@@ -7746,7 +8201,26 @@
                 </a:solidFill>
                 <a:latin typeface="맑은 고딕"/>
               </a:rPr>
-              <a:t>•  보이지 않다가 `ARCHIVE LOG CURRENT` 후에 보이면 아카이브 적용</a:t>
+              <a:t>•  보이지 않다가 </a:t>
+            </a:r>
+            <a:r>
+              <a:rPr sz="1700" b="0">
+                <a:solidFill>
+                  <a:srgbClr val="222222"/>
+                </a:solidFill>
+                <a:latin typeface="Consolas"/>
+                <a:cs typeface="Consolas"/>
+              </a:rPr>
+              <a:t>ARCHIVE LOG CURRENT</a:t>
+            </a:r>
+            <a:r>
+              <a:rPr sz="1700" b="0">
+                <a:solidFill>
+                  <a:srgbClr val="222222"/>
+                </a:solidFill>
+                <a:latin typeface="맑은 고딕"/>
+              </a:rPr>
+              <a:t> 후에 보이면 아카이브 적용</a:t>
             </a:r>
           </a:p>
           <a:p>
@@ -7902,7 +8376,26 @@
                 </a:solidFill>
                 <a:latin typeface="맑은 고딕"/>
               </a:rPr>
-              <a:t>•  `V$MANAGED_STANDBY`의 프로세스(ARCH·DGRD·RFS·MRP0) 역할과 상태를 읽는다.</a:t>
+              <a:t>•  </a:t>
+            </a:r>
+            <a:r>
+              <a:rPr sz="1600" b="0">
+                <a:solidFill>
+                  <a:srgbClr val="222222"/>
+                </a:solidFill>
+                <a:latin typeface="Consolas"/>
+                <a:cs typeface="Consolas"/>
+              </a:rPr>
+              <a:t>V$MANAGED_STANDBY</a:t>
+            </a:r>
+            <a:r>
+              <a:rPr sz="1600" b="0">
+                <a:solidFill>
+                  <a:srgbClr val="222222"/>
+                </a:solidFill>
+                <a:latin typeface="맑은 고딕"/>
+              </a:rPr>
+              <a:t>의 프로세스(ARCH·DGRD·RFS·MRP0) 역할과 상태를 읽는다.</a:t>
             </a:r>
           </a:p>
           <a:p>
@@ -7934,7 +8427,45 @@
                 </a:solidFill>
                 <a:latin typeface="맑은 고딕"/>
               </a:rPr>
-              <a:t>•  Standby의 `LOG_ARCHIVE_DEST_1`이 `BAD PARAM`이 되는 원인을 진단하고 고친다.</a:t>
+              <a:t>•  Standby의 </a:t>
+            </a:r>
+            <a:r>
+              <a:rPr sz="1600" b="0">
+                <a:solidFill>
+                  <a:srgbClr val="222222"/>
+                </a:solidFill>
+                <a:latin typeface="Consolas"/>
+                <a:cs typeface="Consolas"/>
+              </a:rPr>
+              <a:t>LOG_ARCHIVE_DEST_1</a:t>
+            </a:r>
+            <a:r>
+              <a:rPr sz="1600" b="0">
+                <a:solidFill>
+                  <a:srgbClr val="222222"/>
+                </a:solidFill>
+                <a:latin typeface="맑은 고딕"/>
+              </a:rPr>
+              <a:t>이 </a:t>
+            </a:r>
+            <a:r>
+              <a:rPr sz="1600" b="0">
+                <a:solidFill>
+                  <a:srgbClr val="222222"/>
+                </a:solidFill>
+                <a:latin typeface="Consolas"/>
+                <a:cs typeface="Consolas"/>
+              </a:rPr>
+              <a:t>BAD PARAM</a:t>
+            </a:r>
+            <a:r>
+              <a:rPr sz="1600" b="0">
+                <a:solidFill>
+                  <a:srgbClr val="222222"/>
+                </a:solidFill>
+                <a:latin typeface="맑은 고딕"/>
+              </a:rPr>
+              <a:t>이 되는 원인을 진단하고 고친다.</a:t>
             </a:r>
           </a:p>
           <a:p>
@@ -7950,7 +8481,26 @@
                 </a:solidFill>
                 <a:latin typeface="맑은 고딕"/>
               </a:rPr>
-              <a:t>•  `RECOVERY_MODE` 열과 기능 시험으로 실시간 적용 여부를 교차 검증한다.</a:t>
+              <a:t>•  </a:t>
+            </a:r>
+            <a:r>
+              <a:rPr sz="1600" b="0">
+                <a:solidFill>
+                  <a:srgbClr val="222222"/>
+                </a:solidFill>
+                <a:latin typeface="Consolas"/>
+                <a:cs typeface="Consolas"/>
+              </a:rPr>
+              <a:t>RECOVERY_MODE</a:t>
+            </a:r>
+            <a:r>
+              <a:rPr sz="1600" b="0">
+                <a:solidFill>
+                  <a:srgbClr val="222222"/>
+                </a:solidFill>
+                <a:latin typeface="맑은 고딕"/>
+              </a:rPr>
+              <a:t> 열과 기능 시험으로 실시간 적용 여부를 교차 검증한다.</a:t>
             </a:r>
           </a:p>
           <a:p>
@@ -7966,7 +8516,26 @@
                 </a:solidFill>
                 <a:latin typeface="맑은 고딕"/>
               </a:rPr>
-              <a:t>•  19c에서 `USING CURRENT LOGFILE`이 사실상 불필요해진 것을 실측으로 확인한다.</a:t>
+              <a:t>•  19c에서 </a:t>
+            </a:r>
+            <a:r>
+              <a:rPr sz="1600" b="0">
+                <a:solidFill>
+                  <a:srgbClr val="222222"/>
+                </a:solidFill>
+                <a:latin typeface="Consolas"/>
+                <a:cs typeface="Consolas"/>
+              </a:rPr>
+              <a:t>USING CURRENT LOGFILE</a:t>
+            </a:r>
+            <a:r>
+              <a:rPr sz="1600" b="0">
+                <a:solidFill>
+                  <a:srgbClr val="222222"/>
+                </a:solidFill>
+                <a:latin typeface="맑은 고딕"/>
+              </a:rPr>
+              <a:t>이 사실상 불필요해진 것을 실측으로 확인한다.</a:t>
             </a:r>
           </a:p>
           <a:p>
@@ -7982,7 +8551,26 @@
                 </a:solidFill>
                 <a:latin typeface="맑은 고딕"/>
               </a:rPr>
-              <a:t>•  갭을 만들어 `V$ARCHIVE_GAP`으로 관찰하고 해소 과정을 추적한다.</a:t>
+              <a:t>•  갭을 만들어 </a:t>
+            </a:r>
+            <a:r>
+              <a:rPr sz="1600" b="0">
+                <a:solidFill>
+                  <a:srgbClr val="222222"/>
+                </a:solidFill>
+                <a:latin typeface="Consolas"/>
+                <a:cs typeface="Consolas"/>
+              </a:rPr>
+              <a:t>V$ARCHIVE_GAP</a:t>
+            </a:r>
+            <a:r>
+              <a:rPr sz="1600" b="0">
+                <a:solidFill>
+                  <a:srgbClr val="222222"/>
+                </a:solidFill>
+                <a:latin typeface="맑은 고딕"/>
+              </a:rPr>
+              <a:t>으로 관찰하고 해소 과정을 추적한다.</a:t>
             </a:r>
           </a:p>
           <a:p>
@@ -7998,7 +8586,26 @@
                 </a:solidFill>
                 <a:latin typeface="맑은 고딕"/>
               </a:rPr>
-              <a:t>•  `V$DATAGUARD_STATS` 네 행과 두 시각 열의 차이를 안다.</a:t>
+              <a:t>•  </a:t>
+            </a:r>
+            <a:r>
+              <a:rPr sz="1600" b="0">
+                <a:solidFill>
+                  <a:srgbClr val="222222"/>
+                </a:solidFill>
+                <a:latin typeface="Consolas"/>
+                <a:cs typeface="Consolas"/>
+              </a:rPr>
+              <a:t>V$DATAGUARD_STATS</a:t>
+            </a:r>
+            <a:r>
+              <a:rPr sz="1600" b="0">
+                <a:solidFill>
+                  <a:srgbClr val="222222"/>
+                </a:solidFill>
+                <a:latin typeface="맑은 고딕"/>
+              </a:rPr>
+              <a:t> 네 행과 두 시각 열의 차이를 안다.</a:t>
             </a:r>
           </a:p>
         </p:txBody>
@@ -8177,7 +8784,26 @@
                 </a:solidFill>
                 <a:latin typeface="맑은 고딕"/>
               </a:rPr>
-              <a:t>•  `... DISCONNECT FROM SESSION` → MANAGED REAL TIME APPLY, 40초 내 보임</a:t>
+              <a:t>•  </a:t>
+            </a:r>
+            <a:r>
+              <a:rPr sz="1700" b="0">
+                <a:solidFill>
+                  <a:srgbClr val="222222"/>
+                </a:solidFill>
+                <a:latin typeface="Consolas"/>
+                <a:cs typeface="Consolas"/>
+              </a:rPr>
+              <a:t>... DISCONNECT FROM SESSION</a:t>
+            </a:r>
+            <a:r>
+              <a:rPr sz="1700" b="0">
+                <a:solidFill>
+                  <a:srgbClr val="222222"/>
+                </a:solidFill>
+                <a:latin typeface="맑은 고딕"/>
+              </a:rPr>
+              <a:t> → MANAGED REAL TIME APPLY, 40초 내 보임</a:t>
             </a:r>
           </a:p>
           <a:p>
@@ -8193,7 +8819,26 @@
                 </a:solidFill>
                 <a:latin typeface="맑은 고딕"/>
               </a:rPr>
-              <a:t>•  `... USING CURRENT LOGFILE ...` → MANAGED REAL TIME APPLY, 20초 내 보임</a:t>
+              <a:t>•  </a:t>
+            </a:r>
+            <a:r>
+              <a:rPr sz="1700" b="0">
+                <a:solidFill>
+                  <a:srgbClr val="222222"/>
+                </a:solidFill>
+                <a:latin typeface="Consolas"/>
+                <a:cs typeface="Consolas"/>
+              </a:rPr>
+              <a:t>... USING CURRENT LOGFILE ...</a:t>
+            </a:r>
+            <a:r>
+              <a:rPr sz="1700" b="0">
+                <a:solidFill>
+                  <a:srgbClr val="222222"/>
+                </a:solidFill>
+                <a:latin typeface="맑은 고딕"/>
+              </a:rPr>
+              <a:t> → MANAGED REAL TIME APPLY, 20초 내 보임</a:t>
             </a:r>
           </a:p>
           <a:p>
@@ -8209,7 +8854,16 @@
                 </a:solidFill>
                 <a:latin typeface="맑은 고딕"/>
               </a:rPr>
-              <a:t>•  **SRL이 있으면 12.2 이후 실시간 적용이 기본**</a:t>
+              <a:t>•  </a:t>
+            </a:r>
+            <a:r>
+              <a:rPr sz="1700" b="1">
+                <a:solidFill>
+                  <a:srgbClr val="222222"/>
+                </a:solidFill>
+                <a:latin typeface="맑은 고딕"/>
+              </a:rPr>
+              <a:t>SRL이 있으면 12.2 이후 실시간 적용이 기본</a:t>
             </a:r>
           </a:p>
           <a:p>
@@ -8225,7 +8879,26 @@
                 </a:solidFill>
                 <a:latin typeface="맑은 고딕"/>
               </a:rPr>
-              <a:t>•  `USING CURRENT LOGFILE`은 받아들여지지만 동작을 바꾸지 않는다</a:t>
+              <a:t>•  </a:t>
+            </a:r>
+            <a:r>
+              <a:rPr sz="1700" b="0">
+                <a:solidFill>
+                  <a:srgbClr val="222222"/>
+                </a:solidFill>
+                <a:latin typeface="Consolas"/>
+                <a:cs typeface="Consolas"/>
+              </a:rPr>
+              <a:t>USING CURRENT LOGFILE</a:t>
+            </a:r>
+            <a:r>
+              <a:rPr sz="1700" b="0">
+                <a:solidFill>
+                  <a:srgbClr val="222222"/>
+                </a:solidFill>
+                <a:latin typeface="맑은 고딕"/>
+              </a:rPr>
+              <a:t>은 받아들여지지만 동작을 바꾸지 않는다</a:t>
             </a:r>
           </a:p>
         </p:txBody>
@@ -8659,7 +9332,26 @@
                 </a:solidFill>
                 <a:latin typeface="맑은 고딕"/>
               </a:rPr>
-              <a:t>•  Standby: CANCEL / Primary: `ARCHIVE LOG CURRENT` × 3</a:t>
+              <a:t>•  Standby: CANCEL / Primary: </a:t>
+            </a:r>
+            <a:r>
+              <a:rPr sz="1700" b="0">
+                <a:solidFill>
+                  <a:srgbClr val="222222"/>
+                </a:solidFill>
+                <a:latin typeface="Consolas"/>
+                <a:cs typeface="Consolas"/>
+              </a:rPr>
+              <a:t>ARCHIVE LOG CURRENT</a:t>
+            </a:r>
+            <a:r>
+              <a:rPr sz="1700" b="0">
+                <a:solidFill>
+                  <a:srgbClr val="222222"/>
+                </a:solidFill>
+                <a:latin typeface="맑은 고딕"/>
+              </a:rPr>
+              <a:t> × 3</a:t>
             </a:r>
           </a:p>
           <a:p>
@@ -8675,7 +9367,26 @@
                 </a:solidFill>
                 <a:latin typeface="맑은 고딕"/>
               </a:rPr>
-              <a:t>•  `V$ARCHIVE_GAP` : thread 1, 64 ~ 65</a:t>
+              <a:t>•  </a:t>
+            </a:r>
+            <a:r>
+              <a:rPr sz="1700" b="0">
+                <a:solidFill>
+                  <a:srgbClr val="222222"/>
+                </a:solidFill>
+                <a:latin typeface="Consolas"/>
+                <a:cs typeface="Consolas"/>
+              </a:rPr>
+              <a:t>V$ARCHIVE_GAP</a:t>
+            </a:r>
+            <a:r>
+              <a:rPr sz="1700" b="0">
+                <a:solidFill>
+                  <a:srgbClr val="222222"/>
+                </a:solidFill>
+                <a:latin typeface="맑은 고딕"/>
+              </a:rPr>
+              <a:t> : thread 1, 64 ~ 65</a:t>
             </a:r>
           </a:p>
           <a:p>
@@ -8691,7 +9402,16 @@
                 </a:solidFill>
                 <a:latin typeface="맑은 고딕"/>
               </a:rPr>
-              <a:t>•  받은 것 66 / 적용한 것 61 — **다섯 개 밀림**</a:t>
+              <a:t>•  받은 것 66 / 적용한 것 61 — </a:t>
+            </a:r>
+            <a:r>
+              <a:rPr sz="1700" b="1">
+                <a:solidFill>
+                  <a:srgbClr val="222222"/>
+                </a:solidFill>
+                <a:latin typeface="맑은 고딕"/>
+              </a:rPr>
+              <a:t>다섯 개 밀림</a:t>
             </a:r>
           </a:p>
           <a:p>
@@ -8934,7 +9654,26 @@
                 </a:solidFill>
                 <a:latin typeface="맑은 고딕"/>
               </a:rPr>
-              <a:t>•  `apply lag &gt;= transport lag`이 정상 관계</a:t>
+              <a:t>•  </a:t>
+            </a:r>
+            <a:r>
+              <a:rPr sz="1700" b="0">
+                <a:solidFill>
+                  <a:srgbClr val="222222"/>
+                </a:solidFill>
+                <a:latin typeface="Consolas"/>
+                <a:cs typeface="Consolas"/>
+              </a:rPr>
+              <a:t>apply lag &gt;= transport lag</a:t>
+            </a:r>
+            <a:r>
+              <a:rPr sz="1700" b="0">
+                <a:solidFill>
+                  <a:srgbClr val="222222"/>
+                </a:solidFill>
+                <a:latin typeface="맑은 고딕"/>
+              </a:rPr>
+              <a:t>이 정상 관계</a:t>
             </a:r>
           </a:p>
         </p:txBody>
@@ -9113,7 +9852,64 @@
                 </a:solidFill>
                 <a:latin typeface="맑은 고딕"/>
               </a:rPr>
-              <a:t>•  `transport lag` / `apply lag` — 과거. `DATUM_TIME`이 있다</a:t>
+              <a:t>•  </a:t>
+            </a:r>
+            <a:r>
+              <a:rPr sz="1700" b="0">
+                <a:solidFill>
+                  <a:srgbClr val="222222"/>
+                </a:solidFill>
+                <a:latin typeface="Consolas"/>
+                <a:cs typeface="Consolas"/>
+              </a:rPr>
+              <a:t>transport lag</a:t>
+            </a:r>
+            <a:r>
+              <a:rPr sz="1700" b="0">
+                <a:solidFill>
+                  <a:srgbClr val="222222"/>
+                </a:solidFill>
+                <a:latin typeface="맑은 고딕"/>
+              </a:rPr>
+              <a:t> / </a:t>
+            </a:r>
+            <a:r>
+              <a:rPr sz="1700" b="0">
+                <a:solidFill>
+                  <a:srgbClr val="222222"/>
+                </a:solidFill>
+                <a:latin typeface="Consolas"/>
+                <a:cs typeface="Consolas"/>
+              </a:rPr>
+              <a:t>apply lag</a:t>
+            </a:r>
+            <a:r>
+              <a:rPr sz="1700" b="0">
+                <a:solidFill>
+                  <a:srgbClr val="222222"/>
+                </a:solidFill>
+                <a:latin typeface="맑은 고딕"/>
+              </a:rPr>
+              <a:t> — 과거. </a:t>
+            </a:r>
+            <a:r>
+              <a:rPr sz="1700" b="0">
+                <a:solidFill>
+                  <a:srgbClr val="222222"/>
+                </a:solidFill>
+                <a:latin typeface="Consolas"/>
+                <a:cs typeface="Consolas"/>
+              </a:rPr>
+              <a:t>DATUM_TIME</a:t>
+            </a:r>
+            <a:r>
+              <a:rPr sz="1700" b="0">
+                <a:solidFill>
+                  <a:srgbClr val="222222"/>
+                </a:solidFill>
+                <a:latin typeface="맑은 고딕"/>
+              </a:rPr>
+              <a:t>이 있다</a:t>
             </a:r>
           </a:p>
           <a:p>
@@ -9129,7 +9925,26 @@
                 </a:solidFill>
                 <a:latin typeface="맑은 고딕"/>
               </a:rPr>
-              <a:t>•  `apply finish time` — 밀린 것을 다 적용하는 데 걸릴 시간</a:t>
+              <a:t>•  </a:t>
+            </a:r>
+            <a:r>
+              <a:rPr sz="1700" b="0">
+                <a:solidFill>
+                  <a:srgbClr val="222222"/>
+                </a:solidFill>
+                <a:latin typeface="Consolas"/>
+                <a:cs typeface="Consolas"/>
+              </a:rPr>
+              <a:t>apply finish time</a:t>
+            </a:r>
+            <a:r>
+              <a:rPr sz="1700" b="0">
+                <a:solidFill>
+                  <a:srgbClr val="222222"/>
+                </a:solidFill>
+                <a:latin typeface="맑은 고딕"/>
+              </a:rPr>
+              <a:t> — 밀린 것을 다 적용하는 데 걸릴 시간</a:t>
             </a:r>
           </a:p>
           <a:p>
@@ -9145,7 +9960,35 @@
                 </a:solidFill>
                 <a:latin typeface="맑은 고딕"/>
               </a:rPr>
-              <a:t>•  `estimated startup time` — 실측 **8초**</a:t>
+              <a:t>•  </a:t>
+            </a:r>
+            <a:r>
+              <a:rPr sz="1700" b="0">
+                <a:solidFill>
+                  <a:srgbClr val="222222"/>
+                </a:solidFill>
+                <a:latin typeface="Consolas"/>
+                <a:cs typeface="Consolas"/>
+              </a:rPr>
+              <a:t>estimated startup time</a:t>
+            </a:r>
+            <a:r>
+              <a:rPr sz="1700" b="0">
+                <a:solidFill>
+                  <a:srgbClr val="222222"/>
+                </a:solidFill>
+                <a:latin typeface="맑은 고딕"/>
+              </a:rPr>
+              <a:t> — 실측 </a:t>
+            </a:r>
+            <a:r>
+              <a:rPr sz="1700" b="1">
+                <a:solidFill>
+                  <a:srgbClr val="222222"/>
+                </a:solidFill>
+                <a:latin typeface="맑은 고딕"/>
+              </a:rPr>
+              <a:t>8초</a:t>
             </a:r>
           </a:p>
           <a:p>
@@ -9161,7 +10004,26 @@
                 </a:solidFill>
                 <a:latin typeface="맑은 고딕"/>
               </a:rPr>
-              <a:t>•  뒤의 둘은 예측이라 `DATUM_TIME`이 없다</a:t>
+              <a:t>•  뒤의 둘은 예측이라 </a:t>
+            </a:r>
+            <a:r>
+              <a:rPr sz="1700" b="0">
+                <a:solidFill>
+                  <a:srgbClr val="222222"/>
+                </a:solidFill>
+                <a:latin typeface="Consolas"/>
+                <a:cs typeface="Consolas"/>
+              </a:rPr>
+              <a:t>DATUM_TIME</a:t>
+            </a:r>
+            <a:r>
+              <a:rPr sz="1700" b="0">
+                <a:solidFill>
+                  <a:srgbClr val="222222"/>
+                </a:solidFill>
+                <a:latin typeface="맑은 고딕"/>
+              </a:rPr>
+              <a:t>이 없다</a:t>
             </a:r>
           </a:p>
         </p:txBody>
@@ -9340,7 +10202,26 @@
                 </a:solidFill>
                 <a:latin typeface="맑은 고딕"/>
               </a:rPr>
-              <a:t>•  `TIME_COMPUTED` 10:43:24 — 계산한 시각</a:t>
+              <a:t>•  </a:t>
+            </a:r>
+            <a:r>
+              <a:rPr sz="1700" b="0">
+                <a:solidFill>
+                  <a:srgbClr val="222222"/>
+                </a:solidFill>
+                <a:latin typeface="Consolas"/>
+                <a:cs typeface="Consolas"/>
+              </a:rPr>
+              <a:t>TIME_COMPUTED</a:t>
+            </a:r>
+            <a:r>
+              <a:rPr sz="1700" b="0">
+                <a:solidFill>
+                  <a:srgbClr val="222222"/>
+                </a:solidFill>
+                <a:latin typeface="맑은 고딕"/>
+              </a:rPr>
+              <a:t> 10:43:24 — 계산한 시각</a:t>
             </a:r>
           </a:p>
           <a:p>
@@ -9356,7 +10237,26 @@
                 </a:solidFill>
                 <a:latin typeface="맑은 고딕"/>
               </a:rPr>
-              <a:t>•  `DATUM_TIME` 10:43:12 — 근거가 된 정보의 시각</a:t>
+              <a:t>•  </a:t>
+            </a:r>
+            <a:r>
+              <a:rPr sz="1700" b="0">
+                <a:solidFill>
+                  <a:srgbClr val="222222"/>
+                </a:solidFill>
+                <a:latin typeface="Consolas"/>
+                <a:cs typeface="Consolas"/>
+              </a:rPr>
+              <a:t>DATUM_TIME</a:t>
+            </a:r>
+            <a:r>
+              <a:rPr sz="1700" b="0">
+                <a:solidFill>
+                  <a:srgbClr val="222222"/>
+                </a:solidFill>
+                <a:latin typeface="맑은 고딕"/>
+              </a:rPr>
+              <a:t> 10:43:12 — 근거가 된 정보의 시각</a:t>
             </a:r>
           </a:p>
           <a:p>
@@ -9372,7 +10272,16 @@
                 </a:solidFill>
                 <a:latin typeface="맑은 고딕"/>
               </a:rPr>
-              <a:t>•  **"apply lag이 0이다" = "십수 초 전에는 0이었다"**</a:t>
+              <a:t>•  </a:t>
+            </a:r>
+            <a:r>
+              <a:rPr sz="1700" b="1">
+                <a:solidFill>
+                  <a:srgbClr val="222222"/>
+                </a:solidFill>
+                <a:latin typeface="맑은 고딕"/>
+              </a:rPr>
+              <a:t>"apply lag이 0이다" = "십수 초 전에는 0이었다"</a:t>
             </a:r>
           </a:p>
           <a:p>
@@ -9567,7 +10476,26 @@
                 </a:solidFill>
                 <a:latin typeface="맑은 고딕"/>
               </a:rPr>
-              <a:t>•  `transport lag`만 크다 → 네트워크·전송 경로</a:t>
+              <a:t>•  </a:t>
+            </a:r>
+            <a:r>
+              <a:rPr sz="1700" b="0">
+                <a:solidFill>
+                  <a:srgbClr val="222222"/>
+                </a:solidFill>
+                <a:latin typeface="Consolas"/>
+                <a:cs typeface="Consolas"/>
+              </a:rPr>
+              <a:t>transport lag</a:t>
+            </a:r>
+            <a:r>
+              <a:rPr sz="1700" b="0">
+                <a:solidFill>
+                  <a:srgbClr val="222222"/>
+                </a:solidFill>
+                <a:latin typeface="맑은 고딕"/>
+              </a:rPr>
+              <a:t>만 크다 → 네트워크·전송 경로</a:t>
             </a:r>
           </a:p>
           <a:p>
@@ -9583,7 +10511,26 @@
                 </a:solidFill>
                 <a:latin typeface="맑은 고딕"/>
               </a:rPr>
-              <a:t>•  `apply lag`만 크다 → Standby의 적용 성능</a:t>
+              <a:t>•  </a:t>
+            </a:r>
+            <a:r>
+              <a:rPr sz="1700" b="0">
+                <a:solidFill>
+                  <a:srgbClr val="222222"/>
+                </a:solidFill>
+                <a:latin typeface="Consolas"/>
+                <a:cs typeface="Consolas"/>
+              </a:rPr>
+              <a:t>apply lag</a:t>
+            </a:r>
+            <a:r>
+              <a:rPr sz="1700" b="0">
+                <a:solidFill>
+                  <a:srgbClr val="222222"/>
+                </a:solidFill>
+                <a:latin typeface="맑은 고딕"/>
+              </a:rPr>
+              <a:t>만 크다 → Standby의 적용 성능</a:t>
             </a:r>
           </a:p>
           <a:p>
@@ -9615,7 +10562,16 @@
                 </a:solidFill>
                 <a:latin typeface="맑은 고딕"/>
               </a:rPr>
-              <a:t>•  **둘 다 0인데 데이터가 최신이 아니다 → 적용이 멈췄다**</a:t>
+              <a:t>•  </a:t>
+            </a:r>
+            <a:r>
+              <a:rPr sz="1700" b="1">
+                <a:solidFill>
+                  <a:srgbClr val="222222"/>
+                </a:solidFill>
+                <a:latin typeface="맑은 고딕"/>
+              </a:rPr>
+              <a:t>둘 다 0인데 데이터가 최신이 아니다 → 적용이 멈췄다</a:t>
             </a:r>
           </a:p>
         </p:txBody>
@@ -10049,7 +11005,26 @@
                 </a:solidFill>
                 <a:latin typeface="맑은 고딕"/>
               </a:rPr>
-              <a:t>•  `RECOVERY_MODE` 유지, 전환 없이 커밋한 행 40초 내 보임</a:t>
+              <a:t>•  </a:t>
+            </a:r>
+            <a:r>
+              <a:rPr sz="1700" b="0">
+                <a:solidFill>
+                  <a:srgbClr val="222222"/>
+                </a:solidFill>
+                <a:latin typeface="Consolas"/>
+                <a:cs typeface="Consolas"/>
+              </a:rPr>
+              <a:t>RECOVERY_MODE</a:t>
+            </a:r>
+            <a:r>
+              <a:rPr sz="1700" b="0">
+                <a:solidFill>
+                  <a:srgbClr val="222222"/>
+                </a:solidFill>
+                <a:latin typeface="맑은 고딕"/>
+              </a:rPr>
+              <a:t> 유지, 전환 없이 커밋한 행 40초 내 보임</a:t>
             </a:r>
           </a:p>
           <a:p>
@@ -10065,7 +11040,16 @@
                 </a:solidFill>
                 <a:latin typeface="맑은 고딕"/>
               </a:rPr>
-              <a:t>•  4장의 "온라인 + 1" 규칙은 **최소 요건이 아니라 여유를 위한 권장**</a:t>
+              <a:t>•  4장의 "온라인 + 1" 규칙은 </a:t>
+            </a:r>
+            <a:r>
+              <a:rPr sz="1700" b="1">
+                <a:solidFill>
+                  <a:srgbClr val="222222"/>
+                </a:solidFill>
+                <a:latin typeface="맑은 고딕"/>
+              </a:rPr>
+              <a:t>최소 요건이 아니라 여유를 위한 권장</a:t>
             </a:r>
           </a:p>
           <a:p>
@@ -10260,7 +11244,54 @@
                 </a:solidFill>
                 <a:latin typeface="맑은 고딕"/>
               </a:rPr>
-              <a:t>•  ACTIVE인 SRL 삭제 → `ORA-00261` + `ORA-00312` **두 줄**</a:t>
+              <a:t>•  ACTIVE인 SRL 삭제 → </a:t>
+            </a:r>
+            <a:r>
+              <a:rPr sz="1700" b="0">
+                <a:solidFill>
+                  <a:srgbClr val="222222"/>
+                </a:solidFill>
+                <a:latin typeface="Consolas"/>
+                <a:cs typeface="Consolas"/>
+              </a:rPr>
+              <a:t>ORA-00261</a:t>
+            </a:r>
+            <a:r>
+              <a:rPr sz="1700" b="0">
+                <a:solidFill>
+                  <a:srgbClr val="222222"/>
+                </a:solidFill>
+                <a:latin typeface="맑은 고딕"/>
+              </a:rPr>
+              <a:t> + </a:t>
+            </a:r>
+            <a:r>
+              <a:rPr sz="1700" b="0">
+                <a:solidFill>
+                  <a:srgbClr val="222222"/>
+                </a:solidFill>
+                <a:latin typeface="Consolas"/>
+                <a:cs typeface="Consolas"/>
+              </a:rPr>
+              <a:t>ORA-00312</a:t>
+            </a:r>
+            <a:r>
+              <a:rPr sz="1700" b="0">
+                <a:solidFill>
+                  <a:srgbClr val="222222"/>
+                </a:solidFill>
+                <a:latin typeface="맑은 고딕"/>
+              </a:rPr>
+              <a:t> </a:t>
+            </a:r>
+            <a:r>
+              <a:rPr sz="1700" b="1">
+                <a:solidFill>
+                  <a:srgbClr val="222222"/>
+                </a:solidFill>
+                <a:latin typeface="맑은 고딕"/>
+              </a:rPr>
+              <a:t>두 줄</a:t>
             </a:r>
           </a:p>
           <a:p>
@@ -10292,7 +11323,17 @@
                 </a:solidFill>
                 <a:latin typeface="맑은 고딕"/>
               </a:rPr>
-              <a:t>•  이미 있는 그룹 번호로 추가 → `ORA-01184`</a:t>
+              <a:t>•  이미 있는 그룹 번호로 추가 → </a:t>
+            </a:r>
+            <a:r>
+              <a:rPr sz="1700" b="0">
+                <a:solidFill>
+                  <a:srgbClr val="222222"/>
+                </a:solidFill>
+                <a:latin typeface="Consolas"/>
+                <a:cs typeface="Consolas"/>
+              </a:rPr>
+              <a:t>ORA-01184</a:t>
             </a:r>
           </a:p>
           <a:p>
@@ -10771,7 +11812,36 @@
                 </a:solidFill>
                 <a:latin typeface="맑은 고딕"/>
               </a:rPr>
-              <a:t>•  `mrp` 행에 `NVL(..., '*** NOT RUNNING ***')`</a:t>
+              <a:t>•  </a:t>
+            </a:r>
+            <a:r>
+              <a:rPr sz="1700" b="0">
+                <a:solidFill>
+                  <a:srgbClr val="222222"/>
+                </a:solidFill>
+                <a:latin typeface="Consolas"/>
+                <a:cs typeface="Consolas"/>
+              </a:rPr>
+              <a:t>mrp</a:t>
+            </a:r>
+            <a:r>
+              <a:rPr sz="1700" b="0">
+                <a:solidFill>
+                  <a:srgbClr val="222222"/>
+                </a:solidFill>
+                <a:latin typeface="맑은 고딕"/>
+              </a:rPr>
+              <a:t> 행에 </a:t>
+            </a:r>
+            <a:r>
+              <a:rPr sz="1700" b="0">
+                <a:solidFill>
+                  <a:srgbClr val="222222"/>
+                </a:solidFill>
+                <a:latin typeface="Consolas"/>
+                <a:cs typeface="Consolas"/>
+              </a:rPr>
+              <a:t>NVL(..., '*** NOT RUNNING ***')</a:t>
             </a:r>
           </a:p>
           <a:p>
@@ -10982,7 +12052,26 @@
                 </a:solidFill>
                 <a:latin typeface="맑은 고딕"/>
               </a:rPr>
-              <a:t>•  ② `RECOVERY_MODE` — IDLE이면 ③을 먼저 본다</a:t>
+              <a:t>•  ② </a:t>
+            </a:r>
+            <a:r>
+              <a:rPr sz="1700" b="0">
+                <a:solidFill>
+                  <a:srgbClr val="222222"/>
+                </a:solidFill>
+                <a:latin typeface="Consolas"/>
+                <a:cs typeface="Consolas"/>
+              </a:rPr>
+              <a:t>RECOVERY_MODE</a:t>
+            </a:r>
+            <a:r>
+              <a:rPr sz="1700" b="0">
+                <a:solidFill>
+                  <a:srgbClr val="222222"/>
+                </a:solidFill>
+                <a:latin typeface="맑은 고딕"/>
+              </a:rPr>
+              <a:t> — IDLE이면 ③을 먼저 본다</a:t>
             </a:r>
           </a:p>
           <a:p>
@@ -10998,7 +12087,26 @@
                 </a:solidFill>
                 <a:latin typeface="맑은 고딕"/>
               </a:rPr>
-              <a:t>•  ③ 목적지 `STATUS` — BAD PARAM이면 ②를 믿을 수 없다</a:t>
+              <a:t>•  ③ 목적지 </a:t>
+            </a:r>
+            <a:r>
+              <a:rPr sz="1700" b="0">
+                <a:solidFill>
+                  <a:srgbClr val="222222"/>
+                </a:solidFill>
+                <a:latin typeface="Consolas"/>
+                <a:cs typeface="Consolas"/>
+              </a:rPr>
+              <a:t>STATUS</a:t>
+            </a:r>
+            <a:r>
+              <a:rPr sz="1700" b="0">
+                <a:solidFill>
+                  <a:srgbClr val="222222"/>
+                </a:solidFill>
+                <a:latin typeface="맑은 고딕"/>
+              </a:rPr>
+              <a:t> — BAD PARAM이면 ②를 믿을 수 없다</a:t>
             </a:r>
           </a:p>
           <a:p>
@@ -11193,7 +12301,26 @@
                 </a:solidFill>
                 <a:latin typeface="맑은 고딕"/>
               </a:rPr>
-              <a:t>•  `RECOVERY_MODE = IDLE` 이 두 가지 상황에서 나온다</a:t>
+              <a:t>•  </a:t>
+            </a:r>
+            <a:r>
+              <a:rPr sz="1700" b="0">
+                <a:solidFill>
+                  <a:srgbClr val="222222"/>
+                </a:solidFill>
+                <a:latin typeface="Consolas"/>
+                <a:cs typeface="Consolas"/>
+              </a:rPr>
+              <a:t>RECOVERY_MODE = IDLE</a:t>
+            </a:r>
+            <a:r>
+              <a:rPr sz="1700" b="0">
+                <a:solidFill>
+                  <a:srgbClr val="222222"/>
+                </a:solidFill>
+                <a:latin typeface="맑은 고딕"/>
+              </a:rPr>
+              <a:t> 이 두 가지 상황에서 나온다</a:t>
             </a:r>
           </a:p>
           <a:p>
@@ -11209,7 +12336,26 @@
                 </a:solidFill>
                 <a:latin typeface="맑은 고딕"/>
               </a:rPr>
-              <a:t>•  ① 목적지가 `BAD PARAM` — 7.4절의 사례</a:t>
+              <a:t>•  ① 목적지가 </a:t>
+            </a:r>
+            <a:r>
+              <a:rPr sz="1700" b="0">
+                <a:solidFill>
+                  <a:srgbClr val="222222"/>
+                </a:solidFill>
+                <a:latin typeface="Consolas"/>
+                <a:cs typeface="Consolas"/>
+              </a:rPr>
+              <a:t>BAD PARAM</a:t>
+            </a:r>
+            <a:r>
+              <a:rPr sz="1700" b="0">
+                <a:solidFill>
+                  <a:srgbClr val="222222"/>
+                </a:solidFill>
+                <a:latin typeface="맑은 고딕"/>
+              </a:rPr>
+              <a:t> — 7.4절의 사례</a:t>
             </a:r>
           </a:p>
           <a:p>
@@ -11241,7 +12387,26 @@
                 </a:solidFill>
                 <a:latin typeface="맑은 고딕"/>
               </a:rPr>
-              <a:t>•  `STATUS`가 VALID인지 아닌지로 갈린다</a:t>
+              <a:t>•  </a:t>
+            </a:r>
+            <a:r>
+              <a:rPr sz="1700" b="0">
+                <a:solidFill>
+                  <a:srgbClr val="222222"/>
+                </a:solidFill>
+                <a:latin typeface="Consolas"/>
+                <a:cs typeface="Consolas"/>
+              </a:rPr>
+              <a:t>STATUS</a:t>
+            </a:r>
+            <a:r>
+              <a:rPr sz="1700" b="0">
+                <a:solidFill>
+                  <a:srgbClr val="222222"/>
+                </a:solidFill>
+                <a:latin typeface="맑은 고딕"/>
+              </a:rPr>
+              <a:t>가 VALID인지 아닌지로 갈린다</a:t>
             </a:r>
           </a:p>
         </p:txBody>
@@ -11436,7 +12601,25 @@
                 </a:solidFill>
                 <a:latin typeface="맑은 고딕"/>
               </a:rPr>
-              <a:t>•  지연보다 **MRP0 존재**를 먼저 본다</a:t>
+              <a:t>•  지연보다 </a:t>
+            </a:r>
+            <a:r>
+              <a:rPr sz="1700" b="1">
+                <a:solidFill>
+                  <a:srgbClr val="222222"/>
+                </a:solidFill>
+                <a:latin typeface="맑은 고딕"/>
+              </a:rPr>
+              <a:t>MRP0 존재</a:t>
+            </a:r>
+            <a:r>
+              <a:rPr sz="1700" b="0">
+                <a:solidFill>
+                  <a:srgbClr val="222222"/>
+                </a:solidFill>
+                <a:latin typeface="맑은 고딕"/>
+              </a:rPr>
+              <a:t>를 먼저 본다</a:t>
             </a:r>
           </a:p>
           <a:p>
@@ -11452,7 +12635,25 @@
                 </a:solidFill>
                 <a:latin typeface="맑은 고딕"/>
               </a:rPr>
-              <a:t>•  값 하나가 아니라 **추세**를 본다</a:t>
+              <a:t>•  값 하나가 아니라 </a:t>
+            </a:r>
+            <a:r>
+              <a:rPr sz="1700" b="1">
+                <a:solidFill>
+                  <a:srgbClr val="222222"/>
+                </a:solidFill>
+                <a:latin typeface="맑은 고딕"/>
+              </a:rPr>
+              <a:t>추세</a:t>
+            </a:r>
+            <a:r>
+              <a:rPr sz="1700" b="0">
+                <a:solidFill>
+                  <a:srgbClr val="222222"/>
+                </a:solidFill>
+                <a:latin typeface="맑은 고딕"/>
+              </a:rPr>
+              <a:t>를 본다</a:t>
             </a:r>
           </a:p>
         </p:txBody>
@@ -11592,7 +12793,26 @@
                 </a:solidFill>
                 <a:latin typeface="맑은 고딕"/>
               </a:rPr>
-              <a:t>•  Q1. RFS와 MRP0의 `SEQUENCE#`가 같다는 것이 무엇을 뜻하며, 왜 유용한 판별법인가?</a:t>
+              <a:t>•  Q1. RFS와 MRP0의 </a:t>
+            </a:r>
+            <a:r>
+              <a:rPr sz="1600" b="0">
+                <a:solidFill>
+                  <a:srgbClr val="222222"/>
+                </a:solidFill>
+                <a:latin typeface="Consolas"/>
+                <a:cs typeface="Consolas"/>
+              </a:rPr>
+              <a:t>SEQUENCE#</a:t>
+            </a:r>
+            <a:r>
+              <a:rPr sz="1600" b="0">
+                <a:solidFill>
+                  <a:srgbClr val="222222"/>
+                </a:solidFill>
+                <a:latin typeface="맑은 고딕"/>
+              </a:rPr>
+              <a:t>가 같다는 것이 무엇을 뜻하며, 왜 유용한 판별법인가?</a:t>
             </a:r>
           </a:p>
           <a:p>
@@ -11608,7 +12828,26 @@
                 </a:solidFill>
                 <a:latin typeface="맑은 고딕"/>
               </a:rPr>
-              <a:t>•  Q2. Standby 목적지 1번이 `BAD PARAM`인데도 아카이브가 정상 생성된 이유는?</a:t>
+              <a:t>•  Q2. Standby 목적지 1번이 </a:t>
+            </a:r>
+            <a:r>
+              <a:rPr sz="1600" b="0">
+                <a:solidFill>
+                  <a:srgbClr val="222222"/>
+                </a:solidFill>
+                <a:latin typeface="Consolas"/>
+                <a:cs typeface="Consolas"/>
+              </a:rPr>
+              <a:t>BAD PARAM</a:t>
+            </a:r>
+            <a:r>
+              <a:rPr sz="1600" b="0">
+                <a:solidFill>
+                  <a:srgbClr val="222222"/>
+                </a:solidFill>
+                <a:latin typeface="맑은 고딕"/>
+              </a:rPr>
+              <a:t>인데도 아카이브가 정상 생성된 이유는?</a:t>
             </a:r>
           </a:p>
           <a:p>
@@ -11624,7 +12863,45 @@
                 </a:solidFill>
                 <a:latin typeface="맑은 고딕"/>
               </a:rPr>
-              <a:t>•  Q3. `STATUS=BAD PARAM`과 `VALID_NOW=WRONG VALID_TYPE`은 각각 어떻게 대응해야 하는가?</a:t>
+              <a:t>•  Q3. </a:t>
+            </a:r>
+            <a:r>
+              <a:rPr sz="1600" b="0">
+                <a:solidFill>
+                  <a:srgbClr val="222222"/>
+                </a:solidFill>
+                <a:latin typeface="Consolas"/>
+                <a:cs typeface="Consolas"/>
+              </a:rPr>
+              <a:t>STATUS=BAD PARAM</a:t>
+            </a:r>
+            <a:r>
+              <a:rPr sz="1600" b="0">
+                <a:solidFill>
+                  <a:srgbClr val="222222"/>
+                </a:solidFill>
+                <a:latin typeface="맑은 고딕"/>
+              </a:rPr>
+              <a:t>과 </a:t>
+            </a:r>
+            <a:r>
+              <a:rPr sz="1600" b="0">
+                <a:solidFill>
+                  <a:srgbClr val="222222"/>
+                </a:solidFill>
+                <a:latin typeface="Consolas"/>
+                <a:cs typeface="Consolas"/>
+              </a:rPr>
+              <a:t>VALID_NOW=WRONG VALID_TYPE</a:t>
+            </a:r>
+            <a:r>
+              <a:rPr sz="1600" b="0">
+                <a:solidFill>
+                  <a:srgbClr val="222222"/>
+                </a:solidFill>
+                <a:latin typeface="맑은 고딕"/>
+              </a:rPr>
+              <a:t>은 각각 어떻게 대응해야 하는가?</a:t>
             </a:r>
           </a:p>
           <a:p>
@@ -11640,7 +12917,26 @@
                 </a:solidFill>
                 <a:latin typeface="맑은 고딕"/>
               </a:rPr>
-              <a:t>•  Q4. 19c에서 `USING CURRENT LOGFILE`의 실질적 효과는 무엇이며, 그럼에도 명시해야 하는 이유는?</a:t>
+              <a:t>•  Q4. 19c에서 </a:t>
+            </a:r>
+            <a:r>
+              <a:rPr sz="1600" b="0">
+                <a:solidFill>
+                  <a:srgbClr val="222222"/>
+                </a:solidFill>
+                <a:latin typeface="Consolas"/>
+                <a:cs typeface="Consolas"/>
+              </a:rPr>
+              <a:t>USING CURRENT LOGFILE</a:t>
+            </a:r>
+            <a:r>
+              <a:rPr sz="1600" b="0">
+                <a:solidFill>
+                  <a:srgbClr val="222222"/>
+                </a:solidFill>
+                <a:latin typeface="맑은 고딕"/>
+              </a:rPr>
+              <a:t>의 실질적 효과는 무엇이며, 그럼에도 명시해야 하는 이유는?</a:t>
             </a:r>
           </a:p>
           <a:p>
@@ -11812,7 +13108,26 @@
                 </a:solidFill>
                 <a:latin typeface="맑은 고딕"/>
               </a:rPr>
-              <a:t>•  `V$MANAGED_STANDBY` 실측 9행. 진단에 쓰는 것은 RFS와 MRP0 둘이다.</a:t>
+              <a:t>•  </a:t>
+            </a:r>
+            <a:r>
+              <a:rPr sz="1600" b="0">
+                <a:solidFill>
+                  <a:srgbClr val="222222"/>
+                </a:solidFill>
+                <a:latin typeface="Consolas"/>
+                <a:cs typeface="Consolas"/>
+              </a:rPr>
+              <a:t>V$MANAGED_STANDBY</a:t>
+            </a:r>
+            <a:r>
+              <a:rPr sz="1600" b="0">
+                <a:solidFill>
+                  <a:srgbClr val="222222"/>
+                </a:solidFill>
+                <a:latin typeface="맑은 고딕"/>
+              </a:rPr>
+              <a:t> 실측 9행. 진단에 쓰는 것은 RFS와 MRP0 둘이다.</a:t>
             </a:r>
           </a:p>
           <a:p>
@@ -11844,7 +13159,45 @@
                 </a:solidFill>
                 <a:latin typeface="맑은 고딕"/>
               </a:rPr>
-              <a:t>•  RFS와 MRP0의 `SEQUENCE#`·`BLOCK#`이 같으면 실시간 적용의 직접 증거다. MOUNTED에서도 쓸 수 있다.</a:t>
+              <a:t>•  RFS와 MRP0의 </a:t>
+            </a:r>
+            <a:r>
+              <a:rPr sz="1600" b="0">
+                <a:solidFill>
+                  <a:srgbClr val="222222"/>
+                </a:solidFill>
+                <a:latin typeface="Consolas"/>
+                <a:cs typeface="Consolas"/>
+              </a:rPr>
+              <a:t>SEQUENCE#</a:t>
+            </a:r>
+            <a:r>
+              <a:rPr sz="1600" b="0">
+                <a:solidFill>
+                  <a:srgbClr val="222222"/>
+                </a:solidFill>
+                <a:latin typeface="맑은 고딕"/>
+              </a:rPr>
+              <a:t>·</a:t>
+            </a:r>
+            <a:r>
+              <a:rPr sz="1600" b="0">
+                <a:solidFill>
+                  <a:srgbClr val="222222"/>
+                </a:solidFill>
+                <a:latin typeface="Consolas"/>
+                <a:cs typeface="Consolas"/>
+              </a:rPr>
+              <a:t>BLOCK#</a:t>
+            </a:r>
+            <a:r>
+              <a:rPr sz="1600" b="0">
+                <a:solidFill>
+                  <a:srgbClr val="222222"/>
+                </a:solidFill>
+                <a:latin typeface="맑은 고딕"/>
+              </a:rPr>
+              <a:t>이 같으면 실시간 적용의 직접 증거다. MOUNTED에서도 쓸 수 있다.</a:t>
             </a:r>
           </a:p>
           <a:p>
@@ -11860,7 +13213,54 @@
                 </a:solidFill>
                 <a:latin typeface="맑은 고딕"/>
               </a:rPr>
-              <a:t>•  적용을 멈추면 MRP0이 사라지고 `OPEN_MODE`가 `READ ONLY`가 된다. **그런데 두 지연은 0으로 보인다.**</a:t>
+              <a:t>•  적용을 멈추면 MRP0이 사라지고 </a:t>
+            </a:r>
+            <a:r>
+              <a:rPr sz="1600" b="0">
+                <a:solidFill>
+                  <a:srgbClr val="222222"/>
+                </a:solidFill>
+                <a:latin typeface="Consolas"/>
+                <a:cs typeface="Consolas"/>
+              </a:rPr>
+              <a:t>OPEN_MODE</a:t>
+            </a:r>
+            <a:r>
+              <a:rPr sz="1600" b="0">
+                <a:solidFill>
+                  <a:srgbClr val="222222"/>
+                </a:solidFill>
+                <a:latin typeface="맑은 고딕"/>
+              </a:rPr>
+              <a:t>가 </a:t>
+            </a:r>
+            <a:r>
+              <a:rPr sz="1600" b="0">
+                <a:solidFill>
+                  <a:srgbClr val="222222"/>
+                </a:solidFill>
+                <a:latin typeface="Consolas"/>
+                <a:cs typeface="Consolas"/>
+              </a:rPr>
+              <a:t>READ ONLY</a:t>
+            </a:r>
+            <a:r>
+              <a:rPr sz="1600" b="0">
+                <a:solidFill>
+                  <a:srgbClr val="222222"/>
+                </a:solidFill>
+                <a:latin typeface="맑은 고딕"/>
+              </a:rPr>
+              <a:t>가 된다. </a:t>
+            </a:r>
+            <a:r>
+              <a:rPr sz="1600" b="1">
+                <a:solidFill>
+                  <a:srgbClr val="222222"/>
+                </a:solidFill>
+                <a:latin typeface="맑은 고딕"/>
+              </a:rPr>
+              <a:t>그런데 두 지연은 0으로 보인다.</a:t>
             </a:r>
           </a:p>
           <a:p>
@@ -11908,7 +13308,64 @@
                 </a:solidFill>
                 <a:latin typeface="맑은 고딕"/>
               </a:rPr>
-              <a:t>•  Standby의 `LOG_ARCHIVE_DEST_1`이 `db_unique_name=chicago` 상속으로 `BAD PARAM`이었다.</a:t>
+              <a:t>•  Standby의 </a:t>
+            </a:r>
+            <a:r>
+              <a:rPr sz="1600" b="0">
+                <a:solidFill>
+                  <a:srgbClr val="222222"/>
+                </a:solidFill>
+                <a:latin typeface="Consolas"/>
+                <a:cs typeface="Consolas"/>
+              </a:rPr>
+              <a:t>LOG_ARCHIVE_DEST_1</a:t>
+            </a:r>
+            <a:r>
+              <a:rPr sz="1600" b="0">
+                <a:solidFill>
+                  <a:srgbClr val="222222"/>
+                </a:solidFill>
+                <a:latin typeface="맑은 고딕"/>
+              </a:rPr>
+              <a:t>이 </a:t>
+            </a:r>
+            <a:r>
+              <a:rPr sz="1600" b="0">
+                <a:solidFill>
+                  <a:srgbClr val="222222"/>
+                </a:solidFill>
+                <a:latin typeface="Consolas"/>
+                <a:cs typeface="Consolas"/>
+              </a:rPr>
+              <a:t>db_unique_name=chicago</a:t>
+            </a:r>
+            <a:r>
+              <a:rPr sz="1600" b="0">
+                <a:solidFill>
+                  <a:srgbClr val="222222"/>
+                </a:solidFill>
+                <a:latin typeface="맑은 고딕"/>
+              </a:rPr>
+              <a:t> 상속으로 </a:t>
+            </a:r>
+            <a:r>
+              <a:rPr sz="1600" b="0">
+                <a:solidFill>
+                  <a:srgbClr val="222222"/>
+                </a:solidFill>
+                <a:latin typeface="Consolas"/>
+                <a:cs typeface="Consolas"/>
+              </a:rPr>
+              <a:t>BAD PARAM</a:t>
+            </a:r>
+            <a:r>
+              <a:rPr sz="1600" b="0">
+                <a:solidFill>
+                  <a:srgbClr val="222222"/>
+                </a:solidFill>
+                <a:latin typeface="맑은 고딕"/>
+              </a:rPr>
+              <a:t>이었다.</a:t>
             </a:r>
           </a:p>
           <a:p>
@@ -11940,7 +13397,45 @@
                 </a:solidFill>
                 <a:latin typeface="맑은 고딕"/>
               </a:rPr>
-              <a:t>•  고치면 `STATUS`가 VALID가 되고 `RECOVERY_MODE`가 되살아난다. 진단 도구가 고장 나 있던 것이다.</a:t>
+              <a:t>•  고치면 </a:t>
+            </a:r>
+            <a:r>
+              <a:rPr sz="1600" b="0">
+                <a:solidFill>
+                  <a:srgbClr val="222222"/>
+                </a:solidFill>
+                <a:latin typeface="Consolas"/>
+                <a:cs typeface="Consolas"/>
+              </a:rPr>
+              <a:t>STATUS</a:t>
+            </a:r>
+            <a:r>
+              <a:rPr sz="1600" b="0">
+                <a:solidFill>
+                  <a:srgbClr val="222222"/>
+                </a:solidFill>
+                <a:latin typeface="맑은 고딕"/>
+              </a:rPr>
+              <a:t>가 VALID가 되고 </a:t>
+            </a:r>
+            <a:r>
+              <a:rPr sz="1600" b="0">
+                <a:solidFill>
+                  <a:srgbClr val="222222"/>
+                </a:solidFill>
+                <a:latin typeface="Consolas"/>
+                <a:cs typeface="Consolas"/>
+              </a:rPr>
+              <a:t>RECOVERY_MODE</a:t>
+            </a:r>
+            <a:r>
+              <a:rPr sz="1600" b="0">
+                <a:solidFill>
+                  <a:srgbClr val="222222"/>
+                </a:solidFill>
+                <a:latin typeface="맑은 고딕"/>
+              </a:rPr>
+              <a:t>가 되살아난다. 진단 도구가 고장 나 있던 것이다.</a:t>
             </a:r>
           </a:p>
           <a:p>
@@ -11956,7 +13451,45 @@
                 </a:solidFill>
                 <a:latin typeface="맑은 고딕"/>
               </a:rPr>
-              <a:t>•  `LOG_ARCHIVE_DEST_n`은 동적 파라미터라 `SCOPE=BOTH`로 즉시 반영된다.</a:t>
+              <a:t>•  </a:t>
+            </a:r>
+            <a:r>
+              <a:rPr sz="1600" b="0">
+                <a:solidFill>
+                  <a:srgbClr val="222222"/>
+                </a:solidFill>
+                <a:latin typeface="Consolas"/>
+                <a:cs typeface="Consolas"/>
+              </a:rPr>
+              <a:t>LOG_ARCHIVE_DEST_n</a:t>
+            </a:r>
+            <a:r>
+              <a:rPr sz="1600" b="0">
+                <a:solidFill>
+                  <a:srgbClr val="222222"/>
+                </a:solidFill>
+                <a:latin typeface="맑은 고딕"/>
+              </a:rPr>
+              <a:t>은 동적 파라미터라 </a:t>
+            </a:r>
+            <a:r>
+              <a:rPr sz="1600" b="0">
+                <a:solidFill>
+                  <a:srgbClr val="222222"/>
+                </a:solidFill>
+                <a:latin typeface="Consolas"/>
+                <a:cs typeface="Consolas"/>
+              </a:rPr>
+              <a:t>SCOPE=BOTH</a:t>
+            </a:r>
+            <a:r>
+              <a:rPr sz="1600" b="0">
+                <a:solidFill>
+                  <a:srgbClr val="222222"/>
+                </a:solidFill>
+                <a:latin typeface="맑은 고딕"/>
+              </a:rPr>
+              <a:t>로 즉시 반영된다.</a:t>
             </a:r>
           </a:p>
           <a:p>
@@ -11972,7 +13505,26 @@
                 </a:solidFill>
                 <a:latin typeface="맑은 고딕"/>
               </a:rPr>
-              <a:t>•  `WRONG VALID_TYPE`은 정상이다. 역할 전환용 목적지가 지금은 유효하지 않다는 뜻이다.</a:t>
+              <a:t>•  </a:t>
+            </a:r>
+            <a:r>
+              <a:rPr sz="1600" b="0">
+                <a:solidFill>
+                  <a:srgbClr val="222222"/>
+                </a:solidFill>
+                <a:latin typeface="Consolas"/>
+                <a:cs typeface="Consolas"/>
+              </a:rPr>
+              <a:t>WRONG VALID_TYPE</a:t>
+            </a:r>
+            <a:r>
+              <a:rPr sz="1600" b="0">
+                <a:solidFill>
+                  <a:srgbClr val="222222"/>
+                </a:solidFill>
+                <a:latin typeface="맑은 고딕"/>
+              </a:rPr>
+              <a:t>은 정상이다. 역할 전환용 목적지가 지금은 유효하지 않다는 뜻이다.</a:t>
             </a:r>
           </a:p>
           <a:p>
@@ -11988,7 +13540,83 @@
                 </a:solidFill>
                 <a:latin typeface="맑은 고딕"/>
               </a:rPr>
-              <a:t>•  상속 사례가 넷 — `CONTROL_FILES`·`LOG_ARCHIVE_DEST_1`·`FAL_CLIENT`, 그리고 막아 낸 `DB_NAME`.</a:t>
+              <a:t>•  상속 사례가 넷 — </a:t>
+            </a:r>
+            <a:r>
+              <a:rPr sz="1600" b="0">
+                <a:solidFill>
+                  <a:srgbClr val="222222"/>
+                </a:solidFill>
+                <a:latin typeface="Consolas"/>
+                <a:cs typeface="Consolas"/>
+              </a:rPr>
+              <a:t>CONTROL_FILES</a:t>
+            </a:r>
+            <a:r>
+              <a:rPr sz="1600" b="0">
+                <a:solidFill>
+                  <a:srgbClr val="222222"/>
+                </a:solidFill>
+                <a:latin typeface="맑은 고딕"/>
+              </a:rPr>
+              <a:t>·</a:t>
+            </a:r>
+            <a:r>
+              <a:rPr sz="1600" b="0">
+                <a:solidFill>
+                  <a:srgbClr val="222222"/>
+                </a:solidFill>
+                <a:latin typeface="Consolas"/>
+                <a:cs typeface="Consolas"/>
+              </a:rPr>
+              <a:t>LOG_ARCHIVE_DEST_1</a:t>
+            </a:r>
+            <a:r>
+              <a:rPr sz="1600" b="0">
+                <a:solidFill>
+                  <a:srgbClr val="222222"/>
+                </a:solidFill>
+                <a:latin typeface="맑은 고딕"/>
+              </a:rPr>
+              <a:t>·</a:t>
+            </a:r>
+            <a:r>
+              <a:rPr sz="1600" b="0">
+                <a:solidFill>
+                  <a:srgbClr val="222222"/>
+                </a:solidFill>
+                <a:latin typeface="Consolas"/>
+                <a:cs typeface="Consolas"/>
+              </a:rPr>
+              <a:t>FAL_CLIENT</a:t>
+            </a:r>
+            <a:r>
+              <a:rPr sz="1600" b="0">
+                <a:solidFill>
+                  <a:srgbClr val="222222"/>
+                </a:solidFill>
+                <a:latin typeface="맑은 고딕"/>
+              </a:rPr>
+              <a:t>, 그리고 막아 낸 </a:t>
+            </a:r>
+            <a:r>
+              <a:rPr sz="1600" b="0">
+                <a:solidFill>
+                  <a:srgbClr val="222222"/>
+                </a:solidFill>
+                <a:latin typeface="Consolas"/>
+                <a:cs typeface="Consolas"/>
+              </a:rPr>
+              <a:t>DB_NAME</a:t>
+            </a:r>
+            <a:r>
+              <a:rPr sz="1600" b="0">
+                <a:solidFill>
+                  <a:srgbClr val="222222"/>
+                </a:solidFill>
+                <a:latin typeface="맑은 고딕"/>
+              </a:rPr>
+              <a:t>.</a:t>
             </a:r>
           </a:p>
           <a:p>
@@ -12004,7 +13632,26 @@
                 </a:solidFill>
                 <a:latin typeface="맑은 고딕"/>
               </a:rPr>
-              <a:t>•  19c에서는 SRL이 있으면 `USING CURRENT LOGFILE` 없이도 실시간 적용이다. 그럼에도 명시하는 편이 낫다.</a:t>
+              <a:t>•  19c에서는 SRL이 있으면 </a:t>
+            </a:r>
+            <a:r>
+              <a:rPr sz="1600" b="0">
+                <a:solidFill>
+                  <a:srgbClr val="222222"/>
+                </a:solidFill>
+                <a:latin typeface="Consolas"/>
+                <a:cs typeface="Consolas"/>
+              </a:rPr>
+              <a:t>USING CURRENT LOGFILE</a:t>
+            </a:r>
+            <a:r>
+              <a:rPr sz="1600" b="0">
+                <a:solidFill>
+                  <a:srgbClr val="222222"/>
+                </a:solidFill>
+                <a:latin typeface="맑은 고딕"/>
+              </a:rPr>
+              <a:t> 없이도 실시간 적용이다. 그럼에도 명시하는 편이 낫다.</a:t>
             </a:r>
           </a:p>
           <a:p>
@@ -12020,7 +13667,26 @@
                 </a:solidFill>
                 <a:latin typeface="맑은 고딕"/>
               </a:rPr>
-              <a:t>•  `V$ARCHIVE_GAP`은 빠진 파일을 보여 준다. 실측 갭 2개, 밀린 것 5개로 서로 다르다.</a:t>
+              <a:t>•  </a:t>
+            </a:r>
+            <a:r>
+              <a:rPr sz="1600" b="0">
+                <a:solidFill>
+                  <a:srgbClr val="222222"/>
+                </a:solidFill>
+                <a:latin typeface="Consolas"/>
+                <a:cs typeface="Consolas"/>
+              </a:rPr>
+              <a:t>V$ARCHIVE_GAP</a:t>
+            </a:r>
+            <a:r>
+              <a:rPr sz="1600" b="0">
+                <a:solidFill>
+                  <a:srgbClr val="222222"/>
+                </a:solidFill>
+                <a:latin typeface="맑은 고딕"/>
+              </a:rPr>
+              <a:t>은 빠진 파일을 보여 준다. 실측 갭 2개, 밀린 것 5개로 서로 다르다.</a:t>
             </a:r>
           </a:p>
           <a:p>
@@ -12052,7 +13718,45 @@
                 </a:solidFill>
                 <a:latin typeface="맑은 고딕"/>
               </a:rPr>
-              <a:t>•  `TIME_COMPUTED`와 `DATUM_TIME`이 12초 차이 났다. 지연 값 자체가 십수 초 전 정보다.</a:t>
+              <a:t>•  </a:t>
+            </a:r>
+            <a:r>
+              <a:rPr sz="1600" b="0">
+                <a:solidFill>
+                  <a:srgbClr val="222222"/>
+                </a:solidFill>
+                <a:latin typeface="Consolas"/>
+                <a:cs typeface="Consolas"/>
+              </a:rPr>
+              <a:t>TIME_COMPUTED</a:t>
+            </a:r>
+            <a:r>
+              <a:rPr sz="1600" b="0">
+                <a:solidFill>
+                  <a:srgbClr val="222222"/>
+                </a:solidFill>
+                <a:latin typeface="맑은 고딕"/>
+              </a:rPr>
+              <a:t>와 </a:t>
+            </a:r>
+            <a:r>
+              <a:rPr sz="1600" b="0">
+                <a:solidFill>
+                  <a:srgbClr val="222222"/>
+                </a:solidFill>
+                <a:latin typeface="Consolas"/>
+                <a:cs typeface="Consolas"/>
+              </a:rPr>
+              <a:t>DATUM_TIME</a:t>
+            </a:r>
+            <a:r>
+              <a:rPr sz="1600" b="0">
+                <a:solidFill>
+                  <a:srgbClr val="222222"/>
+                </a:solidFill>
+                <a:latin typeface="맑은 고딕"/>
+              </a:rPr>
+              <a:t>이 12초 차이 났다. 지연 값 자체가 십수 초 전 정보다.</a:t>
             </a:r>
           </a:p>
           <a:p>
@@ -12256,7 +13960,26 @@
                 </a:solidFill>
                 <a:latin typeface="맑은 고딕"/>
               </a:rPr>
-              <a:t>•  실습 03 — BAD PARAM 진단과 교정: 상속된 두 파라미터를 고치고 `RECOVERY_MODE` 변화를 확인한다.</a:t>
+              <a:t>•  실습 03 — BAD PARAM 진단과 교정: 상속된 두 파라미터를 고치고 </a:t>
+            </a:r>
+            <a:r>
+              <a:rPr sz="1600" b="0">
+                <a:solidFill>
+                  <a:srgbClr val="222222"/>
+                </a:solidFill>
+                <a:latin typeface="Consolas"/>
+                <a:cs typeface="Consolas"/>
+              </a:rPr>
+              <a:t>RECOVERY_MODE</a:t>
+            </a:r>
+            <a:r>
+              <a:rPr sz="1600" b="0">
+                <a:solidFill>
+                  <a:srgbClr val="222222"/>
+                </a:solidFill>
+                <a:latin typeface="맑은 고딕"/>
+              </a:rPr>
+              <a:t> 변화를 확인한다.</a:t>
             </a:r>
           </a:p>
           <a:p>
@@ -12288,7 +14011,26 @@
                 </a:solidFill>
                 <a:latin typeface="맑은 고딕"/>
               </a:rPr>
-              <a:t>•  실습 05 — 갭 만들기와 해소: `V$ARCHIVE_GAP`을 관찰하고 따라잡는 과정을 추적한다.</a:t>
+              <a:t>•  실습 05 — 갭 만들기와 해소: </a:t>
+            </a:r>
+            <a:r>
+              <a:rPr sz="1600" b="0">
+                <a:solidFill>
+                  <a:srgbClr val="222222"/>
+                </a:solidFill>
+                <a:latin typeface="Consolas"/>
+                <a:cs typeface="Consolas"/>
+              </a:rPr>
+              <a:t>V$ARCHIVE_GAP</a:t>
+            </a:r>
+            <a:r>
+              <a:rPr sz="1600" b="0">
+                <a:solidFill>
+                  <a:srgbClr val="222222"/>
+                </a:solidFill>
+                <a:latin typeface="맑은 고딕"/>
+              </a:rPr>
+              <a:t>을 관찰하고 따라잡는 과정을 추적한다.</a:t>
             </a:r>
           </a:p>
           <a:p>
@@ -12770,7 +14512,26 @@
                 </a:solidFill>
                 <a:latin typeface="맑은 고딕"/>
               </a:rPr>
-              <a:t>•  5·6장은 `READ ONLY WITH APPLY` 확인으로 끝났다</a:t>
+              <a:t>•  5·6장은 </a:t>
+            </a:r>
+            <a:r>
+              <a:rPr sz="1700" b="0">
+                <a:solidFill>
+                  <a:srgbClr val="222222"/>
+                </a:solidFill>
+                <a:latin typeface="Consolas"/>
+                <a:cs typeface="Consolas"/>
+              </a:rPr>
+              <a:t>READ ONLY WITH APPLY</a:t>
+            </a:r>
+            <a:r>
+              <a:rPr sz="1700" b="0">
+                <a:solidFill>
+                  <a:srgbClr val="222222"/>
+                </a:solidFill>
+                <a:latin typeface="맑은 고딕"/>
+              </a:rPr>
+              <a:t> 확인으로 끝났다</a:t>
             </a:r>
           </a:p>
           <a:p>
@@ -12997,7 +14758,26 @@
                 </a:solidFill>
                 <a:latin typeface="맑은 고딕"/>
               </a:rPr>
-              <a:t>•  `RFS` — Primary의 리두를 받아 SRL에 쓴다. 개수 유동적</a:t>
+              <a:t>•  </a:t>
+            </a:r>
+            <a:r>
+              <a:rPr sz="1700" b="0">
+                <a:solidFill>
+                  <a:srgbClr val="222222"/>
+                </a:solidFill>
+                <a:latin typeface="Consolas"/>
+                <a:cs typeface="Consolas"/>
+              </a:rPr>
+              <a:t>RFS</a:t>
+            </a:r>
+            <a:r>
+              <a:rPr sz="1700" b="0">
+                <a:solidFill>
+                  <a:srgbClr val="222222"/>
+                </a:solidFill>
+                <a:latin typeface="맑은 고딕"/>
+              </a:rPr>
+              <a:t> — Primary의 리두를 받아 SRL에 쓴다. 개수 유동적</a:t>
             </a:r>
           </a:p>
           <a:p>
@@ -13013,7 +14793,35 @@
                 </a:solidFill>
                 <a:latin typeface="맑은 고딕"/>
               </a:rPr>
-              <a:t>•  `MRP0` — SRL을 읽어 데이터 파일에 적용한다. **항상 하나**</a:t>
+              <a:t>•  </a:t>
+            </a:r>
+            <a:r>
+              <a:rPr sz="1700" b="0">
+                <a:solidFill>
+                  <a:srgbClr val="222222"/>
+                </a:solidFill>
+                <a:latin typeface="Consolas"/>
+                <a:cs typeface="Consolas"/>
+              </a:rPr>
+              <a:t>MRP0</a:t>
+            </a:r>
+            <a:r>
+              <a:rPr sz="1700" b="0">
+                <a:solidFill>
+                  <a:srgbClr val="222222"/>
+                </a:solidFill>
+                <a:latin typeface="맑은 고딕"/>
+              </a:rPr>
+              <a:t> — SRL을 읽어 데이터 파일에 적용한다. </a:t>
+            </a:r>
+            <a:r>
+              <a:rPr sz="1700" b="1">
+                <a:solidFill>
+                  <a:srgbClr val="222222"/>
+                </a:solidFill>
+                <a:latin typeface="맑은 고딕"/>
+              </a:rPr>
+              <a:t>항상 하나</a:t>
             </a:r>
           </a:p>
           <a:p>
@@ -13029,7 +14837,45 @@
                 </a:solidFill>
                 <a:latin typeface="맑은 고딕"/>
               </a:rPr>
-              <a:t>•  `ARCH` — 아카이브 담당. 실측 4개 (`LOG_ARCHIVE_MAX_PROCESSES=4`)</a:t>
+              <a:t>•  </a:t>
+            </a:r>
+            <a:r>
+              <a:rPr sz="1700" b="0">
+                <a:solidFill>
+                  <a:srgbClr val="222222"/>
+                </a:solidFill>
+                <a:latin typeface="Consolas"/>
+                <a:cs typeface="Consolas"/>
+              </a:rPr>
+              <a:t>ARCH</a:t>
+            </a:r>
+            <a:r>
+              <a:rPr sz="1700" b="0">
+                <a:solidFill>
+                  <a:srgbClr val="222222"/>
+                </a:solidFill>
+                <a:latin typeface="맑은 고딕"/>
+              </a:rPr>
+              <a:t> — 아카이브 담당. 실측 4개 (</a:t>
+            </a:r>
+            <a:r>
+              <a:rPr sz="1700" b="0">
+                <a:solidFill>
+                  <a:srgbClr val="222222"/>
+                </a:solidFill>
+                <a:latin typeface="Consolas"/>
+                <a:cs typeface="Consolas"/>
+              </a:rPr>
+              <a:t>LOG_ARCHIVE_MAX_PROCESSES=4</a:t>
+            </a:r>
+            <a:r>
+              <a:rPr sz="1700" b="0">
+                <a:solidFill>
+                  <a:srgbClr val="222222"/>
+                </a:solidFill>
+                <a:latin typeface="맑은 고딕"/>
+              </a:rPr>
+              <a:t>)</a:t>
             </a:r>
           </a:p>
           <a:p>
@@ -13045,7 +14891,26 @@
                 </a:solidFill>
                 <a:latin typeface="맑은 고딕"/>
               </a:rPr>
-              <a:t>•  `DGRD` — 관리용 보조. 실측 2개</a:t>
+              <a:t>•  </a:t>
+            </a:r>
+            <a:r>
+              <a:rPr sz="1700" b="0">
+                <a:solidFill>
+                  <a:srgbClr val="222222"/>
+                </a:solidFill>
+                <a:latin typeface="Consolas"/>
+                <a:cs typeface="Consolas"/>
+              </a:rPr>
+              <a:t>DGRD</a:t>
+            </a:r>
+            <a:r>
+              <a:rPr sz="1700" b="0">
+                <a:solidFill>
+                  <a:srgbClr val="222222"/>
+                </a:solidFill>
+                <a:latin typeface="맑은 고딕"/>
+              </a:rPr>
+              <a:t> — 관리용 보조. 실측 2개</a:t>
             </a:r>
           </a:p>
         </p:txBody>
@@ -13256,7 +15121,16 @@
                 </a:solidFill>
                 <a:latin typeface="맑은 고딕"/>
               </a:rPr>
-              <a:t>•  **받는 지점과 적용하는 지점이 같다**</a:t>
+              <a:t>•  </a:t>
+            </a:r>
+            <a:r>
+              <a:rPr sz="1700" b="1">
+                <a:solidFill>
+                  <a:srgbClr val="222222"/>
+                </a:solidFill>
+                <a:latin typeface="맑은 고딕"/>
+              </a:rPr>
+              <a:t>받는 지점과 적용하는 지점이 같다</a:t>
             </a:r>
           </a:p>
           <a:p>
@@ -13451,7 +15325,26 @@
                 </a:solidFill>
                 <a:latin typeface="맑은 고딕"/>
               </a:rPr>
-              <a:t>•  적용 중지 → `V$MANAGED_STANDBY`에서 MRP0이 없어진다</a:t>
+              <a:t>•  적용 중지 → </a:t>
+            </a:r>
+            <a:r>
+              <a:rPr sz="1700" b="0">
+                <a:solidFill>
+                  <a:srgbClr val="222222"/>
+                </a:solidFill>
+                <a:latin typeface="Consolas"/>
+                <a:cs typeface="Consolas"/>
+              </a:rPr>
+              <a:t>V$MANAGED_STANDBY</a:t>
+            </a:r>
+            <a:r>
+              <a:rPr sz="1700" b="0">
+                <a:solidFill>
+                  <a:srgbClr val="222222"/>
+                </a:solidFill>
+                <a:latin typeface="맑은 고딕"/>
+              </a:rPr>
+              <a:t>에서 MRP0이 없어진다</a:t>
             </a:r>
           </a:p>
           <a:p>
@@ -13467,7 +15360,35 @@
                 </a:solidFill>
                 <a:latin typeface="맑은 고딕"/>
               </a:rPr>
-              <a:t>•  `OPEN_MODE` : READ ONLY WITH APPLY → **READ ONLY**</a:t>
+              <a:t>•  </a:t>
+            </a:r>
+            <a:r>
+              <a:rPr sz="1700" b="0">
+                <a:solidFill>
+                  <a:srgbClr val="222222"/>
+                </a:solidFill>
+                <a:latin typeface="Consolas"/>
+                <a:cs typeface="Consolas"/>
+              </a:rPr>
+              <a:t>OPEN_MODE</a:t>
+            </a:r>
+            <a:r>
+              <a:rPr sz="1700" b="0">
+                <a:solidFill>
+                  <a:srgbClr val="222222"/>
+                </a:solidFill>
+                <a:latin typeface="맑은 고딕"/>
+              </a:rPr>
+              <a:t> : READ ONLY WITH APPLY → </a:t>
+            </a:r>
+            <a:r>
+              <a:rPr sz="1700" b="1">
+                <a:solidFill>
+                  <a:srgbClr val="222222"/>
+                </a:solidFill>
+                <a:latin typeface="맑은 고딕"/>
+              </a:rPr>
+              <a:t>READ ONLY</a:t>
             </a:r>
           </a:p>
           <a:p>
@@ -13483,7 +15404,16 @@
                 </a:solidFill>
                 <a:latin typeface="맑은 고딕"/>
               </a:rPr>
-              <a:t>•  그런데 두 지연은 **0으로 보인다**</a:t>
+              <a:t>•  그런데 두 지연은 </a:t>
+            </a:r>
+            <a:r>
+              <a:rPr sz="1700" b="1">
+                <a:solidFill>
+                  <a:srgbClr val="222222"/>
+                </a:solidFill>
+                <a:latin typeface="맑은 고딕"/>
+              </a:rPr>
+              <a:t>0으로 보인다</a:t>
             </a:r>
           </a:p>
           <a:p>

--- a/ADG/07장/7장_RedoApply기동과동기화검증.pptx
+++ b/ADG/07장/7장_RedoApply기동과동기화검증.pptx
@@ -41,6 +41,24 @@
     <p:sldId id="289" r:id="rId41"/>
     <p:sldId id="290" r:id="rId42"/>
     <p:sldId id="291" r:id="rId43"/>
+    <p:sldId id="292" r:id="rId44"/>
+    <p:sldId id="293" r:id="rId45"/>
+    <p:sldId id="294" r:id="rId46"/>
+    <p:sldId id="295" r:id="rId47"/>
+    <p:sldId id="296" r:id="rId48"/>
+    <p:sldId id="297" r:id="rId49"/>
+    <p:sldId id="298" r:id="rId50"/>
+    <p:sldId id="299" r:id="rId51"/>
+    <p:sldId id="300" r:id="rId52"/>
+    <p:sldId id="301" r:id="rId53"/>
+    <p:sldId id="302" r:id="rId54"/>
+    <p:sldId id="303" r:id="rId55"/>
+    <p:sldId id="304" r:id="rId56"/>
+    <p:sldId id="305" r:id="rId57"/>
+    <p:sldId id="306" r:id="rId58"/>
+    <p:sldId id="307" r:id="rId59"/>
+    <p:sldId id="308" r:id="rId60"/>
+    <p:sldId id="309" r:id="rId61"/>
   </p:sldIdLst>
   <p:sldSz cx="12191695" cy="6858000" type="screen4x3"/>
   <p:notesSz cx="6858000" cy="9144000"/>
@@ -537,7 +555,7 @@
           <a:lstStyle/>
           <a:p>
             <a:r>
-              <a:t>구축을 마치고 상태 조회 하나가 정상으로 나오면 안심하게 됩니다. 그런데 이 장에서 보게 되겠지만, 그 시점의 boston은 목적지 1번이 BAD PARAM 상태였고 FAL_CLIENT도 잘못되어 있었습니다. 지연은 0이었고 적용도 돌고 있었으므로 어떤 조회도 문제를 알려 주지 않았습니다. 겉모습은 정상이었던 것이죠. 이런 결함은 평상시에 보이지 않다가 역할 전환처럼 가장 급한 순간에 드러납니다. 그래서 확인 항목을 늘려야 합니다.</a:t>
+              <a:t>학생들이 가장 자주 섞는 지점이 여기입니다. Standby에 리두가 도착했다는 사실과 Standby 데이터가 최신이라는 사실은 서로 다른 이야기입니다. 예를 들어 적용을 멈춰 둔 Standby라도 전송은 정상이라 Primary가 장애로 사라져도 데이터는 잃지 않습니다. 다만 그 Standby를 Primary로 올리려면 밀린 리두를 모두 적용해야 하니 시간이 오래 걸립니다. 이 구분이 뒤에서 transport lag와 apply lag라는 두 지표로 그대로 이어진다는 점을 미리 짚어 두시면 좋습니다.</a:t>
             </a:r>
           </a:p>
         </p:txBody>
@@ -607,7 +625,7 @@
           <a:lstStyle/>
           <a:p>
             <a:r>
-              <a:t>두 열을 구분해 읽는 것이 이 슬라이드의 요점입니다. STATUS가 BAD PARAM이면 고쳐야 하고, VALID_NOW가 WRONG VALID_TYPE이면 그대로 두어야 합니다. 2장에서 배운 VALID_FOR 속성이 여기서 결과로 나타납니다. 이 목적지는 boston이 Primary가 되었을 때 chicago로 리두를 보내기 위한 것이므로 지금 쓰이지 않는 것이 당연합니다. 이 둘을 혼동하면 멀쩡한 목적지를 고치거나 고장 난 목적지를 방치하게 됩니다.</a:t>
+              <a:t>라이선스 경계가 걸리는 곳이라 분명히 해 둘 필요가 있습니다. 마운트 상태에서 적용하는 것과, 적용을 멈추고 READ ONLY로 여는 것은 Enterprise Edition의 Data Guard 기본 기능입니다. 하지만 열린 상태에서 적용을 다시 켜면 READ ONLY WITH APPLY가 되고, 이것은 실시간 조회라서 Active Data Guard 옵션이 필요합니다. 기동 스크립트가 무심코 OPEN 후에 적용을 켜도록 되어 있으면 라이선스 없는 환경에서 문제가 되므로 스크립트 순서를 꼭 확인해야 합니다.</a:t>
             </a:r>
           </a:p>
         </p:txBody>
@@ -677,7 +695,7 @@
           <a:lstStyle/>
           <a:p>
             <a:r>
-              <a:t>FAL_CLIENT는 "요청을 보낼 때 나를 이렇게 소개하라"는 값인데, boston이 자신을 chicago라고 소개하고 있었습니다. 11g 이후로는 이 값이 없거나 틀려도 동작하므로 오류조차 나지 않습니다. 셋 중 가장 조용한 결함이죠. 여기서 끌어낼 원칙은 하나입니다. DUPLICATE의 SPFILE 절은 Primary 파라미터를 통째로 가져오므로, Standby에서 값이 달라야 하는 파라미터는 빠짐없이 SET으로 지정해야 합니다. 지정하지 않은 것은 조용히 상속되고, 그중 일부만 오류를 냅니다.</a:t>
+              <a:t>명령이 Database altered로 끝났다고 적용이 잘 되고 있다는 보장은 없습니다. 예를 들어 SRL 구성이 잘못돼 있으면 MRP0는 떠 있지만 아카이브 기반으로 돌고 있고, 필요한 로그가 빠져 있으면 갭을 기다리며 멈춰 있습니다. 프로세스, 모드, 진행의 세 단계를 순서대로 확인하는 습관이 필요한 이유입니다. 이 세 단계는 뒤에서 나오는 다섯 단계 점검 순서의 축약판이라고 보시면 됩니다.</a:t>
             </a:r>
           </a:p>
         </p:txBody>
@@ -747,7 +765,7 @@
           <a:lstStyle/>
           <a:p>
             <a:r>
-              <a:t>열 값 하나를 믿기 어려운 상황을 앞에서 봤으므로 독립적인 확인 방법이 필요합니다. 정의로 돌아가면 판별법이 나옵니다. 주의할 점이 셋 있습니다. 첫째, Primary에 쓰기가 발생하므로 운영에서는 신중해야 합니다. 둘째, 시험이 끝나면 테이블을 지웁니다. 셋째, 충분히 기다립니다. 실측에서 20초에서 40초가 걸렸는데, 5초 만에 확인하고 안 보인다고 판단하면 잘못된 결론에 이릅니다.</a:t>
+              <a:t>WAIT_FOR_LOG를 보고 문제라고 판단하는 경우가 꽤 있습니다. Primary의 리두 생성이 적으면 실시간 적용 중인 MRP0는 대부분의 시간을 기다리며 보내므로 정상입니다. 반면 WAIT_FOR_GAP은 확실한 이상 신호이고 갭이 해소돼야 풀립니다. V$ARCHIVED_LOG의 APPLIED 열은 로그 파일 단위로만 표시되기 때문에, 실시간 적용 중에는 현재 SRL 내용이 이미 반영되어 있어도 그 로그가 아카이브되기 전까지 YES로 바뀌지 않습니다.</a:t>
             </a:r>
           </a:p>
         </p:txBody>
@@ -817,7 +835,7 @@
           <a:lstStyle/>
           <a:p>
             <a:r>
-              <a:t>오래된 문서와 절차서가 강조하는 절이 사실상 무의미해진 것입니다. 여기서 두 가지를 배웁니다. 첫째, 절차서에서 이 절이 빠졌다고 해서 아카이브 적용으로 돌고 있다고 단정하면 안 됩니다. 확인은 RECOVERY_MODE와 기능 시험으로 합니다. 둘째, 그럼에도 명시하는 편이 낫습니다. 명령을 읽는 사람에게 의도를 알려 주고, SRL이 없는 환경으로 옮겼을 때 동작이 조용히 달라지는 것을 막아 줍니다. 동작이 같다고 해서 생략이 최선은 아닙니다.</a:t>
+              <a:t>아카이브 기반 적용에서는 Primary 로그 하나가 다 찰 때까지의 변경이 Standby에 도착해 있어도 데이터 파일에는 반영되지 않습니다. 로그가 크고 업무량이 적은 시간대라면 수십 분씩 뒤처지기도 합니다. 실시간 적용은 쓰이는 중인 SRL을 곧장 읽으므로 이 지연이 사라집니다. 적용을 잠시 멈췄다 다시 켜는 경우처럼 밀린 구간이 있으면 MRP0가 아카이브 로그로 먼저 따라잡고 자동으로 SRL로 돌아오므로 관리자가 따로 할 일은 없습니다.</a:t>
             </a:r>
           </a:p>
         </p:txBody>
@@ -887,7 +905,7 @@
           <a:lstStyle/>
           <a:p>
             <a:r>
-              <a:t>두 숫자가 다른 것이 핵심입니다. V$ARCHIVE_GAP은 "적용해야 하는데 파일이 없는 것"을 보여 주지 "적용하지 않은 것"을 보여 주지 않습니다. 전송은 계속되고 있었으므로 파일 대부분은 도착해 있었고, 갭으로 잡힌 것은 그중 일부입니다. 그래서 갭이 비어 있다고 해서 뒤처지지 않았다는 뜻이 아닙니다. 지금이 그 예입니다. 참고로 Primary 쪽 APPLIED_SEQ#는 Primary가 마지막으로 확인한 시점의 값이라 시차가 있습니다. 정확한 판단은 Standby에서 직접 조회한 값으로 합니다.</a:t>
+              <a:t>실시간 적용은 RFS가 쓰는 파일을 MRP0가 같이 읽는 구조입니다. RFS가 SRL 대신 아카이브 로그에 직접 쓰는 상황이 되면 실시간 적용은 성립하지 않습니다. 4장에서 SRL을 Online Redo Log와 같은 크기로, 그룹 수보다 하나 더 만들라고 한 규칙도 이 상황을 막으려고 둔 것입니다. 실습 7에서는 SRL을 지우려다 적용 중인 그룹이라 ORA-00261로 거부되는 장면을 직접 보게 됩니다.</a:t>
             </a:r>
           </a:p>
         </p:txBody>
@@ -957,7 +975,7 @@
           <a:lstStyle/>
           <a:p>
             <a:r>
-              <a:t>파일은 모두 도착했지만 아직 적용 중이라는 뜻입니다. 갭 해소와 지연 해소는 다른 단계입니다. apply lag이 transport lag보다 큰 것도 당연합니다. 받아야 적용할 수 있으므로 적용이 더 뒤처집니다. 반대로 나오면 두 값의 계산 시점이 어긋난 것이고 몇 초 뒤 정상 관계로 돌아옵니다. 그리고 이때 조급하게 명령을 다시 내리면 ORA-01153만 만납니다. MRP0의 BLOCK#이 늘어나는지 확인하고 기다리는 것이 옳습니다.</a:t>
+              <a:t>실무에서 가장 중요한 경고 가운데 하나입니다. 실시간 적용이 꺼져도 경고 메시지가 뜨지 않습니다. 흔한 계기는 Primary의 Online Redo Log 크기를 키우면서 Standby의 SRL은 예전 크기로 남겨 두는 경우입니다. 그 순간부터 RFS는 맞는 크기의 SRL을 찾지 못해 아카이브 로그에 직접 쓰고, 적용은 로그 전환 때마다 계단처럼 움직입니다. 로그 크기 변경 작업 체크리스트에 SRL 재구성을 반드시 넣어 두어야 합니다.</a:t>
             </a:r>
           </a:p>
         </p:txBody>
@@ -1027,7 +1045,7 @@
           <a:lstStyle/>
           <a:p>
             <a:r>
-              <a:t>estimated startup time은 지금 Standby를 Primary로 전환한다면 서비스 개시까지 걸릴 예상 시간입니다. 실측 8초였는데 16장의 역할 전환에서 다시 보게 됩니다. UNIT 열을 보면 정밀도가 다릅니다. 두 지연은 초 단위이고 apply finish time은 밀리초 단위입니다. 앞의 둘은 초보다 세밀하게 볼 필요가 없다는 오라클의 판단이 반영된 것으로 보입니다.</a:t>
+              <a:t>설치 문서 가운데 일반 기동과 실시간 적용 기동을 따로 적어 둔 것이 있는데, 11g 시절의 구분이 남은 것입니다. 19c에서는 두 명령의 결과가 같고 USING CURRENT LOGFILE은 받아들여지기는 하지만 디프리케이트된 절입니다. 실습 4에서 두 명령을 차례로 실행해 RECOVERY_MODE가 같게 나오는 것을 확인합니다. 실시간 적용을 끄고 싶을 때만 USING ARCHIVED LOGFILE을 쓰며, 이 절은 뒤의 지연 적용에서 다시 등장합니다.</a:t>
             </a:r>
           </a:p>
         </p:txBody>
@@ -1097,7 +1115,7 @@
           <a:lstStyle/>
           <a:p>
             <a:r>
-              <a:t>이 차이를 모르면 진단이 어긋납니다. 값이 줄어들고 있으면 따라잡는 중이므로 기다리면 되고, 늘어나고 있으면 문제이며, 제자리이면 정상이거나 완전히 멈춘 것이라 다른 지표로 확인해야 합니다. 추세로 판단한다는 원칙이 여기서 나옵니다. 참고로 apply finish time과 estimated startup time에는 DATUM_TIME이 없습니다. 과거 정보가 아니라 예측값이기 때문입니다.</a:t>
+              <a:t>시험 문제로도 자주 나오는 혼동입니다. Real-Time Apply는 적용을 언제 하느냐의 문제이고, Real-Time Query는 적용 결과를 사용자가 볼 수 있느냐의 문제입니다. 공식 교재 노트에서도 두 기능이 다르다고 따로 강조합니다. 마운트 상태의 Standby도 실시간 적용으로 Primary를 초 단위로 따라가고 있지만, 열려 있지 않으니 그 결과를 조회할 수 없을 뿐입니다. 실시간 조회의 세부 기능과 설정은 9장에서 다룬다고 연결해 두십시오.</a:t>
             </a:r>
           </a:p>
         </p:txBody>
@@ -1167,7 +1185,7 @@
           <a:lstStyle/>
           <a:p>
             <a:r>
-              <a:t>마지막 행이 앞에서 본 함정입니다. 지연 값만으로는 이 상태를 구분할 수 없으므로 MRP0 존재를 봐야 합니다. 두 번째 행은 야간 배치 뒤에 흔히 나타납니다. 배치가 만든 리두량이 Standby의 적용 능력을 넘어선 것이며, 시간이 지나며 값이 줄어들면 조치가 필요 없습니다. 줄지 않거나 늘어나면 Standby의 I/O를 보거나 배치 자체의 리두 발생량을 줄이는 방향을 검토합니다.</a:t>
+              <a:t>RECOVERY_MODE가 가장 빠른 판별 수단입니다. 다만 Standby의 로컬 아카이브 목적지가 잘못돼 있으면 이 열이 기대와 다르게 보일 수 있어서, 값이 이상하면 목적지 STATUS부터 봅니다. 기능 시험은 Primary에서 커밋한 행이 로그 전환 없이 Standby에서 보이는지 확인하는 방법인데, Standby를 열어 둔 채 적용해야 하므로 Active Data Guard가 필요합니다. 라이선스가 없는 환경이라면 apply lag가 초 단위로 유지되는지로 간접 판단합니다.</a:t>
             </a:r>
           </a:p>
         </p:txBody>
@@ -1237,7 +1255,7 @@
           <a:lstStyle/>
           <a:p>
             <a:r>
-              <a:t>4장에서도 같은 관찰을 했고 두 장의 실측이 같은 방향을 가리킵니다. 규칙의 성격을 아는 것이 중요합니다. 최소 요건이라면 어기면 동작하지 않아야 하는데 동작합니다. 여유를 위한 권장이므로 부하가 가벼운 환경에서는 차이가 드러나지 않습니다. 실습 환경이 그랬습니다. 운영에서 리두 생성량이 많으면 이 차이가 지연으로 나타납니다. 참고로 ACTIVE인 SRL은 지울 수 없습니다. MRP를 멈춰도 RFS는 계속 받으니까요.</a:t>
+              <a:t>실시간 적용을 쓰지 않을 이유는 사실상 지연 적용을 의도적으로 쓰는 경우뿐입니다. 로그 크기 이야기를 덧붙이면 좋습니다. 아카이브 기반 적용에서는 로그가 클수록 적용이 더 늦어지기 때문에 로그를 작게 유지하려는 압력이 있었는데, 실시간 적용에서는 로그가 커도 지연이 늘지 않고 오히려 로그 전환 빈도가 줄어 부담이 적어집니다. 공식 교재가 실시간 적용의 이점으로 더 큰 로그 파일 사용을 꼽는 이유가 여기에 있습니다.</a:t>
             </a:r>
           </a:p>
         </p:txBody>
@@ -1307,7 +1325,7 @@
           <a:lstStyle/>
           <a:p>
             <a:r>
-              <a:t>아홉 행이 나오지만 진단에서 실제로 보는 것은 RFS와 MRP0 둘입니다. 나머지는 배경입니다. ARCH가 네 개인 것은 우연이 아니라 DUPLICATE 스크립트에 넣은 log_archive_max_processes 값 그대로입니다. Standby에서는 아카이브할 일이 거의 없어 상태가 전부 CONNECTED인데, 역할 전환 후 Primary가 되면 이들이 일을 시작합니다. MRP0이 항상 하나라는 규칙에서 ORA-01153이 나옵니다. 이미 돌고 있는데 또 기동하려 하면 두 번째를 만들 수 없어 거부됩니다.</a:t>
+              <a:t>BR 과정에서 아카이브 로그를 적용해 데이터 파일을 앞으로 굴리는 복구를 해 보셨다면, Redo Apply는 그 복구를 영원히 멈추지 않고 이어 가는 것이라고 설명하면 쉽게 이해합니다. managed recovery라는 이름도 여기서 나왔습니다. 블록 변경 벡터를 그대로 적용하므로 결과가 블록 단위로 같다는 점이 논리 Standby와 가장 큰 차이입니다. SQL Apply는 LogMiner로 SQL을 다시 만들어 실행하므로 지원하지 않는 데이터 유형이 생기는데, 물리 Standby에는 그런 제약이 없습니다.</a:t>
             </a:r>
           </a:p>
         </p:txBody>
@@ -1377,7 +1395,7 @@
           <a:lstStyle/>
           <a:p>
             <a:r>
-              <a:t>ORA-00312가 두 줄이라는 사소한 사실이 구성 방식을 드러냅니다. 4장에서 같은 오류를 만났을 때는 경로 지정 방식이라 한 줄이었습니다. ORA-01184 쪽은 4장과 결과가 다릅니다. 그때는 여러 그룹을 한 문장에 넣었다가 중복 하나 때문에 전체가 실패했는데, 이번에는 그룹별로 따로 실행해 셋은 성공하고 하나만 실패했습니다. 복구 상황처럼 현재 상태가 불확실할 때는 반드시 그룹별로 실행합니다.</a:t>
+              <a:t>Primary 입장에서만 파라미터를 생각하다 보면 Standby 자신의 로컬 아카이브 목적지를 소홀히 하게 됩니다. Standby 역할에서 아카이브할 대상은 Online Redo Log 대신 SRL입니다. 따라서 VALID_FOR를 ALL_LOGFILES와 ALL_ROLES로 두는 것이 가장 단순하고, 역할이 바뀌어도 다시 손댈 필요가 없습니다. ONLINE_LOGFILES만 잡아 두면 V$ARCHIVE_DEST의 VALID_NOW 열에 WRONG VALID_TYPE이 나타나며, SRL이 아카이브되지 못하는 문제로 이어집니다.</a:t>
             </a:r>
           </a:p>
         </p:txBody>
@@ -1447,7 +1465,7 @@
           <a:lstStyle/>
           <a:p>
             <a:r>
-              <a:t>UNION ALL로 각 뷰의 결과를 item과 val 두 문자열로 맞추면 됩니다. 여러 목적지를 한 줄로 보이려면 LISTAGG를 씁니다. 작성할 때 주의할 점이 셋 있습니다. 첫째, mrp 행의 NVL입니다. 집계 함수가 NULL을 돌려주면 빈 칸으로 보여 놓치기 쉬우므로 눈에 띄게 만듭니다. 둘째, recovery_mode는 dest status와 함께 봅니다. 목적지가 BAD PARAM이면 값이 왜곡되니까요. 셋째, 모든 열을 문자열로 맞춰야 UNION ALL에서 타입 불일치가 나지 않습니다.</a:t>
+              <a:t>BAD PARAM은 오라클이 파라미터 값 자체를 읽지 못했다는 뜻입니다. 따옴표가 빠졌거나 속성 이름에 오타가 있거나 괄호 짝이 맞지 않는 경우가 대부분이고, DESTINATION 열이 비어 있는 것이 대표적인 증상입니다. Standby의 로컬 목적지가 BAD PARAM이면 SRL이 아카이브되지 못해 모든 SRL이 사용 중이 되고, RFS가 아카이브 로그에 직접 쓰면서 실시간 적용까지 강등되는 연쇄가 생깁니다. 실습 3이 이 상황을 다룹니다.</a:t>
             </a:r>
           </a:p>
         </p:txBody>
@@ -1517,7 +1535,7 @@
           <a:lstStyle/>
           <a:p>
             <a:r>
-              <a:t>순서에 의존 관계가 있다는 것이 이 슬라이드의 요점입니다. ①이 실패하면 나머지를 볼 필요가 없습니다. 적용부터 기동해야죠. ③이 실패하면 ②는 신뢰할 수 없지만 ④와 ⑤는 여전히 유효합니다. 이 의존 관계를 모르면 IDLE이라는 값을 보고 "실시간 적용이 아니구나"라고 잘못 판단하게 됩니다. 실제로 이 장에서 그런 상황을 겪었습니다. ⑥은 가장 확실하지만 Primary에 쓰기가 발생하므로 마지막 수단으로 씁니다.</a:t>
+              <a:t>FAL_SERVER에는 Primary만 적어도 되지만 다른 Standby나 Far Sync를 함께 적어 두면 요청 대상이 늘어납니다. FAL_CLIENT는 19c에서는 설정하지 않아도 FAL이 동작하지만, 값을 넣었다면 FAL 서버 쪽에서 찾을 수 있는 올바른 Net 서비스 이름이어야 합니다. 역할 전환 이후를 생각해 Primary에도 반대 방향 값을 넣어 둡니다. STANDBY_FILE_MANAGEMENT가 MANUAL이면 Primary에서 데이터 파일이 추가되는 순간 적용이 멈추는데, 그 처리는 8장의 주제입니다.</a:t>
             </a:r>
           </a:p>
         </p:txBody>
@@ -1587,7 +1605,7 @@
           <a:lstStyle/>
           <a:p>
             <a:r>
-              <a:t>진단에서 흔히 헷갈리는 지점입니다. IDLE이라는 값만 보고 "실시간 적용이 아니구나"라고 판단하면 두 상황을 구분하지 못합니다. 목적지 STATUS가 BAD PARAM이면 진단 열 자체가 왜곡된 것이고, VALID인데 IDLE이면 적용이 실제로 멈춘 것입니다. 그래서 점검 순서에서 RECOVERY_MODE 다음에 STATUS를 두었고, 통합 점검 조회에도 dest status 행을 반드시 포함시켰습니다. 값 하나가 두 가지를 뜻할 수 있다면 그것을 가르는 다른 값을 함께 봐야 합니다.</a:t>
+              <a:t>이 사례는 새로 만든 Standby에서 실제로 흔히 생기는 흐름입니다. RECOVERY_MODE가 MANAGED로 나온다면 실시간 적용이 꺼져 있으므로 SRL 쪽을 의심합니다. 그런데 SRL은 제대로 만들어져 있는데 계속 사용 중 상태라면 SRL을 비워 줄 아카이브가 막혀 있는 것이고, 그 원인이 로컬 목적지의 BAD PARAM인 경우가 많습니다. 파라미터를 고치고 적용을 다시 기동하면 RECOVERY_MODE가 돌아옵니다. 증상에서 원인으로 한 단계씩 거슬러 올라가는 사고방식을 보여 주는 데 초점을 두십시오.</a:t>
             </a:r>
           </a:p>
         </p:txBody>
@@ -1657,7 +1675,357 @@
           <a:lstStyle/>
           <a:p>
             <a:r>
-              <a:t>이 장의 실측이 공통으로 가리키는 것은 하나입니다. 단일 지표는 거짓 안심을 준다는 것입니다. READ ONLY WITH APPLY만 보고 넘어갔다면 BAD PARAM을 못 찾았을 것이고, 지연만 보고 넘어갔다면 멈춘 적용을 정상으로 판단했을 것이며, 한 번의 조회로 끝냈다면 DATUM_TIME 때문에 십수 초 전 상태를 지금으로 착각했을 것입니다. 세 습관은 모두 같은 원칙의 다른 표현입니다. 다음 장부터는 이 습관을 전제로 진행합니다.</a:t>
+              <a:t>갭은 Standby가 적용하려는 다음 순번의 로그가 없어서 더 진행할 수 없는 상태입니다. 원인은 거의 항상 전송이나 보관 쪽에 있고, 적용은 그 결과를 발견하는 쪽입니다. 네 가지 원인 가운데 마지막, 즉 Primary의 아카이브 로그가 Standby로 가기 전에 지워진 경우가 가장 곤란합니다. 앞의 세 경우는 원본이 Primary에 남아 있어 자동으로 메워지지만, 원본이 사라지면 자동 해소가 불가능하기 때문입니다.</a:t>
+            </a:r>
+          </a:p>
+        </p:txBody>
+      </p:sp>
+      <p:sp>
+        <p:nvSpPr>
+          <p:cNvPr id="4" name="Slide Number Placeholder 3"/>
+          <p:cNvSpPr>
+            <a:spLocks noGrp="1"/>
+          </p:cNvSpPr>
+          <p:nvPr>
+            <p:ph type="sldNum" idx="5" sz="quarter"/>
+          </p:nvPr>
+        </p:nvSpPr>
+        <p:spPr/>
+      </p:sp>
+    </p:spTree>
+  </p:cSld>
+  <p:clrMapOvr>
+    <a:masterClrMapping/>
+  </p:clrMapOvr>
+</p:notes>
+</file>
+
+<file path=ppt/notesSlides/notesSlide25.xml><?xml version="1.0" encoding="utf-8"?>
+<p:notes xmlns:a="http://schemas.openxmlformats.org/drawingml/2006/main" xmlns:p="http://schemas.openxmlformats.org/presentationml/2006/main" xmlns:r="http://schemas.openxmlformats.org/officeDocument/2006/relationships">
+  <p:cSld>
+    <p:spTree>
+      <p:nvGrpSpPr>
+        <p:cNvPr id="1" name=""/>
+        <p:cNvGrpSpPr/>
+        <p:nvPr/>
+      </p:nvGrpSpPr>
+      <p:grpSpPr>
+        <a:xfrm>
+          <a:off x="0" y="0"/>
+          <a:ext cx="0" cy="0"/>
+          <a:chOff x="0" y="0"/>
+          <a:chExt cx="0" cy="0"/>
+        </a:xfrm>
+      </p:grpSpPr>
+      <p:sp>
+        <p:nvSpPr>
+          <p:cNvPr id="2" name="Slide Image Placeholder 1"/>
+          <p:cNvSpPr>
+            <a:spLocks noGrp="1"/>
+          </p:cNvSpPr>
+          <p:nvPr>
+            <p:ph type="sldImg" idx="2"/>
+          </p:nvPr>
+        </p:nvSpPr>
+        <p:spPr/>
+      </p:sp>
+      <p:sp>
+        <p:nvSpPr>
+          <p:cNvPr id="3" name="Notes Placeholder 2"/>
+          <p:cNvSpPr>
+            <a:spLocks noGrp="1"/>
+          </p:cNvSpPr>
+          <p:nvPr>
+            <p:ph type="body" idx="3" sz="quarter"/>
+          </p:nvPr>
+        </p:nvSpPr>
+        <p:spPr/>
+        <p:txBody>
+          <a:bodyPr/>
+          <a:lstStyle/>
+          <a:p>
+            <a:r>
+              <a:t>두 경로는 서로를 보완합니다. ARCn ping은 Primary가 Standby에게 어디까지 받았는지 물어보고 빠진 것을 보내는 방식이라 연결이 끊겼다 다시 붙는 상황에 강합니다. FAL은 Standby의 MRP0가 적용하다가 다음 로그가 없다는 것을 알아챘을 때 직접 요청하는 방식이라, 도착은 했는데 중간 파일이 손상되거나 사라진 상황에 강합니다. 손상된 리두를 발견했을 때 정상 로그를 다시 받아 오는 것도 이 경로를 씁니다. 갭 해소 중에는 V$DATAGUARD_PROCESS에 RFS 연결이 잠시 늘어납니다.</a:t>
+            </a:r>
+          </a:p>
+        </p:txBody>
+      </p:sp>
+      <p:sp>
+        <p:nvSpPr>
+          <p:cNvPr id="4" name="Slide Number Placeholder 3"/>
+          <p:cNvSpPr>
+            <a:spLocks noGrp="1"/>
+          </p:cNvSpPr>
+          <p:nvPr>
+            <p:ph type="sldNum" idx="5" sz="quarter"/>
+          </p:nvPr>
+        </p:nvSpPr>
+        <p:spPr/>
+      </p:sp>
+    </p:spTree>
+  </p:cSld>
+  <p:clrMapOvr>
+    <a:masterClrMapping/>
+  </p:clrMapOvr>
+</p:notes>
+</file>
+
+<file path=ppt/notesSlides/notesSlide26.xml><?xml version="1.0" encoding="utf-8"?>
+<p:notes xmlns:a="http://schemas.openxmlformats.org/drawingml/2006/main" xmlns:p="http://schemas.openxmlformats.org/presentationml/2006/main" xmlns:r="http://schemas.openxmlformats.org/officeDocument/2006/relationships">
+  <p:cSld>
+    <p:spTree>
+      <p:nvGrpSpPr>
+        <p:cNvPr id="1" name=""/>
+        <p:cNvGrpSpPr/>
+        <p:nvPr/>
+      </p:nvGrpSpPr>
+      <p:grpSpPr>
+        <a:xfrm>
+          <a:off x="0" y="0"/>
+          <a:ext cx="0" cy="0"/>
+          <a:chOff x="0" y="0"/>
+          <a:chExt cx="0" cy="0"/>
+        </a:xfrm>
+      </p:grpSpPr>
+      <p:sp>
+        <p:nvSpPr>
+          <p:cNvPr id="2" name="Slide Image Placeholder 1"/>
+          <p:cNvSpPr>
+            <a:spLocks noGrp="1"/>
+          </p:cNvSpPr>
+          <p:nvPr>
+            <p:ph type="sldImg" idx="2"/>
+          </p:nvPr>
+        </p:nvSpPr>
+        <p:spPr/>
+      </p:sp>
+      <p:sp>
+        <p:nvSpPr>
+          <p:cNvPr id="3" name="Notes Placeholder 2"/>
+          <p:cNvSpPr>
+            <a:spLocks noGrp="1"/>
+          </p:cNvSpPr>
+          <p:nvPr>
+            <p:ph type="body" idx="3" sz="quarter"/>
+          </p:nvPr>
+        </p:nvSpPr>
+        <p:spPr/>
+        <p:txBody>
+          <a:bodyPr/>
+          <a:lstStyle/>
+          <a:p>
+            <a:r>
+              <a:t>V$ARCHIVE_GAP에는 자동 해소가 진행 중인 짧은 갭도 잠깐 나타날 수 있으므로, 한 번 보고 수동 조치에 들어가지 말고 시간 간격을 두고 다시 확인하게 합니다. 자동으로 메워지지 않는다면 해당 구간 로그를 직접 복사해 등록하면 MRP0가 이어서 적용합니다. 원본이 아예 없다면 18c부터 제공되는 RECOVER STANDBY DATABASE FROM SERVICE로 Standby를 증분으로 끌어올리거나 다시 만들어야 하며, 그 절차는 15장에서 다룹니다.</a:t>
+            </a:r>
+          </a:p>
+        </p:txBody>
+      </p:sp>
+      <p:sp>
+        <p:nvSpPr>
+          <p:cNvPr id="4" name="Slide Number Placeholder 3"/>
+          <p:cNvSpPr>
+            <a:spLocks noGrp="1"/>
+          </p:cNvSpPr>
+          <p:nvPr>
+            <p:ph type="sldNum" idx="5" sz="quarter"/>
+          </p:nvPr>
+        </p:nvSpPr>
+        <p:spPr/>
+      </p:sp>
+    </p:spTree>
+  </p:cSld>
+  <p:clrMapOvr>
+    <a:masterClrMapping/>
+  </p:clrMapOvr>
+</p:notes>
+</file>
+
+<file path=ppt/notesSlides/notesSlide27.xml><?xml version="1.0" encoding="utf-8"?>
+<p:notes xmlns:a="http://schemas.openxmlformats.org/drawingml/2006/main" xmlns:p="http://schemas.openxmlformats.org/presentationml/2006/main" xmlns:r="http://schemas.openxmlformats.org/officeDocument/2006/relationships">
+  <p:cSld>
+    <p:spTree>
+      <p:nvGrpSpPr>
+        <p:cNvPr id="1" name=""/>
+        <p:cNvGrpSpPr/>
+        <p:nvPr/>
+      </p:nvGrpSpPr>
+      <p:grpSpPr>
+        <a:xfrm>
+          <a:off x="0" y="0"/>
+          <a:ext cx="0" cy="0"/>
+          <a:chOff x="0" y="0"/>
+          <a:chExt cx="0" cy="0"/>
+        </a:xfrm>
+      </p:grpSpPr>
+      <p:sp>
+        <p:nvSpPr>
+          <p:cNvPr id="2" name="Slide Image Placeholder 1"/>
+          <p:cNvSpPr>
+            <a:spLocks noGrp="1"/>
+          </p:cNvSpPr>
+          <p:nvPr>
+            <p:ph type="sldImg" idx="2"/>
+          </p:nvPr>
+        </p:nvSpPr>
+        <p:spPr/>
+      </p:sp>
+      <p:sp>
+        <p:nvSpPr>
+          <p:cNvPr id="3" name="Notes Placeholder 2"/>
+          <p:cNvSpPr>
+            <a:spLocks noGrp="1"/>
+          </p:cNvSpPr>
+          <p:nvPr>
+            <p:ph type="body" idx="3" sz="quarter"/>
+          </p:nvPr>
+        </p:nvSpPr>
+        <p:spPr/>
+        <p:txBody>
+          <a:bodyPr/>
+          <a:lstStyle/>
+          <a:p>
+            <a:r>
+              <a:t>보호 모드 자체는 2장에서 배웠지만, 갭과 연결해서 보면 의미가 더 분명해집니다. Maximum Availability로 설정돼 있어도 SYNC 대상과 연결이 끊긴 동안은 데이터 손실 가능성이 있는 상태로 운영됩니다. 갭이 모두 메워져야 원래 보장 수준으로 돌아옵니다. V$DATABASE의 PROTECTION_MODE와 PROTECTION_LEVEL을 나란히 보면 이 차이를 확인할 수 있습니다. Maximum Performance에서는 Primary가 갭에 전혀 반응하지 않으므로 Standby 쪽 감시가 더 중요합니다.</a:t>
+            </a:r>
+          </a:p>
+        </p:txBody>
+      </p:sp>
+      <p:sp>
+        <p:nvSpPr>
+          <p:cNvPr id="4" name="Slide Number Placeholder 3"/>
+          <p:cNvSpPr>
+            <a:spLocks noGrp="1"/>
+          </p:cNvSpPr>
+          <p:nvPr>
+            <p:ph type="sldNum" idx="5" sz="quarter"/>
+          </p:nvPr>
+        </p:nvSpPr>
+        <p:spPr/>
+      </p:sp>
+    </p:spTree>
+  </p:cSld>
+  <p:clrMapOvr>
+    <a:masterClrMapping/>
+  </p:clrMapOvr>
+</p:notes>
+</file>
+
+<file path=ppt/notesSlides/notesSlide28.xml><?xml version="1.0" encoding="utf-8"?>
+<p:notes xmlns:a="http://schemas.openxmlformats.org/drawingml/2006/main" xmlns:p="http://schemas.openxmlformats.org/presentationml/2006/main" xmlns:r="http://schemas.openxmlformats.org/officeDocument/2006/relationships">
+  <p:cSld>
+    <p:spTree>
+      <p:nvGrpSpPr>
+        <p:cNvPr id="1" name=""/>
+        <p:cNvGrpSpPr/>
+        <p:nvPr/>
+      </p:nvGrpSpPr>
+      <p:grpSpPr>
+        <a:xfrm>
+          <a:off x="0" y="0"/>
+          <a:ext cx="0" cy="0"/>
+          <a:chOff x="0" y="0"/>
+          <a:chExt cx="0" cy="0"/>
+        </a:xfrm>
+      </p:grpSpPr>
+      <p:sp>
+        <p:nvSpPr>
+          <p:cNvPr id="2" name="Slide Image Placeholder 1"/>
+          <p:cNvSpPr>
+            <a:spLocks noGrp="1"/>
+          </p:cNvSpPr>
+          <p:nvPr>
+            <p:ph type="sldImg" idx="2"/>
+          </p:nvPr>
+        </p:nvSpPr>
+        <p:spPr/>
+      </p:sp>
+      <p:sp>
+        <p:nvSpPr>
+          <p:cNvPr id="3" name="Notes Placeholder 2"/>
+          <p:cNvSpPr>
+            <a:spLocks noGrp="1"/>
+          </p:cNvSpPr>
+          <p:nvPr>
+            <p:ph type="body" idx="3" sz="quarter"/>
+          </p:nvPr>
+        </p:nvSpPr>
+        <p:spPr/>
+        <p:txBody>
+          <a:bodyPr/>
+          <a:lstStyle/>
+          <a:p>
+            <a:r>
+              <a:t>자동으로 해소할 수 없는 갭은 대부분 운영 쪽에서 아카이브 로그를 너무 일찍 지워서 생깁니다. 백업이 끝나면 아카이브 로그를 지우는 스크립트가 Standby 적용 여부를 고려하지 않는 경우가 대표적입니다. RMAN 삭제 정책을 APPLIED ON ALL STANDBY로 두면 Standby가 적용하지 않은 로그는 FRA 자동 정리 대상에서 빠지고, RMAN DELETE도 경고와 함께 건너뜁니다. 역할 전환을 대비해 Primary와 Standby에 같은 정책을 둡니다.</a:t>
+            </a:r>
+          </a:p>
+        </p:txBody>
+      </p:sp>
+      <p:sp>
+        <p:nvSpPr>
+          <p:cNvPr id="4" name="Slide Number Placeholder 3"/>
+          <p:cNvSpPr>
+            <a:spLocks noGrp="1"/>
+          </p:cNvSpPr>
+          <p:nvPr>
+            <p:ph type="sldNum" idx="5" sz="quarter"/>
+          </p:nvPr>
+        </p:nvSpPr>
+        <p:spPr/>
+      </p:sp>
+    </p:spTree>
+  </p:cSld>
+  <p:clrMapOvr>
+    <a:masterClrMapping/>
+  </p:clrMapOvr>
+</p:notes>
+</file>
+
+<file path=ppt/notesSlides/notesSlide29.xml><?xml version="1.0" encoding="utf-8"?>
+<p:notes xmlns:a="http://schemas.openxmlformats.org/drawingml/2006/main" xmlns:p="http://schemas.openxmlformats.org/presentationml/2006/main" xmlns:r="http://schemas.openxmlformats.org/officeDocument/2006/relationships">
+  <p:cSld>
+    <p:spTree>
+      <p:nvGrpSpPr>
+        <p:cNvPr id="1" name=""/>
+        <p:cNvGrpSpPr/>
+        <p:nvPr/>
+      </p:nvGrpSpPr>
+      <p:grpSpPr>
+        <a:xfrm>
+          <a:off x="0" y="0"/>
+          <a:ext cx="0" cy="0"/>
+          <a:chOff x="0" y="0"/>
+          <a:chExt cx="0" cy="0"/>
+        </a:xfrm>
+      </p:grpSpPr>
+      <p:sp>
+        <p:nvSpPr>
+          <p:cNvPr id="2" name="Slide Image Placeholder 1"/>
+          <p:cNvSpPr>
+            <a:spLocks noGrp="1"/>
+          </p:cNvSpPr>
+          <p:nvPr>
+            <p:ph type="sldImg" idx="2"/>
+          </p:nvPr>
+        </p:nvSpPr>
+        <p:spPr/>
+      </p:sp>
+      <p:sp>
+        <p:nvSpPr>
+          <p:cNvPr id="3" name="Notes Placeholder 2"/>
+          <p:cNvSpPr>
+            <a:spLocks noGrp="1"/>
+          </p:cNvSpPr>
+          <p:nvPr>
+            <p:ph type="body" idx="3" sz="quarter"/>
+          </p:nvPr>
+        </p:nvSpPr>
+        <p:spPr/>
+        <p:txBody>
+          <a:bodyPr/>
+          <a:lstStyle/>
+          <a:p>
+            <a:r>
+              <a:t>Data Guard는 장애로부터 데이터를 지키는 기술이지 사람의 실수로부터 지키는 기술은 아닙니다. 잘못된 DELETE도 정상적인 변경이므로 그대로 Standby에 옮겨집니다. 지연 적용은 이 약점을 보완하기 위해 적용 시점만 일부러 늦춰 시간 여유를 만드는 방법입니다. 여기서 강조할 점은 리두 전송은 평소처럼 즉시 이루어진다는 것입니다. 리두는 Standby에 도착해 보관되므로 Primary가 사라져도 데이터 손실은 생기지 않고, 적용만 뒤로 밀려 있을 뿐입니다.</a:t>
             </a:r>
           </a:p>
         </p:txBody>
@@ -1727,7 +2095,707 @@
           <a:lstStyle/>
           <a:p>
             <a:r>
-              <a:t>이 비교가 유용한 이유는 Active Data Guard가 아니어도 쓸 수 있다는 점입니다. MOUNTED 상태에서는 Standby를 조회할 수 없으므로 기능 시험이 불가능한데, V$MANAGED_STANDBY는 볼 수 있습니다. 아카이브 적용이라면 두 값이 달라야 합니다. RFS가 받고 있는 로그는 아직 아카이브되지 않았으므로 적용 대상이 아니고, MRP0의 시퀀스가 최소 하나 이상 뒤처져 있어야 하니까요. 다만 로그 전환 직후에는 잠깐 어긋나 보일 수 있어 두 번 확인하는 편이 안전합니다.</a:t>
+              <a:t>RFS를 보고 적용이 돈다고 착각하는 경우가 많습니다. RFS는 받는 쪽일 뿐이고, 적용은 MRP0가 지휘하고 PR로 시작하는 복구 슬레이브가 실제 블록 작업을 나눠 맡습니다. 슬레이브 수는 Standby 서버의 CPU 수를 보고 자동으로 정해지며, 기동 명령에 PARALLEL 절을 붙여 바꿀 수 있지만 대부분은 기본값으로 충분합니다. RFS 개수는 전송 방식과 갭 해소 연결에 따라 수시로 바뀌므로 개수 자체에는 큰 의미가 없습니다.</a:t>
+            </a:r>
+          </a:p>
+        </p:txBody>
+      </p:sp>
+      <p:sp>
+        <p:nvSpPr>
+          <p:cNvPr id="4" name="Slide Number Placeholder 3"/>
+          <p:cNvSpPr>
+            <a:spLocks noGrp="1"/>
+          </p:cNvSpPr>
+          <p:nvPr>
+            <p:ph type="sldNum" idx="5" sz="quarter"/>
+          </p:nvPr>
+        </p:nvSpPr>
+        <p:spPr/>
+      </p:sp>
+    </p:spTree>
+  </p:cSld>
+  <p:clrMapOvr>
+    <a:masterClrMapping/>
+  </p:clrMapOvr>
+</p:notes>
+</file>
+
+<file path=ppt/notesSlides/notesSlide30.xml><?xml version="1.0" encoding="utf-8"?>
+<p:notes xmlns:a="http://schemas.openxmlformats.org/drawingml/2006/main" xmlns:p="http://schemas.openxmlformats.org/presentationml/2006/main" xmlns:r="http://schemas.openxmlformats.org/officeDocument/2006/relationships">
+  <p:cSld>
+    <p:spTree>
+      <p:nvGrpSpPr>
+        <p:cNvPr id="1" name=""/>
+        <p:cNvGrpSpPr/>
+        <p:nvPr/>
+      </p:nvGrpSpPr>
+      <p:grpSpPr>
+        <a:xfrm>
+          <a:off x="0" y="0"/>
+          <a:ext cx="0" cy="0"/>
+          <a:chOff x="0" y="0"/>
+          <a:chExt cx="0" cy="0"/>
+        </a:xfrm>
+      </p:grpSpPr>
+      <p:sp>
+        <p:nvSpPr>
+          <p:cNvPr id="2" name="Slide Image Placeholder 1"/>
+          <p:cNvSpPr>
+            <a:spLocks noGrp="1"/>
+          </p:cNvSpPr>
+          <p:nvPr>
+            <p:ph type="sldImg" idx="2"/>
+          </p:nvPr>
+        </p:nvSpPr>
+        <p:spPr/>
+      </p:sp>
+      <p:sp>
+        <p:nvSpPr>
+          <p:cNvPr id="3" name="Notes Placeholder 2"/>
+          <p:cNvSpPr>
+            <a:spLocks noGrp="1"/>
+          </p:cNvSpPr>
+          <p:nvPr>
+            <p:ph type="body" idx="3" sz="quarter"/>
+          </p:nvPr>
+        </p:nvSpPr>
+        <p:spPr/>
+        <p:txBody>
+          <a:bodyPr/>
+          <a:lstStyle/>
+          <a:p>
+            <a:r>
+              <a:t>지연은 Standby에서 거는 설정이라고 생각하기 쉬운데, 실제로는 Primary 쪽 LOG_ARCHIVE_DEST_n의 속성입니다. 목적지마다 따로 걸 수 있어서 Standby 둘 중 하나에만 지연을 거는 구성이 가능합니다. 지연 시간은 리두가 Standby에 도착해 아카이브된 순간부터 셉니다. 값을 생략하면 30분이 되지만, 운영 문서와 맞추기 위해 항상 명시하는 편이 좋습니다. Broker로 관리한다면 Standby 데이터베이스의 DelayMins 속성으로 같은 내용을 다룹니다.</a:t>
+            </a:r>
+          </a:p>
+        </p:txBody>
+      </p:sp>
+      <p:sp>
+        <p:nvSpPr>
+          <p:cNvPr id="4" name="Slide Number Placeholder 3"/>
+          <p:cNvSpPr>
+            <a:spLocks noGrp="1"/>
+          </p:cNvSpPr>
+          <p:nvPr>
+            <p:ph type="sldNum" idx="5" sz="quarter"/>
+          </p:nvPr>
+        </p:nvSpPr>
+        <p:spPr/>
+      </p:sp>
+    </p:spTree>
+  </p:cSld>
+  <p:clrMapOvr>
+    <a:masterClrMapping/>
+  </p:clrMapOvr>
+</p:notes>
+</file>
+
+<file path=ppt/notesSlides/notesSlide31.xml><?xml version="1.0" encoding="utf-8"?>
+<p:notes xmlns:a="http://schemas.openxmlformats.org/drawingml/2006/main" xmlns:p="http://schemas.openxmlformats.org/presentationml/2006/main" xmlns:r="http://schemas.openxmlformats.org/officeDocument/2006/relationships">
+  <p:cSld>
+    <p:spTree>
+      <p:nvGrpSpPr>
+        <p:cNvPr id="1" name=""/>
+        <p:cNvGrpSpPr/>
+        <p:nvPr/>
+      </p:nvGrpSpPr>
+      <p:grpSpPr>
+        <a:xfrm>
+          <a:off x="0" y="0"/>
+          <a:ext cx="0" cy="0"/>
+          <a:chOff x="0" y="0"/>
+          <a:chExt cx="0" cy="0"/>
+        </a:xfrm>
+      </p:grpSpPr>
+      <p:sp>
+        <p:nvSpPr>
+          <p:cNvPr id="2" name="Slide Image Placeholder 1"/>
+          <p:cNvSpPr>
+            <a:spLocks noGrp="1"/>
+          </p:cNvSpPr>
+          <p:nvPr>
+            <p:ph type="sldImg" idx="2"/>
+          </p:nvPr>
+        </p:nvSpPr>
+        <p:spPr/>
+      </p:sp>
+      <p:sp>
+        <p:nvSpPr>
+          <p:cNvPr id="3" name="Notes Placeholder 2"/>
+          <p:cNvSpPr>
+            <a:spLocks noGrp="1"/>
+          </p:cNvSpPr>
+          <p:nvPr>
+            <p:ph type="body" idx="3" sz="quarter"/>
+          </p:nvPr>
+        </p:nvSpPr>
+        <p:spPr/>
+        <p:txBody>
+          <a:bodyPr/>
+          <a:lstStyle/>
+          <a:p>
+            <a:r>
+              <a:t>실시간 적용은 도착한 리두를 즉시 반영하는 방식이고, 지연 적용은 아카이브된 로그를 일정 시간 묵혔다가 반영하는 방식이라 서로 반대입니다. 공식 교재와 19c 문서는 실시간 적용 중인 목적지에 걸린 DELAY는 무시된다고 설명합니다. 지연을 확실히 걸려면 USING ARCHIVED LOGFILE로 기동하고, RECOVERY_MODE가 MANAGED로 나오는지 눈으로 확인하는 절차를 넣습니다. 긴급하게 따라잡아야 할 때 쓰는 NODELAY는 파라미터를 건드리지 않고 이번 기동에만 효과가 있습니다.</a:t>
+            </a:r>
+          </a:p>
+        </p:txBody>
+      </p:sp>
+      <p:sp>
+        <p:nvSpPr>
+          <p:cNvPr id="4" name="Slide Number Placeholder 3"/>
+          <p:cNvSpPr>
+            <a:spLocks noGrp="1"/>
+          </p:cNvSpPr>
+          <p:nvPr>
+            <p:ph type="sldNum" idx="5" sz="quarter"/>
+          </p:nvPr>
+        </p:nvSpPr>
+        <p:spPr/>
+      </p:sp>
+    </p:spTree>
+  </p:cSld>
+  <p:clrMapOvr>
+    <a:masterClrMapping/>
+  </p:clrMapOvr>
+</p:notes>
+</file>
+
+<file path=ppt/notesSlides/notesSlide32.xml><?xml version="1.0" encoding="utf-8"?>
+<p:notes xmlns:a="http://schemas.openxmlformats.org/drawingml/2006/main" xmlns:p="http://schemas.openxmlformats.org/presentationml/2006/main" xmlns:r="http://schemas.openxmlformats.org/officeDocument/2006/relationships">
+  <p:cSld>
+    <p:spTree>
+      <p:nvGrpSpPr>
+        <p:cNvPr id="1" name=""/>
+        <p:cNvGrpSpPr/>
+        <p:nvPr/>
+      </p:nvGrpSpPr>
+      <p:grpSpPr>
+        <a:xfrm>
+          <a:off x="0" y="0"/>
+          <a:ext cx="0" cy="0"/>
+          <a:chOff x="0" y="0"/>
+          <a:chExt cx="0" cy="0"/>
+        </a:xfrm>
+      </p:grpSpPr>
+      <p:sp>
+        <p:nvSpPr>
+          <p:cNvPr id="2" name="Slide Image Placeholder 1"/>
+          <p:cNvSpPr>
+            <a:spLocks noGrp="1"/>
+          </p:cNvSpPr>
+          <p:nvPr>
+            <p:ph type="sldImg" idx="2"/>
+          </p:nvPr>
+        </p:nvSpPr>
+        <p:spPr/>
+      </p:sp>
+      <p:sp>
+        <p:nvSpPr>
+          <p:cNvPr id="3" name="Notes Placeholder 2"/>
+          <p:cNvSpPr>
+            <a:spLocks noGrp="1"/>
+          </p:cNvSpPr>
+          <p:nvPr>
+            <p:ph type="body" idx="3" sz="quarter"/>
+          </p:nvPr>
+        </p:nvSpPr>
+        <p:spPr/>
+        <p:txBody>
+          <a:bodyPr/>
+          <a:lstStyle/>
+          <a:p>
+            <a:r>
+              <a:t>지연 Standby를 Failover 대상으로 쓰면 지연 구간의 리두를 모두 적용한 뒤에야 Primary가 될 수 있으므로 전환 시간이 그만큼 길어집니다. 이 때문에 실시간으로 따라가는 Standby를 역할 전환용으로 두고, 지연 Standby를 별도로 두는 구성이 일반적입니다. Flashback Database를 켠 Standby는 지연 없이도 과거 시점으로 되돌려 데이터를 꺼낼 수 있어 더 유연합니다. 실제로는 둘을 함께 쓰는 경우도 많습니다.</a:t>
+            </a:r>
+          </a:p>
+        </p:txBody>
+      </p:sp>
+      <p:sp>
+        <p:nvSpPr>
+          <p:cNvPr id="4" name="Slide Number Placeholder 3"/>
+          <p:cNvSpPr>
+            <a:spLocks noGrp="1"/>
+          </p:cNvSpPr>
+          <p:nvPr>
+            <p:ph type="sldNum" idx="5" sz="quarter"/>
+          </p:nvPr>
+        </p:nvSpPr>
+        <p:spPr/>
+      </p:sp>
+    </p:spTree>
+  </p:cSld>
+  <p:clrMapOvr>
+    <a:masterClrMapping/>
+  </p:clrMapOvr>
+</p:notes>
+</file>
+
+<file path=ppt/notesSlides/notesSlide33.xml><?xml version="1.0" encoding="utf-8"?>
+<p:notes xmlns:a="http://schemas.openxmlformats.org/drawingml/2006/main" xmlns:p="http://schemas.openxmlformats.org/presentationml/2006/main" xmlns:r="http://schemas.openxmlformats.org/officeDocument/2006/relationships">
+  <p:cSld>
+    <p:spTree>
+      <p:nvGrpSpPr>
+        <p:cNvPr id="1" name=""/>
+        <p:cNvGrpSpPr/>
+        <p:nvPr/>
+      </p:nvGrpSpPr>
+      <p:grpSpPr>
+        <a:xfrm>
+          <a:off x="0" y="0"/>
+          <a:ext cx="0" cy="0"/>
+          <a:chOff x="0" y="0"/>
+          <a:chExt cx="0" cy="0"/>
+        </a:xfrm>
+      </p:grpSpPr>
+      <p:sp>
+        <p:nvSpPr>
+          <p:cNvPr id="2" name="Slide Image Placeholder 1"/>
+          <p:cNvSpPr>
+            <a:spLocks noGrp="1"/>
+          </p:cNvSpPr>
+          <p:nvPr>
+            <p:ph type="sldImg" idx="2"/>
+          </p:nvPr>
+        </p:nvSpPr>
+        <p:spPr/>
+      </p:sp>
+      <p:sp>
+        <p:nvSpPr>
+          <p:cNvPr id="3" name="Notes Placeholder 2"/>
+          <p:cNvSpPr>
+            <a:spLocks noGrp="1"/>
+          </p:cNvSpPr>
+          <p:nvPr>
+            <p:ph type="body" idx="3" sz="quarter"/>
+          </p:nvPr>
+        </p:nvSpPr>
+        <p:spPr/>
+        <p:txBody>
+          <a:bodyPr/>
+          <a:lstStyle/>
+          <a:p>
+            <a:r>
+              <a:t>이 사례에서 가장 먼저 해야 할 일은 지연 Standby의 적용을 멈추는 것입니다. 그대로 두면 지연 시간이 지나 같은 DELETE가 적용되어 버립니다. 적용을 멈춘 뒤 READ ONLY로 여는 것은 Data Guard 기본 기능이라 Active Data Guard 라이선스가 필요 없습니다. 데이터는 Database Link나 Data Pump로 Primary에 되살립니다. 마지막으로 적용을 다시 켤 때 USING ARCHIVED LOGFILE을 빠뜨리면 지연이 걸리지 않을 수 있으니 RECOVERY_MODE를 확인하는 단계까지 포함시킵니다.</a:t>
+            </a:r>
+          </a:p>
+        </p:txBody>
+      </p:sp>
+      <p:sp>
+        <p:nvSpPr>
+          <p:cNvPr id="4" name="Slide Number Placeholder 3"/>
+          <p:cNvSpPr>
+            <a:spLocks noGrp="1"/>
+          </p:cNvSpPr>
+          <p:nvPr>
+            <p:ph type="sldNum" idx="5" sz="quarter"/>
+          </p:nvPr>
+        </p:nvSpPr>
+        <p:spPr/>
+      </p:sp>
+    </p:spTree>
+  </p:cSld>
+  <p:clrMapOvr>
+    <a:masterClrMapping/>
+  </p:clrMapOvr>
+</p:notes>
+</file>
+
+<file path=ppt/notesSlides/notesSlide34.xml><?xml version="1.0" encoding="utf-8"?>
+<p:notes xmlns:a="http://schemas.openxmlformats.org/drawingml/2006/main" xmlns:p="http://schemas.openxmlformats.org/presentationml/2006/main" xmlns:r="http://schemas.openxmlformats.org/officeDocument/2006/relationships">
+  <p:cSld>
+    <p:spTree>
+      <p:nvGrpSpPr>
+        <p:cNvPr id="1" name=""/>
+        <p:cNvGrpSpPr/>
+        <p:nvPr/>
+      </p:nvGrpSpPr>
+      <p:grpSpPr>
+        <a:xfrm>
+          <a:off x="0" y="0"/>
+          <a:ext cx="0" cy="0"/>
+          <a:chOff x="0" y="0"/>
+          <a:chExt cx="0" cy="0"/>
+        </a:xfrm>
+      </p:grpSpPr>
+      <p:sp>
+        <p:nvSpPr>
+          <p:cNvPr id="2" name="Slide Image Placeholder 1"/>
+          <p:cNvSpPr>
+            <a:spLocks noGrp="1"/>
+          </p:cNvSpPr>
+          <p:nvPr>
+            <p:ph type="sldImg" idx="2"/>
+          </p:nvPr>
+        </p:nvSpPr>
+        <p:spPr/>
+      </p:sp>
+      <p:sp>
+        <p:nvSpPr>
+          <p:cNvPr id="3" name="Notes Placeholder 2"/>
+          <p:cNvSpPr>
+            <a:spLocks noGrp="1"/>
+          </p:cNvSpPr>
+          <p:nvPr>
+            <p:ph type="body" idx="3" sz="quarter"/>
+          </p:nvPr>
+        </p:nvSpPr>
+        <p:spPr/>
+        <p:txBody>
+          <a:bodyPr/>
+          <a:lstStyle/>
+          <a:p>
+            <a:r>
+              <a:t>transport lag는 지금 Primary가 사라지면 얼마만큼을 잃는가라는 질문에, apply lag는 Standby 데이터가 얼마나 과거인가라는 질문에 답합니다. 도착하지 않은 리두는 적용할 수도 없으므로 apply lag는 transport lag보다 작아질 수 없습니다. 나머지 두 행은 장애 시 복구 시간을 가늠하는 지표로, 둘을 더하면 Failover에 걸리는 시간의 대략적인 하한을 얻습니다. 이 뷰는 Standby에서 조회해야 의미가 있고, 상세 진단 활용은 15장에서 이어집니다.</a:t>
+            </a:r>
+          </a:p>
+        </p:txBody>
+      </p:sp>
+      <p:sp>
+        <p:nvSpPr>
+          <p:cNvPr id="4" name="Slide Number Placeholder 3"/>
+          <p:cNvSpPr>
+            <a:spLocks noGrp="1"/>
+          </p:cNvSpPr>
+          <p:nvPr>
+            <p:ph type="sldNum" idx="5" sz="quarter"/>
+          </p:nvPr>
+        </p:nvSpPr>
+        <p:spPr/>
+      </p:sp>
+    </p:spTree>
+  </p:cSld>
+  <p:clrMapOvr>
+    <a:masterClrMapping/>
+  </p:clrMapOvr>
+</p:notes>
+</file>
+
+<file path=ppt/notesSlides/notesSlide35.xml><?xml version="1.0" encoding="utf-8"?>
+<p:notes xmlns:a="http://schemas.openxmlformats.org/drawingml/2006/main" xmlns:p="http://schemas.openxmlformats.org/presentationml/2006/main" xmlns:r="http://schemas.openxmlformats.org/officeDocument/2006/relationships">
+  <p:cSld>
+    <p:spTree>
+      <p:nvGrpSpPr>
+        <p:cNvPr id="1" name=""/>
+        <p:cNvGrpSpPr/>
+        <p:nvPr/>
+      </p:nvGrpSpPr>
+      <p:grpSpPr>
+        <a:xfrm>
+          <a:off x="0" y="0"/>
+          <a:ext cx="0" cy="0"/>
+          <a:chOff x="0" y="0"/>
+          <a:chExt cx="0" cy="0"/>
+        </a:xfrm>
+      </p:grpSpPr>
+      <p:sp>
+        <p:nvSpPr>
+          <p:cNvPr id="2" name="Slide Image Placeholder 1"/>
+          <p:cNvSpPr>
+            <a:spLocks noGrp="1"/>
+          </p:cNvSpPr>
+          <p:nvPr>
+            <p:ph type="sldImg" idx="2"/>
+          </p:nvPr>
+        </p:nvSpPr>
+        <p:spPr/>
+      </p:sp>
+      <p:sp>
+        <p:nvSpPr>
+          <p:cNvPr id="3" name="Notes Placeholder 2"/>
+          <p:cNvSpPr>
+            <a:spLocks noGrp="1"/>
+          </p:cNvSpPr>
+          <p:nvPr>
+            <p:ph type="body" idx="3" sz="quarter"/>
+          </p:nvPr>
+        </p:nvSpPr>
+        <p:spPr/>
+        <p:txBody>
+          <a:bodyPr/>
+          <a:lstStyle/>
+          <a:p>
+            <a:r>
+              <a:t>lag 지표는 Primary가 주기적으로 보내 주는 정보로 계산됩니다. 따라서 Primary와의 연결이 끊기면 새 정보가 들어오지 않아 마지막으로 계산된 값, 흔히 0초에 가까운 값에 그대로 머뭅니다. 화면만 보면 완벽하게 동기화된 것처럼 보이는 셈입니다. 공식 교재는 DATUM_TIME과 TIME_COMPUTED의 차이가 30초를 넘으면 지표가 정확하지 않을 수 있다고 명시합니다. lag 값을 볼 때는 항상 DATUM_TIME이 현재 시각에 가까운지를 함께 보는 습관이 필요합니다.</a:t>
+            </a:r>
+          </a:p>
+        </p:txBody>
+      </p:sp>
+      <p:sp>
+        <p:nvSpPr>
+          <p:cNvPr id="4" name="Slide Number Placeholder 3"/>
+          <p:cNvSpPr>
+            <a:spLocks noGrp="1"/>
+          </p:cNvSpPr>
+          <p:nvPr>
+            <p:ph type="sldNum" idx="5" sz="quarter"/>
+          </p:nvPr>
+        </p:nvSpPr>
+        <p:spPr/>
+      </p:sp>
+    </p:spTree>
+  </p:cSld>
+  <p:clrMapOvr>
+    <a:masterClrMapping/>
+  </p:clrMapOvr>
+</p:notes>
+</file>
+
+<file path=ppt/notesSlides/notesSlide36.xml><?xml version="1.0" encoding="utf-8"?>
+<p:notes xmlns:a="http://schemas.openxmlformats.org/drawingml/2006/main" xmlns:p="http://schemas.openxmlformats.org/presentationml/2006/main" xmlns:r="http://schemas.openxmlformats.org/officeDocument/2006/relationships">
+  <p:cSld>
+    <p:spTree>
+      <p:nvGrpSpPr>
+        <p:cNvPr id="1" name=""/>
+        <p:cNvGrpSpPr/>
+        <p:nvPr/>
+      </p:nvGrpSpPr>
+      <p:grpSpPr>
+        <a:xfrm>
+          <a:off x="0" y="0"/>
+          <a:ext cx="0" cy="0"/>
+          <a:chOff x="0" y="0"/>
+          <a:chExt cx="0" cy="0"/>
+        </a:xfrm>
+      </p:grpSpPr>
+      <p:sp>
+        <p:nvSpPr>
+          <p:cNvPr id="2" name="Slide Image Placeholder 1"/>
+          <p:cNvSpPr>
+            <a:spLocks noGrp="1"/>
+          </p:cNvSpPr>
+          <p:nvPr>
+            <p:ph type="sldImg" idx="2"/>
+          </p:nvPr>
+        </p:nvSpPr>
+        <p:spPr/>
+      </p:sp>
+      <p:sp>
+        <p:nvSpPr>
+          <p:cNvPr id="3" name="Notes Placeholder 2"/>
+          <p:cNvSpPr>
+            <a:spLocks noGrp="1"/>
+          </p:cNvSpPr>
+          <p:nvPr>
+            <p:ph type="body" idx="3" sz="quarter"/>
+          </p:nvPr>
+        </p:nvSpPr>
+        <p:spPr/>
+        <p:txBody>
+          <a:bodyPr/>
+          <a:lstStyle/>
+          <a:p>
+            <a:r>
+              <a:t>두 지표를 함께 보면 문제 구간이 좁혀집니다. transport lag가 크다면 네트워크나 전송 설정을 먼저 봅니다. transport lag는 작은데 apply lag만 크다면 리두는 도착했으니 Standby 쪽을 봅니다. 여기서 MRP0의 ACTION을 함께 보면 한 단계 더 나눌 수 있습니다. MRP0가 기다리고 있다면 실시간 적용이 꺼졌거나 지연이 걸린 공급 문제이고, 계속 적용 중인데도 lag가 줄지 않으면 I/O나 CPU 같은 처리량 문제입니다. 순간적으로 튀는 값보다 추세가 더 많은 것을 알려 줍니다.</a:t>
+            </a:r>
+          </a:p>
+        </p:txBody>
+      </p:sp>
+      <p:sp>
+        <p:nvSpPr>
+          <p:cNvPr id="4" name="Slide Number Placeholder 3"/>
+          <p:cNvSpPr>
+            <a:spLocks noGrp="1"/>
+          </p:cNvSpPr>
+          <p:nvPr>
+            <p:ph type="sldNum" idx="5" sz="quarter"/>
+          </p:nvPr>
+        </p:nvSpPr>
+        <p:spPr/>
+      </p:sp>
+    </p:spTree>
+  </p:cSld>
+  <p:clrMapOvr>
+    <a:masterClrMapping/>
+  </p:clrMapOvr>
+</p:notes>
+</file>
+
+<file path=ppt/notesSlides/notesSlide37.xml><?xml version="1.0" encoding="utf-8"?>
+<p:notes xmlns:a="http://schemas.openxmlformats.org/drawingml/2006/main" xmlns:p="http://schemas.openxmlformats.org/presentationml/2006/main" xmlns:r="http://schemas.openxmlformats.org/officeDocument/2006/relationships">
+  <p:cSld>
+    <p:spTree>
+      <p:nvGrpSpPr>
+        <p:cNvPr id="1" name=""/>
+        <p:cNvGrpSpPr/>
+        <p:nvPr/>
+      </p:nvGrpSpPr>
+      <p:grpSpPr>
+        <a:xfrm>
+          <a:off x="0" y="0"/>
+          <a:ext cx="0" cy="0"/>
+          <a:chOff x="0" y="0"/>
+          <a:chExt cx="0" cy="0"/>
+        </a:xfrm>
+      </p:grpSpPr>
+      <p:sp>
+        <p:nvSpPr>
+          <p:cNvPr id="2" name="Slide Image Placeholder 1"/>
+          <p:cNvSpPr>
+            <a:spLocks noGrp="1"/>
+          </p:cNvSpPr>
+          <p:nvPr>
+            <p:ph type="sldImg" idx="2"/>
+          </p:nvPr>
+        </p:nvSpPr>
+        <p:spPr/>
+      </p:sp>
+      <p:sp>
+        <p:nvSpPr>
+          <p:cNvPr id="3" name="Notes Placeholder 2"/>
+          <p:cNvSpPr>
+            <a:spLocks noGrp="1"/>
+          </p:cNvSpPr>
+          <p:nvPr>
+            <p:ph type="body" idx="3" sz="quarter"/>
+          </p:nvPr>
+        </p:nvSpPr>
+        <p:spPr/>
+        <p:txBody>
+          <a:bodyPr/>
+          <a:lstStyle/>
+          <a:p>
+            <a:r>
+              <a:t>순번 비교는 가장 원시적이지만 어떤 환경에서든 쓸 수 있는 방법입니다. 다만 로그 몇 개 차이인지만 알려 줄 뿐 몇 초 차이인지는 알려 주지 않습니다. 로그 크기나 업무량이 달라지면 같은 순번 차이도 전혀 다른 의미가 됩니다. Broker 구성이라면 SHOW DATABASE 출력에 같은 지표가 나오고, 임계값 속성을 걸어 두면 넘었을 때 경고 상태가 됩니다. 조회 세션마다 허용 지연을 거는 STANDBY_MAX_DATA_DELAY는 실시간 조회 기능의 일부라 9장에서 다룹니다.</a:t>
+            </a:r>
+          </a:p>
+        </p:txBody>
+      </p:sp>
+      <p:sp>
+        <p:nvSpPr>
+          <p:cNvPr id="4" name="Slide Number Placeholder 3"/>
+          <p:cNvSpPr>
+            <a:spLocks noGrp="1"/>
+          </p:cNvSpPr>
+          <p:nvPr>
+            <p:ph type="sldNum" idx="5" sz="quarter"/>
+          </p:nvPr>
+        </p:nvSpPr>
+        <p:spPr/>
+      </p:sp>
+    </p:spTree>
+  </p:cSld>
+  <p:clrMapOvr>
+    <a:masterClrMapping/>
+  </p:clrMapOvr>
+</p:notes>
+</file>
+
+<file path=ppt/notesSlides/notesSlide38.xml><?xml version="1.0" encoding="utf-8"?>
+<p:notes xmlns:a="http://schemas.openxmlformats.org/drawingml/2006/main" xmlns:p="http://schemas.openxmlformats.org/presentationml/2006/main" xmlns:r="http://schemas.openxmlformats.org/officeDocument/2006/relationships">
+  <p:cSld>
+    <p:spTree>
+      <p:nvGrpSpPr>
+        <p:cNvPr id="1" name=""/>
+        <p:cNvGrpSpPr/>
+        <p:nvPr/>
+      </p:nvGrpSpPr>
+      <p:grpSpPr>
+        <a:xfrm>
+          <a:off x="0" y="0"/>
+          <a:ext cx="0" cy="0"/>
+          <a:chOff x="0" y="0"/>
+          <a:chExt cx="0" cy="0"/>
+        </a:xfrm>
+      </p:grpSpPr>
+      <p:sp>
+        <p:nvSpPr>
+          <p:cNvPr id="2" name="Slide Image Placeholder 1"/>
+          <p:cNvSpPr>
+            <a:spLocks noGrp="1"/>
+          </p:cNvSpPr>
+          <p:nvPr>
+            <p:ph type="sldImg" idx="2"/>
+          </p:nvPr>
+        </p:nvSpPr>
+        <p:spPr/>
+      </p:sp>
+      <p:sp>
+        <p:nvSpPr>
+          <p:cNvPr id="3" name="Notes Placeholder 2"/>
+          <p:cNvSpPr>
+            <a:spLocks noGrp="1"/>
+          </p:cNvSpPr>
+          <p:nvPr>
+            <p:ph type="body" idx="3" sz="quarter"/>
+          </p:nvPr>
+        </p:nvSpPr>
+        <p:spPr/>
+        <p:txBody>
+          <a:bodyPr/>
+          <a:lstStyle/>
+          <a:p>
+            <a:r>
+              <a:t>이 다섯 단계는 순서가 중요합니다. 역할이나 열린 모드가 의도와 다르면 그 뒤의 값은 해석할 근거가 없습니다. 프로세스가 없으면 모드를 볼 이유가 없고, 갭이 있으면 lag 값이 커지는 것은 당연합니다. 위에서부터 차례로 확인하고 처음 이상이 나타난 단계에서 멈춰 원인을 찾는 방식으로 쓰게 하십시오. 실습 6에서 이 순서를 하나의 통합 점검 조회로 묶어 보는데, 그 조회가 이 다섯 단계를 그대로 옮긴 것입니다.</a:t>
+            </a:r>
+          </a:p>
+        </p:txBody>
+      </p:sp>
+      <p:sp>
+        <p:nvSpPr>
+          <p:cNvPr id="4" name="Slide Number Placeholder 3"/>
+          <p:cNvSpPr>
+            <a:spLocks noGrp="1"/>
+          </p:cNvSpPr>
+          <p:nvPr>
+            <p:ph type="sldNum" idx="5" sz="quarter"/>
+          </p:nvPr>
+        </p:nvSpPr>
+        <p:spPr/>
+      </p:sp>
+    </p:spTree>
+  </p:cSld>
+  <p:clrMapOvr>
+    <a:masterClrMapping/>
+  </p:clrMapOvr>
+</p:notes>
+</file>
+
+<file path=ppt/notesSlides/notesSlide39.xml><?xml version="1.0" encoding="utf-8"?>
+<p:notes xmlns:a="http://schemas.openxmlformats.org/drawingml/2006/main" xmlns:p="http://schemas.openxmlformats.org/presentationml/2006/main" xmlns:r="http://schemas.openxmlformats.org/officeDocument/2006/relationships">
+  <p:cSld>
+    <p:spTree>
+      <p:nvGrpSpPr>
+        <p:cNvPr id="1" name=""/>
+        <p:cNvGrpSpPr/>
+        <p:nvPr/>
+      </p:nvGrpSpPr>
+      <p:grpSpPr>
+        <a:xfrm>
+          <a:off x="0" y="0"/>
+          <a:ext cx="0" cy="0"/>
+          <a:chOff x="0" y="0"/>
+          <a:chExt cx="0" cy="0"/>
+        </a:xfrm>
+      </p:grpSpPr>
+      <p:sp>
+        <p:nvSpPr>
+          <p:cNvPr id="2" name="Slide Image Placeholder 1"/>
+          <p:cNvSpPr>
+            <a:spLocks noGrp="1"/>
+          </p:cNvSpPr>
+          <p:nvPr>
+            <p:ph type="sldImg" idx="2"/>
+          </p:nvPr>
+        </p:nvSpPr>
+        <p:spPr/>
+      </p:sp>
+      <p:sp>
+        <p:nvSpPr>
+          <p:cNvPr id="3" name="Notes Placeholder 2"/>
+          <p:cNvSpPr>
+            <a:spLocks noGrp="1"/>
+          </p:cNvSpPr>
+          <p:nvPr>
+            <p:ph type="body" idx="3" sz="quarter"/>
+          </p:nvPr>
+        </p:nvSpPr>
+        <p:spPr/>
+        <p:txBody>
+          <a:bodyPr/>
+          <a:lstStyle/>
+          <a:p>
+            <a:r>
+              <a:t>이 장에서 다룬 문제 대부분은 경보 없이 조용히 생긴다는 공통점이 있습니다. 적용을 멈춰도 전송은 정상이라 아무도 모르고, SRL이 맞지 않아 실시간 적용이 꺼져도 오류가 없습니다. 유지 보수 절차서의 마지막 단계에 적용 재기동과 RECOVERY_MODE 확인을 넣는 것이 가장 확실한 대책입니다. lag 감시 기준은 업무가 허용하는 데이터 손실과 복구 시간에서 거꾸로 정하고, Failover 예상 시간도 평소에 기록해 두면 실제 장애 때 판단 근거가 됩니다.</a:t>
             </a:r>
           </a:p>
         </p:txBody>
@@ -1797,7 +2865,7 @@
           <a:lstStyle/>
           <a:p>
             <a:r>
-              <a:t>이 장에서 가장 중요한 함정입니다. 적용이 완전히 멈추면 새로 적용할 것이 없으므로 transport lag도 apply lag도 0이 됩니다. 지연만 감시하는 모니터링은 이 상태를 정상으로 보고합니다. 그래서 지연보다 MRP0의 존재와 OPEN_MODE를 먼저 봐야 합니다. WITH APPLY라는 꼬리표가 MRP0의 존재를 그대로 반영하므로, 이 한 문자열만으로도 적용 여부를 알 수 있습니다. 시간이 지나면 지연 값도 올라가지만 그때까지 몇 분이 그냥 지나갑니다.</a:t>
+              <a:t>예전 자료와 설치 문서 상당수가 V$MANAGED_STANDBY를 씁니다. 19c에서도 조회는 되지만 디프리케이트 상태이고, 공식 교재도 V$DATAGUARD_PROCESS를 쓰라고 권합니다. 새 뷰는 프로세스 이름 대신 역할 이름을 보여 주어 무엇을 하는 프로세스인지 곧장 읽힌다는 장점이 있고, Broker 프로세스도 함께 나타납니다. 앞으로 점검 스크립트를 새로 만든다면 새 뷰 기준으로 쓰도록 안내하고, 기존 스크립트를 만났을 때 두 뷰가 같은 정보를 다른 이름으로 보여 준다는 것만 알면 충분합니다.</a:t>
             </a:r>
           </a:p>
         </p:txBody>
@@ -1867,7 +2935,7 @@
           <a:lstStyle/>
           <a:p>
             <a:r>
-              <a:t>오류처럼 보이지만 실은 "이미 그 상태다"라는 알림입니다. 멱등성 위반 알림에 가깝습니다. 실측에서 ORA-01153 직후 조회한 MRP0은 그대로 APPLYING_LOG였고, ORA-16136 직후의 MRP0 개수는 그대로 0이었습니다. ORA-01153의 incompatible이라는 단어를 "다른 종류"로 오해하기 쉬운데, "지금 상태와 양립할 수 없다"는 뜻입니다. 4장에서는 서로 다른 적용 방식을 겹쳐 실행해 만났고 여기서는 같은 방식을 두 번 실행해 만났습니다. 근본 규칙은 MRP는 하나뿐이라는 것입니다.</a:t>
+              <a:t>Primary에서는 수십 개 세션이 나눠서 만든 변경을 Standby는 한 곳에서 다시 수행해야 합니다. 이 때문에 Standby를 Primary보다 작은 서버로 두면 평소에는 문제가 없다가 야간 배치 시간에 적용이 밀리는 일이 생깁니다. 특히 적용은 변경할 블록을 먼저 읽어야 하므로 I/O 성능이 가장 큰 변수입니다. Apply Rate는 Broker의 SHOW DATABASE에서 볼 수 있는데, 리두 생성 속도와 비교해 여유가 있는지 보는 용도로 쓰고, 정밀 측정 방법은 15장에서 다룹니다.</a:t>
             </a:r>
           </a:p>
         </p:txBody>
@@ -1937,7 +3005,7 @@
           <a:lstStyle/>
           <a:p>
             <a:r>
-              <a:t>두 순서가 대칭이 아니라는 점이 요령입니다. CANCEL을 먼저 내는 쪽이 항상 비용이 낮습니다. 실패해도 정보가 필요 없기 때문입니다. 반대로 기동부터 시도했다가 ORA-01153을 만나면 "그럼 지금 어떤 방식으로 돌고 있지"를 확인해야 하고, 방식을 바꾸려던 것이었다면 결국 CANCEL로 돌아옵니다. 스크립트에서는 WHENEVER SQLERROR 설정을 CANCEL 구간에서만 풀어 주면 깔끔합니다. 마지막 확인 단계를 빠뜨리지 않는 것도 중요합니다.</a:t>
+              <a:t>lost write는 스토리지가 기록했다고 응답했지만 실제로는 기록되지 않은 상황입니다. Primary 혼자서는 이것을 알아채기 어렵지만, Standby가 적용하면서 Primary가 리두에 남긴 블록 읽기 정보와 자기 블록의 SCN을 비교하면 잡아낼 수 있습니다. Primary 쪽 문제면 ORA-00752, Standby 쪽 문제면 ORA-00600 3020으로 나타납니다. Primary 쪽 lost write라면 Standby로 failover한 뒤 Primary를 다시 만드는 것이 권장 복구입니다. Standby가 복사본이면서 동시에 Primary를 검증하는 장치 역할도 하는 셈입니다.</a:t>
             </a:r>
           </a:p>
         </p:txBody>
@@ -2007,7 +3075,7 @@
           <a:lstStyle/>
           <a:p>
             <a:r>
-              <a:t>DB_UNIQUE_NAME 속성은 "이 목적지는 이 이름을 가진 데이터베이스를 위한 것"이라는 선언입니다. 값이 자신과 다르면 그 목적지는 자신에게 해당하지 않으므로 오라클은 해석을 거부하고 BAD PARAM으로 둡니다. 왜 이렇게 됐는가. DUPLICATE의 SPFILE 절이 Primary spfile을 가져오는데 스크립트에 set log_archive_dest_1이 없었기 때문입니다. 6장의 CONTROL_FILES와 완전히 같은 구조입니다. 지정하지 않은 파라미터는 조용히 상속됩니다.</a:t>
+              <a:t>NOMOUNT에서는 컨트롤 파일을 읽지 않았으니 무엇을 적용할지 알 수 없으므로 MOUNT 이상이 조건입니다. 기동 직후에는 전송되는 리두가 없으면 MRP0가 기다리기만 하므로, Primary에서 로그 전환을 한 번 일으켜 적용 위치가 움직이는지 보는 것이 일반적인 확인 방법입니다. Broker로 관리하는 구성에서는 SQL로 적용을 끄면 Broker가 기대하는 APPLY-ON 상태와 어긋나 경고가 뜨므로, 그런 구성에서는 DGMGRL로 상태를 바꾸는 것이 원칙입니다.</a:t>
             </a:r>
           </a:p>
         </p:txBody>
@@ -2077,7 +3145,7 @@
           <a:lstStyle/>
           <a:p>
             <a:r>
-              <a:t>이런 결함이 가장 다루기 어렵습니다. 오류가 나지 않으니 아무도 알아채지 못합니다. 진짜 문제는 역할 전환 후에 드러납니다. boston이 Primary가 되면 목적지 1번이 로컬 아카이브를 담당해야 하는데 BAD PARAM이면 그때 멈춥니다. 평상시에는 보이지 않다가 가장 급한 순간에 터지는 종류입니다. 그래서 구축 직후 점검 목록에 "목적지 상태가 전부 VALID인가"를 넣어야 합니다. 지연이 0이라는 것만으로는 부족합니다.</a:t>
+              <a:t>DISCONNECT를 빼고 실행하면 SQL*Plus 화면이 멈춘 것처럼 보여 당황하는 경우가 많습니다. 실제로는 그 세션이 복구를 직접 수행하고 있어서 프롬프트가 돌아오지 않는 것이고, 다른 세션에서 CANCEL을 내야 풀립니다. 오래된 문서에서는 DISCONNECT FROM SESSION이라는 긴 형태를 쓰는데, 19c에서도 받아들여지므로 기존 스크립트를 고칠 필요는 없습니다. 다만 새로 쓰는 절차서는 짧은 형태로 통일하는 편이 읽기 쉽습니다.</a:t>
             </a:r>
           </a:p>
         </p:txBody>
@@ -2147,7 +3215,7 @@
           <a:lstStyle/>
           <a:p>
             <a:r>
-              <a:t>두 번째 변화가 더 중요합니다. 적용은 그전에도 돌고 있었지만 RECOVERY_MODE 열은 IDLE을 보여 주고 있었습니다. 목적지가 유효하지 않으면 이 열이 의미 있는 값을 갖지 못하기 때문입니다. 즉 진단 도구 자체가 고장 나 있었던 셈입니다. 이것이 BAD PARAM을 방치하면 안 되는 두 번째 이유입니다. 참고로 LOG_ARCHIVE_DEST_n은 동적 파라미터라 SCOPE=BOTH로 즉시 반영됩니다. 6장의 CONTROL_FILES가 SCOPE=SPFILE만 가능해 재기동이 필요했던 것과 대조됩니다.</a:t>
+              <a:t>두 오류는 상태를 알려 주는 메시지에 가깝습니다. 원하는 상태가 이미 만들어져 있다면 그대로 진행해도 됩니다. 문제는 ORA-01153을 무시하는 경우입니다. 실시간 적용을 끄려고 USING ARCHIVED LOGFILE로 기동했는데 이미 적용이 돌고 있었다면 오류만 나고 방식은 바뀌지 않습니다. 방식을 바꾸는 절차는 항상 CANCEL을 먼저 내고, 그 단계의 ORA-16136은 무시하도록 짜는 것이 안전합니다. 실습 2에서 두 오류를 직접 만들어 보게 됩니다.</a:t>
             </a:r>
           </a:p>
         </p:txBody>
@@ -5397,7 +6465,7 @@
                 </a:solidFill>
                 <a:latin typeface="맑은 고딕"/>
               </a:rPr>
-              <a:t>상태 열 하나로는 알 수 없다</a:t>
+              <a:t>무엇이 적용하는가, 언제 적용하는가, 얼마나 따라가는가</a:t>
             </a:r>
           </a:p>
         </p:txBody>
@@ -5436,7 +6504,7 @@
                 </a:solidFill>
                 <a:latin typeface="맑은 고딕"/>
               </a:rPr>
-              <a:t>프로세스·모드·갭·지연을 읽는 법</a:t>
+              <a:t>제7장</a:t>
             </a:r>
           </a:p>
         </p:txBody>
@@ -5537,7 +6605,7 @@
                 </a:solidFill>
                 <a:latin typeface="맑은 고딕"/>
               </a:rPr>
-              <a:t>두 오류</a:t>
+              <a:t>적용 단계의 손상 검증</a:t>
             </a:r>
           </a:p>
         </p:txBody>
@@ -5576,7 +6644,7 @@
                 </a:solidFill>
                 <a:latin typeface="맑은 고딕"/>
               </a:rPr>
-              <a:t>둘 다 무해하다</a:t>
+              <a:t>리두를 그대로 덮어쓰는 장치가 아니다</a:t>
             </a:r>
           </a:p>
         </p:txBody>
@@ -5615,7 +6683,7 @@
                 </a:solidFill>
                 <a:latin typeface="맑은 고딕"/>
               </a:rPr>
-              <a:t>•  멈춰 있는데 CANCEL → **ORA-16136** `Managed Standby Recovery not active`</a:t>
+              <a:t>•  RFS, ARCn, MRP, DBWn이 단계별로 정합성 검사</a:t>
             </a:r>
           </a:p>
           <a:p>
@@ -5631,7 +6699,7 @@
                 </a:solidFill>
                 <a:latin typeface="맑은 고딕"/>
               </a:rPr>
-              <a:t>•  돌고 있는데 기동 → **ORA-01153** `an incompatible media recovery is active`</a:t>
+              <a:t>•  손상된 리두는 갭 해소 경로로 다시 받아 옴</a:t>
             </a:r>
           </a:p>
           <a:p>
@@ -5647,7 +6715,7 @@
                 </a:solidFill>
                 <a:latin typeface="맑은 고딕"/>
               </a:rPr>
-              <a:t>•  `USING CURRENT LOGFILE` 유무와 무관하게 같은 오류</a:t>
+              <a:t>•  DB_LOST_WRITE_PROTECT: 양쪽 TYPICAL 이상 권장</a:t>
             </a:r>
           </a:p>
           <a:p>
@@ -5663,7 +6731,7 @@
                 </a:solidFill>
                 <a:latin typeface="맑은 고딕"/>
               </a:rPr>
-              <a:t>•  둘 다 **상태를 바꾸지 않는다**</a:t>
+              <a:t>•  Primary lost write는 ORA-00752로 드러남</a:t>
             </a:r>
           </a:p>
         </p:txBody>
@@ -5695,7 +6763,7 @@
         <p:spPr>
           <a:xfrm>
             <a:off x="0" y="0"/>
-            <a:ext cx="12191695" cy="1005840"/>
+            <a:ext cx="12191695" cy="6858000"/>
           </a:xfrm>
           <a:prstGeom prst="rect">
             <a:avLst/>
@@ -5738,8 +6806,8 @@
         </p:nvSpPr>
         <p:spPr>
           <a:xfrm>
-            <a:off x="548640" y="91440"/>
-            <a:ext cx="10972800" cy="777240"/>
+            <a:off x="822960" y="2011680"/>
+            <a:ext cx="10515600" cy="1097280"/>
           </a:xfrm>
           <a:prstGeom prst="rect">
             <a:avLst/>
@@ -5758,13 +6826,13 @@
               </a:spcAft>
             </a:pPr>
             <a:r>
-              <a:rPr sz="2600" b="1">
+              <a:rPr sz="4000" b="1">
                 <a:solidFill>
                   <a:srgbClr val="FFFFFF"/>
                 </a:solidFill>
                 <a:latin typeface="맑은 고딕"/>
               </a:rPr>
-              <a:t>재기동은 CANCEL 먼저</a:t>
+              <a:t>7.3</a:t>
             </a:r>
           </a:p>
         </p:txBody>
@@ -5777,8 +6845,8 @@
         </p:nvSpPr>
         <p:spPr>
           <a:xfrm>
-            <a:off x="640080" y="1078992"/>
-            <a:ext cx="10881360" cy="457200"/>
+            <a:off x="822960" y="3017520"/>
+            <a:ext cx="10515600" cy="914400"/>
           </a:xfrm>
           <a:prstGeom prst="rect">
             <a:avLst/>
@@ -5797,27 +6865,71 @@
               </a:spcAft>
             </a:pPr>
             <a:r>
-              <a:rPr sz="1500" b="0">
-                <a:solidFill>
-                  <a:srgbClr val="5A6672"/>
-                </a:solidFill>
-                <a:latin typeface="맑은 고딕"/>
-              </a:rPr>
-              <a:t>비용이 다르다</a:t>
-            </a:r>
-          </a:p>
-        </p:txBody>
-      </p:sp>
-      <p:sp>
-        <p:nvSpPr>
-          <p:cNvPr id="5" name="TextBox 4"/>
+              <a:rPr sz="2800" b="1">
+                <a:solidFill>
+                  <a:srgbClr val="FFFFFF"/>
+                </a:solidFill>
+                <a:latin typeface="맑은 고딕"/>
+              </a:rPr>
+              <a:t>Redo Apply 기동과 중지</a:t>
+            </a:r>
+          </a:p>
+        </p:txBody>
+      </p:sp>
+      <p:sp>
+        <p:nvSpPr>
+          <p:cNvPr id="5" name="Rectangle 4"/>
+          <p:cNvSpPr/>
+          <p:nvPr/>
+        </p:nvSpPr>
+        <p:spPr>
+          <a:xfrm>
+            <a:off x="822960" y="4114800"/>
+            <a:ext cx="5486400" cy="54864"/>
+          </a:xfrm>
+          <a:prstGeom prst="rect">
+            <a:avLst/>
+          </a:prstGeom>
+          <a:solidFill>
+            <a:srgbClr val="FFFFFF"/>
+          </a:solidFill>
+          <a:ln>
+            <a:noFill/>
+          </a:ln>
+          <a:effectLst/>
+        </p:spPr>
+        <p:style>
+          <a:lnRef idx="1">
+            <a:schemeClr val="accent1"/>
+          </a:lnRef>
+          <a:fillRef idx="3">
+            <a:schemeClr val="accent1"/>
+          </a:fillRef>
+          <a:effectRef idx="2">
+            <a:schemeClr val="accent1"/>
+          </a:effectRef>
+          <a:fontRef idx="minor">
+            <a:schemeClr val="lt1"/>
+          </a:fontRef>
+        </p:style>
+        <p:txBody>
+          <a:bodyPr rtlCol="0" anchor="ctr"/>
+          <a:lstStyle/>
+          <a:p>
+            <a:pPr algn="ctr"/>
+          </a:p>
+        </p:txBody>
+      </p:sp>
+      <p:sp>
+        <p:nvSpPr>
+          <p:cNvPr id="6" name="TextBox 5"/>
           <p:cNvSpPr txBox="1"/>
           <p:nvPr/>
         </p:nvSpPr>
         <p:spPr>
           <a:xfrm>
-            <a:off x="640080" y="1737360"/>
-            <a:ext cx="10881360" cy="4754880"/>
+            <a:off x="822960" y="4297680"/>
+            <a:ext cx="10058400" cy="2011680"/>
           </a:xfrm>
           <a:prstGeom prst="rect">
             <a:avLst/>
@@ -5832,65 +6944,49 @@
           <a:p>
             <a:pPr algn="l">
               <a:spcAft>
-                <a:spcPts val="1000"/>
-              </a:spcAft>
-            </a:pPr>
-            <a:r>
-              <a:rPr sz="1700" b="0">
-                <a:solidFill>
-                  <a:srgbClr val="222222"/>
-                </a:solidFill>
-                <a:latin typeface="맑은 고딕"/>
-              </a:rPr>
-              <a:t>•  CANCEL → 대기 → 기동 → 확인</a:t>
-            </a:r>
-          </a:p>
-          <a:p>
-            <a:pPr algn="l">
-              <a:spcAft>
-                <a:spcPts val="1000"/>
-              </a:spcAft>
-            </a:pPr>
-            <a:r>
-              <a:rPr sz="1700" b="0">
-                <a:solidFill>
-                  <a:srgbClr val="222222"/>
-                </a:solidFill>
-                <a:latin typeface="맑은 고딕"/>
-              </a:rPr>
-              <a:t>•  CANCEL 먼저 : 이미 멈춰 있어도 ORA-16136만 나고 끝난다</a:t>
-            </a:r>
-          </a:p>
-          <a:p>
-            <a:pPr algn="l">
-              <a:spcAft>
-                <a:spcPts val="1000"/>
-              </a:spcAft>
-            </a:pPr>
-            <a:r>
-              <a:rPr sz="1700" b="0">
-                <a:solidFill>
-                  <a:srgbClr val="222222"/>
-                </a:solidFill>
-                <a:latin typeface="맑은 고딕"/>
-              </a:rPr>
-              <a:t>•  기동 먼저 : ORA-01153이 나면 현재 방식을 확인하는 단계가 더 든다</a:t>
-            </a:r>
-          </a:p>
-          <a:p>
-            <a:pPr algn="l">
-              <a:spcAft>
-                <a:spcPts val="1000"/>
-              </a:spcAft>
-            </a:pPr>
-            <a:r>
-              <a:rPr sz="1700" b="0">
-                <a:solidFill>
-                  <a:srgbClr val="222222"/>
-                </a:solidFill>
-                <a:latin typeface="맑은 고딕"/>
-              </a:rPr>
-              <a:t>•  자동화 시 CANCEL 구간의 ORA-16136을 무시하도록 작성한다</a:t>
+                <a:spcPts val="800"/>
+              </a:spcAft>
+            </a:pPr>
+            <a:r>
+              <a:rPr sz="1600" b="0">
+                <a:solidFill>
+                  <a:srgbClr val="FFFFFF"/>
+                </a:solidFill>
+                <a:latin typeface="맑은 고딕"/>
+              </a:rPr>
+              <a:t>•  기동 명령과 선행 조건</a:t>
+            </a:r>
+          </a:p>
+          <a:p>
+            <a:pPr algn="l">
+              <a:spcAft>
+                <a:spcPts val="800"/>
+              </a:spcAft>
+            </a:pPr>
+            <a:r>
+              <a:rPr sz="1600" b="0">
+                <a:solidFill>
+                  <a:srgbClr val="FFFFFF"/>
+                </a:solidFill>
+                <a:latin typeface="맑은 고딕"/>
+              </a:rPr>
+              <a:t>•  상태에 맞지 않는 명령의 오류</a:t>
+            </a:r>
+          </a:p>
+          <a:p>
+            <a:pPr algn="l">
+              <a:spcAft>
+                <a:spcPts val="800"/>
+              </a:spcAft>
+            </a:pPr>
+            <a:r>
+              <a:rPr sz="1600" b="0">
+                <a:solidFill>
+                  <a:srgbClr val="FFFFFF"/>
+                </a:solidFill>
+                <a:latin typeface="맑은 고딕"/>
+              </a:rPr>
+              <a:t>•  열린 모드와 적용 상태의 조합</a:t>
             </a:r>
           </a:p>
         </p:txBody>
@@ -5922,7 +7018,7 @@
         <p:spPr>
           <a:xfrm>
             <a:off x="0" y="0"/>
-            <a:ext cx="12191695" cy="6858000"/>
+            <a:ext cx="12191695" cy="1005840"/>
           </a:xfrm>
           <a:prstGeom prst="rect">
             <a:avLst/>
@@ -5965,8 +7061,8 @@
         </p:nvSpPr>
         <p:spPr>
           <a:xfrm>
-            <a:off x="822960" y="2011680"/>
-            <a:ext cx="10515600" cy="1097280"/>
+            <a:off x="548640" y="91440"/>
+            <a:ext cx="10972800" cy="777240"/>
           </a:xfrm>
           <a:prstGeom prst="rect">
             <a:avLst/>
@@ -5985,13 +7081,13 @@
               </a:spcAft>
             </a:pPr>
             <a:r>
-              <a:rPr sz="4000" b="1">
+              <a:rPr sz="2600" b="1">
                 <a:solidFill>
                   <a:srgbClr val="FFFFFF"/>
                 </a:solidFill>
                 <a:latin typeface="맑은 고딕"/>
               </a:rPr>
-              <a:t>7.4</a:t>
+              <a:t>기동 명령과 선행 조건</a:t>
             </a:r>
           </a:p>
         </p:txBody>
@@ -6004,8 +7100,8 @@
         </p:nvSpPr>
         <p:spPr>
           <a:xfrm>
-            <a:off x="822960" y="3017520"/>
-            <a:ext cx="10515600" cy="914400"/>
+            <a:off x="640080" y="1078992"/>
+            <a:ext cx="10881360" cy="457200"/>
           </a:xfrm>
           <a:prstGeom prst="rect">
             <a:avLst/>
@@ -6024,71 +7120,27 @@
               </a:spcAft>
             </a:pPr>
             <a:r>
-              <a:rPr sz="2800" b="1">
-                <a:solidFill>
-                  <a:srgbClr val="FFFFFF"/>
-                </a:solidFill>
-                <a:latin typeface="맑은 고딕"/>
-              </a:rPr>
-              <a:t>세 번째 가이드 결함</a:t>
-            </a:r>
-          </a:p>
-        </p:txBody>
-      </p:sp>
-      <p:sp>
-        <p:nvSpPr>
-          <p:cNvPr id="5" name="Rectangle 4"/>
-          <p:cNvSpPr/>
-          <p:nvPr/>
-        </p:nvSpPr>
-        <p:spPr>
-          <a:xfrm>
-            <a:off x="822960" y="4114800"/>
-            <a:ext cx="5486400" cy="54864"/>
-          </a:xfrm>
-          <a:prstGeom prst="rect">
-            <a:avLst/>
-          </a:prstGeom>
-          <a:solidFill>
-            <a:srgbClr val="FFFFFF"/>
-          </a:solidFill>
-          <a:ln>
-            <a:noFill/>
-          </a:ln>
-          <a:effectLst/>
-        </p:spPr>
-        <p:style>
-          <a:lnRef idx="1">
-            <a:schemeClr val="accent1"/>
-          </a:lnRef>
-          <a:fillRef idx="3">
-            <a:schemeClr val="accent1"/>
-          </a:fillRef>
-          <a:effectRef idx="2">
-            <a:schemeClr val="accent1"/>
-          </a:effectRef>
-          <a:fontRef idx="minor">
-            <a:schemeClr val="lt1"/>
-          </a:fontRef>
-        </p:style>
-        <p:txBody>
-          <a:bodyPr rtlCol="0" anchor="ctr"/>
-          <a:lstStyle/>
-          <a:p>
-            <a:pPr algn="ctr"/>
-          </a:p>
-        </p:txBody>
-      </p:sp>
-      <p:sp>
-        <p:nvSpPr>
-          <p:cNvPr id="6" name="TextBox 5"/>
+              <a:rPr sz="1500" b="0">
+                <a:solidFill>
+                  <a:srgbClr val="5A6672"/>
+                </a:solidFill>
+                <a:latin typeface="맑은 고딕"/>
+              </a:rPr>
+              <a:t>RECOVER MANAGED STANDBY DATABASE</a:t>
+            </a:r>
+          </a:p>
+        </p:txBody>
+      </p:sp>
+      <p:sp>
+        <p:nvSpPr>
+          <p:cNvPr id="5" name="TextBox 4"/>
           <p:cNvSpPr txBox="1"/>
           <p:nvPr/>
         </p:nvSpPr>
         <p:spPr>
           <a:xfrm>
-            <a:off x="822960" y="4297680"/>
-            <a:ext cx="10058400" cy="2011680"/>
+            <a:off x="640080" y="1737360"/>
+            <a:ext cx="10881360" cy="4754880"/>
           </a:xfrm>
           <a:prstGeom prst="rect">
             <a:avLst/>
@@ -6103,49 +7155,81 @@
           <a:p>
             <a:pPr algn="l">
               <a:spcAft>
-                <a:spcPts val="800"/>
-              </a:spcAft>
-            </a:pPr>
-            <a:r>
-              <a:rPr sz="1600" b="0">
-                <a:solidFill>
-                  <a:srgbClr val="FFFFFF"/>
-                </a:solidFill>
-                <a:latin typeface="맑은 고딕"/>
-              </a:rPr>
-              <a:t>•  BAD PARAM 진단</a:t>
-            </a:r>
-          </a:p>
-          <a:p>
-            <a:pPr algn="l">
-              <a:spcAft>
-                <a:spcPts val="800"/>
-              </a:spcAft>
-            </a:pPr>
-            <a:r>
-              <a:rPr sz="1600" b="0">
-                <a:solidFill>
-                  <a:srgbClr val="FFFFFF"/>
-                </a:solidFill>
-                <a:latin typeface="맑은 고딕"/>
-              </a:rPr>
-              <a:t>•  소리 없는 결함</a:t>
-            </a:r>
-          </a:p>
-          <a:p>
-            <a:pPr algn="l">
-              <a:spcAft>
-                <a:spcPts val="800"/>
-              </a:spcAft>
-            </a:pPr>
-            <a:r>
-              <a:rPr sz="1600" b="0">
-                <a:solidFill>
-                  <a:srgbClr val="FFFFFF"/>
-                </a:solidFill>
-                <a:latin typeface="맑은 고딕"/>
-              </a:rPr>
-              <a:t>•  WRONG VALID_TYPE은 정상</a:t>
+                <a:spcPts val="1000"/>
+              </a:spcAft>
+            </a:pPr>
+            <a:r>
+              <a:rPr sz="1700" b="0">
+                <a:solidFill>
+                  <a:srgbClr val="222222"/>
+                </a:solidFill>
+                <a:latin typeface="맑은 고딕"/>
+              </a:rPr>
+              <a:t>•  Standby가 최소 MOUNT 상태여야 함</a:t>
+            </a:r>
+          </a:p>
+          <a:p>
+            <a:pPr algn="l">
+              <a:spcAft>
+                <a:spcPts val="1000"/>
+              </a:spcAft>
+            </a:pPr>
+            <a:r>
+              <a:rPr sz="1700" b="0">
+                <a:solidFill>
+                  <a:srgbClr val="222222"/>
+                </a:solidFill>
+                <a:latin typeface="맑은 고딕"/>
+              </a:rPr>
+              <a:t>•  기본형: ... RECOVER MANAGED STANDBY DATABASE DISCONNECT</a:t>
+            </a:r>
+          </a:p>
+          <a:p>
+            <a:pPr algn="l">
+              <a:spcAft>
+                <a:spcPts val="1000"/>
+              </a:spcAft>
+            </a:pPr>
+            <a:r>
+              <a:rPr sz="1700" b="0">
+                <a:solidFill>
+                  <a:srgbClr val="222222"/>
+                </a:solidFill>
+                <a:latin typeface="맑은 고딕"/>
+              </a:rPr>
+              <a:t>•  SYSDBA 또는 SYSDG로 접속해 실행</a:t>
+            </a:r>
+          </a:p>
+          <a:p>
+            <a:pPr algn="l">
+              <a:spcAft>
+                <a:spcPts val="1000"/>
+              </a:spcAft>
+            </a:pPr>
+            <a:r>
+              <a:rPr sz="1700" b="0">
+                <a:solidFill>
+                  <a:srgbClr val="222222"/>
+                </a:solidFill>
+                <a:latin typeface="맑은 고딕"/>
+              </a:rPr>
+              <a:t>•  처음 기동 후 Primary 로그 전환으로 흐름 확인</a:t>
+            </a:r>
+          </a:p>
+          <a:p>
+            <a:pPr algn="l">
+              <a:spcAft>
+                <a:spcPts val="1000"/>
+              </a:spcAft>
+            </a:pPr>
+            <a:r>
+              <a:rPr sz="1700" b="0">
+                <a:solidFill>
+                  <a:srgbClr val="222222"/>
+                </a:solidFill>
+                <a:latin typeface="맑은 고딕"/>
+              </a:rPr>
+              <a:t>•  Broker 구성에서는 DGMGRL로 상태 변경</a:t>
             </a:r>
           </a:p>
         </p:txBody>
@@ -6246,7 +7330,7 @@
                 </a:solidFill>
                 <a:latin typeface="맑은 고딕"/>
               </a:rPr>
-              <a:t>BAD PARAM</a:t>
+              <a:t>DISCONNECT의 의미</a:t>
             </a:r>
           </a:p>
         </p:txBody>
@@ -6285,7 +7369,7 @@
                 </a:solidFill>
                 <a:latin typeface="맑은 고딕"/>
               </a:rPr>
-              <a:t>목적지 이름은 있는데 경로가 없다</a:t>
+              <a:t>누가 복구를 수행하는가</a:t>
             </a:r>
           </a:p>
         </p:txBody>
@@ -6324,7 +7408,7 @@
                 </a:solidFill>
                 <a:latin typeface="맑은 고딕"/>
               </a:rPr>
-              <a:t>•  `1 LOG_ARCHIVE_DEST_1  (빈칸)  BAD PARAM  IDLE`</a:t>
+              <a:t>•  DISCONNECT: MRP0가 백그라운드에서 적용</a:t>
             </a:r>
           </a:p>
           <a:p>
@@ -6340,7 +7424,7 @@
                 </a:solidFill>
                 <a:latin typeface="맑은 고딕"/>
               </a:rPr>
-              <a:t>•  파라미터 값 : `... db_unique_name=**chicago**`</a:t>
+              <a:t>•  생략하면 명령 세션이 직접 복구, 프롬프트 반환 없음</a:t>
             </a:r>
           </a:p>
           <a:p>
@@ -6356,7 +7440,7 @@
                 </a:solidFill>
                 <a:latin typeface="맑은 고딕"/>
               </a:rPr>
-              <a:t>•  이 데이터베이스의 `DB_UNIQUE_NAME`은 `boston`</a:t>
+              <a:t>•  FROM SESSION은 지금도 허용되지만 불필요</a:t>
             </a:r>
           </a:p>
           <a:p>
@@ -6372,7 +7456,7 @@
                 </a:solidFill>
                 <a:latin typeface="맑은 고딕"/>
               </a:rPr>
-              <a:t>•  원인은 **파라미터 상속** — 6장 컨트롤 파일과 같은 구조</a:t>
+              <a:t>•  사실상 운영에서는 항상 DISCONNECT 사용</a:t>
             </a:r>
           </a:p>
         </p:txBody>
@@ -6473,7 +7557,7 @@
                 </a:solidFill>
                 <a:latin typeface="맑은 고딕"/>
               </a:rPr>
-              <a:t>그런데 왜 아무 문제가 없었나</a:t>
+              <a:t>중지와 상태 오류</a:t>
             </a:r>
           </a:p>
         </p:txBody>
@@ -6512,7 +7596,7 @@
                 </a:solidFill>
                 <a:latin typeface="맑은 고딕"/>
               </a:rPr>
-              <a:t>우회로가 있었다</a:t>
+              <a:t>두 오류 모두 데이터에는 영향 없음</a:t>
             </a:r>
           </a:p>
         </p:txBody>
@@ -6551,7 +7635,7 @@
                 </a:solidFill>
                 <a:latin typeface="맑은 고딕"/>
               </a:rPr>
-              <a:t>•  5·6장 확인 항목은 모두 정상이었다 — 실제로도 정상이었다</a:t>
+              <a:t>•  중지: ... RECOVER MANAGED STANDBY DATABASE CANCEL</a:t>
             </a:r>
           </a:p>
           <a:p>
@@ -6567,7 +7651,7 @@
                 </a:solidFill>
                 <a:latin typeface="맑은 고딕"/>
               </a:rPr>
-              <a:t>•  `DB_RECOVERY_FILE_DEST`가 있어 아카이브는 FRA로 갔다</a:t>
+              <a:t>•  ORA-01153: 이미 도는데 다시 기동</a:t>
             </a:r>
           </a:p>
           <a:p>
@@ -6583,7 +7667,7 @@
                 </a:solidFill>
                 <a:latin typeface="맑은 고딕"/>
               </a:rPr>
-              <a:t>•  실측 : `.../fast_recovery_area/BOSTON/archivelog/2026_08_27/o1_mf_1_66_...arc`</a:t>
+              <a:t>•  ORA-16136: 이미 멈췄는데 CANCEL</a:t>
             </a:r>
           </a:p>
           <a:p>
@@ -6599,7 +7683,23 @@
                 </a:solidFill>
                 <a:latin typeface="맑은 고딕"/>
               </a:rPr>
-              <a:t>•  **기능은 동작하고 상태 열만 비정상**</a:t>
+              <a:t>•  ORA-10456: 마운트 상태에서 적용 중 OPEN 시도</a:t>
+            </a:r>
+          </a:p>
+          <a:p>
+            <a:pPr algn="l">
+              <a:spcAft>
+                <a:spcPts val="1000"/>
+              </a:spcAft>
+            </a:pPr>
+            <a:r>
+              <a:rPr sz="1700" b="0">
+                <a:solidFill>
+                  <a:srgbClr val="222222"/>
+                </a:solidFill>
+                <a:latin typeface="맑은 고딕"/>
+              </a:rPr>
+              <a:t>•  재기동 스크립트는 CANCEL 후 기동, 16136은 무시</a:t>
             </a:r>
           </a:p>
         </p:txBody>
@@ -6700,7 +7800,7 @@
                 </a:solidFill>
                 <a:latin typeface="맑은 고딕"/>
               </a:rPr>
-              <a:t>고치면 진단 도구가 되살아난다</a:t>
+              <a:t>열린 모드와 적용 상태 조합</a:t>
             </a:r>
           </a:p>
         </p:txBody>
@@ -6739,7 +7839,7 @@
                 </a:solidFill>
                 <a:latin typeface="맑은 고딕"/>
               </a:rPr>
-              <a:t>두 가지가 함께 바뀐다</a:t>
+              <a:t>라이선스 경계가 걸린 곳</a:t>
             </a:r>
           </a:p>
         </p:txBody>
@@ -6778,7 +7878,7 @@
                 </a:solidFill>
                 <a:latin typeface="맑은 고딕"/>
               </a:rPr>
-              <a:t>•  `db_unique_name=boston`으로 수정, `SCOPE=BOTH`</a:t>
+              <a:t>•  MOUNTED + 적용: 전통적인 Standby</a:t>
             </a:r>
           </a:p>
           <a:p>
@@ -6794,7 +7894,7 @@
                 </a:solidFill>
                 <a:latin typeface="맑은 고딕"/>
               </a:rPr>
-              <a:t>•  `STATUS` : BAD PARAM → **VALID**</a:t>
+              <a:t>•  READ ONLY + 적용 중지: 조회 가능, 데이터 정지</a:t>
             </a:r>
           </a:p>
           <a:p>
@@ -6810,7 +7910,7 @@
                 </a:solidFill>
                 <a:latin typeface="맑은 고딕"/>
               </a:rPr>
-              <a:t>•  `RECOVERY_MODE` : IDLE → **MANAGED REAL TIME APPLY**</a:t>
+              <a:t>•  READ ONLY WITH APPLY: Active Data Guard 옵션 필요</a:t>
             </a:r>
           </a:p>
           <a:p>
@@ -6826,7 +7926,7 @@
                 </a:solidFill>
                 <a:latin typeface="맑은 고딕"/>
               </a:rPr>
-              <a:t>•  고치기 전에는 실시간 적용 여부를 이 열로 판단할 수 없었다</a:t>
+              <a:t>•  열린 Standby를 마운트로: 재기동 후 STARTUP MOUNT</a:t>
             </a:r>
           </a:p>
         </p:txBody>
@@ -6927,7 +8027,7 @@
                 </a:solidFill>
                 <a:latin typeface="맑은 고딕"/>
               </a:rPr>
-              <a:t>WRONG VALID_TYPE</a:t>
+              <a:t>기동 직후 확인할 세 가지</a:t>
             </a:r>
           </a:p>
         </p:txBody>
@@ -6966,7 +8066,7 @@
                 </a:solidFill>
                 <a:latin typeface="맑은 고딕"/>
               </a:rPr>
-              <a:t>이것은 정상이다</a:t>
+              <a:t>켜졌다가 아니라 적용하고 있다를 본다</a:t>
             </a:r>
           </a:p>
         </p:txBody>
@@ -7005,7 +8105,7 @@
                 </a:solidFill>
                 <a:latin typeface="맑은 고딕"/>
               </a:rPr>
-              <a:t>•  `2 ... VALID  REMOTE  WRONG VALID_TYPE`</a:t>
+              <a:t>•  프로세스: managed recovery 역할의 MRP0</a:t>
             </a:r>
           </a:p>
           <a:p>
@@ -7021,7 +8121,7 @@
                 </a:solidFill>
                 <a:latin typeface="맑은 고딕"/>
               </a:rPr>
-              <a:t>•  boston의 목적지 2번 : `valid_for=(online_logfile,**primary_role**)`</a:t>
+              <a:t>•  모드: RECOVERY_MODE가 기대한 값인지</a:t>
             </a:r>
           </a:p>
           <a:p>
@@ -7037,7 +8137,7 @@
                 </a:solidFill>
                 <a:latin typeface="맑은 고딕"/>
               </a:rPr>
-              <a:t>•  boston은 지금 Standby → 역할이 맞지 않으니 지금은 유효하지 않다</a:t>
+              <a:t>•  진행: 로그 전환 후 적용 위치가 움직이는지</a:t>
             </a:r>
           </a:p>
           <a:p>
@@ -7053,7 +8153,7 @@
                 </a:solidFill>
                 <a:latin typeface="맑은 고딕"/>
               </a:rPr>
-              <a:t>•  역할 전환 후 쓰일 목적지다. 고치면 안 된다</a:t>
+              <a:t>•  프로세스가 떠 있어도 진행이 멈춰 있을 수 있음</a:t>
             </a:r>
           </a:p>
         </p:txBody>
@@ -7154,7 +8254,7 @@
                 </a:solidFill>
                 <a:latin typeface="맑은 고딕"/>
               </a:rPr>
-              <a:t>상속 사례가 넷</a:t>
+              <a:t>ACTION 값 읽기</a:t>
             </a:r>
           </a:p>
         </p:txBody>
@@ -7193,7 +8293,7 @@
                 </a:solidFill>
                 <a:latin typeface="맑은 고딕"/>
               </a:rPr>
-              <a:t>하나는 증상조차 없다</a:t>
+              <a:t>MRP0가 지금 무엇을 하는가</a:t>
             </a:r>
           </a:p>
         </p:txBody>
@@ -7232,7 +8332,7 @@
                 </a:solidFill>
                 <a:latin typeface="맑은 고딕"/>
               </a:rPr>
-              <a:t>•  `CONTROL_FILES` (6장) — Standby에 Chicago 디렉터리</a:t>
+              <a:t>•  APPLYING_LOG: 적용 중</a:t>
             </a:r>
           </a:p>
           <a:p>
@@ -7248,7 +8348,7 @@
                 </a:solidFill>
                 <a:latin typeface="맑은 고딕"/>
               </a:rPr>
-              <a:t>•  `LOG_ARCHIVE_DEST_1` (7장) — BAD PARAM</a:t>
+              <a:t>•  WAIT_FOR_LOG: 다음 리두 대기, 오류 아님</a:t>
             </a:r>
           </a:p>
           <a:p>
@@ -7264,7 +8364,7 @@
                 </a:solidFill>
                 <a:latin typeface="맑은 고딕"/>
               </a:rPr>
-              <a:t>•  `FAL_CLIENT` (7장) — **증상 없음.** 값이 chicago였다</a:t>
+              <a:t>•  WAIT_FOR_GAP: 빠진 로그 때문에 진행 불가</a:t>
             </a:r>
           </a:p>
           <a:p>
@@ -7280,7 +8380,7 @@
                 </a:solidFill>
                 <a:latin typeface="맑은 고딕"/>
               </a:rPr>
-              <a:t>•  `DB_NAME` (5장) — 스크립트가 `set db_name`으로 막아 냈다</a:t>
+              <a:t>•  APPLIED 열은 로그 단위 표시, 초 단위 판단 불가</a:t>
             </a:r>
           </a:p>
         </p:txBody>
@@ -7381,7 +8481,7 @@
                 </a:solidFill>
                 <a:latin typeface="맑은 고딕"/>
               </a:rPr>
-              <a:t>7.5</a:t>
+              <a:t>7.4</a:t>
             </a:r>
           </a:p>
         </p:txBody>
@@ -7420,7 +8520,7 @@
                 </a:solidFill>
                 <a:latin typeface="맑은 고딕"/>
               </a:rPr>
-              <a:t>실시간 적용인가</a:t>
+              <a:t>실시간 적용 (Real-Time Apply)</a:t>
             </a:r>
           </a:p>
         </p:txBody>
@@ -7503,7 +8603,7 @@
                 </a:solidFill>
                 <a:latin typeface="맑은 고딕"/>
               </a:rPr>
-              <a:t>•  RECOVERY_MODE 열</a:t>
+              <a:t>•  로그 전환을 기다리지 않는 적용</a:t>
             </a:r>
           </a:p>
           <a:p>
@@ -7519,7 +8619,7 @@
                 </a:solidFill>
                 <a:latin typeface="맑은 고딕"/>
               </a:rPr>
-              <a:t>•  기능 시험</a:t>
+              <a:t>•  SRL이 전제인 이유</a:t>
             </a:r>
           </a:p>
           <a:p>
@@ -7535,7 +8635,7 @@
                 </a:solidFill>
                 <a:latin typeface="맑은 고딕"/>
               </a:rPr>
-              <a:t>•  19c에서 달라진 것</a:t>
+              <a:t>•  19c 기본값과 판별 방법</a:t>
             </a:r>
           </a:p>
         </p:txBody>
@@ -7636,7 +8736,7 @@
                 </a:solidFill>
                 <a:latin typeface="맑은 고딕"/>
               </a:rPr>
-              <a:t>기능 시험</a:t>
+              <a:t>아카이브 기반 적용 vs 실시간 적용</a:t>
             </a:r>
           </a:p>
         </p:txBody>
@@ -7675,7 +8775,7 @@
                 </a:solidFill>
                 <a:latin typeface="맑은 고딕"/>
               </a:rPr>
-              <a:t>정의가 곧 판별법이다</a:t>
+              <a:t>언제 리두를 읽는가의 차이</a:t>
             </a:r>
           </a:p>
         </p:txBody>
@@ -7714,7 +8814,7 @@
                 </a:solidFill>
                 <a:latin typeface="맑은 고딕"/>
               </a:rPr>
-              <a:t>•  실시간 적용 = 아카이브를 기다리지 않고 적용한다</a:t>
+              <a:t>•  아카이브 기반: 로그가 아카이브된 뒤 읽기 시작</a:t>
             </a:r>
           </a:p>
           <a:p>
@@ -7730,7 +8830,7 @@
                 </a:solidFill>
                 <a:latin typeface="맑은 고딕"/>
               </a:rPr>
-              <a:t>•  그러므로 : **로그를 전환하지 않고** 커밋한 행이 Standby에서 보이면 실시간</a:t>
+              <a:t>•  실시간: RFS가 SRL에 쓰는 즉시 MRP0가 읽음</a:t>
             </a:r>
           </a:p>
           <a:p>
@@ -7746,7 +8846,7 @@
                 </a:solidFill>
                 <a:latin typeface="맑은 고딕"/>
               </a:rPr>
-              <a:t>•  보이지 않다가 `ARCHIVE LOG CURRENT` 후에 보이면 아카이브 적용</a:t>
+              <a:t>•  밀리면 아카이브 로그로 따라잡고 다시 SRL로</a:t>
             </a:r>
           </a:p>
           <a:p>
@@ -7762,7 +8862,7 @@
                 </a:solidFill>
                 <a:latin typeface="맑은 고딕"/>
               </a:rPr>
-              <a:t>•  Active Data Guard여야 가능한 시험</a:t>
+              <a:t>•  RECOVERY_MODE: MANAGED 대 MANAGED REAL TIME APPLY</a:t>
             </a:r>
           </a:p>
         </p:txBody>
@@ -7863,7 +8963,7 @@
                 </a:solidFill>
                 <a:latin typeface="맑은 고딕"/>
               </a:rPr>
-              <a:t>학습 목표 (Objectives)</a:t>
+              <a:t>학습 목표</a:t>
             </a:r>
           </a:p>
         </p:txBody>
@@ -7902,7 +9002,7 @@
                 </a:solidFill>
                 <a:latin typeface="맑은 고딕"/>
               </a:rPr>
-              <a:t>•  `V$MANAGED_STANDBY`의 프로세스(ARCH·DGRD·RFS·MRP0) 역할과 상태를 읽는다.</a:t>
+              <a:t>•  전송 서비스와 Redo Apply를 구분해 설명한다</a:t>
             </a:r>
           </a:p>
           <a:p>
@@ -7918,7 +9018,7 @@
                 </a:solidFill>
                 <a:latin typeface="맑은 고딕"/>
               </a:rPr>
-              <a:t>•  Redo Apply를 기동·중지하고 ORA-16136과 ORA-01153을 구분한다.</a:t>
+              <a:t>•  RFS, MRP0, 복구 슬레이브의 역할을 구분한다</a:t>
             </a:r>
           </a:p>
           <a:p>
@@ -7934,7 +9034,7 @@
                 </a:solidFill>
                 <a:latin typeface="맑은 고딕"/>
               </a:rPr>
-              <a:t>•  Standby의 `LOG_ARCHIVE_DEST_1`이 `BAD PARAM`이 되는 원인을 진단하고 고친다.</a:t>
+              <a:t>•  Redo Apply를 기동·중지하고 상태 오류를 해석한다</a:t>
             </a:r>
           </a:p>
           <a:p>
@@ -7950,7 +9050,7 @@
                 </a:solidFill>
                 <a:latin typeface="맑은 고딕"/>
               </a:rPr>
-              <a:t>•  `RECOVERY_MODE` 열과 기능 시험으로 실시간 적용 여부를 교차 검증한다.</a:t>
+              <a:t>•  실시간 적용의 조건과 19c 기본 동작을 판별한다</a:t>
             </a:r>
           </a:p>
           <a:p>
@@ -7966,7 +9066,7 @@
                 </a:solidFill>
                 <a:latin typeface="맑은 고딕"/>
               </a:rPr>
-              <a:t>•  19c에서 `USING CURRENT LOGFILE`이 사실상 불필요해진 것을 실측으로 확인한다.</a:t>
+              <a:t>•  갭 해소 경로(ARCn ping, FAL)와 DELAY를 설명한다</a:t>
             </a:r>
           </a:p>
           <a:p>
@@ -7982,23 +9082,7 @@
                 </a:solidFill>
                 <a:latin typeface="맑은 고딕"/>
               </a:rPr>
-              <a:t>•  갭을 만들어 `V$ARCHIVE_GAP`으로 관찰하고 해소 과정을 추적한다.</a:t>
-            </a:r>
-          </a:p>
-          <a:p>
-            <a:pPr algn="l">
-              <a:spcAft>
-                <a:spcPts val="1000"/>
-              </a:spcAft>
-            </a:pPr>
-            <a:r>
-              <a:rPr sz="1600" b="0">
-                <a:solidFill>
-                  <a:srgbClr val="222222"/>
-                </a:solidFill>
-                <a:latin typeface="맑은 고딕"/>
-              </a:rPr>
-              <a:t>•  `V$DATAGUARD_STATS` 네 행과 두 시각 열의 차이를 안다.</a:t>
+              <a:t>•  transport lag, apply lag로 지연 구간을 좁힌다</a:t>
             </a:r>
           </a:p>
         </p:txBody>
@@ -8099,7 +9183,7 @@
                 </a:solidFill>
                 <a:latin typeface="맑은 고딕"/>
               </a:rPr>
-              <a:t>실측 결과</a:t>
+              <a:t>SRL이 전제인 이유</a:t>
             </a:r>
           </a:p>
         </p:txBody>
@@ -8138,7 +9222,7 @@
                 </a:solidFill>
                 <a:latin typeface="맑은 고딕"/>
               </a:rPr>
-              <a:t>두 명령이 같다</a:t>
+              <a:t>쓰는 중인 파일을 동시에 읽는 구조</a:t>
             </a:r>
           </a:p>
         </p:txBody>
@@ -8177,7 +9261,7 @@
                 </a:solidFill>
                 <a:latin typeface="맑은 고딕"/>
               </a:rPr>
-              <a:t>•  `... DISCONNECT FROM SESSION` → MANAGED REAL TIME APPLY, 40초 내 보임</a:t>
+              <a:t>•  RFS가 SRL에 쓰지 않으면 실시간 적용 불가</a:t>
             </a:r>
           </a:p>
           <a:p>
@@ -8193,7 +9277,7 @@
                 </a:solidFill>
                 <a:latin typeface="맑은 고딕"/>
               </a:rPr>
-              <a:t>•  `... USING CURRENT LOGFILE ...` → MANAGED REAL TIME APPLY, 20초 내 보임</a:t>
+              <a:t>•  SRL 없음, 크기 부족, 모두 아카이브 대기 시 강등</a:t>
             </a:r>
           </a:p>
           <a:p>
@@ -8209,7 +9293,7 @@
                 </a:solidFill>
                 <a:latin typeface="맑은 고딕"/>
               </a:rPr>
-              <a:t>•  **SRL이 있으면 12.2 이후 실시간 적용이 기본**</a:t>
+              <a:t>•  4장 규칙: ORL과 같은 크기, 그룹 하나 더</a:t>
             </a:r>
           </a:p>
           <a:p>
@@ -8225,7 +9309,7 @@
                 </a:solidFill>
                 <a:latin typeface="맑은 고딕"/>
               </a:rPr>
-              <a:t>•  `USING CURRENT LOGFILE`은 받아들여지지만 동작을 바꾸지 않는다</a:t>
+              <a:t>•  적용 중인 SRL 삭제 시 ORA-00261</a:t>
             </a:r>
           </a:p>
         </p:txBody>
@@ -8257,7 +9341,7 @@
         <p:spPr>
           <a:xfrm>
             <a:off x="0" y="0"/>
-            <a:ext cx="12191695" cy="6858000"/>
+            <a:ext cx="12191695" cy="1005840"/>
           </a:xfrm>
           <a:prstGeom prst="rect">
             <a:avLst/>
@@ -8300,8 +9384,8 @@
         </p:nvSpPr>
         <p:spPr>
           <a:xfrm>
-            <a:off x="822960" y="2011680"/>
-            <a:ext cx="10515600" cy="1097280"/>
+            <a:off x="548640" y="91440"/>
+            <a:ext cx="10972800" cy="777240"/>
           </a:xfrm>
           <a:prstGeom prst="rect">
             <a:avLst/>
@@ -8320,13 +9404,13 @@
               </a:spcAft>
             </a:pPr>
             <a:r>
-              <a:rPr sz="4000" b="1">
+              <a:rPr sz="2600" b="1">
                 <a:solidFill>
                   <a:srgbClr val="FFFFFF"/>
                 </a:solidFill>
                 <a:latin typeface="맑은 고딕"/>
               </a:rPr>
-              <a:t>7.6</a:t>
+              <a:t>소리 없는 강등</a:t>
             </a:r>
           </a:p>
         </p:txBody>
@@ -8339,8 +9423,8 @@
         </p:nvSpPr>
         <p:spPr>
           <a:xfrm>
-            <a:off x="822960" y="3017520"/>
-            <a:ext cx="10515600" cy="914400"/>
+            <a:off x="640080" y="1078992"/>
+            <a:ext cx="10881360" cy="457200"/>
           </a:xfrm>
           <a:prstGeom prst="rect">
             <a:avLst/>
@@ -8359,71 +9443,27 @@
               </a:spcAft>
             </a:pPr>
             <a:r>
-              <a:rPr sz="2800" b="1">
-                <a:solidFill>
-                  <a:srgbClr val="FFFFFF"/>
-                </a:solidFill>
-                <a:latin typeface="맑은 고딕"/>
-              </a:rPr>
-              <a:t>갭과 지연</a:t>
-            </a:r>
-          </a:p>
-        </p:txBody>
-      </p:sp>
-      <p:sp>
-        <p:nvSpPr>
-          <p:cNvPr id="5" name="Rectangle 4"/>
-          <p:cNvSpPr/>
-          <p:nvPr/>
-        </p:nvSpPr>
-        <p:spPr>
-          <a:xfrm>
-            <a:off x="822960" y="4114800"/>
-            <a:ext cx="5486400" cy="54864"/>
-          </a:xfrm>
-          <a:prstGeom prst="rect">
-            <a:avLst/>
-          </a:prstGeom>
-          <a:solidFill>
-            <a:srgbClr val="FFFFFF"/>
-          </a:solidFill>
-          <a:ln>
-            <a:noFill/>
-          </a:ln>
-          <a:effectLst/>
-        </p:spPr>
-        <p:style>
-          <a:lnRef idx="1">
-            <a:schemeClr val="accent1"/>
-          </a:lnRef>
-          <a:fillRef idx="3">
-            <a:schemeClr val="accent1"/>
-          </a:fillRef>
-          <a:effectRef idx="2">
-            <a:schemeClr val="accent1"/>
-          </a:effectRef>
-          <a:fontRef idx="minor">
-            <a:schemeClr val="lt1"/>
-          </a:fontRef>
-        </p:style>
-        <p:txBody>
-          <a:bodyPr rtlCol="0" anchor="ctr"/>
-          <a:lstStyle/>
-          <a:p>
-            <a:pPr algn="ctr"/>
-          </a:p>
-        </p:txBody>
-      </p:sp>
-      <p:sp>
-        <p:nvSpPr>
-          <p:cNvPr id="6" name="TextBox 5"/>
+              <a:rPr sz="1500" b="0">
+                <a:solidFill>
+                  <a:srgbClr val="5A6672"/>
+                </a:solidFill>
+                <a:latin typeface="맑은 고딕"/>
+              </a:rPr>
+              <a:t>오류 없이 아카이브 기반으로 떨어진다</a:t>
+            </a:r>
+          </a:p>
+        </p:txBody>
+      </p:sp>
+      <p:sp>
+        <p:nvSpPr>
+          <p:cNvPr id="5" name="TextBox 4"/>
           <p:cNvSpPr txBox="1"/>
           <p:nvPr/>
         </p:nvSpPr>
         <p:spPr>
           <a:xfrm>
-            <a:off x="822960" y="4297680"/>
-            <a:ext cx="10058400" cy="2011680"/>
+            <a:off x="640080" y="1737360"/>
+            <a:ext cx="10881360" cy="4754880"/>
           </a:xfrm>
           <a:prstGeom prst="rect">
             <a:avLst/>
@@ -8438,49 +9478,65 @@
           <a:p>
             <a:pPr algn="l">
               <a:spcAft>
-                <a:spcPts val="800"/>
-              </a:spcAft>
-            </a:pPr>
-            <a:r>
-              <a:rPr sz="1600" b="0">
-                <a:solidFill>
-                  <a:srgbClr val="FFFFFF"/>
-                </a:solidFill>
-                <a:latin typeface="맑은 고딕"/>
-              </a:rPr>
-              <a:t>•  갭 만들기와 관찰</a:t>
-            </a:r>
-          </a:p>
-          <a:p>
-            <a:pPr algn="l">
-              <a:spcAft>
-                <a:spcPts val="800"/>
-              </a:spcAft>
-            </a:pPr>
-            <a:r>
-              <a:rPr sz="1600" b="0">
-                <a:solidFill>
-                  <a:srgbClr val="FFFFFF"/>
-                </a:solidFill>
-                <a:latin typeface="맑은 고딕"/>
-              </a:rPr>
-              <a:t>•  갭 0과 지연 0은 다르다</a:t>
-            </a:r>
-          </a:p>
-          <a:p>
-            <a:pPr algn="l">
-              <a:spcAft>
-                <a:spcPts val="800"/>
-              </a:spcAft>
-            </a:pPr>
-            <a:r>
-              <a:rPr sz="1600" b="0">
-                <a:solidFill>
-                  <a:srgbClr val="FFFFFF"/>
-                </a:solidFill>
-                <a:latin typeface="맑은 고딕"/>
-              </a:rPr>
-              <a:t>•  지연 읽기</a:t>
+                <a:spcPts val="1000"/>
+              </a:spcAft>
+            </a:pPr>
+            <a:r>
+              <a:rPr sz="1700" b="0">
+                <a:solidFill>
+                  <a:srgbClr val="222222"/>
+                </a:solidFill>
+                <a:latin typeface="맑은 고딕"/>
+              </a:rPr>
+              <a:t>•  기동 명령은 성공, MRP0도 정상으로 보임</a:t>
+            </a:r>
+          </a:p>
+          <a:p>
+            <a:pPr algn="l">
+              <a:spcAft>
+                <a:spcPts val="1000"/>
+              </a:spcAft>
+            </a:pPr>
+            <a:r>
+              <a:rPr sz="1700" b="0">
+                <a:solidFill>
+                  <a:srgbClr val="222222"/>
+                </a:solidFill>
+                <a:latin typeface="맑은 고딕"/>
+              </a:rPr>
+              <a:t>•  실제로는 로그 전환 때마다 계단식으로 적용</a:t>
+            </a:r>
+          </a:p>
+          <a:p>
+            <a:pPr algn="l">
+              <a:spcAft>
+                <a:spcPts val="1000"/>
+              </a:spcAft>
+            </a:pPr>
+            <a:r>
+              <a:rPr sz="1700" b="0">
+                <a:solidFill>
+                  <a:srgbClr val="222222"/>
+                </a:solidFill>
+                <a:latin typeface="맑은 고딕"/>
+              </a:rPr>
+              <a:t>•  Primary 로그를 키우고 SRL을 그대로 두면 발생</a:t>
+            </a:r>
+          </a:p>
+          <a:p>
+            <a:pPr algn="l">
+              <a:spcAft>
+                <a:spcPts val="1000"/>
+              </a:spcAft>
+            </a:pPr>
+            <a:r>
+              <a:rPr sz="1700" b="0">
+                <a:solidFill>
+                  <a:srgbClr val="222222"/>
+                </a:solidFill>
+                <a:latin typeface="맑은 고딕"/>
+              </a:rPr>
+              <a:t>•  판별 수단은 RECOVERY_MODE와 apply lag</a:t>
             </a:r>
           </a:p>
         </p:txBody>
@@ -8581,7 +9637,7 @@
                 </a:solidFill>
                 <a:latin typeface="맑은 고딕"/>
               </a:rPr>
-              <a:t>갭 만들기</a:t>
+              <a:t>19c 기본값과 명령 절</a:t>
             </a:r>
           </a:p>
         </p:txBody>
@@ -8620,7 +9676,7 @@
                 </a:solidFill>
                 <a:latin typeface="맑은 고딕"/>
               </a:rPr>
-              <a:t>적용을 멈추고 로그를 전환한다</a:t>
+              <a:t>12.1부터 실시간 적용이 기본</a:t>
             </a:r>
           </a:p>
         </p:txBody>
@@ -8659,7 +9715,7 @@
                 </a:solidFill>
                 <a:latin typeface="맑은 고딕"/>
               </a:rPr>
-              <a:t>•  Standby: CANCEL / Primary: `ARCHIVE LOG CURRENT` × 3</a:t>
+              <a:t>•  기본형 기동만으로 실시간 적용</a:t>
             </a:r>
           </a:p>
           <a:p>
@@ -8675,7 +9731,7 @@
                 </a:solidFill>
                 <a:latin typeface="맑은 고딕"/>
               </a:rPr>
-              <a:t>•  `V$ARCHIVE_GAP` : thread 1, 64 ~ 65</a:t>
+              <a:t>•  USING CURRENT LOGFILE: 디프리케이트, 효과 같음</a:t>
             </a:r>
           </a:p>
           <a:p>
@@ -8691,7 +9747,7 @@
                 </a:solidFill>
                 <a:latin typeface="맑은 고딕"/>
               </a:rPr>
-              <a:t>•  받은 것 66 / 적용한 것 61 — **다섯 개 밀림**</a:t>
+              <a:t>•  USING ARCHIVED LOGFILE: 실시간 적용 끄기</a:t>
             </a:r>
           </a:p>
           <a:p>
@@ -8707,7 +9763,7 @@
                 </a:solidFill>
                 <a:latin typeface="맑은 고딕"/>
               </a:rPr>
-              <a:t>•  갭은 두 개인데 밀린 것은 다섯 개</a:t>
+              <a:t>•  PARALLEL n, NODELAY, FINISH도 기동 시점에 결정</a:t>
             </a:r>
           </a:p>
         </p:txBody>
@@ -8808,7 +9864,7 @@
                 </a:solidFill>
                 <a:latin typeface="맑은 고딕"/>
               </a:rPr>
-              <a:t>갭 0, 지연 1분</a:t>
+              <a:t>실시간 적용 vs 실시간 조회</a:t>
             </a:r>
           </a:p>
         </p:txBody>
@@ -8847,7 +9903,7 @@
                 </a:solidFill>
                 <a:latin typeface="맑은 고딕"/>
               </a:rPr>
-              <a:t>다른 단계다</a:t>
+              <a:t>이름은 비슷, 기능과 라이선스는 다름</a:t>
             </a:r>
           </a:p>
         </p:txBody>
@@ -8886,7 +9942,7 @@
                 </a:solidFill>
                 <a:latin typeface="맑은 고딕"/>
               </a:rPr>
-              <a:t>•  적용 재기동 20초 뒤 : gaps 0, transport lag 59초, apply lag 64초</a:t>
+              <a:t>•  실시간 적용: MRP0가 SRL을 바로 읽는 적용 방식</a:t>
             </a:r>
           </a:p>
           <a:p>
@@ -8902,7 +9958,7 @@
                 </a:solidFill>
                 <a:latin typeface="맑은 고딕"/>
               </a:rPr>
-              <a:t>•  갭 = 빠진 파일이 있는가</a:t>
+              <a:t>•  실시간 조회: READ ONLY로 연 채 적용을 계속</a:t>
             </a:r>
           </a:p>
           <a:p>
@@ -8918,7 +9974,7 @@
                 </a:solidFill>
                 <a:latin typeface="맑은 고딕"/>
               </a:rPr>
-              <a:t>•  지연 = 얼마나 뒤처져 있는가</a:t>
+              <a:t>•  실시간 적용은 기본 기능, 조회는 ADG 옵션</a:t>
             </a:r>
           </a:p>
           <a:p>
@@ -8934,7 +9990,7 @@
                 </a:solidFill>
                 <a:latin typeface="맑은 고딕"/>
               </a:rPr>
-              <a:t>•  `apply lag &gt;= transport lag`이 정상 관계</a:t>
+              <a:t>•  마운트 Standby도 실시간 적용은 돌아감</a:t>
             </a:r>
           </a:p>
         </p:txBody>
@@ -9035,7 +10091,7 @@
                 </a:solidFill>
                 <a:latin typeface="맑은 고딕"/>
               </a:rPr>
-              <a:t>V$DATAGUARD_STATS 네 행</a:t>
+              <a:t>실시간 적용 판별</a:t>
             </a:r>
           </a:p>
         </p:txBody>
@@ -9074,7 +10130,7 @@
                 </a:solidFill>
                 <a:latin typeface="맑은 고딕"/>
               </a:rPr>
-              <a:t>과거 둘, 미래 둘</a:t>
+              <a:t>1차는 뷰, 2차는 기능 시험</a:t>
             </a:r>
           </a:p>
         </p:txBody>
@@ -9113,7 +10169,7 @@
                 </a:solidFill>
                 <a:latin typeface="맑은 고딕"/>
               </a:rPr>
-              <a:t>•  `transport lag` / `apply lag` — 과거. `DATUM_TIME`이 있다</a:t>
+              <a:t>•  V$ARCHIVE_DEST_STATUS.RECOVERY_MODE 확인</a:t>
             </a:r>
           </a:p>
           <a:p>
@@ -9129,7 +10185,7 @@
                 </a:solidFill>
                 <a:latin typeface="맑은 고딕"/>
               </a:rPr>
-              <a:t>•  `apply finish time` — 밀린 것을 다 적용하는 데 걸릴 시간</a:t>
+              <a:t>•  값: MANAGED REAL TIME APPLY / MANAGED / IDLE</a:t>
             </a:r>
           </a:p>
           <a:p>
@@ -9145,7 +10201,7 @@
                 </a:solidFill>
                 <a:latin typeface="맑은 고딕"/>
               </a:rPr>
-              <a:t>•  `estimated startup time` — 실측 **8초**</a:t>
+              <a:t>•  반드시 Standby 인스턴스에서 조회</a:t>
             </a:r>
           </a:p>
           <a:p>
@@ -9161,7 +10217,23 @@
                 </a:solidFill>
                 <a:latin typeface="맑은 고딕"/>
               </a:rPr>
-              <a:t>•  뒤의 둘은 예측이라 `DATUM_TIME`이 없다</a:t>
+              <a:t>•  기능 시험: 커밋 후 로그 전환 없이 Standby 조회</a:t>
+            </a:r>
+          </a:p>
+          <a:p>
+            <a:pPr algn="l">
+              <a:spcAft>
+                <a:spcPts val="1000"/>
+              </a:spcAft>
+            </a:pPr>
+            <a:r>
+              <a:rPr sz="1700" b="0">
+                <a:solidFill>
+                  <a:srgbClr val="222222"/>
+                </a:solidFill>
+                <a:latin typeface="맑은 고딕"/>
+              </a:rPr>
+              <a:t>•  기능 시험은 ADG 라이선스 환경에서만</a:t>
             </a:r>
           </a:p>
         </p:txBody>
@@ -9262,7 +10334,7 @@
                 </a:solidFill>
                 <a:latin typeface="맑은 고딕"/>
               </a:rPr>
-              <a:t>지연 값에도 지연이 있다</a:t>
+              <a:t>실시간 적용의 이점</a:t>
             </a:r>
           </a:p>
         </p:txBody>
@@ -9301,7 +10373,7 @@
                 </a:solidFill>
                 <a:latin typeface="맑은 고딕"/>
               </a:rPr>
-              <a:t>12초</a:t>
+              <a:t>운영상 손해는 거의 없다</a:t>
             </a:r>
           </a:p>
         </p:txBody>
@@ -9340,7 +10412,7 @@
                 </a:solidFill>
                 <a:latin typeface="맑은 고딕"/>
               </a:rPr>
-              <a:t>•  `TIME_COMPUTED` 10:43:24 — 계산한 시각</a:t>
+              <a:t>•  Switchover, Failover 시 남은 적용량 감소</a:t>
             </a:r>
           </a:p>
           <a:p>
@@ -9356,7 +10428,7 @@
                 </a:solidFill>
                 <a:latin typeface="맑은 고딕"/>
               </a:rPr>
-              <a:t>•  `DATUM_TIME` 10:43:12 — 근거가 된 정보의 시각</a:t>
+              <a:t>•  Failover 시간(RTO) 단축</a:t>
             </a:r>
           </a:p>
           <a:p>
@@ -9372,7 +10444,7 @@
                 </a:solidFill>
                 <a:latin typeface="맑은 고딕"/>
               </a:rPr>
-              <a:t>•  **"apply lag이 0이다" = "십수 초 전에는 0이었다"**</a:t>
+              <a:t>•  실시간 조회 결과가 Primary와 초 단위로 근접</a:t>
             </a:r>
           </a:p>
           <a:p>
@@ -9388,7 +10460,7 @@
                 </a:solidFill>
                 <a:latin typeface="맑은 고딕"/>
               </a:rPr>
-              <a:t>•  한 번의 조회로 단정하지 않는다. 두세 번 조회해 추세를 본다</a:t>
+              <a:t>•  큰 로그 파일을 써도 적용 지연이 늘지 않음</a:t>
             </a:r>
           </a:p>
         </p:txBody>
@@ -9420,7 +10492,7 @@
         <p:spPr>
           <a:xfrm>
             <a:off x="0" y="0"/>
-            <a:ext cx="12191695" cy="1005840"/>
+            <a:ext cx="12191695" cy="6858000"/>
           </a:xfrm>
           <a:prstGeom prst="rect">
             <a:avLst/>
@@ -9463,8 +10535,8 @@
         </p:nvSpPr>
         <p:spPr>
           <a:xfrm>
-            <a:off x="548640" y="91440"/>
-            <a:ext cx="10972800" cy="777240"/>
+            <a:off x="822960" y="2011680"/>
+            <a:ext cx="10515600" cy="1097280"/>
           </a:xfrm>
           <a:prstGeom prst="rect">
             <a:avLst/>
@@ -9483,13 +10555,13 @@
               </a:spcAft>
             </a:pPr>
             <a:r>
-              <a:rPr sz="2600" b="1">
+              <a:rPr sz="4000" b="1">
                 <a:solidFill>
                   <a:srgbClr val="FFFFFF"/>
                 </a:solidFill>
                 <a:latin typeface="맑은 고딕"/>
               </a:rPr>
-              <a:t>지연 원인 분류</a:t>
+              <a:t>7.5</a:t>
             </a:r>
           </a:p>
         </p:txBody>
@@ -9502,8 +10574,8 @@
         </p:nvSpPr>
         <p:spPr>
           <a:xfrm>
-            <a:off x="640080" y="1078992"/>
-            <a:ext cx="10881360" cy="457200"/>
+            <a:off x="822960" y="3017520"/>
+            <a:ext cx="10515600" cy="914400"/>
           </a:xfrm>
           <a:prstGeom prst="rect">
             <a:avLst/>
@@ -9522,27 +10594,71 @@
               </a:spcAft>
             </a:pPr>
             <a:r>
-              <a:rPr sz="1500" b="0">
-                <a:solidFill>
-                  <a:srgbClr val="5A6672"/>
-                </a:solidFill>
-                <a:latin typeface="맑은 고딕"/>
-              </a:rPr>
-              <a:t>어느 쪽이 큰가</a:t>
-            </a:r>
-          </a:p>
-        </p:txBody>
-      </p:sp>
-      <p:sp>
-        <p:nvSpPr>
-          <p:cNvPr id="5" name="TextBox 4"/>
+              <a:rPr sz="2800" b="1">
+                <a:solidFill>
+                  <a:srgbClr val="FFFFFF"/>
+                </a:solidFill>
+                <a:latin typeface="맑은 고딕"/>
+              </a:rPr>
+              <a:t>적용을 떠받치는 Standby 설정</a:t>
+            </a:r>
+          </a:p>
+        </p:txBody>
+      </p:sp>
+      <p:sp>
+        <p:nvSpPr>
+          <p:cNvPr id="5" name="Rectangle 4"/>
+          <p:cNvSpPr/>
+          <p:nvPr/>
+        </p:nvSpPr>
+        <p:spPr>
+          <a:xfrm>
+            <a:off x="822960" y="4114800"/>
+            <a:ext cx="5486400" cy="54864"/>
+          </a:xfrm>
+          <a:prstGeom prst="rect">
+            <a:avLst/>
+          </a:prstGeom>
+          <a:solidFill>
+            <a:srgbClr val="FFFFFF"/>
+          </a:solidFill>
+          <a:ln>
+            <a:noFill/>
+          </a:ln>
+          <a:effectLst/>
+        </p:spPr>
+        <p:style>
+          <a:lnRef idx="1">
+            <a:schemeClr val="accent1"/>
+          </a:lnRef>
+          <a:fillRef idx="3">
+            <a:schemeClr val="accent1"/>
+          </a:fillRef>
+          <a:effectRef idx="2">
+            <a:schemeClr val="accent1"/>
+          </a:effectRef>
+          <a:fontRef idx="minor">
+            <a:schemeClr val="lt1"/>
+          </a:fontRef>
+        </p:style>
+        <p:txBody>
+          <a:bodyPr rtlCol="0" anchor="ctr"/>
+          <a:lstStyle/>
+          <a:p>
+            <a:pPr algn="ctr"/>
+          </a:p>
+        </p:txBody>
+      </p:sp>
+      <p:sp>
+        <p:nvSpPr>
+          <p:cNvPr id="6" name="TextBox 5"/>
           <p:cNvSpPr txBox="1"/>
           <p:nvPr/>
         </p:nvSpPr>
         <p:spPr>
           <a:xfrm>
-            <a:off x="640080" y="1737360"/>
-            <a:ext cx="10881360" cy="4754880"/>
+            <a:off x="822960" y="4297680"/>
+            <a:ext cx="10058400" cy="2011680"/>
           </a:xfrm>
           <a:prstGeom prst="rect">
             <a:avLst/>
@@ -9557,65 +10673,49 @@
           <a:p>
             <a:pPr algn="l">
               <a:spcAft>
-                <a:spcPts val="1000"/>
-              </a:spcAft>
-            </a:pPr>
-            <a:r>
-              <a:rPr sz="1700" b="0">
-                <a:solidFill>
-                  <a:srgbClr val="222222"/>
-                </a:solidFill>
-                <a:latin typeface="맑은 고딕"/>
-              </a:rPr>
-              <a:t>•  `transport lag`만 크다 → 네트워크·전송 경로</a:t>
-            </a:r>
-          </a:p>
-          <a:p>
-            <a:pPr algn="l">
-              <a:spcAft>
-                <a:spcPts val="1000"/>
-              </a:spcAft>
-            </a:pPr>
-            <a:r>
-              <a:rPr sz="1700" b="0">
-                <a:solidFill>
-                  <a:srgbClr val="222222"/>
-                </a:solidFill>
-                <a:latin typeface="맑은 고딕"/>
-              </a:rPr>
-              <a:t>•  `apply lag`만 크다 → Standby의 적용 성능</a:t>
-            </a:r>
-          </a:p>
-          <a:p>
-            <a:pPr algn="l">
-              <a:spcAft>
-                <a:spcPts val="1000"/>
-              </a:spcAft>
-            </a:pPr>
-            <a:r>
-              <a:rPr sz="1700" b="0">
-                <a:solidFill>
-                  <a:srgbClr val="222222"/>
-                </a:solidFill>
-                <a:latin typeface="맑은 고딕"/>
-              </a:rPr>
-              <a:t>•  둘 다 크고 비슷 → 전송이 막혀 적용도 못 한다</a:t>
-            </a:r>
-          </a:p>
-          <a:p>
-            <a:pPr algn="l">
-              <a:spcAft>
-                <a:spcPts val="1000"/>
-              </a:spcAft>
-            </a:pPr>
-            <a:r>
-              <a:rPr sz="1700" b="0">
-                <a:solidFill>
-                  <a:srgbClr val="222222"/>
-                </a:solidFill>
-                <a:latin typeface="맑은 고딕"/>
-              </a:rPr>
-              <a:t>•  **둘 다 0인데 데이터가 최신이 아니다 → 적용이 멈췄다**</a:t>
+                <a:spcPts val="800"/>
+              </a:spcAft>
+            </a:pPr>
+            <a:r>
+              <a:rPr sz="1600" b="0">
+                <a:solidFill>
+                  <a:srgbClr val="FFFFFF"/>
+                </a:solidFill>
+                <a:latin typeface="맑은 고딕"/>
+              </a:rPr>
+              <a:t>•  Standby의 로컬 아카이브 목적지</a:t>
+            </a:r>
+          </a:p>
+          <a:p>
+            <a:pPr algn="l">
+              <a:spcAft>
+                <a:spcPts val="800"/>
+              </a:spcAft>
+            </a:pPr>
+            <a:r>
+              <a:rPr sz="1600" b="0">
+                <a:solidFill>
+                  <a:srgbClr val="FFFFFF"/>
+                </a:solidFill>
+                <a:latin typeface="맑은 고딕"/>
+              </a:rPr>
+              <a:t>•  목적지 STATUS 읽기</a:t>
+            </a:r>
+          </a:p>
+          <a:p>
+            <a:pPr algn="l">
+              <a:spcAft>
+                <a:spcPts val="800"/>
+              </a:spcAft>
+            </a:pPr>
+            <a:r>
+              <a:rPr sz="1600" b="0">
+                <a:solidFill>
+                  <a:srgbClr val="FFFFFF"/>
+                </a:solidFill>
+                <a:latin typeface="맑은 고딕"/>
+              </a:rPr>
+              <a:t>•  FAL과 파일 관리 파라미터</a:t>
             </a:r>
           </a:p>
         </p:txBody>
@@ -9647,7 +10747,7 @@
         <p:spPr>
           <a:xfrm>
             <a:off x="0" y="0"/>
-            <a:ext cx="12191695" cy="6858000"/>
+            <a:ext cx="12191695" cy="1005840"/>
           </a:xfrm>
           <a:prstGeom prst="rect">
             <a:avLst/>
@@ -9690,8 +10790,8 @@
         </p:nvSpPr>
         <p:spPr>
           <a:xfrm>
-            <a:off x="822960" y="2011680"/>
-            <a:ext cx="10515600" cy="1097280"/>
+            <a:off x="548640" y="91440"/>
+            <a:ext cx="10972800" cy="777240"/>
           </a:xfrm>
           <a:prstGeom prst="rect">
             <a:avLst/>
@@ -9710,13 +10810,13 @@
               </a:spcAft>
             </a:pPr>
             <a:r>
-              <a:rPr sz="4000" b="1">
+              <a:rPr sz="2600" b="1">
                 <a:solidFill>
                   <a:srgbClr val="FFFFFF"/>
                 </a:solidFill>
                 <a:latin typeface="맑은 고딕"/>
               </a:rPr>
-              <a:t>7.8</a:t>
+              <a:t>로컬 아카이브 목적지와 VALID_FOR</a:t>
             </a:r>
           </a:p>
         </p:txBody>
@@ -9729,8 +10829,8 @@
         </p:nvSpPr>
         <p:spPr>
           <a:xfrm>
-            <a:off x="822960" y="3017520"/>
-            <a:ext cx="10515600" cy="914400"/>
+            <a:off x="640080" y="1078992"/>
+            <a:ext cx="10881360" cy="457200"/>
           </a:xfrm>
           <a:prstGeom prst="rect">
             <a:avLst/>
@@ -9749,71 +10849,27 @@
               </a:spcAft>
             </a:pPr>
             <a:r>
-              <a:rPr sz="2800" b="1">
-                <a:solidFill>
-                  <a:srgbClr val="FFFFFF"/>
-                </a:solidFill>
-                <a:latin typeface="맑은 고딕"/>
-              </a:rPr>
-              <a:t>SRL과 점검 절차</a:t>
-            </a:r>
-          </a:p>
-        </p:txBody>
-      </p:sp>
-      <p:sp>
-        <p:nvSpPr>
-          <p:cNvPr id="5" name="Rectangle 4"/>
-          <p:cNvSpPr/>
-          <p:nvPr/>
-        </p:nvSpPr>
-        <p:spPr>
-          <a:xfrm>
-            <a:off x="822960" y="4114800"/>
-            <a:ext cx="5486400" cy="54864"/>
-          </a:xfrm>
-          <a:prstGeom prst="rect">
-            <a:avLst/>
-          </a:prstGeom>
-          <a:solidFill>
-            <a:srgbClr val="FFFFFF"/>
-          </a:solidFill>
-          <a:ln>
-            <a:noFill/>
-          </a:ln>
-          <a:effectLst/>
-        </p:spPr>
-        <p:style>
-          <a:lnRef idx="1">
-            <a:schemeClr val="accent1"/>
-          </a:lnRef>
-          <a:fillRef idx="3">
-            <a:schemeClr val="accent1"/>
-          </a:fillRef>
-          <a:effectRef idx="2">
-            <a:schemeClr val="accent1"/>
-          </a:effectRef>
-          <a:fontRef idx="minor">
-            <a:schemeClr val="lt1"/>
-          </a:fontRef>
-        </p:style>
-        <p:txBody>
-          <a:bodyPr rtlCol="0" anchor="ctr"/>
-          <a:lstStyle/>
-          <a:p>
-            <a:pPr algn="ctr"/>
-          </a:p>
-        </p:txBody>
-      </p:sp>
-      <p:sp>
-        <p:nvSpPr>
-          <p:cNvPr id="6" name="TextBox 5"/>
+              <a:rPr sz="1500" b="0">
+                <a:solidFill>
+                  <a:srgbClr val="5A6672"/>
+                </a:solidFill>
+                <a:latin typeface="맑은 고딕"/>
+              </a:rPr>
+              <a:t>다 찬 SRL은 어디로 가는가</a:t>
+            </a:r>
+          </a:p>
+        </p:txBody>
+      </p:sp>
+      <p:sp>
+        <p:nvSpPr>
+          <p:cNvPr id="5" name="TextBox 4"/>
           <p:cNvSpPr txBox="1"/>
           <p:nvPr/>
         </p:nvSpPr>
         <p:spPr>
           <a:xfrm>
-            <a:off x="822960" y="4297680"/>
-            <a:ext cx="10058400" cy="2011680"/>
+            <a:off x="640080" y="1737360"/>
+            <a:ext cx="10881360" cy="4754880"/>
           </a:xfrm>
           <a:prstGeom prst="rect">
             <a:avLst/>
@@ -9828,33 +10884,81 @@
           <a:p>
             <a:pPr algn="l">
               <a:spcAft>
-                <a:spcPts val="800"/>
-              </a:spcAft>
-            </a:pPr>
-            <a:r>
-              <a:rPr sz="1600" b="0">
-                <a:solidFill>
-                  <a:srgbClr val="FFFFFF"/>
-                </a:solidFill>
-                <a:latin typeface="맑은 고딕"/>
-              </a:rPr>
-              <a:t>•  SRL과 적용의 관계</a:t>
-            </a:r>
-          </a:p>
-          <a:p>
-            <a:pPr algn="l">
-              <a:spcAft>
-                <a:spcPts val="800"/>
-              </a:spcAft>
-            </a:pPr>
-            <a:r>
-              <a:rPr sz="1600" b="0">
-                <a:solidFill>
-                  <a:srgbClr val="FFFFFF"/>
-                </a:solidFill>
-                <a:latin typeface="맑은 고딕"/>
-              </a:rPr>
-              <a:t>•  통합 점검 조회</a:t>
+                <a:spcPts val="1000"/>
+              </a:spcAft>
+            </a:pPr>
+            <a:r>
+              <a:rPr sz="1700" b="0">
+                <a:solidFill>
+                  <a:srgbClr val="222222"/>
+                </a:solidFill>
+                <a:latin typeface="맑은 고딕"/>
+              </a:rPr>
+              <a:t>•  Standby ARCn이 SRL을 아카이브 로그로 만듦</a:t>
+            </a:r>
+          </a:p>
+          <a:p>
+            <a:pPr algn="l">
+              <a:spcAft>
+                <a:spcPts val="1000"/>
+              </a:spcAft>
+            </a:pPr>
+            <a:r>
+              <a:rPr sz="1700" b="0">
+                <a:solidFill>
+                  <a:srgbClr val="222222"/>
+                </a:solidFill>
+                <a:latin typeface="맑은 고딕"/>
+              </a:rPr>
+              <a:t>•  위치는 Standby의 LOG_ARCHIVE_DEST_1 등이 결정</a:t>
+            </a:r>
+          </a:p>
+          <a:p>
+            <a:pPr algn="l">
+              <a:spcAft>
+                <a:spcPts val="1000"/>
+              </a:spcAft>
+            </a:pPr>
+            <a:r>
+              <a:rPr sz="1700" b="0">
+                <a:solidFill>
+                  <a:srgbClr val="222222"/>
+                </a:solidFill>
+                <a:latin typeface="맑은 고딕"/>
+              </a:rPr>
+              <a:t>•  VALID_FOR에 SRL(ALL_LOGFILES 등)이 포함돼야 함</a:t>
+            </a:r>
+          </a:p>
+          <a:p>
+            <a:pPr algn="l">
+              <a:spcAft>
+                <a:spcPts val="1000"/>
+              </a:spcAft>
+            </a:pPr>
+            <a:r>
+              <a:rPr sz="1700" b="0">
+                <a:solidFill>
+                  <a:srgbClr val="222222"/>
+                </a:solidFill>
+                <a:latin typeface="맑은 고딕"/>
+              </a:rPr>
+              <a:t>•  ONLINE_LOGFILES만 지정하면 WRONG VALID_TYPE</a:t>
+            </a:r>
+          </a:p>
+          <a:p>
+            <a:pPr algn="l">
+              <a:spcAft>
+                <a:spcPts val="1000"/>
+              </a:spcAft>
+            </a:pPr>
+            <a:r>
+              <a:rPr sz="1700" b="0">
+                <a:solidFill>
+                  <a:srgbClr val="222222"/>
+                </a:solidFill>
+                <a:latin typeface="맑은 고딕"/>
+              </a:rPr>
+              <a:t>•  STANDBY_ARCHIVE_DEST는 디프리케이트</a:t>
             </a:r>
           </a:p>
         </p:txBody>
@@ -9955,7 +11059,7 @@
                 </a:solidFill>
                 <a:latin typeface="맑은 고딕"/>
               </a:rPr>
-              <a:t>SRL 하나여도 실시간 적용된다</a:t>
+              <a:t>목적지 STATUS 읽기</a:t>
             </a:r>
           </a:p>
         </p:txBody>
@@ -9994,7 +11098,7 @@
                 </a:solidFill>
                 <a:latin typeface="맑은 고딕"/>
               </a:rPr>
-              <a:t>규칙의 성격</a:t>
+              <a:t>INACTIVE와 BAD PARAM을 혼동하지 말 것</a:t>
             </a:r>
           </a:p>
         </p:txBody>
@@ -10033,7 +11137,7 @@
                 </a:solidFill>
                 <a:latin typeface="맑은 고딕"/>
               </a:rPr>
-              <a:t>•  네 그룹 중 셋을 지우고 하나만 남겼다</a:t>
+              <a:t>•  VALID: 정상 사용 중</a:t>
             </a:r>
           </a:p>
           <a:p>
@@ -10049,7 +11153,7 @@
                 </a:solidFill>
                 <a:latin typeface="맑은 고딕"/>
               </a:rPr>
-              <a:t>•  `RECOVERY_MODE` 유지, 전환 없이 커밋한 행 40초 내 보임</a:t>
+              <a:t>•  INACTIVE: 정의되지 않은 목적지, 정상</a:t>
             </a:r>
           </a:p>
           <a:p>
@@ -10065,7 +11169,7 @@
                 </a:solidFill>
                 <a:latin typeface="맑은 고딕"/>
               </a:rPr>
-              <a:t>•  4장의 "온라인 + 1" 규칙은 **최소 요건이 아니라 여유를 위한 권장**</a:t>
+              <a:t>•  BAD PARAM: 문자열을 해석하지 못함</a:t>
             </a:r>
           </a:p>
           <a:p>
@@ -10081,7 +11185,23 @@
                 </a:solidFill>
                 <a:latin typeface="맑은 고딕"/>
               </a:rPr>
-              <a:t>•  하나만이면 아카이브되는 동안 받을 자리가 없어 전송이 대기한다</a:t>
+              <a:t>•  ERROR: 문법은 맞지만 기록·연결 실패</a:t>
+            </a:r>
+          </a:p>
+          <a:p>
+            <a:pPr algn="l">
+              <a:spcAft>
+                <a:spcPts val="1000"/>
+              </a:spcAft>
+            </a:pPr>
+            <a:r>
+              <a:rPr sz="1700" b="0">
+                <a:solidFill>
+                  <a:srgbClr val="222222"/>
+                </a:solidFill>
+                <a:latin typeface="맑은 고딕"/>
+              </a:rPr>
+              <a:t>•  DEFERRED: 수동 보류 상태</a:t>
             </a:r>
           </a:p>
         </p:txBody>
@@ -10182,7 +11302,7 @@
                 </a:solidFill>
                 <a:latin typeface="맑은 고딕"/>
               </a:rPr>
-              <a:t>오류 두 개와 OMF의 흔적</a:t>
+              <a:t>FAL과 파일 관리 파라미터</a:t>
             </a:r>
           </a:p>
         </p:txBody>
@@ -10221,7 +11341,7 @@
                 </a:solidFill>
                 <a:latin typeface="맑은 고딕"/>
               </a:rPr>
-              <a:t>ORA-00261 / ORA-01184</a:t>
+              <a:t>기동 성공 뒤에도 적용을 좌우하는 설정</a:t>
             </a:r>
           </a:p>
         </p:txBody>
@@ -10260,7 +11380,7 @@
                 </a:solidFill>
                 <a:latin typeface="맑은 고딕"/>
               </a:rPr>
-              <a:t>•  ACTIVE인 SRL 삭제 → `ORA-00261` + `ORA-00312` **두 줄**</a:t>
+              <a:t>•  FAL_SERVER: 빠진 로그를 요청할 대상</a:t>
             </a:r>
           </a:p>
           <a:p>
@@ -10276,7 +11396,7 @@
                 </a:solidFill>
                 <a:latin typeface="맑은 고딕"/>
               </a:rPr>
-              <a:t>•  두 줄인 이유 : OMF라 그룹당 멤버가 둘 (oradata + FRA)</a:t>
+              <a:t>•  FAL_CLIENT: 19c에서는 선택, 설정 시 올바른 이름</a:t>
             </a:r>
           </a:p>
           <a:p>
@@ -10292,7 +11412,7 @@
                 </a:solidFill>
                 <a:latin typeface="맑은 고딕"/>
               </a:rPr>
-              <a:t>•  이미 있는 그룹 번호로 추가 → `ORA-01184`</a:t>
+              <a:t>•  Primary에도 반대 방향으로 미리 설정</a:t>
             </a:r>
           </a:p>
           <a:p>
@@ -10308,7 +11428,23 @@
                 </a:solidFill>
                 <a:latin typeface="맑은 고딕"/>
               </a:rPr>
-              <a:t>•  그룹별로 따로 실행하면 나머지는 성공한다</a:t>
+              <a:t>•  STANDBY_FILE_MANAGEMENT=AUTO (상세는 8장)</a:t>
+            </a:r>
+          </a:p>
+          <a:p>
+            <a:pPr algn="l">
+              <a:spcAft>
+                <a:spcPts val="1000"/>
+              </a:spcAft>
+            </a:pPr>
+            <a:r>
+              <a:rPr sz="1700" b="0">
+                <a:solidFill>
+                  <a:srgbClr val="222222"/>
+                </a:solidFill>
+                <a:latin typeface="맑은 고딕"/>
+              </a:rPr>
+              <a:t>•  파일 이름 변환·OMF 설정도 적용의 일부</a:t>
             </a:r>
           </a:p>
         </p:txBody>
@@ -10409,7 +11545,7 @@
                 </a:solidFill>
                 <a:latin typeface="맑은 고딕"/>
               </a:rPr>
-              <a:t>이 장의 구성 (Agenda)</a:t>
+              <a:t>Agenda</a:t>
             </a:r>
           </a:p>
         </p:txBody>
@@ -10448,7 +11584,7 @@
                 </a:solidFill>
                 <a:latin typeface="맑은 고딕"/>
               </a:rPr>
-              <a:t>•  7.2  적용은 누가 하는가</a:t>
+              <a:t>•  7.2  Redo Apply의 위치와 동작 원리</a:t>
             </a:r>
           </a:p>
           <a:p>
@@ -10464,7 +11600,7 @@
                 </a:solidFill>
                 <a:latin typeface="맑은 고딕"/>
               </a:rPr>
-              <a:t>•  7.3  적용 제어</a:t>
+              <a:t>•  7.3  Redo Apply 기동과 중지</a:t>
             </a:r>
           </a:p>
           <a:p>
@@ -10480,7 +11616,7 @@
                 </a:solidFill>
                 <a:latin typeface="맑은 고딕"/>
               </a:rPr>
-              <a:t>•  7.4  Standby 아카이브 목적지 — 세 번째 가이드 결함</a:t>
+              <a:t>•  7.4  실시간 적용 (Real-Time Apply)</a:t>
             </a:r>
           </a:p>
           <a:p>
@@ -10496,7 +11632,7 @@
                 </a:solidFill>
                 <a:latin typeface="맑은 고딕"/>
               </a:rPr>
-              <a:t>•  7.5  실시간 적용인가 — 두 가지 확인 방법</a:t>
+              <a:t>•  7.5  적용을 떠받치는 Standby 설정</a:t>
             </a:r>
           </a:p>
           <a:p>
@@ -10512,7 +11648,7 @@
                 </a:solidFill>
                 <a:latin typeface="맑은 고딕"/>
               </a:rPr>
-              <a:t>•  7.6  갭을 만들고 관찰하기</a:t>
+              <a:t>•  7.6  아카이브 갭과 FAL  /  7.7  지연 적용 (DELAY)</a:t>
             </a:r>
           </a:p>
           <a:p>
@@ -10528,39 +11664,7 @@
                 </a:solidFill>
                 <a:latin typeface="맑은 고딕"/>
               </a:rPr>
-              <a:t>•  7.7  지연 읽기</a:t>
-            </a:r>
-          </a:p>
-          <a:p>
-            <a:pPr algn="l">
-              <a:spcAft>
-                <a:spcPts val="1000"/>
-              </a:spcAft>
-            </a:pPr>
-            <a:r>
-              <a:rPr sz="1600" b="0">
-                <a:solidFill>
-                  <a:srgbClr val="222222"/>
-                </a:solidFill>
-                <a:latin typeface="맑은 고딕"/>
-              </a:rPr>
-              <a:t>•  7.8  SRL과 적용의 관계</a:t>
-            </a:r>
-          </a:p>
-          <a:p>
-            <a:pPr algn="l">
-              <a:spcAft>
-                <a:spcPts val="1000"/>
-              </a:spcAft>
-            </a:pPr>
-            <a:r>
-              <a:rPr sz="1600" b="0">
-                <a:solidFill>
-                  <a:srgbClr val="222222"/>
-                </a:solidFill>
-                <a:latin typeface="맑은 고딕"/>
-              </a:rPr>
-              <a:t>•  7.9  점검 순서 정리</a:t>
+              <a:t>•  7.8  동기화 상태를 판단하는 지표  /  7.9  운영 시 주의점</a:t>
             </a:r>
           </a:p>
         </p:txBody>
@@ -10661,7 +11765,7 @@
                 </a:solidFill>
                 <a:latin typeface="맑은 고딕"/>
               </a:rPr>
-              <a:t>통합 점검 조회</a:t>
+              <a:t>사례 — 기동은 성공, 적용은 제자리</a:t>
             </a:r>
           </a:p>
         </p:txBody>
@@ -10700,7 +11804,7 @@
                 </a:solidFill>
                 <a:latin typeface="맑은 고딕"/>
               </a:rPr>
-              <a:t>아홉 줄로 전부 본다</a:t>
+              <a:t>진단 순서 따라가기</a:t>
             </a:r>
           </a:p>
         </p:txBody>
@@ -10739,7 +11843,7 @@
                 </a:solidFill>
                 <a:latin typeface="맑은 고딕"/>
               </a:rPr>
-              <a:t>•  role/open · protection · mrp · recovery_mode</a:t>
+              <a:t>•  증상: MRP0는 보이는데 적용 위치가 거의 고정</a:t>
             </a:r>
           </a:p>
           <a:p>
@@ -10755,7 +11859,7 @@
                 </a:solidFill>
                 <a:latin typeface="맑은 고딕"/>
               </a:rPr>
-              <a:t>•  dest status · gaps · transport lag · apply lag · srl</a:t>
+              <a:t>•  1단계: RECOVERY_MODE가 MANAGED인지 확인</a:t>
             </a:r>
           </a:p>
           <a:p>
@@ -10771,7 +11875,7 @@
                 </a:solidFill>
                 <a:latin typeface="맑은 고딕"/>
               </a:rPr>
-              <a:t>•  `mrp` 행에 `NVL(..., '*** NOT RUNNING ***')`</a:t>
+              <a:t>•  2단계: Standby 로컬 목적지 STATUS 확인</a:t>
             </a:r>
           </a:p>
           <a:p>
@@ -10787,7 +11891,23 @@
                 </a:solidFill>
                 <a:latin typeface="맑은 고딕"/>
               </a:rPr>
-              <a:t>•  그 한 줄이 "지연 0인데 멈춰 있는" 함정을 막는다</a:t>
+              <a:t>•  원인: BAD PARAM으로 SRL 아카이브 불가</a:t>
+            </a:r>
+          </a:p>
+          <a:p>
+            <a:pPr algn="l">
+              <a:spcAft>
+                <a:spcPts val="1000"/>
+              </a:spcAft>
+            </a:pPr>
+            <a:r>
+              <a:rPr sz="1700" b="0">
+                <a:solidFill>
+                  <a:srgbClr val="222222"/>
+                </a:solidFill>
+                <a:latin typeface="맑은 고딕"/>
+              </a:rPr>
+              <a:t>•  교정 후 재기동, FAL 설정도 함께 점검</a:t>
             </a:r>
           </a:p>
         </p:txBody>
@@ -10819,7 +11939,7 @@
         <p:spPr>
           <a:xfrm>
             <a:off x="0" y="0"/>
-            <a:ext cx="12191695" cy="1005840"/>
+            <a:ext cx="12191695" cy="6858000"/>
           </a:xfrm>
           <a:prstGeom prst="rect">
             <a:avLst/>
@@ -10862,8 +11982,8 @@
         </p:nvSpPr>
         <p:spPr>
           <a:xfrm>
-            <a:off x="548640" y="91440"/>
-            <a:ext cx="10972800" cy="777240"/>
+            <a:off x="822960" y="2011680"/>
+            <a:ext cx="10515600" cy="1097280"/>
           </a:xfrm>
           <a:prstGeom prst="rect">
             <a:avLst/>
@@ -10882,13 +12002,13 @@
               </a:spcAft>
             </a:pPr>
             <a:r>
-              <a:rPr sz="2600" b="1">
+              <a:rPr sz="4000" b="1">
                 <a:solidFill>
                   <a:srgbClr val="FFFFFF"/>
                 </a:solidFill>
                 <a:latin typeface="맑은 고딕"/>
               </a:rPr>
-              <a:t>점검 순서</a:t>
+              <a:t>7.6</a:t>
             </a:r>
           </a:p>
         </p:txBody>
@@ -10901,8 +12021,8 @@
         </p:nvSpPr>
         <p:spPr>
           <a:xfrm>
-            <a:off x="640080" y="1078992"/>
-            <a:ext cx="10881360" cy="457200"/>
+            <a:off x="822960" y="3017520"/>
+            <a:ext cx="10515600" cy="914400"/>
           </a:xfrm>
           <a:prstGeom prst="rect">
             <a:avLst/>
@@ -10921,27 +12041,71 @@
               </a:spcAft>
             </a:pPr>
             <a:r>
-              <a:rPr sz="1500" b="0">
-                <a:solidFill>
-                  <a:srgbClr val="5A6672"/>
-                </a:solidFill>
-                <a:latin typeface="맑은 고딕"/>
-              </a:rPr>
-              <a:t>의존 관계가 있다</a:t>
-            </a:r>
-          </a:p>
-        </p:txBody>
-      </p:sp>
-      <p:sp>
-        <p:nvSpPr>
-          <p:cNvPr id="5" name="TextBox 4"/>
+              <a:rPr sz="2800" b="1">
+                <a:solidFill>
+                  <a:srgbClr val="FFFFFF"/>
+                </a:solidFill>
+                <a:latin typeface="맑은 고딕"/>
+              </a:rPr>
+              <a:t>아카이브 갭과 FAL</a:t>
+            </a:r>
+          </a:p>
+        </p:txBody>
+      </p:sp>
+      <p:sp>
+        <p:nvSpPr>
+          <p:cNvPr id="5" name="Rectangle 4"/>
+          <p:cNvSpPr/>
+          <p:nvPr/>
+        </p:nvSpPr>
+        <p:spPr>
+          <a:xfrm>
+            <a:off x="822960" y="4114800"/>
+            <a:ext cx="5486400" cy="54864"/>
+          </a:xfrm>
+          <a:prstGeom prst="rect">
+            <a:avLst/>
+          </a:prstGeom>
+          <a:solidFill>
+            <a:srgbClr val="FFFFFF"/>
+          </a:solidFill>
+          <a:ln>
+            <a:noFill/>
+          </a:ln>
+          <a:effectLst/>
+        </p:spPr>
+        <p:style>
+          <a:lnRef idx="1">
+            <a:schemeClr val="accent1"/>
+          </a:lnRef>
+          <a:fillRef idx="3">
+            <a:schemeClr val="accent1"/>
+          </a:fillRef>
+          <a:effectRef idx="2">
+            <a:schemeClr val="accent1"/>
+          </a:effectRef>
+          <a:fontRef idx="minor">
+            <a:schemeClr val="lt1"/>
+          </a:fontRef>
+        </p:style>
+        <p:txBody>
+          <a:bodyPr rtlCol="0" anchor="ctr"/>
+          <a:lstStyle/>
+          <a:p>
+            <a:pPr algn="ctr"/>
+          </a:p>
+        </p:txBody>
+      </p:sp>
+      <p:sp>
+        <p:nvSpPr>
+          <p:cNvPr id="6" name="TextBox 5"/>
           <p:cNvSpPr txBox="1"/>
           <p:nvPr/>
         </p:nvSpPr>
         <p:spPr>
           <a:xfrm>
-            <a:off x="640080" y="1737360"/>
-            <a:ext cx="10881360" cy="4754880"/>
+            <a:off x="822960" y="4297680"/>
+            <a:ext cx="10058400" cy="2011680"/>
           </a:xfrm>
           <a:prstGeom prst="rect">
             <a:avLst/>
@@ -10956,65 +12120,49 @@
           <a:p>
             <a:pPr algn="l">
               <a:spcAft>
-                <a:spcPts val="1000"/>
-              </a:spcAft>
-            </a:pPr>
-            <a:r>
-              <a:rPr sz="1700" b="0">
-                <a:solidFill>
-                  <a:srgbClr val="222222"/>
-                </a:solidFill>
-                <a:latin typeface="맑은 고딕"/>
-              </a:rPr>
-              <a:t>•  ① MRP0 존재 — 없으면 나머지는 무의미하다</a:t>
-            </a:r>
-          </a:p>
-          <a:p>
-            <a:pPr algn="l">
-              <a:spcAft>
-                <a:spcPts val="1000"/>
-              </a:spcAft>
-            </a:pPr>
-            <a:r>
-              <a:rPr sz="1700" b="0">
-                <a:solidFill>
-                  <a:srgbClr val="222222"/>
-                </a:solidFill>
-                <a:latin typeface="맑은 고딕"/>
-              </a:rPr>
-              <a:t>•  ② `RECOVERY_MODE` — IDLE이면 ③을 먼저 본다</a:t>
-            </a:r>
-          </a:p>
-          <a:p>
-            <a:pPr algn="l">
-              <a:spcAft>
-                <a:spcPts val="1000"/>
-              </a:spcAft>
-            </a:pPr>
-            <a:r>
-              <a:rPr sz="1700" b="0">
-                <a:solidFill>
-                  <a:srgbClr val="222222"/>
-                </a:solidFill>
-                <a:latin typeface="맑은 고딕"/>
-              </a:rPr>
-              <a:t>•  ③ 목적지 `STATUS` — BAD PARAM이면 ②를 믿을 수 없다</a:t>
-            </a:r>
-          </a:p>
-          <a:p>
-            <a:pPr algn="l">
-              <a:spcAft>
-                <a:spcPts val="1000"/>
-              </a:spcAft>
-            </a:pPr>
-            <a:r>
-              <a:rPr sz="1700" b="0">
-                <a:solidFill>
-                  <a:srgbClr val="222222"/>
-                </a:solidFill>
-                <a:latin typeface="맑은 고딕"/>
-              </a:rPr>
-              <a:t>•  ④ 갭 → ⑤ 지연(추세) → ⑥ 기능 시험</a:t>
+                <a:spcPts val="800"/>
+              </a:spcAft>
+            </a:pPr>
+            <a:r>
+              <a:rPr sz="1600" b="0">
+                <a:solidFill>
+                  <a:srgbClr val="FFFFFF"/>
+                </a:solidFill>
+                <a:latin typeface="맑은 고딕"/>
+              </a:rPr>
+              <a:t>•  갭이 생기는 원인</a:t>
+            </a:r>
+          </a:p>
+          <a:p>
+            <a:pPr algn="l">
+              <a:spcAft>
+                <a:spcPts val="800"/>
+              </a:spcAft>
+            </a:pPr>
+            <a:r>
+              <a:rPr sz="1600" b="0">
+                <a:solidFill>
+                  <a:srgbClr val="FFFFFF"/>
+                </a:solidFill>
+                <a:latin typeface="맑은 고딕"/>
+              </a:rPr>
+              <a:t>•  자동 해소의 두 경로</a:t>
+            </a:r>
+          </a:p>
+          <a:p>
+            <a:pPr algn="l">
+              <a:spcAft>
+                <a:spcPts val="800"/>
+              </a:spcAft>
+            </a:pPr>
+            <a:r>
+              <a:rPr sz="1600" b="0">
+                <a:solidFill>
+                  <a:srgbClr val="FFFFFF"/>
+                </a:solidFill>
+                <a:latin typeface="맑은 고딕"/>
+              </a:rPr>
+              <a:t>•  수동 해소와 예방</a:t>
             </a:r>
           </a:p>
         </p:txBody>
@@ -11115,7 +12263,7 @@
                 </a:solidFill>
                 <a:latin typeface="맑은 고딕"/>
               </a:rPr>
-              <a:t>같은 IDLE, 다른 원인</a:t>
+              <a:t>갭이 생기는 원인</a:t>
             </a:r>
           </a:p>
         </p:txBody>
@@ -11154,7 +12302,7 @@
                 </a:solidFill>
                 <a:latin typeface="맑은 고딕"/>
               </a:rPr>
-              <a:t>STATUS를 함께 본다</a:t>
+              <a:t>적용은 갭을 발견하고 기다리는 쪽</a:t>
             </a:r>
           </a:p>
         </p:txBody>
@@ -11193,7 +12341,7 @@
                 </a:solidFill>
                 <a:latin typeface="맑은 고딕"/>
               </a:rPr>
-              <a:t>•  `RECOVERY_MODE = IDLE` 이 두 가지 상황에서 나온다</a:t>
+              <a:t>•  네트워크 단절로 일정 시간 전송 불가</a:t>
             </a:r>
           </a:p>
           <a:p>
@@ -11209,7 +12357,7 @@
                 </a:solidFill>
                 <a:latin typeface="맑은 고딕"/>
               </a:rPr>
-              <a:t>•  ① 목적지가 `BAD PARAM` — 7.4절의 사례</a:t>
+              <a:t>•  Standby 인스턴스 다운 중 로그 전환</a:t>
             </a:r>
           </a:p>
           <a:p>
@@ -11225,7 +12373,7 @@
                 </a:solidFill>
                 <a:latin typeface="맑은 고딕"/>
               </a:rPr>
-              <a:t>•  ② 적용이 멈춤 — MRP0이 없다</a:t>
+              <a:t>•  Standby 디스크 부족으로 기록 실패</a:t>
             </a:r>
           </a:p>
           <a:p>
@@ -11241,7 +12389,23 @@
                 </a:solidFill>
                 <a:latin typeface="맑은 고딕"/>
               </a:rPr>
-              <a:t>•  `STATUS`가 VALID인지 아닌지로 갈린다</a:t>
+              <a:t>•  Primary 아카이브 로그가 전송 전 삭제</a:t>
+            </a:r>
+          </a:p>
+          <a:p>
+            <a:pPr algn="l">
+              <a:spcAft>
+                <a:spcPts val="1000"/>
+              </a:spcAft>
+            </a:pPr>
+            <a:r>
+              <a:rPr sz="1700" b="0">
+                <a:solidFill>
+                  <a:srgbClr val="222222"/>
+                </a:solidFill>
+                <a:latin typeface="맑은 고딕"/>
+              </a:rPr>
+              <a:t>•  갭 해소 중에는 apply lag가 일시적으로 커짐</a:t>
             </a:r>
           </a:p>
         </p:txBody>
@@ -11342,7 +12506,7 @@
                 </a:solidFill>
                 <a:latin typeface="맑은 고딕"/>
               </a:rPr>
-              <a:t>이 장이 남기는 습관</a:t>
+              <a:t>자동 해소의 두 경로</a:t>
             </a:r>
           </a:p>
         </p:txBody>
@@ -11381,7 +12545,7 @@
                 </a:solidFill>
                 <a:latin typeface="맑은 고딕"/>
               </a:rPr>
-              <a:t>세 가지</a:t>
+              <a:t>Primary가 먼저, 또는 Standby가 요청</a:t>
             </a:r>
           </a:p>
         </p:txBody>
@@ -11420,7 +12584,7 @@
                 </a:solidFill>
                 <a:latin typeface="맑은 고딕"/>
               </a:rPr>
-              <a:t>•  상태 열 하나로 판단하지 않는다 — 교차 검증한다</a:t>
+              <a:t>•  ARCn ping: Primary가 주기적으로 누락을 확인해 전송</a:t>
             </a:r>
           </a:p>
           <a:p>
@@ -11436,7 +12600,7 @@
                 </a:solidFill>
                 <a:latin typeface="맑은 고딕"/>
               </a:rPr>
-              <a:t>•  지연보다 **MRP0 존재**를 먼저 본다</a:t>
+              <a:t>•  FAL: MRP0가 부재를 발견해 FAL_SERVER에 요청</a:t>
             </a:r>
           </a:p>
           <a:p>
@@ -11452,7 +12616,23 @@
                 </a:solidFill>
                 <a:latin typeface="맑은 고딕"/>
               </a:rPr>
-              <a:t>•  값 하나가 아니라 **추세**를 본다</a:t>
+              <a:t>•  요청 받은 쪽 ARCn이 Standby RFS로 전송</a:t>
+            </a:r>
+          </a:p>
+          <a:p>
+            <a:pPr algn="l">
+              <a:spcAft>
+                <a:spcPts val="1000"/>
+              </a:spcAft>
+            </a:pPr>
+            <a:r>
+              <a:rPr sz="1700" b="0">
+                <a:solidFill>
+                  <a:srgbClr val="222222"/>
+                </a:solidFill>
+                <a:latin typeface="맑은 고딕"/>
+              </a:rPr>
+              <a:t>•  ping은 재연결에, FAL은 손상·유실에 강함</a:t>
             </a:r>
           </a:p>
         </p:txBody>
@@ -11553,7 +12733,7 @@
                 </a:solidFill>
                 <a:latin typeface="맑은 고딕"/>
               </a:rPr>
-              <a:t>퀴즈 (Quiz)</a:t>
+              <a:t>갭 확인과 수동 해소</a:t>
             </a:r>
           </a:p>
         </p:txBody>
@@ -11566,8 +12746,8 @@
         </p:nvSpPr>
         <p:spPr>
           <a:xfrm>
-            <a:off x="640080" y="1371600"/>
-            <a:ext cx="10881360" cy="5120640"/>
+            <a:off x="640080" y="1078992"/>
+            <a:ext cx="10881360" cy="457200"/>
           </a:xfrm>
           <a:prstGeom prst="rect">
             <a:avLst/>
@@ -11582,97 +12762,120 @@
           <a:p>
             <a:pPr algn="l">
               <a:spcAft>
-                <a:spcPts val="1000"/>
-              </a:spcAft>
-            </a:pPr>
-            <a:r>
-              <a:rPr sz="1600" b="0">
-                <a:solidFill>
-                  <a:srgbClr val="222222"/>
-                </a:solidFill>
-                <a:latin typeface="맑은 고딕"/>
-              </a:rPr>
-              <a:t>•  Q1. RFS와 MRP0의 `SEQUENCE#`가 같다는 것이 무엇을 뜻하며, 왜 유용한 판별법인가?</a:t>
-            </a:r>
-          </a:p>
-          <a:p>
-            <a:pPr algn="l">
-              <a:spcAft>
-                <a:spcPts val="1000"/>
-              </a:spcAft>
-            </a:pPr>
-            <a:r>
-              <a:rPr sz="1600" b="0">
-                <a:solidFill>
-                  <a:srgbClr val="222222"/>
-                </a:solidFill>
-                <a:latin typeface="맑은 고딕"/>
-              </a:rPr>
-              <a:t>•  Q2. Standby 목적지 1번이 `BAD PARAM`인데도 아카이브가 정상 생성된 이유는?</a:t>
-            </a:r>
-          </a:p>
-          <a:p>
-            <a:pPr algn="l">
-              <a:spcAft>
-                <a:spcPts val="1000"/>
-              </a:spcAft>
-            </a:pPr>
-            <a:r>
-              <a:rPr sz="1600" b="0">
-                <a:solidFill>
-                  <a:srgbClr val="222222"/>
-                </a:solidFill>
-                <a:latin typeface="맑은 고딕"/>
-              </a:rPr>
-              <a:t>•  Q3. `STATUS=BAD PARAM`과 `VALID_NOW=WRONG VALID_TYPE`은 각각 어떻게 대응해야 하는가?</a:t>
-            </a:r>
-          </a:p>
-          <a:p>
-            <a:pPr algn="l">
-              <a:spcAft>
-                <a:spcPts val="1000"/>
-              </a:spcAft>
-            </a:pPr>
-            <a:r>
-              <a:rPr sz="1600" b="0">
-                <a:solidFill>
-                  <a:srgbClr val="222222"/>
-                </a:solidFill>
-                <a:latin typeface="맑은 고딕"/>
-              </a:rPr>
-              <a:t>•  Q4. 19c에서 `USING CURRENT LOGFILE`의 실질적 효과는 무엇이며, 그럼에도 명시해야 하는 이유는?</a:t>
-            </a:r>
-          </a:p>
-          <a:p>
-            <a:pPr algn="l">
-              <a:spcAft>
-                <a:spcPts val="1000"/>
-              </a:spcAft>
-            </a:pPr>
-            <a:r>
-              <a:rPr sz="1600" b="0">
-                <a:solidFill>
-                  <a:srgbClr val="222222"/>
-                </a:solidFill>
-                <a:latin typeface="맑은 고딕"/>
-              </a:rPr>
-              <a:t>•  Q5. 갭이 0인데 지연이 1분인 상태를 어떻게 해석해야 하는가?</a:t>
-            </a:r>
-          </a:p>
-          <a:p>
-            <a:pPr algn="l">
-              <a:spcAft>
-                <a:spcPts val="1000"/>
-              </a:spcAft>
-            </a:pPr>
-            <a:r>
-              <a:rPr sz="1600" b="0">
-                <a:solidFill>
-                  <a:srgbClr val="222222"/>
-                </a:solidFill>
-                <a:latin typeface="맑은 고딕"/>
-              </a:rPr>
-              <a:t>•  Q6. 적용이 멈췄는데 두 지연이 0으로 보이는 이유와, 그때 무엇을 확인해야 하는가?</a:t>
+                <a:spcPts val="600"/>
+              </a:spcAft>
+            </a:pPr>
+            <a:r>
+              <a:rPr sz="1500" b="0">
+                <a:solidFill>
+                  <a:srgbClr val="5A6672"/>
+                </a:solidFill>
+                <a:latin typeface="맑은 고딕"/>
+              </a:rPr>
+              <a:t>자동으로 안 될 때의 순서</a:t>
+            </a:r>
+          </a:p>
+        </p:txBody>
+      </p:sp>
+      <p:sp>
+        <p:nvSpPr>
+          <p:cNvPr id="5" name="TextBox 4"/>
+          <p:cNvSpPr txBox="1"/>
+          <p:nvPr/>
+        </p:nvSpPr>
+        <p:spPr>
+          <a:xfrm>
+            <a:off x="640080" y="1737360"/>
+            <a:ext cx="10881360" cy="4754880"/>
+          </a:xfrm>
+          <a:prstGeom prst="rect">
+            <a:avLst/>
+          </a:prstGeom>
+          <a:noFill/>
+        </p:spPr>
+        <p:txBody>
+          <a:bodyPr wrap="square">
+            <a:spAutoFit/>
+          </a:bodyPr>
+          <a:lstStyle/>
+          <a:p>
+            <a:pPr algn="l">
+              <a:spcAft>
+                <a:spcPts val="1000"/>
+              </a:spcAft>
+            </a:pPr>
+            <a:r>
+              <a:rPr sz="1700" b="0">
+                <a:solidFill>
+                  <a:srgbClr val="222222"/>
+                </a:solidFill>
+                <a:latin typeface="맑은 고딕"/>
+              </a:rPr>
+              <a:t>•  Standby에서 V$ARCHIVE_GAP 조회</a:t>
+            </a:r>
+          </a:p>
+          <a:p>
+            <a:pPr algn="l">
+              <a:spcAft>
+                <a:spcPts val="1000"/>
+              </a:spcAft>
+            </a:pPr>
+            <a:r>
+              <a:rPr sz="1700" b="0">
+                <a:solidFill>
+                  <a:srgbClr val="222222"/>
+                </a:solidFill>
+                <a:latin typeface="맑은 고딕"/>
+              </a:rPr>
+              <a:t>•  몇 분 간격으로 다시 봐서 줄어드는지 확인</a:t>
+            </a:r>
+          </a:p>
+          <a:p>
+            <a:pPr algn="l">
+              <a:spcAft>
+                <a:spcPts val="1000"/>
+              </a:spcAft>
+            </a:pPr>
+            <a:r>
+              <a:rPr sz="1700" b="0">
+                <a:solidFill>
+                  <a:srgbClr val="222222"/>
+                </a:solidFill>
+                <a:latin typeface="맑은 고딕"/>
+              </a:rPr>
+              <a:t>•  원본 복사 후 ALTER DATABASE REGISTER PHYSICAL LOGFILE</a:t>
+            </a:r>
+          </a:p>
+          <a:p>
+            <a:pPr algn="l">
+              <a:spcAft>
+                <a:spcPts val="1000"/>
+              </a:spcAft>
+            </a:pPr>
+            <a:r>
+              <a:rPr sz="1700" b="0">
+                <a:solidFill>
+                  <a:srgbClr val="222222"/>
+                </a:solidFill>
+                <a:latin typeface="맑은 고딕"/>
+              </a:rPr>
+              <a:t>•  원본이 없으면 RECOVER STANDBY DATABASE FROM SERVICE</a:t>
+            </a:r>
+          </a:p>
+          <a:p>
+            <a:pPr algn="l">
+              <a:spcAft>
+                <a:spcPts val="1000"/>
+              </a:spcAft>
+            </a:pPr>
+            <a:r>
+              <a:rPr sz="1700" b="0">
+                <a:solidFill>
+                  <a:srgbClr val="222222"/>
+                </a:solidFill>
+                <a:latin typeface="맑은 고딕"/>
+              </a:rPr>
+              <a:t>•  갭이 있으면 Switchover 불가</a:t>
             </a:r>
           </a:p>
         </p:txBody>
@@ -11773,7 +12976,7 @@
                 </a:solidFill>
                 <a:latin typeface="맑은 고딕"/>
               </a:rPr>
-              <a:t>요약 (Summary)</a:t>
+              <a:t>갭과 보호 모드</a:t>
             </a:r>
           </a:p>
         </p:txBody>
@@ -11786,8 +12989,8 @@
         </p:nvSpPr>
         <p:spPr>
           <a:xfrm>
-            <a:off x="640080" y="1371600"/>
-            <a:ext cx="10881360" cy="5120640"/>
+            <a:off x="640080" y="1078992"/>
+            <a:ext cx="10881360" cy="457200"/>
           </a:xfrm>
           <a:prstGeom prst="rect">
             <a:avLst/>
@@ -11802,289 +13005,104 @@
           <a:p>
             <a:pPr algn="l">
               <a:spcAft>
-                <a:spcPts val="1000"/>
-              </a:spcAft>
-            </a:pPr>
-            <a:r>
-              <a:rPr sz="1600" b="0">
-                <a:solidFill>
-                  <a:srgbClr val="222222"/>
-                </a:solidFill>
-                <a:latin typeface="맑은 고딕"/>
-              </a:rPr>
-              <a:t>•  `V$MANAGED_STANDBY` 실측 9행. 진단에 쓰는 것은 RFS와 MRP0 둘이다.</a:t>
-            </a:r>
-          </a:p>
-          <a:p>
-            <a:pPr algn="l">
-              <a:spcAft>
-                <a:spcPts val="1000"/>
-              </a:spcAft>
-            </a:pPr>
-            <a:r>
-              <a:rPr sz="1600" b="0">
-                <a:solidFill>
-                  <a:srgbClr val="222222"/>
-                </a:solidFill>
-                <a:latin typeface="맑은 고딕"/>
-              </a:rPr>
-              <a:t>•  MRP0은 항상 하나다. 이 규칙에서 ORA-01153이 나온다.</a:t>
-            </a:r>
-          </a:p>
-          <a:p>
-            <a:pPr algn="l">
-              <a:spcAft>
-                <a:spcPts val="1000"/>
-              </a:spcAft>
-            </a:pPr>
-            <a:r>
-              <a:rPr sz="1600" b="0">
-                <a:solidFill>
-                  <a:srgbClr val="222222"/>
-                </a:solidFill>
-                <a:latin typeface="맑은 고딕"/>
-              </a:rPr>
-              <a:t>•  RFS와 MRP0의 `SEQUENCE#`·`BLOCK#`이 같으면 실시간 적용의 직접 증거다. MOUNTED에서도 쓸 수 있다.</a:t>
-            </a:r>
-          </a:p>
-          <a:p>
-            <a:pPr algn="l">
-              <a:spcAft>
-                <a:spcPts val="1000"/>
-              </a:spcAft>
-            </a:pPr>
-            <a:r>
-              <a:rPr sz="1600" b="0">
-                <a:solidFill>
-                  <a:srgbClr val="222222"/>
-                </a:solidFill>
-                <a:latin typeface="맑은 고딕"/>
-              </a:rPr>
-              <a:t>•  적용을 멈추면 MRP0이 사라지고 `OPEN_MODE`가 `READ ONLY`가 된다. **그런데 두 지연은 0으로 보인다.**</a:t>
-            </a:r>
-          </a:p>
-          <a:p>
-            <a:pPr algn="l">
-              <a:spcAft>
-                <a:spcPts val="1000"/>
-              </a:spcAft>
-            </a:pPr>
-            <a:r>
-              <a:rPr sz="1600" b="0">
-                <a:solidFill>
-                  <a:srgbClr val="222222"/>
-                </a:solidFill>
-                <a:latin typeface="맑은 고딕"/>
-              </a:rPr>
-              <a:t>•  멈춰 있는데 CANCEL → ORA-16136. 돌고 있는데 기동 → ORA-01153. 둘 다 상태를 바꾸지 않는다.</a:t>
-            </a:r>
-          </a:p>
-          <a:p>
-            <a:pPr algn="l">
-              <a:spcAft>
-                <a:spcPts val="1000"/>
-              </a:spcAft>
-            </a:pPr>
-            <a:r>
-              <a:rPr sz="1600" b="0">
-                <a:solidFill>
-                  <a:srgbClr val="222222"/>
-                </a:solidFill>
-                <a:latin typeface="맑은 고딕"/>
-              </a:rPr>
-              <a:t>•  재기동은 CANCEL → 대기 → 기동 → 확인. CANCEL을 먼저 내는 쪽이 항상 비용이 낮다.</a:t>
-            </a:r>
-          </a:p>
-          <a:p>
-            <a:pPr algn="l">
-              <a:spcAft>
-                <a:spcPts val="1000"/>
-              </a:spcAft>
-            </a:pPr>
-            <a:r>
-              <a:rPr sz="1600" b="0">
-                <a:solidFill>
-                  <a:srgbClr val="222222"/>
-                </a:solidFill>
-                <a:latin typeface="맑은 고딕"/>
-              </a:rPr>
-              <a:t>•  Standby의 `LOG_ARCHIVE_DEST_1`이 `db_unique_name=chicago` 상속으로 `BAD PARAM`이었다.</a:t>
-            </a:r>
-          </a:p>
-          <a:p>
-            <a:pPr algn="l">
-              <a:spcAft>
-                <a:spcPts val="1000"/>
-              </a:spcAft>
-            </a:pPr>
-            <a:r>
-              <a:rPr sz="1600" b="0">
-                <a:solidFill>
-                  <a:srgbClr val="222222"/>
-                </a:solidFill>
-                <a:latin typeface="맑은 고딕"/>
-              </a:rPr>
-              <a:t>•  FRA가 있어 기능은 우회로로 동작했다. 소리 없는 결함이며 역할 전환 후에 드러난다.</a:t>
-            </a:r>
-          </a:p>
-          <a:p>
-            <a:pPr algn="l">
-              <a:spcAft>
-                <a:spcPts val="1000"/>
-              </a:spcAft>
-            </a:pPr>
-            <a:r>
-              <a:rPr sz="1600" b="0">
-                <a:solidFill>
-                  <a:srgbClr val="222222"/>
-                </a:solidFill>
-                <a:latin typeface="맑은 고딕"/>
-              </a:rPr>
-              <a:t>•  고치면 `STATUS`가 VALID가 되고 `RECOVERY_MODE`가 되살아난다. 진단 도구가 고장 나 있던 것이다.</a:t>
-            </a:r>
-          </a:p>
-          <a:p>
-            <a:pPr algn="l">
-              <a:spcAft>
-                <a:spcPts val="1000"/>
-              </a:spcAft>
-            </a:pPr>
-            <a:r>
-              <a:rPr sz="1600" b="0">
-                <a:solidFill>
-                  <a:srgbClr val="222222"/>
-                </a:solidFill>
-                <a:latin typeface="맑은 고딕"/>
-              </a:rPr>
-              <a:t>•  `LOG_ARCHIVE_DEST_n`은 동적 파라미터라 `SCOPE=BOTH`로 즉시 반영된다.</a:t>
-            </a:r>
-          </a:p>
-          <a:p>
-            <a:pPr algn="l">
-              <a:spcAft>
-                <a:spcPts val="1000"/>
-              </a:spcAft>
-            </a:pPr>
-            <a:r>
-              <a:rPr sz="1600" b="0">
-                <a:solidFill>
-                  <a:srgbClr val="222222"/>
-                </a:solidFill>
-                <a:latin typeface="맑은 고딕"/>
-              </a:rPr>
-              <a:t>•  `WRONG VALID_TYPE`은 정상이다. 역할 전환용 목적지가 지금은 유효하지 않다는 뜻이다.</a:t>
-            </a:r>
-          </a:p>
-          <a:p>
-            <a:pPr algn="l">
-              <a:spcAft>
-                <a:spcPts val="1000"/>
-              </a:spcAft>
-            </a:pPr>
-            <a:r>
-              <a:rPr sz="1600" b="0">
-                <a:solidFill>
-                  <a:srgbClr val="222222"/>
-                </a:solidFill>
-                <a:latin typeface="맑은 고딕"/>
-              </a:rPr>
-              <a:t>•  상속 사례가 넷 — `CONTROL_FILES`·`LOG_ARCHIVE_DEST_1`·`FAL_CLIENT`, 그리고 막아 낸 `DB_NAME`.</a:t>
-            </a:r>
-          </a:p>
-          <a:p>
-            <a:pPr algn="l">
-              <a:spcAft>
-                <a:spcPts val="1000"/>
-              </a:spcAft>
-            </a:pPr>
-            <a:r>
-              <a:rPr sz="1600" b="0">
-                <a:solidFill>
-                  <a:srgbClr val="222222"/>
-                </a:solidFill>
-                <a:latin typeface="맑은 고딕"/>
-              </a:rPr>
-              <a:t>•  19c에서는 SRL이 있으면 `USING CURRENT LOGFILE` 없이도 실시간 적용이다. 그럼에도 명시하는 편이 낫다.</a:t>
-            </a:r>
-          </a:p>
-          <a:p>
-            <a:pPr algn="l">
-              <a:spcAft>
-                <a:spcPts val="1000"/>
-              </a:spcAft>
-            </a:pPr>
-            <a:r>
-              <a:rPr sz="1600" b="0">
-                <a:solidFill>
-                  <a:srgbClr val="222222"/>
-                </a:solidFill>
-                <a:latin typeface="맑은 고딕"/>
-              </a:rPr>
-              <a:t>•  `V$ARCHIVE_GAP`은 빠진 파일을 보여 준다. 실측 갭 2개, 밀린 것 5개로 서로 다르다.</a:t>
-            </a:r>
-          </a:p>
-          <a:p>
-            <a:pPr algn="l">
-              <a:spcAft>
-                <a:spcPts val="1000"/>
-              </a:spcAft>
-            </a:pPr>
-            <a:r>
-              <a:rPr sz="1600" b="0">
-                <a:solidFill>
-                  <a:srgbClr val="222222"/>
-                </a:solidFill>
-                <a:latin typeface="맑은 고딕"/>
-              </a:rPr>
-              <a:t>•  갭 0과 지연 0은 다르다. 실측에서 갭 0, 지연 59/64초인 구간이 있었다.</a:t>
-            </a:r>
-          </a:p>
-          <a:p>
-            <a:pPr algn="l">
-              <a:spcAft>
-                <a:spcPts val="1000"/>
-              </a:spcAft>
-            </a:pPr>
-            <a:r>
-              <a:rPr sz="1600" b="0">
-                <a:solidFill>
-                  <a:srgbClr val="222222"/>
-                </a:solidFill>
-                <a:latin typeface="맑은 고딕"/>
-              </a:rPr>
-              <a:t>•  `TIME_COMPUTED`와 `DATUM_TIME`이 12초 차이 났다. 지연 값 자체가 십수 초 전 정보다.</a:t>
-            </a:r>
-          </a:p>
-          <a:p>
-            <a:pPr algn="l">
-              <a:spcAft>
-                <a:spcPts val="1000"/>
-              </a:spcAft>
-            </a:pPr>
-            <a:r>
-              <a:rPr sz="1600" b="0">
-                <a:solidFill>
-                  <a:srgbClr val="222222"/>
-                </a:solidFill>
-                <a:latin typeface="맑은 고딕"/>
-              </a:rPr>
-              <a:t>•  SRL이 하나여도 실시간 적용은 동작한다. 개수 규칙은 여유를 위한 권장이다.</a:t>
-            </a:r>
-          </a:p>
-          <a:p>
-            <a:pPr algn="l">
-              <a:spcAft>
-                <a:spcPts val="1000"/>
-              </a:spcAft>
-            </a:pPr>
-            <a:r>
-              <a:rPr sz="1600" b="0">
-                <a:solidFill>
-                  <a:srgbClr val="222222"/>
-                </a:solidFill>
-                <a:latin typeface="맑은 고딕"/>
-              </a:rPr>
-              <a:t>•  ACTIVE인 SRL 삭제 → ORA-00261 + ORA-00312(OMF라 두 줄). 중복 그룹 추가 → ORA-01184.</a:t>
+                <a:spcPts val="600"/>
+              </a:spcAft>
+            </a:pPr>
+            <a:r>
+              <a:rPr sz="1500" b="0">
+                <a:solidFill>
+                  <a:srgbClr val="5A6672"/>
+                </a:solidFill>
+                <a:latin typeface="맑은 고딕"/>
+              </a:rPr>
+              <a:t>설정값과 실제 보장 수준은 다를 수 있다</a:t>
+            </a:r>
+          </a:p>
+        </p:txBody>
+      </p:sp>
+      <p:sp>
+        <p:nvSpPr>
+          <p:cNvPr id="5" name="TextBox 4"/>
+          <p:cNvSpPr txBox="1"/>
+          <p:nvPr/>
+        </p:nvSpPr>
+        <p:spPr>
+          <a:xfrm>
+            <a:off x="640080" y="1737360"/>
+            <a:ext cx="10881360" cy="4754880"/>
+          </a:xfrm>
+          <a:prstGeom prst="rect">
+            <a:avLst/>
+          </a:prstGeom>
+          <a:noFill/>
+        </p:spPr>
+        <p:txBody>
+          <a:bodyPr wrap="square">
+            <a:spAutoFit/>
+          </a:bodyPr>
+          <a:lstStyle/>
+          <a:p>
+            <a:pPr algn="l">
+              <a:spcAft>
+                <a:spcPts val="1000"/>
+              </a:spcAft>
+            </a:pPr>
+            <a:r>
+              <a:rPr sz="1700" b="0">
+                <a:solidFill>
+                  <a:srgbClr val="222222"/>
+                </a:solidFill>
+                <a:latin typeface="맑은 고딕"/>
+              </a:rPr>
+              <a:t>•  Maximum Availability: 단절 시 비동기화로 계속 운영</a:t>
+            </a:r>
+          </a:p>
+          <a:p>
+            <a:pPr algn="l">
+              <a:spcAft>
+                <a:spcPts val="1000"/>
+              </a:spcAft>
+            </a:pPr>
+            <a:r>
+              <a:rPr sz="1700" b="0">
+                <a:solidFill>
+                  <a:srgbClr val="222222"/>
+                </a:solidFill>
+                <a:latin typeface="맑은 고딕"/>
+              </a:rPr>
+              <a:t>•  갭이 모두 해소돼야 동기화 상태로 복귀</a:t>
+            </a:r>
+          </a:p>
+          <a:p>
+            <a:pPr algn="l">
+              <a:spcAft>
+                <a:spcPts val="1000"/>
+              </a:spcAft>
+            </a:pPr>
+            <a:r>
+              <a:rPr sz="1700" b="0">
+                <a:solidFill>
+                  <a:srgbClr val="222222"/>
+                </a:solidFill>
+                <a:latin typeface="맑은 고딕"/>
+              </a:rPr>
+              <a:t>•  PROTECTION_MODE는 설정, PROTECTION_LEVEL은 실제</a:t>
+            </a:r>
+          </a:p>
+          <a:p>
+            <a:pPr algn="l">
+              <a:spcAft>
+                <a:spcPts val="1000"/>
+              </a:spcAft>
+            </a:pPr>
+            <a:r>
+              <a:rPr sz="1700" b="0">
+                <a:solidFill>
+                  <a:srgbClr val="222222"/>
+                </a:solidFill>
+                <a:latin typeface="맑은 고딕"/>
+              </a:rPr>
+              <a:t>•  Maximum Performance는 갭이 있어도 Primary 무반응</a:t>
             </a:r>
           </a:p>
         </p:txBody>
@@ -12185,7 +13203,7 @@
                 </a:solidFill>
                 <a:latin typeface="맑은 고딕"/>
               </a:rPr>
-              <a:t>실습 개요 (Practice Overview)</a:t>
+              <a:t>삭제 정책으로 갭을 예방</a:t>
             </a:r>
           </a:p>
         </p:txBody>
@@ -12198,8 +13216,8 @@
         </p:nvSpPr>
         <p:spPr>
           <a:xfrm>
-            <a:off x="640080" y="1371600"/>
-            <a:ext cx="10881360" cy="5120640"/>
+            <a:off x="640080" y="1078992"/>
+            <a:ext cx="10881360" cy="457200"/>
           </a:xfrm>
           <a:prstGeom prst="rect">
             <a:avLst/>
@@ -12214,129 +13232,813 @@
           <a:p>
             <a:pPr algn="l">
               <a:spcAft>
-                <a:spcPts val="1000"/>
+                <a:spcPts val="600"/>
+              </a:spcAft>
+            </a:pPr>
+            <a:r>
+              <a:rPr sz="1500" b="0">
+                <a:solidFill>
+                  <a:srgbClr val="5A6672"/>
+                </a:solidFill>
+                <a:latin typeface="맑은 고딕"/>
+              </a:rPr>
+              <a:t>가장 어려운 갭은 스스로 만든 갭</a:t>
+            </a:r>
+          </a:p>
+        </p:txBody>
+      </p:sp>
+      <p:sp>
+        <p:nvSpPr>
+          <p:cNvPr id="5" name="TextBox 4"/>
+          <p:cNvSpPr txBox="1"/>
+          <p:nvPr/>
+        </p:nvSpPr>
+        <p:spPr>
+          <a:xfrm>
+            <a:off x="640080" y="1737360"/>
+            <a:ext cx="10881360" cy="4754880"/>
+          </a:xfrm>
+          <a:prstGeom prst="rect">
+            <a:avLst/>
+          </a:prstGeom>
+          <a:noFill/>
+        </p:spPr>
+        <p:txBody>
+          <a:bodyPr wrap="square">
+            <a:spAutoFit/>
+          </a:bodyPr>
+          <a:lstStyle/>
+          <a:p>
+            <a:pPr algn="l">
+              <a:spcAft>
+                <a:spcPts val="1000"/>
+              </a:spcAft>
+            </a:pPr>
+            <a:r>
+              <a:rPr sz="1700" b="0">
+                <a:solidFill>
+                  <a:srgbClr val="222222"/>
+                </a:solidFill>
+                <a:latin typeface="맑은 고딕"/>
+              </a:rPr>
+              <a:t>•  원인: FRA 공간 압박, 백업 후 일괄 삭제</a:t>
+            </a:r>
+          </a:p>
+          <a:p>
+            <a:pPr algn="l">
+              <a:spcAft>
+                <a:spcPts val="1000"/>
+              </a:spcAft>
+            </a:pPr>
+            <a:r>
+              <a:rPr sz="1700" b="0">
+                <a:solidFill>
+                  <a:srgbClr val="222222"/>
+                </a:solidFill>
+                <a:latin typeface="맑은 고딕"/>
+              </a:rPr>
+              <a:t>•  APPLIED ON ALL STANDBY 정책 권장</a:t>
+            </a:r>
+          </a:p>
+          <a:p>
+            <a:pPr algn="l">
+              <a:spcAft>
+                <a:spcPts val="1000"/>
+              </a:spcAft>
+            </a:pPr>
+            <a:r>
+              <a:rPr sz="1700" b="0">
+                <a:solidFill>
+                  <a:srgbClr val="222222"/>
+                </a:solidFill>
+                <a:latin typeface="맑은 고딕"/>
+              </a:rPr>
+              <a:t>•  최소한 SHIPPED TO ALL STANDBY</a:t>
+            </a:r>
+          </a:p>
+          <a:p>
+            <a:pPr algn="l">
+              <a:spcAft>
+                <a:spcPts val="1000"/>
+              </a:spcAft>
+            </a:pPr>
+            <a:r>
+              <a:rPr sz="1700" b="0">
+                <a:solidFill>
+                  <a:srgbClr val="222222"/>
+                </a:solidFill>
+                <a:latin typeface="맑은 고딕"/>
+              </a:rPr>
+              <a:t>•  Primary와 Standby 양쪽에 같은 정책</a:t>
+            </a:r>
+          </a:p>
+        </p:txBody>
+      </p:sp>
+    </p:spTree>
+  </p:cSld>
+  <p:clrMapOvr>
+    <a:masterClrMapping/>
+  </p:clrMapOvr>
+</p:sld>
+</file>
+
+<file path=ppt/slides/slide37.xml><?xml version="1.0" encoding="utf-8"?>
+<p:sld xmlns:a="http://schemas.openxmlformats.org/drawingml/2006/main" xmlns:p="http://schemas.openxmlformats.org/presentationml/2006/main" xmlns:r="http://schemas.openxmlformats.org/officeDocument/2006/relationships">
+  <p:cSld>
+    <p:spTree>
+      <p:nvGrpSpPr>
+        <p:cNvPr id="1" name=""/>
+        <p:cNvGrpSpPr/>
+        <p:nvPr/>
+      </p:nvGrpSpPr>
+      <p:grpSpPr/>
+      <p:sp>
+        <p:nvSpPr>
+          <p:cNvPr id="2" name="Rectangle 1"/>
+          <p:cNvSpPr/>
+          <p:nvPr/>
+        </p:nvSpPr>
+        <p:spPr>
+          <a:xfrm>
+            <a:off x="0" y="0"/>
+            <a:ext cx="12191695" cy="6858000"/>
+          </a:xfrm>
+          <a:prstGeom prst="rect">
+            <a:avLst/>
+          </a:prstGeom>
+          <a:solidFill>
+            <a:srgbClr val="C0392B"/>
+          </a:solidFill>
+          <a:ln>
+            <a:noFill/>
+          </a:ln>
+          <a:effectLst/>
+        </p:spPr>
+        <p:style>
+          <a:lnRef idx="1">
+            <a:schemeClr val="accent1"/>
+          </a:lnRef>
+          <a:fillRef idx="3">
+            <a:schemeClr val="accent1"/>
+          </a:fillRef>
+          <a:effectRef idx="2">
+            <a:schemeClr val="accent1"/>
+          </a:effectRef>
+          <a:fontRef idx="minor">
+            <a:schemeClr val="lt1"/>
+          </a:fontRef>
+        </p:style>
+        <p:txBody>
+          <a:bodyPr rtlCol="0" anchor="ctr"/>
+          <a:lstStyle/>
+          <a:p>
+            <a:pPr algn="ctr"/>
+          </a:p>
+        </p:txBody>
+      </p:sp>
+      <p:sp>
+        <p:nvSpPr>
+          <p:cNvPr id="3" name="TextBox 2"/>
+          <p:cNvSpPr txBox="1"/>
+          <p:nvPr/>
+        </p:nvSpPr>
+        <p:spPr>
+          <a:xfrm>
+            <a:off x="822960" y="2011680"/>
+            <a:ext cx="10515600" cy="1097280"/>
+          </a:xfrm>
+          <a:prstGeom prst="rect">
+            <a:avLst/>
+          </a:prstGeom>
+          <a:noFill/>
+        </p:spPr>
+        <p:txBody>
+          <a:bodyPr wrap="square">
+            <a:spAutoFit/>
+          </a:bodyPr>
+          <a:lstStyle/>
+          <a:p>
+            <a:pPr algn="l">
+              <a:spcAft>
+                <a:spcPts val="600"/>
+              </a:spcAft>
+            </a:pPr>
+            <a:r>
+              <a:rPr sz="4000" b="1">
+                <a:solidFill>
+                  <a:srgbClr val="FFFFFF"/>
+                </a:solidFill>
+                <a:latin typeface="맑은 고딕"/>
+              </a:rPr>
+              <a:t>7.7</a:t>
+            </a:r>
+          </a:p>
+        </p:txBody>
+      </p:sp>
+      <p:sp>
+        <p:nvSpPr>
+          <p:cNvPr id="4" name="TextBox 3"/>
+          <p:cNvSpPr txBox="1"/>
+          <p:nvPr/>
+        </p:nvSpPr>
+        <p:spPr>
+          <a:xfrm>
+            <a:off x="822960" y="3017520"/>
+            <a:ext cx="10515600" cy="914400"/>
+          </a:xfrm>
+          <a:prstGeom prst="rect">
+            <a:avLst/>
+          </a:prstGeom>
+          <a:noFill/>
+        </p:spPr>
+        <p:txBody>
+          <a:bodyPr wrap="square">
+            <a:spAutoFit/>
+          </a:bodyPr>
+          <a:lstStyle/>
+          <a:p>
+            <a:pPr algn="l">
+              <a:spcAft>
+                <a:spcPts val="600"/>
+              </a:spcAft>
+            </a:pPr>
+            <a:r>
+              <a:rPr sz="2800" b="1">
+                <a:solidFill>
+                  <a:srgbClr val="FFFFFF"/>
+                </a:solidFill>
+                <a:latin typeface="맑은 고딕"/>
+              </a:rPr>
+              <a:t>지연 적용 (DELAY)</a:t>
+            </a:r>
+          </a:p>
+        </p:txBody>
+      </p:sp>
+      <p:sp>
+        <p:nvSpPr>
+          <p:cNvPr id="5" name="Rectangle 4"/>
+          <p:cNvSpPr/>
+          <p:nvPr/>
+        </p:nvSpPr>
+        <p:spPr>
+          <a:xfrm>
+            <a:off x="822960" y="4114800"/>
+            <a:ext cx="5486400" cy="54864"/>
+          </a:xfrm>
+          <a:prstGeom prst="rect">
+            <a:avLst/>
+          </a:prstGeom>
+          <a:solidFill>
+            <a:srgbClr val="FFFFFF"/>
+          </a:solidFill>
+          <a:ln>
+            <a:noFill/>
+          </a:ln>
+          <a:effectLst/>
+        </p:spPr>
+        <p:style>
+          <a:lnRef idx="1">
+            <a:schemeClr val="accent1"/>
+          </a:lnRef>
+          <a:fillRef idx="3">
+            <a:schemeClr val="accent1"/>
+          </a:fillRef>
+          <a:effectRef idx="2">
+            <a:schemeClr val="accent1"/>
+          </a:effectRef>
+          <a:fontRef idx="minor">
+            <a:schemeClr val="lt1"/>
+          </a:fontRef>
+        </p:style>
+        <p:txBody>
+          <a:bodyPr rtlCol="0" anchor="ctr"/>
+          <a:lstStyle/>
+          <a:p>
+            <a:pPr algn="ctr"/>
+          </a:p>
+        </p:txBody>
+      </p:sp>
+      <p:sp>
+        <p:nvSpPr>
+          <p:cNvPr id="6" name="TextBox 5"/>
+          <p:cNvSpPr txBox="1"/>
+          <p:nvPr/>
+        </p:nvSpPr>
+        <p:spPr>
+          <a:xfrm>
+            <a:off x="822960" y="4297680"/>
+            <a:ext cx="10058400" cy="2011680"/>
+          </a:xfrm>
+          <a:prstGeom prst="rect">
+            <a:avLst/>
+          </a:prstGeom>
+          <a:noFill/>
+        </p:spPr>
+        <p:txBody>
+          <a:bodyPr wrap="square">
+            <a:spAutoFit/>
+          </a:bodyPr>
+          <a:lstStyle/>
+          <a:p>
+            <a:pPr algn="l">
+              <a:spcAft>
+                <a:spcPts val="800"/>
               </a:spcAft>
             </a:pPr>
             <a:r>
               <a:rPr sz="1600" b="0">
                 <a:solidFill>
-                  <a:srgbClr val="222222"/>
-                </a:solidFill>
-                <a:latin typeface="맑은 고딕"/>
-              </a:rPr>
-              <a:t>•  실습 01 — 적용 프로세스 관찰: 9행을 읽고 RFS와 MRP0의 관계를 확인한다. 지연 0의 함정을 재현한다.</a:t>
-            </a:r>
-          </a:p>
-          <a:p>
-            <a:pPr algn="l">
-              <a:spcAft>
-                <a:spcPts val="1000"/>
+                  <a:srgbClr val="FFFFFF"/>
+                </a:solidFill>
+                <a:latin typeface="맑은 고딕"/>
+              </a:rPr>
+              <a:t>•  일부러 늦게 적용하는 이유</a:t>
+            </a:r>
+          </a:p>
+          <a:p>
+            <a:pPr algn="l">
+              <a:spcAft>
+                <a:spcPts val="800"/>
               </a:spcAft>
             </a:pPr>
             <a:r>
               <a:rPr sz="1600" b="0">
                 <a:solidFill>
-                  <a:srgbClr val="222222"/>
-                </a:solidFill>
-                <a:latin typeface="맑은 고딕"/>
-              </a:rPr>
-              <a:t>•  실습 02 — 적용 제어와 오류: ORA-16136과 ORA-01153을 재현하고 안전한 재기동 순서를 익힌다.</a:t>
-            </a:r>
-          </a:p>
-          <a:p>
-            <a:pPr algn="l">
-              <a:spcAft>
-                <a:spcPts val="1000"/>
+                  <a:srgbClr val="FFFFFF"/>
+                </a:solidFill>
+                <a:latin typeface="맑은 고딕"/>
+              </a:rPr>
+              <a:t>•  DELAY 속성과 실시간 적용의 관계</a:t>
+            </a:r>
+          </a:p>
+          <a:p>
+            <a:pPr algn="l">
+              <a:spcAft>
+                <a:spcPts val="800"/>
               </a:spcAft>
             </a:pPr>
             <a:r>
               <a:rPr sz="1600" b="0">
                 <a:solidFill>
-                  <a:srgbClr val="222222"/>
-                </a:solidFill>
-                <a:latin typeface="맑은 고딕"/>
-              </a:rPr>
-              <a:t>•  실습 03 — BAD PARAM 진단과 교정: 상속된 두 파라미터를 고치고 `RECOVERY_MODE` 변화를 확인한다.</a:t>
-            </a:r>
-          </a:p>
-          <a:p>
-            <a:pPr algn="l">
-              <a:spcAft>
-                <a:spcPts val="1000"/>
-              </a:spcAft>
-            </a:pPr>
-            <a:r>
-              <a:rPr sz="1600" b="0">
-                <a:solidFill>
-                  <a:srgbClr val="222222"/>
-                </a:solidFill>
-                <a:latin typeface="맑은 고딕"/>
-              </a:rPr>
-              <a:t>•  실습 04 — 실시간 적용 판별: 두 기동 명령을 기능 시험으로 비교한다. ORA-00942를 재현한다.</a:t>
-            </a:r>
-          </a:p>
-          <a:p>
-            <a:pPr algn="l">
-              <a:spcAft>
-                <a:spcPts val="1000"/>
-              </a:spcAft>
-            </a:pPr>
-            <a:r>
-              <a:rPr sz="1600" b="0">
-                <a:solidFill>
-                  <a:srgbClr val="222222"/>
-                </a:solidFill>
-                <a:latin typeface="맑은 고딕"/>
-              </a:rPr>
-              <a:t>•  실습 05 — 갭 만들기와 해소: `V$ARCHIVE_GAP`을 관찰하고 따라잡는 과정을 추적한다.</a:t>
-            </a:r>
-          </a:p>
-          <a:p>
-            <a:pPr algn="l">
-              <a:spcAft>
-                <a:spcPts val="1000"/>
-              </a:spcAft>
-            </a:pPr>
-            <a:r>
-              <a:rPr sz="1600" b="0">
-                <a:solidFill>
-                  <a:srgbClr val="222222"/>
-                </a:solidFill>
-                <a:latin typeface="맑은 고딕"/>
-              </a:rPr>
-              <a:t>•  실습 06 — 지연 읽기: 네 행과 두 시각 열을 해석하고 통합 점검 조회를 만든다.</a:t>
-            </a:r>
-          </a:p>
-          <a:p>
-            <a:pPr algn="l">
-              <a:spcAft>
-                <a:spcPts val="1000"/>
-              </a:spcAft>
-            </a:pPr>
-            <a:r>
-              <a:rPr sz="1600" b="0">
-                <a:solidFill>
-                  <a:srgbClr val="222222"/>
-                </a:solidFill>
-                <a:latin typeface="맑은 고딕"/>
-              </a:rPr>
-              <a:t>•  실습 07 — SRL과 적용: SRL을 지웠다 복구하며 ORA-00261·ORA-01184를 재현한다.</a:t>
-            </a:r>
-          </a:p>
-          <a:p>
-            <a:pPr algn="l">
-              <a:spcAft>
-                <a:spcPts val="1000"/>
-              </a:spcAft>
-            </a:pPr>
-            <a:r>
-              <a:rPr sz="1600" b="0">
-                <a:solidFill>
-                  <a:srgbClr val="222222"/>
-                </a:solidFill>
-                <a:latin typeface="맑은 고딕"/>
-              </a:rPr>
-              <a:t>•  실습 05·07은 적용을 멈추거나 SRL을 변경한다. 각 실습 끝에서 반드시 원복한다.</a:t>
+                  <a:srgbClr val="FFFFFF"/>
+                </a:solidFill>
+                <a:latin typeface="맑은 고딕"/>
+              </a:rPr>
+              <a:t>•  지연 Standby를 고르는 기준</a:t>
+            </a:r>
+          </a:p>
+        </p:txBody>
+      </p:sp>
+    </p:spTree>
+  </p:cSld>
+  <p:clrMapOvr>
+    <a:masterClrMapping/>
+  </p:clrMapOvr>
+</p:sld>
+</file>
+
+<file path=ppt/slides/slide38.xml><?xml version="1.0" encoding="utf-8"?>
+<p:sld xmlns:a="http://schemas.openxmlformats.org/drawingml/2006/main" xmlns:p="http://schemas.openxmlformats.org/presentationml/2006/main" xmlns:r="http://schemas.openxmlformats.org/officeDocument/2006/relationships">
+  <p:cSld>
+    <p:spTree>
+      <p:nvGrpSpPr>
+        <p:cNvPr id="1" name=""/>
+        <p:cNvGrpSpPr/>
+        <p:nvPr/>
+      </p:nvGrpSpPr>
+      <p:grpSpPr/>
+      <p:sp>
+        <p:nvSpPr>
+          <p:cNvPr id="2" name="Rectangle 1"/>
+          <p:cNvSpPr/>
+          <p:nvPr/>
+        </p:nvSpPr>
+        <p:spPr>
+          <a:xfrm>
+            <a:off x="0" y="0"/>
+            <a:ext cx="12191695" cy="1005840"/>
+          </a:xfrm>
+          <a:prstGeom prst="rect">
+            <a:avLst/>
+          </a:prstGeom>
+          <a:solidFill>
+            <a:srgbClr val="C0392B"/>
+          </a:solidFill>
+          <a:ln>
+            <a:noFill/>
+          </a:ln>
+          <a:effectLst/>
+        </p:spPr>
+        <p:style>
+          <a:lnRef idx="1">
+            <a:schemeClr val="accent1"/>
+          </a:lnRef>
+          <a:fillRef idx="3">
+            <a:schemeClr val="accent1"/>
+          </a:fillRef>
+          <a:effectRef idx="2">
+            <a:schemeClr val="accent1"/>
+          </a:effectRef>
+          <a:fontRef idx="minor">
+            <a:schemeClr val="lt1"/>
+          </a:fontRef>
+        </p:style>
+        <p:txBody>
+          <a:bodyPr rtlCol="0" anchor="ctr"/>
+          <a:lstStyle/>
+          <a:p>
+            <a:pPr algn="ctr"/>
+          </a:p>
+        </p:txBody>
+      </p:sp>
+      <p:sp>
+        <p:nvSpPr>
+          <p:cNvPr id="3" name="TextBox 2"/>
+          <p:cNvSpPr txBox="1"/>
+          <p:nvPr/>
+        </p:nvSpPr>
+        <p:spPr>
+          <a:xfrm>
+            <a:off x="548640" y="91440"/>
+            <a:ext cx="10972800" cy="777240"/>
+          </a:xfrm>
+          <a:prstGeom prst="rect">
+            <a:avLst/>
+          </a:prstGeom>
+          <a:noFill/>
+        </p:spPr>
+        <p:txBody>
+          <a:bodyPr wrap="square">
+            <a:spAutoFit/>
+          </a:bodyPr>
+          <a:lstStyle/>
+          <a:p>
+            <a:pPr algn="l">
+              <a:spcAft>
+                <a:spcPts val="600"/>
+              </a:spcAft>
+            </a:pPr>
+            <a:r>
+              <a:rPr sz="2600" b="1">
+                <a:solidFill>
+                  <a:srgbClr val="FFFFFF"/>
+                </a:solidFill>
+                <a:latin typeface="맑은 고딕"/>
+              </a:rPr>
+              <a:t>왜 늦게 적용하는가</a:t>
+            </a:r>
+          </a:p>
+        </p:txBody>
+      </p:sp>
+      <p:sp>
+        <p:nvSpPr>
+          <p:cNvPr id="4" name="TextBox 3"/>
+          <p:cNvSpPr txBox="1"/>
+          <p:nvPr/>
+        </p:nvSpPr>
+        <p:spPr>
+          <a:xfrm>
+            <a:off x="640080" y="1078992"/>
+            <a:ext cx="10881360" cy="457200"/>
+          </a:xfrm>
+          <a:prstGeom prst="rect">
+            <a:avLst/>
+          </a:prstGeom>
+          <a:noFill/>
+        </p:spPr>
+        <p:txBody>
+          <a:bodyPr wrap="square">
+            <a:spAutoFit/>
+          </a:bodyPr>
+          <a:lstStyle/>
+          <a:p>
+            <a:pPr algn="l">
+              <a:spcAft>
+                <a:spcPts val="600"/>
+              </a:spcAft>
+            </a:pPr>
+            <a:r>
+              <a:rPr sz="1500" b="0">
+                <a:solidFill>
+                  <a:srgbClr val="5A6672"/>
+                </a:solidFill>
+                <a:latin typeface="맑은 고딕"/>
+              </a:rPr>
+              <a:t>사용자 오류로부터 데이터를 지키는 시간 창</a:t>
+            </a:r>
+          </a:p>
+        </p:txBody>
+      </p:sp>
+      <p:sp>
+        <p:nvSpPr>
+          <p:cNvPr id="5" name="TextBox 4"/>
+          <p:cNvSpPr txBox="1"/>
+          <p:nvPr/>
+        </p:nvSpPr>
+        <p:spPr>
+          <a:xfrm>
+            <a:off x="640080" y="1737360"/>
+            <a:ext cx="10881360" cy="4754880"/>
+          </a:xfrm>
+          <a:prstGeom prst="rect">
+            <a:avLst/>
+          </a:prstGeom>
+          <a:noFill/>
+        </p:spPr>
+        <p:txBody>
+          <a:bodyPr wrap="square">
+            <a:spAutoFit/>
+          </a:bodyPr>
+          <a:lstStyle/>
+          <a:p>
+            <a:pPr algn="l">
+              <a:spcAft>
+                <a:spcPts val="1000"/>
+              </a:spcAft>
+            </a:pPr>
+            <a:r>
+              <a:rPr sz="1700" b="0">
+                <a:solidFill>
+                  <a:srgbClr val="222222"/>
+                </a:solidFill>
+                <a:latin typeface="맑은 고딕"/>
+              </a:rPr>
+              <a:t>•  Data Guard는 잘못된 DROP, DELETE도 그대로 복제</a:t>
+            </a:r>
+          </a:p>
+          <a:p>
+            <a:pPr algn="l">
+              <a:spcAft>
+                <a:spcPts val="1000"/>
+              </a:spcAft>
+            </a:pPr>
+            <a:r>
+              <a:rPr sz="1700" b="0">
+                <a:solidFill>
+                  <a:srgbClr val="222222"/>
+                </a:solidFill>
+                <a:latin typeface="맑은 고딕"/>
+              </a:rPr>
+              <a:t>•  실시간 적용이면 몇 초 안에 Standby에도 반영</a:t>
+            </a:r>
+          </a:p>
+          <a:p>
+            <a:pPr algn="l">
+              <a:spcAft>
+                <a:spcPts val="1000"/>
+              </a:spcAft>
+            </a:pPr>
+            <a:r>
+              <a:rPr sz="1700" b="0">
+                <a:solidFill>
+                  <a:srgbClr val="222222"/>
+                </a:solidFill>
+                <a:latin typeface="맑은 고딕"/>
+              </a:rPr>
+              <a:t>•  지연 구간 안에 발견하면 적용을 멈추고 데이터 회수</a:t>
+            </a:r>
+          </a:p>
+          <a:p>
+            <a:pPr algn="l">
+              <a:spcAft>
+                <a:spcPts val="1000"/>
+              </a:spcAft>
+            </a:pPr>
+            <a:r>
+              <a:rPr sz="1700" b="0">
+                <a:solidFill>
+                  <a:srgbClr val="222222"/>
+                </a:solidFill>
+                <a:latin typeface="맑은 고딕"/>
+              </a:rPr>
+              <a:t>•  전송은 지연되지 않아 손실 관점 보호는 유지</a:t>
+            </a:r>
+          </a:p>
+        </p:txBody>
+      </p:sp>
+    </p:spTree>
+  </p:cSld>
+  <p:clrMapOvr>
+    <a:masterClrMapping/>
+  </p:clrMapOvr>
+</p:sld>
+</file>
+
+<file path=ppt/slides/slide39.xml><?xml version="1.0" encoding="utf-8"?>
+<p:sld xmlns:a="http://schemas.openxmlformats.org/drawingml/2006/main" xmlns:p="http://schemas.openxmlformats.org/presentationml/2006/main" xmlns:r="http://schemas.openxmlformats.org/officeDocument/2006/relationships">
+  <p:cSld>
+    <p:spTree>
+      <p:nvGrpSpPr>
+        <p:cNvPr id="1" name=""/>
+        <p:cNvGrpSpPr/>
+        <p:nvPr/>
+      </p:nvGrpSpPr>
+      <p:grpSpPr/>
+      <p:sp>
+        <p:nvSpPr>
+          <p:cNvPr id="2" name="Rectangle 1"/>
+          <p:cNvSpPr/>
+          <p:nvPr/>
+        </p:nvSpPr>
+        <p:spPr>
+          <a:xfrm>
+            <a:off x="0" y="0"/>
+            <a:ext cx="12191695" cy="1005840"/>
+          </a:xfrm>
+          <a:prstGeom prst="rect">
+            <a:avLst/>
+          </a:prstGeom>
+          <a:solidFill>
+            <a:srgbClr val="C0392B"/>
+          </a:solidFill>
+          <a:ln>
+            <a:noFill/>
+          </a:ln>
+          <a:effectLst/>
+        </p:spPr>
+        <p:style>
+          <a:lnRef idx="1">
+            <a:schemeClr val="accent1"/>
+          </a:lnRef>
+          <a:fillRef idx="3">
+            <a:schemeClr val="accent1"/>
+          </a:fillRef>
+          <a:effectRef idx="2">
+            <a:schemeClr val="accent1"/>
+          </a:effectRef>
+          <a:fontRef idx="minor">
+            <a:schemeClr val="lt1"/>
+          </a:fontRef>
+        </p:style>
+        <p:txBody>
+          <a:bodyPr rtlCol="0" anchor="ctr"/>
+          <a:lstStyle/>
+          <a:p>
+            <a:pPr algn="ctr"/>
+          </a:p>
+        </p:txBody>
+      </p:sp>
+      <p:sp>
+        <p:nvSpPr>
+          <p:cNvPr id="3" name="TextBox 2"/>
+          <p:cNvSpPr txBox="1"/>
+          <p:nvPr/>
+        </p:nvSpPr>
+        <p:spPr>
+          <a:xfrm>
+            <a:off x="548640" y="91440"/>
+            <a:ext cx="10972800" cy="777240"/>
+          </a:xfrm>
+          <a:prstGeom prst="rect">
+            <a:avLst/>
+          </a:prstGeom>
+          <a:noFill/>
+        </p:spPr>
+        <p:txBody>
+          <a:bodyPr wrap="square">
+            <a:spAutoFit/>
+          </a:bodyPr>
+          <a:lstStyle/>
+          <a:p>
+            <a:pPr algn="l">
+              <a:spcAft>
+                <a:spcPts val="600"/>
+              </a:spcAft>
+            </a:pPr>
+            <a:r>
+              <a:rPr sz="2600" b="1">
+                <a:solidFill>
+                  <a:srgbClr val="FFFFFF"/>
+                </a:solidFill>
+                <a:latin typeface="맑은 고딕"/>
+              </a:rPr>
+              <a:t>DELAY 설정</a:t>
+            </a:r>
+          </a:p>
+        </p:txBody>
+      </p:sp>
+      <p:sp>
+        <p:nvSpPr>
+          <p:cNvPr id="4" name="TextBox 3"/>
+          <p:cNvSpPr txBox="1"/>
+          <p:nvPr/>
+        </p:nvSpPr>
+        <p:spPr>
+          <a:xfrm>
+            <a:off x="640080" y="1078992"/>
+            <a:ext cx="10881360" cy="457200"/>
+          </a:xfrm>
+          <a:prstGeom prst="rect">
+            <a:avLst/>
+          </a:prstGeom>
+          <a:noFill/>
+        </p:spPr>
+        <p:txBody>
+          <a:bodyPr wrap="square">
+            <a:spAutoFit/>
+          </a:bodyPr>
+          <a:lstStyle/>
+          <a:p>
+            <a:pPr algn="l">
+              <a:spcAft>
+                <a:spcPts val="600"/>
+              </a:spcAft>
+            </a:pPr>
+            <a:r>
+              <a:rPr sz="1500" b="0">
+                <a:solidFill>
+                  <a:srgbClr val="5A6672"/>
+                </a:solidFill>
+                <a:latin typeface="맑은 고딕"/>
+              </a:rPr>
+              <a:t>Primary 목적지의 속성</a:t>
+            </a:r>
+          </a:p>
+        </p:txBody>
+      </p:sp>
+      <p:sp>
+        <p:nvSpPr>
+          <p:cNvPr id="5" name="TextBox 4"/>
+          <p:cNvSpPr txBox="1"/>
+          <p:nvPr/>
+        </p:nvSpPr>
+        <p:spPr>
+          <a:xfrm>
+            <a:off x="640080" y="1737360"/>
+            <a:ext cx="10881360" cy="4754880"/>
+          </a:xfrm>
+          <a:prstGeom prst="rect">
+            <a:avLst/>
+          </a:prstGeom>
+          <a:noFill/>
+        </p:spPr>
+        <p:txBody>
+          <a:bodyPr wrap="square">
+            <a:spAutoFit/>
+          </a:bodyPr>
+          <a:lstStyle/>
+          <a:p>
+            <a:pPr algn="l">
+              <a:spcAft>
+                <a:spcPts val="1000"/>
+              </a:spcAft>
+            </a:pPr>
+            <a:r>
+              <a:rPr sz="1700" b="0">
+                <a:solidFill>
+                  <a:srgbClr val="222222"/>
+                </a:solidFill>
+                <a:latin typeface="맑은 고딕"/>
+              </a:rPr>
+              <a:t>•  Primary의 LOG_ARCHIVE_DEST_n에 DELAY=분</a:t>
+            </a:r>
+          </a:p>
+          <a:p>
+            <a:pPr algn="l">
+              <a:spcAft>
+                <a:spcPts val="1000"/>
+              </a:spcAft>
+            </a:pPr>
+            <a:r>
+              <a:rPr sz="1700" b="0">
+                <a:solidFill>
+                  <a:srgbClr val="222222"/>
+                </a:solidFill>
+                <a:latin typeface="맑은 고딕"/>
+              </a:rPr>
+              <a:t>•  값 없이 DELAY만 쓰면 기본 30분</a:t>
+            </a:r>
+          </a:p>
+          <a:p>
+            <a:pPr algn="l">
+              <a:spcAft>
+                <a:spcPts val="1000"/>
+              </a:spcAft>
+            </a:pPr>
+            <a:r>
+              <a:rPr sz="1700" b="0">
+                <a:solidFill>
+                  <a:srgbClr val="222222"/>
+                </a:solidFill>
+                <a:latin typeface="맑은 고딕"/>
+              </a:rPr>
+              <a:t>•  리두가 Standby에 아카이브된 시점부터 계산</a:t>
+            </a:r>
+          </a:p>
+          <a:p>
+            <a:pPr algn="l">
+              <a:spcAft>
+                <a:spcPts val="1000"/>
+              </a:spcAft>
+            </a:pPr>
+            <a:r>
+              <a:rPr sz="1700" b="0">
+                <a:solidFill>
+                  <a:srgbClr val="222222"/>
+                </a:solidFill>
+                <a:latin typeface="맑은 고딕"/>
+              </a:rPr>
+              <a:t>•  Broker 구성에서는 DelayMins 속성</a:t>
             </a:r>
           </a:p>
         </p:txBody>
@@ -12476,7 +14178,7 @@
                 </a:solidFill>
                 <a:latin typeface="맑은 고딕"/>
               </a:rPr>
-              <a:t>적용은 누가 하는가</a:t>
+              <a:t>Redo Apply의 위치와 동작 원리</a:t>
             </a:r>
           </a:p>
         </p:txBody>
@@ -12559,7 +14261,7 @@
                 </a:solidFill>
                 <a:latin typeface="맑은 고딕"/>
               </a:rPr>
-              <a:t>•  네 종류의 프로세스</a:t>
+              <a:t>•  전송과 적용은 별개의 서비스</a:t>
             </a:r>
           </a:p>
           <a:p>
@@ -12575,7 +14277,7 @@
                 </a:solidFill>
                 <a:latin typeface="맑은 고딕"/>
               </a:rPr>
-              <a:t>•  RFS와 MRP0</a:t>
+              <a:t>•  미디어 복구를 끝없이 이어 가는 구조</a:t>
             </a:r>
           </a:p>
           <a:p>
@@ -12591,7 +14293,2413 @@
                 </a:solidFill>
                 <a:latin typeface="맑은 고딕"/>
               </a:rPr>
-              <a:t>•  MRP0이 사라졌을 때</a:t>
+              <a:t>•  Standby 프로세스의 역할 분담</a:t>
+            </a:r>
+          </a:p>
+        </p:txBody>
+      </p:sp>
+    </p:spTree>
+  </p:cSld>
+  <p:clrMapOvr>
+    <a:masterClrMapping/>
+  </p:clrMapOvr>
+</p:sld>
+</file>
+
+<file path=ppt/slides/slide40.xml><?xml version="1.0" encoding="utf-8"?>
+<p:sld xmlns:a="http://schemas.openxmlformats.org/drawingml/2006/main" xmlns:p="http://schemas.openxmlformats.org/presentationml/2006/main" xmlns:r="http://schemas.openxmlformats.org/officeDocument/2006/relationships">
+  <p:cSld>
+    <p:spTree>
+      <p:nvGrpSpPr>
+        <p:cNvPr id="1" name=""/>
+        <p:cNvGrpSpPr/>
+        <p:nvPr/>
+      </p:nvGrpSpPr>
+      <p:grpSpPr/>
+      <p:sp>
+        <p:nvSpPr>
+          <p:cNvPr id="2" name="Rectangle 1"/>
+          <p:cNvSpPr/>
+          <p:nvPr/>
+        </p:nvSpPr>
+        <p:spPr>
+          <a:xfrm>
+            <a:off x="0" y="0"/>
+            <a:ext cx="12191695" cy="1005840"/>
+          </a:xfrm>
+          <a:prstGeom prst="rect">
+            <a:avLst/>
+          </a:prstGeom>
+          <a:solidFill>
+            <a:srgbClr val="C0392B"/>
+          </a:solidFill>
+          <a:ln>
+            <a:noFill/>
+          </a:ln>
+          <a:effectLst/>
+        </p:spPr>
+        <p:style>
+          <a:lnRef idx="1">
+            <a:schemeClr val="accent1"/>
+          </a:lnRef>
+          <a:fillRef idx="3">
+            <a:schemeClr val="accent1"/>
+          </a:fillRef>
+          <a:effectRef idx="2">
+            <a:schemeClr val="accent1"/>
+          </a:effectRef>
+          <a:fontRef idx="minor">
+            <a:schemeClr val="lt1"/>
+          </a:fontRef>
+        </p:style>
+        <p:txBody>
+          <a:bodyPr rtlCol="0" anchor="ctr"/>
+          <a:lstStyle/>
+          <a:p>
+            <a:pPr algn="ctr"/>
+          </a:p>
+        </p:txBody>
+      </p:sp>
+      <p:sp>
+        <p:nvSpPr>
+          <p:cNvPr id="3" name="TextBox 2"/>
+          <p:cNvSpPr txBox="1"/>
+          <p:nvPr/>
+        </p:nvSpPr>
+        <p:spPr>
+          <a:xfrm>
+            <a:off x="548640" y="91440"/>
+            <a:ext cx="10972800" cy="777240"/>
+          </a:xfrm>
+          <a:prstGeom prst="rect">
+            <a:avLst/>
+          </a:prstGeom>
+          <a:noFill/>
+        </p:spPr>
+        <p:txBody>
+          <a:bodyPr wrap="square">
+            <a:spAutoFit/>
+          </a:bodyPr>
+          <a:lstStyle/>
+          <a:p>
+            <a:pPr algn="l">
+              <a:spcAft>
+                <a:spcPts val="600"/>
+              </a:spcAft>
+            </a:pPr>
+            <a:r>
+              <a:rPr sz="2600" b="1">
+                <a:solidFill>
+                  <a:srgbClr val="FFFFFF"/>
+                </a:solidFill>
+                <a:latin typeface="맑은 고딕"/>
+              </a:rPr>
+              <a:t>실시간 적용과의 관계</a:t>
+            </a:r>
+          </a:p>
+        </p:txBody>
+      </p:sp>
+      <p:sp>
+        <p:nvSpPr>
+          <p:cNvPr id="4" name="TextBox 3"/>
+          <p:cNvSpPr txBox="1"/>
+          <p:nvPr/>
+        </p:nvSpPr>
+        <p:spPr>
+          <a:xfrm>
+            <a:off x="640080" y="1078992"/>
+            <a:ext cx="10881360" cy="457200"/>
+          </a:xfrm>
+          <a:prstGeom prst="rect">
+            <a:avLst/>
+          </a:prstGeom>
+          <a:noFill/>
+        </p:spPr>
+        <p:txBody>
+          <a:bodyPr wrap="square">
+            <a:spAutoFit/>
+          </a:bodyPr>
+          <a:lstStyle/>
+          <a:p>
+            <a:pPr algn="l">
+              <a:spcAft>
+                <a:spcPts val="600"/>
+              </a:spcAft>
+            </a:pPr>
+            <a:r>
+              <a:rPr sz="1500" b="0">
+                <a:solidFill>
+                  <a:srgbClr val="5A6672"/>
+                </a:solidFill>
+                <a:latin typeface="맑은 고딕"/>
+              </a:rPr>
+              <a:t>둘은 함께 성립하지 않는다</a:t>
+            </a:r>
+          </a:p>
+        </p:txBody>
+      </p:sp>
+      <p:sp>
+        <p:nvSpPr>
+          <p:cNvPr id="5" name="TextBox 4"/>
+          <p:cNvSpPr txBox="1"/>
+          <p:nvPr/>
+        </p:nvSpPr>
+        <p:spPr>
+          <a:xfrm>
+            <a:off x="640080" y="1737360"/>
+            <a:ext cx="10881360" cy="4754880"/>
+          </a:xfrm>
+          <a:prstGeom prst="rect">
+            <a:avLst/>
+          </a:prstGeom>
+          <a:noFill/>
+        </p:spPr>
+        <p:txBody>
+          <a:bodyPr wrap="square">
+            <a:spAutoFit/>
+          </a:bodyPr>
+          <a:lstStyle/>
+          <a:p>
+            <a:pPr algn="l">
+              <a:spcAft>
+                <a:spcPts val="1000"/>
+              </a:spcAft>
+            </a:pPr>
+            <a:r>
+              <a:rPr sz="1700" b="0">
+                <a:solidFill>
+                  <a:srgbClr val="222222"/>
+                </a:solidFill>
+                <a:latin typeface="맑은 고딕"/>
+              </a:rPr>
+              <a:t>•  실시간 적용 중이면 DELAY가 무시됨(교재·문서)</a:t>
+            </a:r>
+          </a:p>
+          <a:p>
+            <a:pPr algn="l">
+              <a:spcAft>
+                <a:spcPts val="1000"/>
+              </a:spcAft>
+            </a:pPr>
+            <a:r>
+              <a:rPr sz="1700" b="0">
+                <a:solidFill>
+                  <a:srgbClr val="222222"/>
+                </a:solidFill>
+                <a:latin typeface="맑은 고딕"/>
+              </a:rPr>
+              <a:t>•  지연을 쓰려면 USING ARCHIVED LOGFILE로 기동</a:t>
+            </a:r>
+          </a:p>
+          <a:p>
+            <a:pPr algn="l">
+              <a:spcAft>
+                <a:spcPts val="1000"/>
+              </a:spcAft>
+            </a:pPr>
+            <a:r>
+              <a:rPr sz="1700" b="0">
+                <a:solidFill>
+                  <a:srgbClr val="222222"/>
+                </a:solidFill>
+                <a:latin typeface="맑은 고딕"/>
+              </a:rPr>
+              <a:t>•  기동 후 RECOVERY_MODE가 MANAGED인지 확인</a:t>
+            </a:r>
+          </a:p>
+          <a:p>
+            <a:pPr algn="l">
+              <a:spcAft>
+                <a:spcPts val="1000"/>
+              </a:spcAft>
+            </a:pPr>
+            <a:r>
+              <a:rPr sz="1700" b="0">
+                <a:solidFill>
+                  <a:srgbClr val="222222"/>
+                </a:solidFill>
+                <a:latin typeface="맑은 고딕"/>
+              </a:rPr>
+              <a:t>•  NODELAY: 이번 기동에서만 지연 무시</a:t>
+            </a:r>
+          </a:p>
+        </p:txBody>
+      </p:sp>
+    </p:spTree>
+  </p:cSld>
+  <p:clrMapOvr>
+    <a:masterClrMapping/>
+  </p:clrMapOvr>
+</p:sld>
+</file>
+
+<file path=ppt/slides/slide41.xml><?xml version="1.0" encoding="utf-8"?>
+<p:sld xmlns:a="http://schemas.openxmlformats.org/drawingml/2006/main" xmlns:p="http://schemas.openxmlformats.org/presentationml/2006/main" xmlns:r="http://schemas.openxmlformats.org/officeDocument/2006/relationships">
+  <p:cSld>
+    <p:spTree>
+      <p:nvGrpSpPr>
+        <p:cNvPr id="1" name=""/>
+        <p:cNvGrpSpPr/>
+        <p:nvPr/>
+      </p:nvGrpSpPr>
+      <p:grpSpPr/>
+      <p:sp>
+        <p:nvSpPr>
+          <p:cNvPr id="2" name="Rectangle 1"/>
+          <p:cNvSpPr/>
+          <p:nvPr/>
+        </p:nvSpPr>
+        <p:spPr>
+          <a:xfrm>
+            <a:off x="0" y="0"/>
+            <a:ext cx="12191695" cy="1005840"/>
+          </a:xfrm>
+          <a:prstGeom prst="rect">
+            <a:avLst/>
+          </a:prstGeom>
+          <a:solidFill>
+            <a:srgbClr val="C0392B"/>
+          </a:solidFill>
+          <a:ln>
+            <a:noFill/>
+          </a:ln>
+          <a:effectLst/>
+        </p:spPr>
+        <p:style>
+          <a:lnRef idx="1">
+            <a:schemeClr val="accent1"/>
+          </a:lnRef>
+          <a:fillRef idx="3">
+            <a:schemeClr val="accent1"/>
+          </a:fillRef>
+          <a:effectRef idx="2">
+            <a:schemeClr val="accent1"/>
+          </a:effectRef>
+          <a:fontRef idx="minor">
+            <a:schemeClr val="lt1"/>
+          </a:fontRef>
+        </p:style>
+        <p:txBody>
+          <a:bodyPr rtlCol="0" anchor="ctr"/>
+          <a:lstStyle/>
+          <a:p>
+            <a:pPr algn="ctr"/>
+          </a:p>
+        </p:txBody>
+      </p:sp>
+      <p:sp>
+        <p:nvSpPr>
+          <p:cNvPr id="3" name="TextBox 2"/>
+          <p:cNvSpPr txBox="1"/>
+          <p:nvPr/>
+        </p:nvSpPr>
+        <p:spPr>
+          <a:xfrm>
+            <a:off x="548640" y="91440"/>
+            <a:ext cx="10972800" cy="777240"/>
+          </a:xfrm>
+          <a:prstGeom prst="rect">
+            <a:avLst/>
+          </a:prstGeom>
+          <a:noFill/>
+        </p:spPr>
+        <p:txBody>
+          <a:bodyPr wrap="square">
+            <a:spAutoFit/>
+          </a:bodyPr>
+          <a:lstStyle/>
+          <a:p>
+            <a:pPr algn="l">
+              <a:spcAft>
+                <a:spcPts val="600"/>
+              </a:spcAft>
+            </a:pPr>
+            <a:r>
+              <a:rPr sz="2600" b="1">
+                <a:solidFill>
+                  <a:srgbClr val="FFFFFF"/>
+                </a:solidFill>
+                <a:latin typeface="맑은 고딕"/>
+              </a:rPr>
+              <a:t>지연 Standby 선택 기준</a:t>
+            </a:r>
+          </a:p>
+        </p:txBody>
+      </p:sp>
+      <p:sp>
+        <p:nvSpPr>
+          <p:cNvPr id="4" name="TextBox 3"/>
+          <p:cNvSpPr txBox="1"/>
+          <p:nvPr/>
+        </p:nvSpPr>
+        <p:spPr>
+          <a:xfrm>
+            <a:off x="640080" y="1078992"/>
+            <a:ext cx="10881360" cy="457200"/>
+          </a:xfrm>
+          <a:prstGeom prst="rect">
+            <a:avLst/>
+          </a:prstGeom>
+          <a:noFill/>
+        </p:spPr>
+        <p:txBody>
+          <a:bodyPr wrap="square">
+            <a:spAutoFit/>
+          </a:bodyPr>
+          <a:lstStyle/>
+          <a:p>
+            <a:pPr algn="l">
+              <a:spcAft>
+                <a:spcPts val="600"/>
+              </a:spcAft>
+            </a:pPr>
+            <a:r>
+              <a:rPr sz="1500" b="0">
+                <a:solidFill>
+                  <a:srgbClr val="5A6672"/>
+                </a:solidFill>
+                <a:latin typeface="맑은 고딕"/>
+              </a:rPr>
+              <a:t>역할 전환용과 오류 대비용을 나눈다</a:t>
+            </a:r>
+          </a:p>
+        </p:txBody>
+      </p:sp>
+      <p:sp>
+        <p:nvSpPr>
+          <p:cNvPr id="5" name="TextBox 4"/>
+          <p:cNvSpPr txBox="1"/>
+          <p:nvPr/>
+        </p:nvSpPr>
+        <p:spPr>
+          <a:xfrm>
+            <a:off x="640080" y="1737360"/>
+            <a:ext cx="10881360" cy="4754880"/>
+          </a:xfrm>
+          <a:prstGeom prst="rect">
+            <a:avLst/>
+          </a:prstGeom>
+          <a:noFill/>
+        </p:spPr>
+        <p:txBody>
+          <a:bodyPr wrap="square">
+            <a:spAutoFit/>
+          </a:bodyPr>
+          <a:lstStyle/>
+          <a:p>
+            <a:pPr algn="l">
+              <a:spcAft>
+                <a:spcPts val="1000"/>
+              </a:spcAft>
+            </a:pPr>
+            <a:r>
+              <a:rPr sz="1700" b="0">
+                <a:solidFill>
+                  <a:srgbClr val="222222"/>
+                </a:solidFill>
+                <a:latin typeface="맑은 고딕"/>
+              </a:rPr>
+              <a:t>•  지연 Standby는 Failover 시간이 길어짐</a:t>
+            </a:r>
+          </a:p>
+          <a:p>
+            <a:pPr algn="l">
+              <a:spcAft>
+                <a:spcPts val="1000"/>
+              </a:spcAft>
+            </a:pPr>
+            <a:r>
+              <a:rPr sz="1700" b="0">
+                <a:solidFill>
+                  <a:srgbClr val="222222"/>
+                </a:solidFill>
+                <a:latin typeface="맑은 고딕"/>
+              </a:rPr>
+              <a:t>•  지연은 보통 두 번째 Standby에 건다</a:t>
+            </a:r>
+          </a:p>
+          <a:p>
+            <a:pPr algn="l">
+              <a:spcAft>
+                <a:spcPts val="1000"/>
+              </a:spcAft>
+            </a:pPr>
+            <a:r>
+              <a:rPr sz="1700" b="0">
+                <a:solidFill>
+                  <a:srgbClr val="222222"/>
+                </a:solidFill>
+                <a:latin typeface="맑은 고딕"/>
+              </a:rPr>
+              <a:t>•  Switchover 대상이라면 전환 전 지연 제거</a:t>
+            </a:r>
+          </a:p>
+          <a:p>
+            <a:pPr algn="l">
+              <a:spcAft>
+                <a:spcPts val="1000"/>
+              </a:spcAft>
+            </a:pPr>
+            <a:r>
+              <a:rPr sz="1700" b="0">
+                <a:solidFill>
+                  <a:srgbClr val="222222"/>
+                </a:solidFill>
+                <a:latin typeface="맑은 고딕"/>
+              </a:rPr>
+              <a:t>•  Standby의 Flashback Database가 대안이자 보완</a:t>
+            </a:r>
+          </a:p>
+        </p:txBody>
+      </p:sp>
+    </p:spTree>
+  </p:cSld>
+  <p:clrMapOvr>
+    <a:masterClrMapping/>
+  </p:clrMapOvr>
+</p:sld>
+</file>
+
+<file path=ppt/slides/slide42.xml><?xml version="1.0" encoding="utf-8"?>
+<p:sld xmlns:a="http://schemas.openxmlformats.org/drawingml/2006/main" xmlns:p="http://schemas.openxmlformats.org/presentationml/2006/main" xmlns:r="http://schemas.openxmlformats.org/officeDocument/2006/relationships">
+  <p:cSld>
+    <p:spTree>
+      <p:nvGrpSpPr>
+        <p:cNvPr id="1" name=""/>
+        <p:cNvGrpSpPr/>
+        <p:nvPr/>
+      </p:nvGrpSpPr>
+      <p:grpSpPr/>
+      <p:sp>
+        <p:nvSpPr>
+          <p:cNvPr id="2" name="Rectangle 1"/>
+          <p:cNvSpPr/>
+          <p:nvPr/>
+        </p:nvSpPr>
+        <p:spPr>
+          <a:xfrm>
+            <a:off x="0" y="0"/>
+            <a:ext cx="12191695" cy="1005840"/>
+          </a:xfrm>
+          <a:prstGeom prst="rect">
+            <a:avLst/>
+          </a:prstGeom>
+          <a:solidFill>
+            <a:srgbClr val="C0392B"/>
+          </a:solidFill>
+          <a:ln>
+            <a:noFill/>
+          </a:ln>
+          <a:effectLst/>
+        </p:spPr>
+        <p:style>
+          <a:lnRef idx="1">
+            <a:schemeClr val="accent1"/>
+          </a:lnRef>
+          <a:fillRef idx="3">
+            <a:schemeClr val="accent1"/>
+          </a:fillRef>
+          <a:effectRef idx="2">
+            <a:schemeClr val="accent1"/>
+          </a:effectRef>
+          <a:fontRef idx="minor">
+            <a:schemeClr val="lt1"/>
+          </a:fontRef>
+        </p:style>
+        <p:txBody>
+          <a:bodyPr rtlCol="0" anchor="ctr"/>
+          <a:lstStyle/>
+          <a:p>
+            <a:pPr algn="ctr"/>
+          </a:p>
+        </p:txBody>
+      </p:sp>
+      <p:sp>
+        <p:nvSpPr>
+          <p:cNvPr id="3" name="TextBox 2"/>
+          <p:cNvSpPr txBox="1"/>
+          <p:nvPr/>
+        </p:nvSpPr>
+        <p:spPr>
+          <a:xfrm>
+            <a:off x="548640" y="91440"/>
+            <a:ext cx="10972800" cy="777240"/>
+          </a:xfrm>
+          <a:prstGeom prst="rect">
+            <a:avLst/>
+          </a:prstGeom>
+          <a:noFill/>
+        </p:spPr>
+        <p:txBody>
+          <a:bodyPr wrap="square">
+            <a:spAutoFit/>
+          </a:bodyPr>
+          <a:lstStyle/>
+          <a:p>
+            <a:pPr algn="l">
+              <a:spcAft>
+                <a:spcPts val="600"/>
+              </a:spcAft>
+            </a:pPr>
+            <a:r>
+              <a:rPr sz="2600" b="1">
+                <a:solidFill>
+                  <a:srgbClr val="FFFFFF"/>
+                </a:solidFill>
+                <a:latin typeface="맑은 고딕"/>
+              </a:rPr>
+              <a:t>사례 — 오후에 실행된 잘못된 DELETE</a:t>
+            </a:r>
+          </a:p>
+        </p:txBody>
+      </p:sp>
+      <p:sp>
+        <p:nvSpPr>
+          <p:cNvPr id="4" name="TextBox 3"/>
+          <p:cNvSpPr txBox="1"/>
+          <p:nvPr/>
+        </p:nvSpPr>
+        <p:spPr>
+          <a:xfrm>
+            <a:off x="640080" y="1078992"/>
+            <a:ext cx="10881360" cy="457200"/>
+          </a:xfrm>
+          <a:prstGeom prst="rect">
+            <a:avLst/>
+          </a:prstGeom>
+          <a:noFill/>
+        </p:spPr>
+        <p:txBody>
+          <a:bodyPr wrap="square">
+            <a:spAutoFit/>
+          </a:bodyPr>
+          <a:lstStyle/>
+          <a:p>
+            <a:pPr algn="l">
+              <a:spcAft>
+                <a:spcPts val="600"/>
+              </a:spcAft>
+            </a:pPr>
+            <a:r>
+              <a:rPr sz="1500" b="0">
+                <a:solidFill>
+                  <a:srgbClr val="5A6672"/>
+                </a:solidFill>
+                <a:latin typeface="맑은 고딕"/>
+              </a:rPr>
+              <a:t>지연 Standby로 데이터 회수</a:t>
+            </a:r>
+          </a:p>
+        </p:txBody>
+      </p:sp>
+      <p:sp>
+        <p:nvSpPr>
+          <p:cNvPr id="5" name="TextBox 4"/>
+          <p:cNvSpPr txBox="1"/>
+          <p:nvPr/>
+        </p:nvSpPr>
+        <p:spPr>
+          <a:xfrm>
+            <a:off x="640080" y="1737360"/>
+            <a:ext cx="10881360" cy="4754880"/>
+          </a:xfrm>
+          <a:prstGeom prst="rect">
+            <a:avLst/>
+          </a:prstGeom>
+          <a:noFill/>
+        </p:spPr>
+        <p:txBody>
+          <a:bodyPr wrap="square">
+            <a:spAutoFit/>
+          </a:bodyPr>
+          <a:lstStyle/>
+          <a:p>
+            <a:pPr algn="l">
+              <a:spcAft>
+                <a:spcPts val="1000"/>
+              </a:spcAft>
+            </a:pPr>
+            <a:r>
+              <a:rPr sz="1700" b="0">
+                <a:solidFill>
+                  <a:srgbClr val="222222"/>
+                </a:solidFill>
+                <a:latin typeface="맑은 고딕"/>
+              </a:rPr>
+              <a:t>•  조건 없는 DELETE, 40분 뒤 발견</a:t>
+            </a:r>
+          </a:p>
+          <a:p>
+            <a:pPr algn="l">
+              <a:spcAft>
+                <a:spcPts val="1000"/>
+              </a:spcAft>
+            </a:pPr>
+            <a:r>
+              <a:rPr sz="1700" b="0">
+                <a:solidFill>
+                  <a:srgbClr val="222222"/>
+                </a:solidFill>
+                <a:latin typeface="맑은 고딕"/>
+              </a:rPr>
+              <a:t>•  실시간 Standby boston에는 이미 반영</a:t>
+            </a:r>
+          </a:p>
+          <a:p>
+            <a:pPr algn="l">
+              <a:spcAft>
+                <a:spcPts val="1000"/>
+              </a:spcAft>
+            </a:pPr>
+            <a:r>
+              <a:rPr sz="1700" b="0">
+                <a:solidFill>
+                  <a:srgbClr val="222222"/>
+                </a:solidFill>
+                <a:latin typeface="맑은 고딕"/>
+              </a:rPr>
+              <a:t>•  4시간 지연 Standby의 적용부터 CANCEL</a:t>
+            </a:r>
+          </a:p>
+          <a:p>
+            <a:pPr algn="l">
+              <a:spcAft>
+                <a:spcPts val="1000"/>
+              </a:spcAft>
+            </a:pPr>
+            <a:r>
+              <a:rPr sz="1700" b="0">
+                <a:solidFill>
+                  <a:srgbClr val="222222"/>
+                </a:solidFill>
+                <a:latin typeface="맑은 고딕"/>
+              </a:rPr>
+              <a:t>•  READ ONLY로 열어 행 조회 후 Primary로 복원</a:t>
+            </a:r>
+          </a:p>
+          <a:p>
+            <a:pPr algn="l">
+              <a:spcAft>
+                <a:spcPts val="1000"/>
+              </a:spcAft>
+            </a:pPr>
+            <a:r>
+              <a:rPr sz="1700" b="0">
+                <a:solidFill>
+                  <a:srgbClr val="222222"/>
+                </a:solidFill>
+                <a:latin typeface="맑은 고딕"/>
+              </a:rPr>
+              <a:t>•  복구 후 USING ARCHIVED LOGFILE로 재기동</a:t>
+            </a:r>
+          </a:p>
+        </p:txBody>
+      </p:sp>
+    </p:spTree>
+  </p:cSld>
+  <p:clrMapOvr>
+    <a:masterClrMapping/>
+  </p:clrMapOvr>
+</p:sld>
+</file>
+
+<file path=ppt/slides/slide43.xml><?xml version="1.0" encoding="utf-8"?>
+<p:sld xmlns:a="http://schemas.openxmlformats.org/drawingml/2006/main" xmlns:p="http://schemas.openxmlformats.org/presentationml/2006/main" xmlns:r="http://schemas.openxmlformats.org/officeDocument/2006/relationships">
+  <p:cSld>
+    <p:spTree>
+      <p:nvGrpSpPr>
+        <p:cNvPr id="1" name=""/>
+        <p:cNvGrpSpPr/>
+        <p:nvPr/>
+      </p:nvGrpSpPr>
+      <p:grpSpPr/>
+      <p:sp>
+        <p:nvSpPr>
+          <p:cNvPr id="2" name="Rectangle 1"/>
+          <p:cNvSpPr/>
+          <p:nvPr/>
+        </p:nvSpPr>
+        <p:spPr>
+          <a:xfrm>
+            <a:off x="0" y="0"/>
+            <a:ext cx="12191695" cy="6858000"/>
+          </a:xfrm>
+          <a:prstGeom prst="rect">
+            <a:avLst/>
+          </a:prstGeom>
+          <a:solidFill>
+            <a:srgbClr val="C0392B"/>
+          </a:solidFill>
+          <a:ln>
+            <a:noFill/>
+          </a:ln>
+          <a:effectLst/>
+        </p:spPr>
+        <p:style>
+          <a:lnRef idx="1">
+            <a:schemeClr val="accent1"/>
+          </a:lnRef>
+          <a:fillRef idx="3">
+            <a:schemeClr val="accent1"/>
+          </a:fillRef>
+          <a:effectRef idx="2">
+            <a:schemeClr val="accent1"/>
+          </a:effectRef>
+          <a:fontRef idx="minor">
+            <a:schemeClr val="lt1"/>
+          </a:fontRef>
+        </p:style>
+        <p:txBody>
+          <a:bodyPr rtlCol="0" anchor="ctr"/>
+          <a:lstStyle/>
+          <a:p>
+            <a:pPr algn="ctr"/>
+          </a:p>
+        </p:txBody>
+      </p:sp>
+      <p:sp>
+        <p:nvSpPr>
+          <p:cNvPr id="3" name="TextBox 2"/>
+          <p:cNvSpPr txBox="1"/>
+          <p:nvPr/>
+        </p:nvSpPr>
+        <p:spPr>
+          <a:xfrm>
+            <a:off x="822960" y="2011680"/>
+            <a:ext cx="10515600" cy="1097280"/>
+          </a:xfrm>
+          <a:prstGeom prst="rect">
+            <a:avLst/>
+          </a:prstGeom>
+          <a:noFill/>
+        </p:spPr>
+        <p:txBody>
+          <a:bodyPr wrap="square">
+            <a:spAutoFit/>
+          </a:bodyPr>
+          <a:lstStyle/>
+          <a:p>
+            <a:pPr algn="l">
+              <a:spcAft>
+                <a:spcPts val="600"/>
+              </a:spcAft>
+            </a:pPr>
+            <a:r>
+              <a:rPr sz="4000" b="1">
+                <a:solidFill>
+                  <a:srgbClr val="FFFFFF"/>
+                </a:solidFill>
+                <a:latin typeface="맑은 고딕"/>
+              </a:rPr>
+              <a:t>7.8</a:t>
+            </a:r>
+          </a:p>
+        </p:txBody>
+      </p:sp>
+      <p:sp>
+        <p:nvSpPr>
+          <p:cNvPr id="4" name="TextBox 3"/>
+          <p:cNvSpPr txBox="1"/>
+          <p:nvPr/>
+        </p:nvSpPr>
+        <p:spPr>
+          <a:xfrm>
+            <a:off x="822960" y="3017520"/>
+            <a:ext cx="10515600" cy="914400"/>
+          </a:xfrm>
+          <a:prstGeom prst="rect">
+            <a:avLst/>
+          </a:prstGeom>
+          <a:noFill/>
+        </p:spPr>
+        <p:txBody>
+          <a:bodyPr wrap="square">
+            <a:spAutoFit/>
+          </a:bodyPr>
+          <a:lstStyle/>
+          <a:p>
+            <a:pPr algn="l">
+              <a:spcAft>
+                <a:spcPts val="600"/>
+              </a:spcAft>
+            </a:pPr>
+            <a:r>
+              <a:rPr sz="2800" b="1">
+                <a:solidFill>
+                  <a:srgbClr val="FFFFFF"/>
+                </a:solidFill>
+                <a:latin typeface="맑은 고딕"/>
+              </a:rPr>
+              <a:t>동기화 상태를 판단하는 지표</a:t>
+            </a:r>
+          </a:p>
+        </p:txBody>
+      </p:sp>
+      <p:sp>
+        <p:nvSpPr>
+          <p:cNvPr id="5" name="Rectangle 4"/>
+          <p:cNvSpPr/>
+          <p:nvPr/>
+        </p:nvSpPr>
+        <p:spPr>
+          <a:xfrm>
+            <a:off x="822960" y="4114800"/>
+            <a:ext cx="5486400" cy="54864"/>
+          </a:xfrm>
+          <a:prstGeom prst="rect">
+            <a:avLst/>
+          </a:prstGeom>
+          <a:solidFill>
+            <a:srgbClr val="FFFFFF"/>
+          </a:solidFill>
+          <a:ln>
+            <a:noFill/>
+          </a:ln>
+          <a:effectLst/>
+        </p:spPr>
+        <p:style>
+          <a:lnRef idx="1">
+            <a:schemeClr val="accent1"/>
+          </a:lnRef>
+          <a:fillRef idx="3">
+            <a:schemeClr val="accent1"/>
+          </a:fillRef>
+          <a:effectRef idx="2">
+            <a:schemeClr val="accent1"/>
+          </a:effectRef>
+          <a:fontRef idx="minor">
+            <a:schemeClr val="lt1"/>
+          </a:fontRef>
+        </p:style>
+        <p:txBody>
+          <a:bodyPr rtlCol="0" anchor="ctr"/>
+          <a:lstStyle/>
+          <a:p>
+            <a:pPr algn="ctr"/>
+          </a:p>
+        </p:txBody>
+      </p:sp>
+      <p:sp>
+        <p:nvSpPr>
+          <p:cNvPr id="6" name="TextBox 5"/>
+          <p:cNvSpPr txBox="1"/>
+          <p:nvPr/>
+        </p:nvSpPr>
+        <p:spPr>
+          <a:xfrm>
+            <a:off x="822960" y="4297680"/>
+            <a:ext cx="10058400" cy="2011680"/>
+          </a:xfrm>
+          <a:prstGeom prst="rect">
+            <a:avLst/>
+          </a:prstGeom>
+          <a:noFill/>
+        </p:spPr>
+        <p:txBody>
+          <a:bodyPr wrap="square">
+            <a:spAutoFit/>
+          </a:bodyPr>
+          <a:lstStyle/>
+          <a:p>
+            <a:pPr algn="l">
+              <a:spcAft>
+                <a:spcPts val="800"/>
+              </a:spcAft>
+            </a:pPr>
+            <a:r>
+              <a:rPr sz="1600" b="0">
+                <a:solidFill>
+                  <a:srgbClr val="FFFFFF"/>
+                </a:solidFill>
+                <a:latin typeface="맑은 고딕"/>
+              </a:rPr>
+              <a:t>•  V$DATAGUARD_STATS의 네 지표</a:t>
+            </a:r>
+          </a:p>
+          <a:p>
+            <a:pPr algn="l">
+              <a:spcAft>
+                <a:spcPts val="800"/>
+              </a:spcAft>
+            </a:pPr>
+            <a:r>
+              <a:rPr sz="1600" b="0">
+                <a:solidFill>
+                  <a:srgbClr val="FFFFFF"/>
+                </a:solidFill>
+                <a:latin typeface="맑은 고딕"/>
+              </a:rPr>
+              <a:t>•  지표의 신선도</a:t>
+            </a:r>
+          </a:p>
+          <a:p>
+            <a:pPr algn="l">
+              <a:spcAft>
+                <a:spcPts val="800"/>
+              </a:spcAft>
+            </a:pPr>
+            <a:r>
+              <a:rPr sz="1600" b="0">
+                <a:solidFill>
+                  <a:srgbClr val="FFFFFF"/>
+                </a:solidFill>
+                <a:latin typeface="맑은 고딕"/>
+              </a:rPr>
+              <a:t>•  lag 조합으로 지연 구간 좁히기</a:t>
+            </a:r>
+          </a:p>
+        </p:txBody>
+      </p:sp>
+    </p:spTree>
+  </p:cSld>
+  <p:clrMapOvr>
+    <a:masterClrMapping/>
+  </p:clrMapOvr>
+</p:sld>
+</file>
+
+<file path=ppt/slides/slide44.xml><?xml version="1.0" encoding="utf-8"?>
+<p:sld xmlns:a="http://schemas.openxmlformats.org/drawingml/2006/main" xmlns:p="http://schemas.openxmlformats.org/presentationml/2006/main" xmlns:r="http://schemas.openxmlformats.org/officeDocument/2006/relationships">
+  <p:cSld>
+    <p:spTree>
+      <p:nvGrpSpPr>
+        <p:cNvPr id="1" name=""/>
+        <p:cNvGrpSpPr/>
+        <p:nvPr/>
+      </p:nvGrpSpPr>
+      <p:grpSpPr/>
+      <p:sp>
+        <p:nvSpPr>
+          <p:cNvPr id="2" name="Rectangle 1"/>
+          <p:cNvSpPr/>
+          <p:nvPr/>
+        </p:nvSpPr>
+        <p:spPr>
+          <a:xfrm>
+            <a:off x="0" y="0"/>
+            <a:ext cx="12191695" cy="1005840"/>
+          </a:xfrm>
+          <a:prstGeom prst="rect">
+            <a:avLst/>
+          </a:prstGeom>
+          <a:solidFill>
+            <a:srgbClr val="C0392B"/>
+          </a:solidFill>
+          <a:ln>
+            <a:noFill/>
+          </a:ln>
+          <a:effectLst/>
+        </p:spPr>
+        <p:style>
+          <a:lnRef idx="1">
+            <a:schemeClr val="accent1"/>
+          </a:lnRef>
+          <a:fillRef idx="3">
+            <a:schemeClr val="accent1"/>
+          </a:fillRef>
+          <a:effectRef idx="2">
+            <a:schemeClr val="accent1"/>
+          </a:effectRef>
+          <a:fontRef idx="minor">
+            <a:schemeClr val="lt1"/>
+          </a:fontRef>
+        </p:style>
+        <p:txBody>
+          <a:bodyPr rtlCol="0" anchor="ctr"/>
+          <a:lstStyle/>
+          <a:p>
+            <a:pPr algn="ctr"/>
+          </a:p>
+        </p:txBody>
+      </p:sp>
+      <p:sp>
+        <p:nvSpPr>
+          <p:cNvPr id="3" name="TextBox 2"/>
+          <p:cNvSpPr txBox="1"/>
+          <p:nvPr/>
+        </p:nvSpPr>
+        <p:spPr>
+          <a:xfrm>
+            <a:off x="548640" y="91440"/>
+            <a:ext cx="10972800" cy="777240"/>
+          </a:xfrm>
+          <a:prstGeom prst="rect">
+            <a:avLst/>
+          </a:prstGeom>
+          <a:noFill/>
+        </p:spPr>
+        <p:txBody>
+          <a:bodyPr wrap="square">
+            <a:spAutoFit/>
+          </a:bodyPr>
+          <a:lstStyle/>
+          <a:p>
+            <a:pPr algn="l">
+              <a:spcAft>
+                <a:spcPts val="600"/>
+              </a:spcAft>
+            </a:pPr>
+            <a:r>
+              <a:rPr sz="2600" b="1">
+                <a:solidFill>
+                  <a:srgbClr val="FFFFFF"/>
+                </a:solidFill>
+                <a:latin typeface="맑은 고딕"/>
+              </a:rPr>
+              <a:t>V$DATAGUARD_STATS의 네 지표</a:t>
+            </a:r>
+          </a:p>
+        </p:txBody>
+      </p:sp>
+      <p:sp>
+        <p:nvSpPr>
+          <p:cNvPr id="4" name="TextBox 3"/>
+          <p:cNvSpPr txBox="1"/>
+          <p:nvPr/>
+        </p:nvSpPr>
+        <p:spPr>
+          <a:xfrm>
+            <a:off x="640080" y="1078992"/>
+            <a:ext cx="10881360" cy="457200"/>
+          </a:xfrm>
+          <a:prstGeom prst="rect">
+            <a:avLst/>
+          </a:prstGeom>
+          <a:noFill/>
+        </p:spPr>
+        <p:txBody>
+          <a:bodyPr wrap="square">
+            <a:spAutoFit/>
+          </a:bodyPr>
+          <a:lstStyle/>
+          <a:p>
+            <a:pPr algn="l">
+              <a:spcAft>
+                <a:spcPts val="600"/>
+              </a:spcAft>
+            </a:pPr>
+            <a:r>
+              <a:rPr sz="1500" b="0">
+                <a:solidFill>
+                  <a:srgbClr val="5A6672"/>
+                </a:solidFill>
+                <a:latin typeface="맑은 고딕"/>
+              </a:rPr>
+              <a:t>Standby에서 조회</a:t>
+            </a:r>
+          </a:p>
+        </p:txBody>
+      </p:sp>
+      <p:sp>
+        <p:nvSpPr>
+          <p:cNvPr id="5" name="TextBox 4"/>
+          <p:cNvSpPr txBox="1"/>
+          <p:nvPr/>
+        </p:nvSpPr>
+        <p:spPr>
+          <a:xfrm>
+            <a:off x="640080" y="1737360"/>
+            <a:ext cx="10881360" cy="4754880"/>
+          </a:xfrm>
+          <a:prstGeom prst="rect">
+            <a:avLst/>
+          </a:prstGeom>
+          <a:noFill/>
+        </p:spPr>
+        <p:txBody>
+          <a:bodyPr wrap="square">
+            <a:spAutoFit/>
+          </a:bodyPr>
+          <a:lstStyle/>
+          <a:p>
+            <a:pPr algn="l">
+              <a:spcAft>
+                <a:spcPts val="1000"/>
+              </a:spcAft>
+            </a:pPr>
+            <a:r>
+              <a:rPr sz="1700" b="0">
+                <a:solidFill>
+                  <a:srgbClr val="222222"/>
+                </a:solidFill>
+                <a:latin typeface="맑은 고딕"/>
+              </a:rPr>
+              <a:t>•  transport lag: 아직 도착하지 않은 리두의 시간 환산</a:t>
+            </a:r>
+          </a:p>
+          <a:p>
+            <a:pPr algn="l">
+              <a:spcAft>
+                <a:spcPts val="1000"/>
+              </a:spcAft>
+            </a:pPr>
+            <a:r>
+              <a:rPr sz="1700" b="0">
+                <a:solidFill>
+                  <a:srgbClr val="222222"/>
+                </a:solidFill>
+                <a:latin typeface="맑은 고딕"/>
+              </a:rPr>
+              <a:t>•  apply lag: Standby 데이터가 얼마나 과거인가</a:t>
+            </a:r>
+          </a:p>
+          <a:p>
+            <a:pPr algn="l">
+              <a:spcAft>
+                <a:spcPts val="1000"/>
+              </a:spcAft>
+            </a:pPr>
+            <a:r>
+              <a:rPr sz="1700" b="0">
+                <a:solidFill>
+                  <a:srgbClr val="222222"/>
+                </a:solidFill>
+                <a:latin typeface="맑은 고딕"/>
+              </a:rPr>
+              <a:t>•  apply finish time: 받은 리두 적용 완료 예상 시간</a:t>
+            </a:r>
+          </a:p>
+          <a:p>
+            <a:pPr algn="l">
+              <a:spcAft>
+                <a:spcPts val="1000"/>
+              </a:spcAft>
+            </a:pPr>
+            <a:r>
+              <a:rPr sz="1700" b="0">
+                <a:solidFill>
+                  <a:srgbClr val="222222"/>
+                </a:solidFill>
+                <a:latin typeface="맑은 고딕"/>
+              </a:rPr>
+              <a:t>•  estimated startup time: 기동·오픈 예상 시간</a:t>
+            </a:r>
+          </a:p>
+          <a:p>
+            <a:pPr algn="l">
+              <a:spcAft>
+                <a:spcPts val="1000"/>
+              </a:spcAft>
+            </a:pPr>
+            <a:r>
+              <a:rPr sz="1700" b="0">
+                <a:solidFill>
+                  <a:srgbClr val="222222"/>
+                </a:solidFill>
+                <a:latin typeface="맑은 고딕"/>
+              </a:rPr>
+              <a:t>•  apply lag는 항상 transport lag 이상</a:t>
+            </a:r>
+          </a:p>
+        </p:txBody>
+      </p:sp>
+    </p:spTree>
+  </p:cSld>
+  <p:clrMapOvr>
+    <a:masterClrMapping/>
+  </p:clrMapOvr>
+</p:sld>
+</file>
+
+<file path=ppt/slides/slide45.xml><?xml version="1.0" encoding="utf-8"?>
+<p:sld xmlns:a="http://schemas.openxmlformats.org/drawingml/2006/main" xmlns:p="http://schemas.openxmlformats.org/presentationml/2006/main" xmlns:r="http://schemas.openxmlformats.org/officeDocument/2006/relationships">
+  <p:cSld>
+    <p:spTree>
+      <p:nvGrpSpPr>
+        <p:cNvPr id="1" name=""/>
+        <p:cNvGrpSpPr/>
+        <p:nvPr/>
+      </p:nvGrpSpPr>
+      <p:grpSpPr/>
+      <p:sp>
+        <p:nvSpPr>
+          <p:cNvPr id="2" name="Rectangle 1"/>
+          <p:cNvSpPr/>
+          <p:nvPr/>
+        </p:nvSpPr>
+        <p:spPr>
+          <a:xfrm>
+            <a:off x="0" y="0"/>
+            <a:ext cx="12191695" cy="1005840"/>
+          </a:xfrm>
+          <a:prstGeom prst="rect">
+            <a:avLst/>
+          </a:prstGeom>
+          <a:solidFill>
+            <a:srgbClr val="C0392B"/>
+          </a:solidFill>
+          <a:ln>
+            <a:noFill/>
+          </a:ln>
+          <a:effectLst/>
+        </p:spPr>
+        <p:style>
+          <a:lnRef idx="1">
+            <a:schemeClr val="accent1"/>
+          </a:lnRef>
+          <a:fillRef idx="3">
+            <a:schemeClr val="accent1"/>
+          </a:fillRef>
+          <a:effectRef idx="2">
+            <a:schemeClr val="accent1"/>
+          </a:effectRef>
+          <a:fontRef idx="minor">
+            <a:schemeClr val="lt1"/>
+          </a:fontRef>
+        </p:style>
+        <p:txBody>
+          <a:bodyPr rtlCol="0" anchor="ctr"/>
+          <a:lstStyle/>
+          <a:p>
+            <a:pPr algn="ctr"/>
+          </a:p>
+        </p:txBody>
+      </p:sp>
+      <p:sp>
+        <p:nvSpPr>
+          <p:cNvPr id="3" name="TextBox 2"/>
+          <p:cNvSpPr txBox="1"/>
+          <p:nvPr/>
+        </p:nvSpPr>
+        <p:spPr>
+          <a:xfrm>
+            <a:off x="548640" y="91440"/>
+            <a:ext cx="10972800" cy="777240"/>
+          </a:xfrm>
+          <a:prstGeom prst="rect">
+            <a:avLst/>
+          </a:prstGeom>
+          <a:noFill/>
+        </p:spPr>
+        <p:txBody>
+          <a:bodyPr wrap="square">
+            <a:spAutoFit/>
+          </a:bodyPr>
+          <a:lstStyle/>
+          <a:p>
+            <a:pPr algn="l">
+              <a:spcAft>
+                <a:spcPts val="600"/>
+              </a:spcAft>
+            </a:pPr>
+            <a:r>
+              <a:rPr sz="2600" b="1">
+                <a:solidFill>
+                  <a:srgbClr val="FFFFFF"/>
+                </a:solidFill>
+                <a:latin typeface="맑은 고딕"/>
+              </a:rPr>
+              <a:t>지표의 신선도</a:t>
+            </a:r>
+          </a:p>
+        </p:txBody>
+      </p:sp>
+      <p:sp>
+        <p:nvSpPr>
+          <p:cNvPr id="4" name="TextBox 3"/>
+          <p:cNvSpPr txBox="1"/>
+          <p:nvPr/>
+        </p:nvSpPr>
+        <p:spPr>
+          <a:xfrm>
+            <a:off x="640080" y="1078992"/>
+            <a:ext cx="10881360" cy="457200"/>
+          </a:xfrm>
+          <a:prstGeom prst="rect">
+            <a:avLst/>
+          </a:prstGeom>
+          <a:noFill/>
+        </p:spPr>
+        <p:txBody>
+          <a:bodyPr wrap="square">
+            <a:spAutoFit/>
+          </a:bodyPr>
+          <a:lstStyle/>
+          <a:p>
+            <a:pPr algn="l">
+              <a:spcAft>
+                <a:spcPts val="600"/>
+              </a:spcAft>
+            </a:pPr>
+            <a:r>
+              <a:rPr sz="1500" b="0">
+                <a:solidFill>
+                  <a:srgbClr val="5A6672"/>
+                </a:solidFill>
+                <a:latin typeface="맑은 고딕"/>
+              </a:rPr>
+              <a:t>DATUM_TIME과 TIME_COMPUTED</a:t>
+            </a:r>
+          </a:p>
+        </p:txBody>
+      </p:sp>
+      <p:sp>
+        <p:nvSpPr>
+          <p:cNvPr id="5" name="TextBox 4"/>
+          <p:cNvSpPr txBox="1"/>
+          <p:nvPr/>
+        </p:nvSpPr>
+        <p:spPr>
+          <a:xfrm>
+            <a:off x="640080" y="1737360"/>
+            <a:ext cx="10881360" cy="4754880"/>
+          </a:xfrm>
+          <a:prstGeom prst="rect">
+            <a:avLst/>
+          </a:prstGeom>
+          <a:noFill/>
+        </p:spPr>
+        <p:txBody>
+          <a:bodyPr wrap="square">
+            <a:spAutoFit/>
+          </a:bodyPr>
+          <a:lstStyle/>
+          <a:p>
+            <a:pPr algn="l">
+              <a:spcAft>
+                <a:spcPts val="1000"/>
+              </a:spcAft>
+            </a:pPr>
+            <a:r>
+              <a:rPr sz="1700" b="0">
+                <a:solidFill>
+                  <a:srgbClr val="222222"/>
+                </a:solidFill>
+                <a:latin typeface="맑은 고딕"/>
+              </a:rPr>
+              <a:t>•  DATUM_TIME: 계산에 쓴 데이터를 마지막으로 받은 시각</a:t>
+            </a:r>
+          </a:p>
+          <a:p>
+            <a:pPr algn="l">
+              <a:spcAft>
+                <a:spcPts val="1000"/>
+              </a:spcAft>
+            </a:pPr>
+            <a:r>
+              <a:rPr sz="1700" b="0">
+                <a:solidFill>
+                  <a:srgbClr val="222222"/>
+                </a:solidFill>
+                <a:latin typeface="맑은 고딕"/>
+              </a:rPr>
+              <a:t>•  TIME_COMPUTED: 지표를 계산한 시각</a:t>
+            </a:r>
+          </a:p>
+          <a:p>
+            <a:pPr algn="l">
+              <a:spcAft>
+                <a:spcPts val="1000"/>
+              </a:spcAft>
+            </a:pPr>
+            <a:r>
+              <a:rPr sz="1700" b="0">
+                <a:solidFill>
+                  <a:srgbClr val="222222"/>
+                </a:solidFill>
+                <a:latin typeface="맑은 고딕"/>
+              </a:rPr>
+              <a:t>•  두 시각 차이는 30초 미만이어야 신뢰</a:t>
+            </a:r>
+          </a:p>
+          <a:p>
+            <a:pPr algn="l">
+              <a:spcAft>
+                <a:spcPts val="1000"/>
+              </a:spcAft>
+            </a:pPr>
+            <a:r>
+              <a:rPr sz="1700" b="0">
+                <a:solidFill>
+                  <a:srgbClr val="222222"/>
+                </a:solidFill>
+                <a:latin typeface="맑은 고딕"/>
+              </a:rPr>
+              <a:t>•  연결이 끊기면 lag가 작은 값에 멈춰 정상처럼 보임</a:t>
+            </a:r>
+          </a:p>
+        </p:txBody>
+      </p:sp>
+    </p:spTree>
+  </p:cSld>
+  <p:clrMapOvr>
+    <a:masterClrMapping/>
+  </p:clrMapOvr>
+</p:sld>
+</file>
+
+<file path=ppt/slides/slide46.xml><?xml version="1.0" encoding="utf-8"?>
+<p:sld xmlns:a="http://schemas.openxmlformats.org/drawingml/2006/main" xmlns:p="http://schemas.openxmlformats.org/presentationml/2006/main" xmlns:r="http://schemas.openxmlformats.org/officeDocument/2006/relationships">
+  <p:cSld>
+    <p:spTree>
+      <p:nvGrpSpPr>
+        <p:cNvPr id="1" name=""/>
+        <p:cNvGrpSpPr/>
+        <p:nvPr/>
+      </p:nvGrpSpPr>
+      <p:grpSpPr/>
+      <p:sp>
+        <p:nvSpPr>
+          <p:cNvPr id="2" name="Rectangle 1"/>
+          <p:cNvSpPr/>
+          <p:nvPr/>
+        </p:nvSpPr>
+        <p:spPr>
+          <a:xfrm>
+            <a:off x="0" y="0"/>
+            <a:ext cx="12191695" cy="1005840"/>
+          </a:xfrm>
+          <a:prstGeom prst="rect">
+            <a:avLst/>
+          </a:prstGeom>
+          <a:solidFill>
+            <a:srgbClr val="C0392B"/>
+          </a:solidFill>
+          <a:ln>
+            <a:noFill/>
+          </a:ln>
+          <a:effectLst/>
+        </p:spPr>
+        <p:style>
+          <a:lnRef idx="1">
+            <a:schemeClr val="accent1"/>
+          </a:lnRef>
+          <a:fillRef idx="3">
+            <a:schemeClr val="accent1"/>
+          </a:fillRef>
+          <a:effectRef idx="2">
+            <a:schemeClr val="accent1"/>
+          </a:effectRef>
+          <a:fontRef idx="minor">
+            <a:schemeClr val="lt1"/>
+          </a:fontRef>
+        </p:style>
+        <p:txBody>
+          <a:bodyPr rtlCol="0" anchor="ctr"/>
+          <a:lstStyle/>
+          <a:p>
+            <a:pPr algn="ctr"/>
+          </a:p>
+        </p:txBody>
+      </p:sp>
+      <p:sp>
+        <p:nvSpPr>
+          <p:cNvPr id="3" name="TextBox 2"/>
+          <p:cNvSpPr txBox="1"/>
+          <p:nvPr/>
+        </p:nvSpPr>
+        <p:spPr>
+          <a:xfrm>
+            <a:off x="548640" y="91440"/>
+            <a:ext cx="10972800" cy="777240"/>
+          </a:xfrm>
+          <a:prstGeom prst="rect">
+            <a:avLst/>
+          </a:prstGeom>
+          <a:noFill/>
+        </p:spPr>
+        <p:txBody>
+          <a:bodyPr wrap="square">
+            <a:spAutoFit/>
+          </a:bodyPr>
+          <a:lstStyle/>
+          <a:p>
+            <a:pPr algn="l">
+              <a:spcAft>
+                <a:spcPts val="600"/>
+              </a:spcAft>
+            </a:pPr>
+            <a:r>
+              <a:rPr sz="2600" b="1">
+                <a:solidFill>
+                  <a:srgbClr val="FFFFFF"/>
+                </a:solidFill>
+                <a:latin typeface="맑은 고딕"/>
+              </a:rPr>
+              <a:t>lag 조합으로 구간 좁히기</a:t>
+            </a:r>
+          </a:p>
+        </p:txBody>
+      </p:sp>
+      <p:sp>
+        <p:nvSpPr>
+          <p:cNvPr id="4" name="TextBox 3"/>
+          <p:cNvSpPr txBox="1"/>
+          <p:nvPr/>
+        </p:nvSpPr>
+        <p:spPr>
+          <a:xfrm>
+            <a:off x="640080" y="1078992"/>
+            <a:ext cx="10881360" cy="457200"/>
+          </a:xfrm>
+          <a:prstGeom prst="rect">
+            <a:avLst/>
+          </a:prstGeom>
+          <a:noFill/>
+        </p:spPr>
+        <p:txBody>
+          <a:bodyPr wrap="square">
+            <a:spAutoFit/>
+          </a:bodyPr>
+          <a:lstStyle/>
+          <a:p>
+            <a:pPr algn="l">
+              <a:spcAft>
+                <a:spcPts val="600"/>
+              </a:spcAft>
+            </a:pPr>
+            <a:r>
+              <a:rPr sz="1500" b="0">
+                <a:solidFill>
+                  <a:srgbClr val="5A6672"/>
+                </a:solidFill>
+                <a:latin typeface="맑은 고딕"/>
+              </a:rPr>
+              <a:t>어느 쪽 lag가 큰가</a:t>
+            </a:r>
+          </a:p>
+        </p:txBody>
+      </p:sp>
+      <p:sp>
+        <p:nvSpPr>
+          <p:cNvPr id="5" name="TextBox 4"/>
+          <p:cNvSpPr txBox="1"/>
+          <p:nvPr/>
+        </p:nvSpPr>
+        <p:spPr>
+          <a:xfrm>
+            <a:off x="640080" y="1737360"/>
+            <a:ext cx="10881360" cy="4754880"/>
+          </a:xfrm>
+          <a:prstGeom prst="rect">
+            <a:avLst/>
+          </a:prstGeom>
+          <a:noFill/>
+        </p:spPr>
+        <p:txBody>
+          <a:bodyPr wrap="square">
+            <a:spAutoFit/>
+          </a:bodyPr>
+          <a:lstStyle/>
+          <a:p>
+            <a:pPr algn="l">
+              <a:spcAft>
+                <a:spcPts val="1000"/>
+              </a:spcAft>
+            </a:pPr>
+            <a:r>
+              <a:rPr sz="1700" b="0">
+                <a:solidFill>
+                  <a:srgbClr val="222222"/>
+                </a:solidFill>
+                <a:latin typeface="맑은 고딕"/>
+              </a:rPr>
+              <a:t>•  둘 다 작음: 정상, 단 신선도 확인</a:t>
+            </a:r>
+          </a:p>
+          <a:p>
+            <a:pPr algn="l">
+              <a:spcAft>
+                <a:spcPts val="1000"/>
+              </a:spcAft>
+            </a:pPr>
+            <a:r>
+              <a:rPr sz="1700" b="0">
+                <a:solidFill>
+                  <a:srgbClr val="222222"/>
+                </a:solidFill>
+                <a:latin typeface="맑은 고딕"/>
+              </a:rPr>
+              <a:t>•  transport 작고 apply만 큼: 적용 쪽 문제</a:t>
+            </a:r>
+          </a:p>
+          <a:p>
+            <a:pPr algn="l">
+              <a:spcAft>
+                <a:spcPts val="1000"/>
+              </a:spcAft>
+            </a:pPr>
+            <a:r>
+              <a:rPr sz="1700" b="0">
+                <a:solidFill>
+                  <a:srgbClr val="222222"/>
+                </a:solidFill>
+                <a:latin typeface="맑은 고딕"/>
+              </a:rPr>
+              <a:t>•  둘 다 큼: 전송 구간 문제</a:t>
+            </a:r>
+          </a:p>
+          <a:p>
+            <a:pPr algn="l">
+              <a:spcAft>
+                <a:spcPts val="1000"/>
+              </a:spcAft>
+            </a:pPr>
+            <a:r>
+              <a:rPr sz="1700" b="0">
+                <a:solidFill>
+                  <a:srgbClr val="222222"/>
+                </a:solidFill>
+                <a:latin typeface="맑은 고딕"/>
+              </a:rPr>
+              <a:t>•  둘 다 증가 추세: 리두 생성량이 처리 능력 초과</a:t>
+            </a:r>
+          </a:p>
+          <a:p>
+            <a:pPr algn="l">
+              <a:spcAft>
+                <a:spcPts val="1000"/>
+              </a:spcAft>
+            </a:pPr>
+            <a:r>
+              <a:rPr sz="1700" b="0">
+                <a:solidFill>
+                  <a:srgbClr val="222222"/>
+                </a:solidFill>
+                <a:latin typeface="맑은 고딕"/>
+              </a:rPr>
+              <a:t>•  apply lag 큰데 WAIT_FOR_LOG면 공급 문제</a:t>
+            </a:r>
+          </a:p>
+        </p:txBody>
+      </p:sp>
+    </p:spTree>
+  </p:cSld>
+  <p:clrMapOvr>
+    <a:masterClrMapping/>
+  </p:clrMapOvr>
+</p:sld>
+</file>
+
+<file path=ppt/slides/slide47.xml><?xml version="1.0" encoding="utf-8"?>
+<p:sld xmlns:a="http://schemas.openxmlformats.org/drawingml/2006/main" xmlns:p="http://schemas.openxmlformats.org/presentationml/2006/main" xmlns:r="http://schemas.openxmlformats.org/officeDocument/2006/relationships">
+  <p:cSld>
+    <p:spTree>
+      <p:nvGrpSpPr>
+        <p:cNvPr id="1" name=""/>
+        <p:cNvGrpSpPr/>
+        <p:nvPr/>
+      </p:nvGrpSpPr>
+      <p:grpSpPr/>
+      <p:sp>
+        <p:nvSpPr>
+          <p:cNvPr id="2" name="Rectangle 1"/>
+          <p:cNvSpPr/>
+          <p:nvPr/>
+        </p:nvSpPr>
+        <p:spPr>
+          <a:xfrm>
+            <a:off x="0" y="0"/>
+            <a:ext cx="12191695" cy="1005840"/>
+          </a:xfrm>
+          <a:prstGeom prst="rect">
+            <a:avLst/>
+          </a:prstGeom>
+          <a:solidFill>
+            <a:srgbClr val="C0392B"/>
+          </a:solidFill>
+          <a:ln>
+            <a:noFill/>
+          </a:ln>
+          <a:effectLst/>
+        </p:spPr>
+        <p:style>
+          <a:lnRef idx="1">
+            <a:schemeClr val="accent1"/>
+          </a:lnRef>
+          <a:fillRef idx="3">
+            <a:schemeClr val="accent1"/>
+          </a:fillRef>
+          <a:effectRef idx="2">
+            <a:schemeClr val="accent1"/>
+          </a:effectRef>
+          <a:fontRef idx="minor">
+            <a:schemeClr val="lt1"/>
+          </a:fontRef>
+        </p:style>
+        <p:txBody>
+          <a:bodyPr rtlCol="0" anchor="ctr"/>
+          <a:lstStyle/>
+          <a:p>
+            <a:pPr algn="ctr"/>
+          </a:p>
+        </p:txBody>
+      </p:sp>
+      <p:sp>
+        <p:nvSpPr>
+          <p:cNvPr id="3" name="TextBox 2"/>
+          <p:cNvSpPr txBox="1"/>
+          <p:nvPr/>
+        </p:nvSpPr>
+        <p:spPr>
+          <a:xfrm>
+            <a:off x="548640" y="91440"/>
+            <a:ext cx="10972800" cy="777240"/>
+          </a:xfrm>
+          <a:prstGeom prst="rect">
+            <a:avLst/>
+          </a:prstGeom>
+          <a:noFill/>
+        </p:spPr>
+        <p:txBody>
+          <a:bodyPr wrap="square">
+            <a:spAutoFit/>
+          </a:bodyPr>
+          <a:lstStyle/>
+          <a:p>
+            <a:pPr algn="l">
+              <a:spcAft>
+                <a:spcPts val="600"/>
+              </a:spcAft>
+            </a:pPr>
+            <a:r>
+              <a:rPr sz="2600" b="1">
+                <a:solidFill>
+                  <a:srgbClr val="FFFFFF"/>
+                </a:solidFill>
+                <a:latin typeface="맑은 고딕"/>
+              </a:rPr>
+              <a:t>지표가 없을 때의 보조 확인</a:t>
+            </a:r>
+          </a:p>
+        </p:txBody>
+      </p:sp>
+      <p:sp>
+        <p:nvSpPr>
+          <p:cNvPr id="4" name="TextBox 3"/>
+          <p:cNvSpPr txBox="1"/>
+          <p:nvPr/>
+        </p:nvSpPr>
+        <p:spPr>
+          <a:xfrm>
+            <a:off x="640080" y="1078992"/>
+            <a:ext cx="10881360" cy="457200"/>
+          </a:xfrm>
+          <a:prstGeom prst="rect">
+            <a:avLst/>
+          </a:prstGeom>
+          <a:noFill/>
+        </p:spPr>
+        <p:txBody>
+          <a:bodyPr wrap="square">
+            <a:spAutoFit/>
+          </a:bodyPr>
+          <a:lstStyle/>
+          <a:p>
+            <a:pPr algn="l">
+              <a:spcAft>
+                <a:spcPts val="600"/>
+              </a:spcAft>
+            </a:pPr>
+            <a:r>
+              <a:rPr sz="1500" b="0">
+                <a:solidFill>
+                  <a:srgbClr val="5A6672"/>
+                </a:solidFill>
+                <a:latin typeface="맑은 고딕"/>
+              </a:rPr>
+              <a:t>순번 비교와 Broker</a:t>
+            </a:r>
+          </a:p>
+        </p:txBody>
+      </p:sp>
+      <p:sp>
+        <p:nvSpPr>
+          <p:cNvPr id="5" name="TextBox 4"/>
+          <p:cNvSpPr txBox="1"/>
+          <p:nvPr/>
+        </p:nvSpPr>
+        <p:spPr>
+          <a:xfrm>
+            <a:off x="640080" y="1737360"/>
+            <a:ext cx="10881360" cy="4754880"/>
+          </a:xfrm>
+          <a:prstGeom prst="rect">
+            <a:avLst/>
+          </a:prstGeom>
+          <a:noFill/>
+        </p:spPr>
+        <p:txBody>
+          <a:bodyPr wrap="square">
+            <a:spAutoFit/>
+          </a:bodyPr>
+          <a:lstStyle/>
+          <a:p>
+            <a:pPr algn="l">
+              <a:spcAft>
+                <a:spcPts val="1000"/>
+              </a:spcAft>
+            </a:pPr>
+            <a:r>
+              <a:rPr sz="1700" b="0">
+                <a:solidFill>
+                  <a:srgbClr val="222222"/>
+                </a:solidFill>
+                <a:latin typeface="맑은 고딕"/>
+              </a:rPr>
+              <a:t>•  Primary 현재 순번과 Standby 마지막 적용 순번 비교</a:t>
+            </a:r>
+          </a:p>
+          <a:p>
+            <a:pPr algn="l">
+              <a:spcAft>
+                <a:spcPts val="1000"/>
+              </a:spcAft>
+            </a:pPr>
+            <a:r>
+              <a:rPr sz="1700" b="0">
+                <a:solidFill>
+                  <a:srgbClr val="222222"/>
+                </a:solidFill>
+                <a:latin typeface="맑은 고딕"/>
+              </a:rPr>
+              <a:t>•  실시간 적용 중이면 차이 0~1이 보통</a:t>
+            </a:r>
+          </a:p>
+          <a:p>
+            <a:pPr algn="l">
+              <a:spcAft>
+                <a:spcPts val="1000"/>
+              </a:spcAft>
+            </a:pPr>
+            <a:r>
+              <a:rPr sz="1700" b="0">
+                <a:solidFill>
+                  <a:srgbClr val="222222"/>
+                </a:solidFill>
+                <a:latin typeface="맑은 고딕"/>
+              </a:rPr>
+              <a:t>•  순번 차이는 로그 개수일 뿐 시간이 아님</a:t>
+            </a:r>
+          </a:p>
+          <a:p>
+            <a:pPr algn="l">
+              <a:spcAft>
+                <a:spcPts val="1000"/>
+              </a:spcAft>
+            </a:pPr>
+            <a:r>
+              <a:rPr sz="1700" b="0">
+                <a:solidFill>
+                  <a:srgbClr val="222222"/>
+                </a:solidFill>
+                <a:latin typeface="맑은 고딕"/>
+              </a:rPr>
+              <a:t>•  Broker SHOW DATABASE의 Transport Lag, Apply Lag</a:t>
+            </a:r>
+          </a:p>
+          <a:p>
+            <a:pPr algn="l">
+              <a:spcAft>
+                <a:spcPts val="1000"/>
+              </a:spcAft>
+            </a:pPr>
+            <a:r>
+              <a:rPr sz="1700" b="0">
+                <a:solidFill>
+                  <a:srgbClr val="222222"/>
+                </a:solidFill>
+                <a:latin typeface="맑은 고딕"/>
+              </a:rPr>
+              <a:t>•  임계값 경보: ApplyLagThreshold 등(14장)</a:t>
+            </a:r>
+          </a:p>
+        </p:txBody>
+      </p:sp>
+    </p:spTree>
+  </p:cSld>
+  <p:clrMapOvr>
+    <a:masterClrMapping/>
+  </p:clrMapOvr>
+</p:sld>
+</file>
+
+<file path=ppt/slides/slide48.xml><?xml version="1.0" encoding="utf-8"?>
+<p:sld xmlns:a="http://schemas.openxmlformats.org/drawingml/2006/main" xmlns:p="http://schemas.openxmlformats.org/presentationml/2006/main" xmlns:r="http://schemas.openxmlformats.org/officeDocument/2006/relationships">
+  <p:cSld>
+    <p:spTree>
+      <p:nvGrpSpPr>
+        <p:cNvPr id="1" name=""/>
+        <p:cNvGrpSpPr/>
+        <p:nvPr/>
+      </p:nvGrpSpPr>
+      <p:grpSpPr/>
+      <p:sp>
+        <p:nvSpPr>
+          <p:cNvPr id="2" name="Rectangle 1"/>
+          <p:cNvSpPr/>
+          <p:nvPr/>
+        </p:nvSpPr>
+        <p:spPr>
+          <a:xfrm>
+            <a:off x="0" y="0"/>
+            <a:ext cx="12191695" cy="1005840"/>
+          </a:xfrm>
+          <a:prstGeom prst="rect">
+            <a:avLst/>
+          </a:prstGeom>
+          <a:solidFill>
+            <a:srgbClr val="C0392B"/>
+          </a:solidFill>
+          <a:ln>
+            <a:noFill/>
+          </a:ln>
+          <a:effectLst/>
+        </p:spPr>
+        <p:style>
+          <a:lnRef idx="1">
+            <a:schemeClr val="accent1"/>
+          </a:lnRef>
+          <a:fillRef idx="3">
+            <a:schemeClr val="accent1"/>
+          </a:fillRef>
+          <a:effectRef idx="2">
+            <a:schemeClr val="accent1"/>
+          </a:effectRef>
+          <a:fontRef idx="minor">
+            <a:schemeClr val="lt1"/>
+          </a:fontRef>
+        </p:style>
+        <p:txBody>
+          <a:bodyPr rtlCol="0" anchor="ctr"/>
+          <a:lstStyle/>
+          <a:p>
+            <a:pPr algn="ctr"/>
+          </a:p>
+        </p:txBody>
+      </p:sp>
+      <p:sp>
+        <p:nvSpPr>
+          <p:cNvPr id="3" name="TextBox 2"/>
+          <p:cNvSpPr txBox="1"/>
+          <p:nvPr/>
+        </p:nvSpPr>
+        <p:spPr>
+          <a:xfrm>
+            <a:off x="548640" y="91440"/>
+            <a:ext cx="10972800" cy="777240"/>
+          </a:xfrm>
+          <a:prstGeom prst="rect">
+            <a:avLst/>
+          </a:prstGeom>
+          <a:noFill/>
+        </p:spPr>
+        <p:txBody>
+          <a:bodyPr wrap="square">
+            <a:spAutoFit/>
+          </a:bodyPr>
+          <a:lstStyle/>
+          <a:p>
+            <a:pPr algn="l">
+              <a:spcAft>
+                <a:spcPts val="600"/>
+              </a:spcAft>
+            </a:pPr>
+            <a:r>
+              <a:rPr sz="2600" b="1">
+                <a:solidFill>
+                  <a:srgbClr val="FFFFFF"/>
+                </a:solidFill>
+                <a:latin typeface="맑은 고딕"/>
+              </a:rPr>
+              <a:t>기동 후 동기화 점검 순서</a:t>
+            </a:r>
+          </a:p>
+        </p:txBody>
+      </p:sp>
+      <p:sp>
+        <p:nvSpPr>
+          <p:cNvPr id="4" name="TextBox 3"/>
+          <p:cNvSpPr txBox="1"/>
+          <p:nvPr/>
+        </p:nvSpPr>
+        <p:spPr>
+          <a:xfrm>
+            <a:off x="640080" y="1078992"/>
+            <a:ext cx="10881360" cy="457200"/>
+          </a:xfrm>
+          <a:prstGeom prst="rect">
+            <a:avLst/>
+          </a:prstGeom>
+          <a:noFill/>
+        </p:spPr>
+        <p:txBody>
+          <a:bodyPr wrap="square">
+            <a:spAutoFit/>
+          </a:bodyPr>
+          <a:lstStyle/>
+          <a:p>
+            <a:pPr algn="l">
+              <a:spcAft>
+                <a:spcPts val="600"/>
+              </a:spcAft>
+            </a:pPr>
+            <a:r>
+              <a:rPr sz="1500" b="0">
+                <a:solidFill>
+                  <a:srgbClr val="5A6672"/>
+                </a:solidFill>
+                <a:latin typeface="맑은 고딕"/>
+              </a:rPr>
+              <a:t>앞 단계가 이상하면 뒤 단계 값은 믿지 않는다</a:t>
+            </a:r>
+          </a:p>
+        </p:txBody>
+      </p:sp>
+      <p:sp>
+        <p:nvSpPr>
+          <p:cNvPr id="5" name="TextBox 4"/>
+          <p:cNvSpPr txBox="1"/>
+          <p:nvPr/>
+        </p:nvSpPr>
+        <p:spPr>
+          <a:xfrm>
+            <a:off x="640080" y="1737360"/>
+            <a:ext cx="10881360" cy="4754880"/>
+          </a:xfrm>
+          <a:prstGeom prst="rect">
+            <a:avLst/>
+          </a:prstGeom>
+          <a:noFill/>
+        </p:spPr>
+        <p:txBody>
+          <a:bodyPr wrap="square">
+            <a:spAutoFit/>
+          </a:bodyPr>
+          <a:lstStyle/>
+          <a:p>
+            <a:pPr algn="l">
+              <a:spcAft>
+                <a:spcPts val="1000"/>
+              </a:spcAft>
+            </a:pPr>
+            <a:r>
+              <a:rPr sz="1700" b="0">
+                <a:solidFill>
+                  <a:srgbClr val="222222"/>
+                </a:solidFill>
+                <a:latin typeface="맑은 고딕"/>
+              </a:rPr>
+              <a:t>•  1. 역할과 열린 모드 (V$DATABASE)</a:t>
+            </a:r>
+          </a:p>
+          <a:p>
+            <a:pPr algn="l">
+              <a:spcAft>
+                <a:spcPts val="1000"/>
+              </a:spcAft>
+            </a:pPr>
+            <a:r>
+              <a:rPr sz="1700" b="0">
+                <a:solidFill>
+                  <a:srgbClr val="222222"/>
+                </a:solidFill>
+                <a:latin typeface="맑은 고딕"/>
+              </a:rPr>
+              <a:t>•  2. 프로세스: MRP0, RFS와 ACTION</a:t>
+            </a:r>
+          </a:p>
+          <a:p>
+            <a:pPr algn="l">
+              <a:spcAft>
+                <a:spcPts val="1000"/>
+              </a:spcAft>
+            </a:pPr>
+            <a:r>
+              <a:rPr sz="1700" b="0">
+                <a:solidFill>
+                  <a:srgbClr val="222222"/>
+                </a:solidFill>
+                <a:latin typeface="맑은 고딕"/>
+              </a:rPr>
+              <a:t>•  3. 목적지 STATUS와 RECOVERY_MODE</a:t>
+            </a:r>
+          </a:p>
+          <a:p>
+            <a:pPr algn="l">
+              <a:spcAft>
+                <a:spcPts val="1000"/>
+              </a:spcAft>
+            </a:pPr>
+            <a:r>
+              <a:rPr sz="1700" b="0">
+                <a:solidFill>
+                  <a:srgbClr val="222222"/>
+                </a:solidFill>
+                <a:latin typeface="맑은 고딕"/>
+              </a:rPr>
+              <a:t>•  4. 갭: V$ARCHIVE_GAP</a:t>
+            </a:r>
+          </a:p>
+          <a:p>
+            <a:pPr algn="l">
+              <a:spcAft>
+                <a:spcPts val="1000"/>
+              </a:spcAft>
+            </a:pPr>
+            <a:r>
+              <a:rPr sz="1700" b="0">
+                <a:solidFill>
+                  <a:srgbClr val="222222"/>
+                </a:solidFill>
+                <a:latin typeface="맑은 고딕"/>
+              </a:rPr>
+              <a:t>•  5. 지연 지표와 DATUM_TIME 신선도</a:t>
+            </a:r>
+          </a:p>
+        </p:txBody>
+      </p:sp>
+    </p:spTree>
+  </p:cSld>
+  <p:clrMapOvr>
+    <a:masterClrMapping/>
+  </p:clrMapOvr>
+</p:sld>
+</file>
+
+<file path=ppt/slides/slide49.xml><?xml version="1.0" encoding="utf-8"?>
+<p:sld xmlns:a="http://schemas.openxmlformats.org/drawingml/2006/main" xmlns:p="http://schemas.openxmlformats.org/presentationml/2006/main" xmlns:r="http://schemas.openxmlformats.org/officeDocument/2006/relationships">
+  <p:cSld>
+    <p:spTree>
+      <p:nvGrpSpPr>
+        <p:cNvPr id="1" name=""/>
+        <p:cNvGrpSpPr/>
+        <p:nvPr/>
+      </p:nvGrpSpPr>
+      <p:grpSpPr/>
+      <p:sp>
+        <p:nvSpPr>
+          <p:cNvPr id="2" name="Rectangle 1"/>
+          <p:cNvSpPr/>
+          <p:nvPr/>
+        </p:nvSpPr>
+        <p:spPr>
+          <a:xfrm>
+            <a:off x="0" y="0"/>
+            <a:ext cx="12191695" cy="6858000"/>
+          </a:xfrm>
+          <a:prstGeom prst="rect">
+            <a:avLst/>
+          </a:prstGeom>
+          <a:solidFill>
+            <a:srgbClr val="C0392B"/>
+          </a:solidFill>
+          <a:ln>
+            <a:noFill/>
+          </a:ln>
+          <a:effectLst/>
+        </p:spPr>
+        <p:style>
+          <a:lnRef idx="1">
+            <a:schemeClr val="accent1"/>
+          </a:lnRef>
+          <a:fillRef idx="3">
+            <a:schemeClr val="accent1"/>
+          </a:fillRef>
+          <a:effectRef idx="2">
+            <a:schemeClr val="accent1"/>
+          </a:effectRef>
+          <a:fontRef idx="minor">
+            <a:schemeClr val="lt1"/>
+          </a:fontRef>
+        </p:style>
+        <p:txBody>
+          <a:bodyPr rtlCol="0" anchor="ctr"/>
+          <a:lstStyle/>
+          <a:p>
+            <a:pPr algn="ctr"/>
+          </a:p>
+        </p:txBody>
+      </p:sp>
+      <p:sp>
+        <p:nvSpPr>
+          <p:cNvPr id="3" name="TextBox 2"/>
+          <p:cNvSpPr txBox="1"/>
+          <p:nvPr/>
+        </p:nvSpPr>
+        <p:spPr>
+          <a:xfrm>
+            <a:off x="822960" y="2011680"/>
+            <a:ext cx="10515600" cy="1097280"/>
+          </a:xfrm>
+          <a:prstGeom prst="rect">
+            <a:avLst/>
+          </a:prstGeom>
+          <a:noFill/>
+        </p:spPr>
+        <p:txBody>
+          <a:bodyPr wrap="square">
+            <a:spAutoFit/>
+          </a:bodyPr>
+          <a:lstStyle/>
+          <a:p>
+            <a:pPr algn="l">
+              <a:spcAft>
+                <a:spcPts val="600"/>
+              </a:spcAft>
+            </a:pPr>
+            <a:r>
+              <a:rPr sz="4000" b="1">
+                <a:solidFill>
+                  <a:srgbClr val="FFFFFF"/>
+                </a:solidFill>
+                <a:latin typeface="맑은 고딕"/>
+              </a:rPr>
+              <a:t>7.9</a:t>
+            </a:r>
+          </a:p>
+        </p:txBody>
+      </p:sp>
+      <p:sp>
+        <p:nvSpPr>
+          <p:cNvPr id="4" name="TextBox 3"/>
+          <p:cNvSpPr txBox="1"/>
+          <p:nvPr/>
+        </p:nvSpPr>
+        <p:spPr>
+          <a:xfrm>
+            <a:off x="822960" y="3017520"/>
+            <a:ext cx="10515600" cy="914400"/>
+          </a:xfrm>
+          <a:prstGeom prst="rect">
+            <a:avLst/>
+          </a:prstGeom>
+          <a:noFill/>
+        </p:spPr>
+        <p:txBody>
+          <a:bodyPr wrap="square">
+            <a:spAutoFit/>
+          </a:bodyPr>
+          <a:lstStyle/>
+          <a:p>
+            <a:pPr algn="l">
+              <a:spcAft>
+                <a:spcPts val="600"/>
+              </a:spcAft>
+            </a:pPr>
+            <a:r>
+              <a:rPr sz="2800" b="1">
+                <a:solidFill>
+                  <a:srgbClr val="FFFFFF"/>
+                </a:solidFill>
+                <a:latin typeface="맑은 고딕"/>
+              </a:rPr>
+              <a:t>운영 시 주의점</a:t>
+            </a:r>
+          </a:p>
+        </p:txBody>
+      </p:sp>
+      <p:sp>
+        <p:nvSpPr>
+          <p:cNvPr id="5" name="Rectangle 4"/>
+          <p:cNvSpPr/>
+          <p:nvPr/>
+        </p:nvSpPr>
+        <p:spPr>
+          <a:xfrm>
+            <a:off x="822960" y="4114800"/>
+            <a:ext cx="5486400" cy="54864"/>
+          </a:xfrm>
+          <a:prstGeom prst="rect">
+            <a:avLst/>
+          </a:prstGeom>
+          <a:solidFill>
+            <a:srgbClr val="FFFFFF"/>
+          </a:solidFill>
+          <a:ln>
+            <a:noFill/>
+          </a:ln>
+          <a:effectLst/>
+        </p:spPr>
+        <p:style>
+          <a:lnRef idx="1">
+            <a:schemeClr val="accent1"/>
+          </a:lnRef>
+          <a:fillRef idx="3">
+            <a:schemeClr val="accent1"/>
+          </a:fillRef>
+          <a:effectRef idx="2">
+            <a:schemeClr val="accent1"/>
+          </a:effectRef>
+          <a:fontRef idx="minor">
+            <a:schemeClr val="lt1"/>
+          </a:fontRef>
+        </p:style>
+        <p:txBody>
+          <a:bodyPr rtlCol="0" anchor="ctr"/>
+          <a:lstStyle/>
+          <a:p>
+            <a:pPr algn="ctr"/>
+          </a:p>
+        </p:txBody>
+      </p:sp>
+      <p:sp>
+        <p:nvSpPr>
+          <p:cNvPr id="6" name="TextBox 5"/>
+          <p:cNvSpPr txBox="1"/>
+          <p:nvPr/>
+        </p:nvSpPr>
+        <p:spPr>
+          <a:xfrm>
+            <a:off x="822960" y="4297680"/>
+            <a:ext cx="10058400" cy="2011680"/>
+          </a:xfrm>
+          <a:prstGeom prst="rect">
+            <a:avLst/>
+          </a:prstGeom>
+          <a:noFill/>
+        </p:spPr>
+        <p:txBody>
+          <a:bodyPr wrap="square">
+            <a:spAutoFit/>
+          </a:bodyPr>
+          <a:lstStyle/>
+          <a:p>
+            <a:pPr algn="l">
+              <a:spcAft>
+                <a:spcPts val="800"/>
+              </a:spcAft>
+            </a:pPr>
+            <a:r>
+              <a:rPr sz="1600" b="0">
+                <a:solidFill>
+                  <a:srgbClr val="FFFFFF"/>
+                </a:solidFill>
+                <a:latin typeface="맑은 고딕"/>
+              </a:rPr>
+              <a:t>•  멈춘 적용은 경보 없이 방치되기 쉽다</a:t>
+            </a:r>
+          </a:p>
+          <a:p>
+            <a:pPr algn="l">
+              <a:spcAft>
+                <a:spcPts val="800"/>
+              </a:spcAft>
+            </a:pPr>
+            <a:r>
+              <a:rPr sz="1600" b="0">
+                <a:solidFill>
+                  <a:srgbClr val="FFFFFF"/>
+                </a:solidFill>
+                <a:latin typeface="맑은 고딕"/>
+              </a:rPr>
+              <a:t>•  방식 변경은 CANCEL 후 재기동</a:t>
+            </a:r>
+          </a:p>
+          <a:p>
+            <a:pPr algn="l">
+              <a:spcAft>
+                <a:spcPts val="800"/>
+              </a:spcAft>
+            </a:pPr>
+            <a:r>
+              <a:rPr sz="1600" b="0">
+                <a:solidFill>
+                  <a:srgbClr val="FFFFFF"/>
+                </a:solidFill>
+                <a:latin typeface="맑은 고딕"/>
+              </a:rPr>
+              <a:t>•  값, 신선도, 추세로 감시</a:t>
             </a:r>
           </a:p>
         </p:txBody>
@@ -12692,7 +16800,7 @@
                 </a:solidFill>
                 <a:latin typeface="맑은 고딕"/>
               </a:rPr>
-              <a:t>겉모습 안으로</a:t>
+              <a:t>전송과 적용은 분리된 서비스</a:t>
             </a:r>
           </a:p>
         </p:txBody>
@@ -12731,7 +16839,7 @@
                 </a:solidFill>
                 <a:latin typeface="맑은 고딕"/>
               </a:rPr>
-              <a:t>상태 열 하나로는 알 수 없다</a:t>
+              <a:t>도착했다와 반영됐다는 다른 진술</a:t>
             </a:r>
           </a:p>
         </p:txBody>
@@ -12770,7 +16878,7 @@
                 </a:solidFill>
                 <a:latin typeface="맑은 고딕"/>
               </a:rPr>
-              <a:t>•  5·6장은 `READ ONLY WITH APPLY` 확인으로 끝났다</a:t>
+              <a:t>•  전송: 리두를 SRL·아카이브 로그에 기록하면 끝</a:t>
             </a:r>
           </a:p>
           <a:p>
@@ -12786,7 +16894,7 @@
                 </a:solidFill>
                 <a:latin typeface="맑은 고딕"/>
               </a:rPr>
-              <a:t>•  그 확인은 "적용이 돌고 있다"까지만 말해 준다</a:t>
+              <a:t>•  적용: 기록된 리두를 데이터 파일 블록에 반영</a:t>
             </a:r>
           </a:p>
           <a:p>
@@ -12802,7 +16910,7 @@
                 </a:solidFill>
                 <a:latin typeface="맑은 고딕"/>
               </a:rPr>
-              <a:t>•  실시간인가, 얼마나 뒤처졌는가, 목적지는 정상인가 — 답하지 않는다</a:t>
+              <a:t>•  적용이 멈춰도 전송은 계속된다</a:t>
             </a:r>
           </a:p>
           <a:p>
@@ -12818,7 +16926,1034 @@
                 </a:solidFill>
                 <a:latin typeface="맑은 고딕"/>
               </a:rPr>
-              <a:t>•  이 장은 그 안으로 들어간다</a:t>
+              <a:t>•  데이터 손실 여부는 전송, 전환 속도는 적용이 좌우</a:t>
+            </a:r>
+          </a:p>
+        </p:txBody>
+      </p:sp>
+    </p:spTree>
+  </p:cSld>
+  <p:clrMapOvr>
+    <a:masterClrMapping/>
+  </p:clrMapOvr>
+</p:sld>
+</file>
+
+<file path=ppt/slides/slide50.xml><?xml version="1.0" encoding="utf-8"?>
+<p:sld xmlns:a="http://schemas.openxmlformats.org/drawingml/2006/main" xmlns:p="http://schemas.openxmlformats.org/presentationml/2006/main" xmlns:r="http://schemas.openxmlformats.org/officeDocument/2006/relationships">
+  <p:cSld>
+    <p:spTree>
+      <p:nvGrpSpPr>
+        <p:cNvPr id="1" name=""/>
+        <p:cNvGrpSpPr/>
+        <p:nvPr/>
+      </p:nvGrpSpPr>
+      <p:grpSpPr/>
+      <p:sp>
+        <p:nvSpPr>
+          <p:cNvPr id="2" name="Rectangle 1"/>
+          <p:cNvSpPr/>
+          <p:nvPr/>
+        </p:nvSpPr>
+        <p:spPr>
+          <a:xfrm>
+            <a:off x="0" y="0"/>
+            <a:ext cx="12191695" cy="1005840"/>
+          </a:xfrm>
+          <a:prstGeom prst="rect">
+            <a:avLst/>
+          </a:prstGeom>
+          <a:solidFill>
+            <a:srgbClr val="C0392B"/>
+          </a:solidFill>
+          <a:ln>
+            <a:noFill/>
+          </a:ln>
+          <a:effectLst/>
+        </p:spPr>
+        <p:style>
+          <a:lnRef idx="1">
+            <a:schemeClr val="accent1"/>
+          </a:lnRef>
+          <a:fillRef idx="3">
+            <a:schemeClr val="accent1"/>
+          </a:fillRef>
+          <a:effectRef idx="2">
+            <a:schemeClr val="accent1"/>
+          </a:effectRef>
+          <a:fontRef idx="minor">
+            <a:schemeClr val="lt1"/>
+          </a:fontRef>
+        </p:style>
+        <p:txBody>
+          <a:bodyPr rtlCol="0" anchor="ctr"/>
+          <a:lstStyle/>
+          <a:p>
+            <a:pPr algn="ctr"/>
+          </a:p>
+        </p:txBody>
+      </p:sp>
+      <p:sp>
+        <p:nvSpPr>
+          <p:cNvPr id="3" name="TextBox 2"/>
+          <p:cNvSpPr txBox="1"/>
+          <p:nvPr/>
+        </p:nvSpPr>
+        <p:spPr>
+          <a:xfrm>
+            <a:off x="548640" y="91440"/>
+            <a:ext cx="10972800" cy="777240"/>
+          </a:xfrm>
+          <a:prstGeom prst="rect">
+            <a:avLst/>
+          </a:prstGeom>
+          <a:noFill/>
+        </p:spPr>
+        <p:txBody>
+          <a:bodyPr wrap="square">
+            <a:spAutoFit/>
+          </a:bodyPr>
+          <a:lstStyle/>
+          <a:p>
+            <a:pPr algn="l">
+              <a:spcAft>
+                <a:spcPts val="600"/>
+              </a:spcAft>
+            </a:pPr>
+            <a:r>
+              <a:rPr sz="2600" b="1">
+                <a:solidFill>
+                  <a:srgbClr val="FFFFFF"/>
+                </a:solidFill>
+                <a:latin typeface="맑은 고딕"/>
+              </a:rPr>
+              <a:t>운영 시 주의점</a:t>
+            </a:r>
+          </a:p>
+        </p:txBody>
+      </p:sp>
+      <p:sp>
+        <p:nvSpPr>
+          <p:cNvPr id="4" name="TextBox 3"/>
+          <p:cNvSpPr txBox="1"/>
+          <p:nvPr/>
+        </p:nvSpPr>
+        <p:spPr>
+          <a:xfrm>
+            <a:off x="640080" y="1078992"/>
+            <a:ext cx="10881360" cy="457200"/>
+          </a:xfrm>
+          <a:prstGeom prst="rect">
+            <a:avLst/>
+          </a:prstGeom>
+          <a:noFill/>
+        </p:spPr>
+        <p:txBody>
+          <a:bodyPr wrap="square">
+            <a:spAutoFit/>
+          </a:bodyPr>
+          <a:lstStyle/>
+          <a:p>
+            <a:pPr algn="l">
+              <a:spcAft>
+                <a:spcPts val="600"/>
+              </a:spcAft>
+            </a:pPr>
+            <a:r>
+              <a:rPr sz="1500" b="0">
+                <a:solidFill>
+                  <a:srgbClr val="5A6672"/>
+                </a:solidFill>
+                <a:latin typeface="맑은 고딕"/>
+              </a:rPr>
+              <a:t>경보가 울리지 않는 문제들</a:t>
+            </a:r>
+          </a:p>
+        </p:txBody>
+      </p:sp>
+      <p:sp>
+        <p:nvSpPr>
+          <p:cNvPr id="5" name="TextBox 4"/>
+          <p:cNvSpPr txBox="1"/>
+          <p:nvPr/>
+        </p:nvSpPr>
+        <p:spPr>
+          <a:xfrm>
+            <a:off x="640080" y="1737360"/>
+            <a:ext cx="10881360" cy="4754880"/>
+          </a:xfrm>
+          <a:prstGeom prst="rect">
+            <a:avLst/>
+          </a:prstGeom>
+          <a:noFill/>
+        </p:spPr>
+        <p:txBody>
+          <a:bodyPr wrap="square">
+            <a:spAutoFit/>
+          </a:bodyPr>
+          <a:lstStyle/>
+          <a:p>
+            <a:pPr algn="l">
+              <a:spcAft>
+                <a:spcPts val="1000"/>
+              </a:spcAft>
+            </a:pPr>
+            <a:r>
+              <a:rPr sz="1700" b="0">
+                <a:solidFill>
+                  <a:srgbClr val="222222"/>
+                </a:solidFill>
+                <a:latin typeface="맑은 고딕"/>
+              </a:rPr>
+              <a:t>•  CANCEL한 적용의 재기동을 체크리스트에</a:t>
+            </a:r>
+          </a:p>
+          <a:p>
+            <a:pPr algn="l">
+              <a:spcAft>
+                <a:spcPts val="1000"/>
+              </a:spcAft>
+            </a:pPr>
+            <a:r>
+              <a:rPr sz="1700" b="0">
+                <a:solidFill>
+                  <a:srgbClr val="222222"/>
+                </a:solidFill>
+                <a:latin typeface="맑은 고딕"/>
+              </a:rPr>
+              <a:t>•  SQL 관리 구성은 재기동 절차에 적용 기동 포함</a:t>
+            </a:r>
+          </a:p>
+          <a:p>
+            <a:pPr algn="l">
+              <a:spcAft>
+                <a:spcPts val="1000"/>
+              </a:spcAft>
+            </a:pPr>
+            <a:r>
+              <a:rPr sz="1700" b="0">
+                <a:solidFill>
+                  <a:srgbClr val="222222"/>
+                </a:solidFill>
+                <a:latin typeface="맑은 고딕"/>
+              </a:rPr>
+              <a:t>•  Primary 로그 변경 시 SRL도 함께 재구성</a:t>
+            </a:r>
+          </a:p>
+          <a:p>
+            <a:pPr algn="l">
+              <a:spcAft>
+                <a:spcPts val="1000"/>
+              </a:spcAft>
+            </a:pPr>
+            <a:r>
+              <a:rPr sz="1700" b="0">
+                <a:solidFill>
+                  <a:srgbClr val="222222"/>
+                </a:solidFill>
+                <a:latin typeface="맑은 고딕"/>
+              </a:rPr>
+              <a:t>•  Standby 자원은 Primary보다 넉넉하게</a:t>
+            </a:r>
+          </a:p>
+          <a:p>
+            <a:pPr algn="l">
+              <a:spcAft>
+                <a:spcPts val="1000"/>
+              </a:spcAft>
+            </a:pPr>
+            <a:r>
+              <a:rPr sz="1700" b="0">
+                <a:solidFill>
+                  <a:srgbClr val="222222"/>
+                </a:solidFill>
+                <a:latin typeface="맑은 고딕"/>
+              </a:rPr>
+              <a:t>•  적용 중지 기간에는 Primary 삭제 정책·FRA 확인</a:t>
+            </a:r>
+          </a:p>
+        </p:txBody>
+      </p:sp>
+    </p:spTree>
+  </p:cSld>
+  <p:clrMapOvr>
+    <a:masterClrMapping/>
+  </p:clrMapOvr>
+</p:sld>
+</file>
+
+<file path=ppt/slides/slide51.xml><?xml version="1.0" encoding="utf-8"?>
+<p:sld xmlns:a="http://schemas.openxmlformats.org/drawingml/2006/main" xmlns:p="http://schemas.openxmlformats.org/presentationml/2006/main" xmlns:r="http://schemas.openxmlformats.org/officeDocument/2006/relationships">
+  <p:cSld>
+    <p:spTree>
+      <p:nvGrpSpPr>
+        <p:cNvPr id="1" name=""/>
+        <p:cNvGrpSpPr/>
+        <p:nvPr/>
+      </p:nvGrpSpPr>
+      <p:grpSpPr/>
+      <p:sp>
+        <p:nvSpPr>
+          <p:cNvPr id="2" name="Rectangle 1"/>
+          <p:cNvSpPr/>
+          <p:nvPr/>
+        </p:nvSpPr>
+        <p:spPr>
+          <a:xfrm>
+            <a:off x="0" y="0"/>
+            <a:ext cx="12191695" cy="1005840"/>
+          </a:xfrm>
+          <a:prstGeom prst="rect">
+            <a:avLst/>
+          </a:prstGeom>
+          <a:solidFill>
+            <a:srgbClr val="C0392B"/>
+          </a:solidFill>
+          <a:ln>
+            <a:noFill/>
+          </a:ln>
+          <a:effectLst/>
+        </p:spPr>
+        <p:style>
+          <a:lnRef idx="1">
+            <a:schemeClr val="accent1"/>
+          </a:lnRef>
+          <a:fillRef idx="3">
+            <a:schemeClr val="accent1"/>
+          </a:fillRef>
+          <a:effectRef idx="2">
+            <a:schemeClr val="accent1"/>
+          </a:effectRef>
+          <a:fontRef idx="minor">
+            <a:schemeClr val="lt1"/>
+          </a:fontRef>
+        </p:style>
+        <p:txBody>
+          <a:bodyPr rtlCol="0" anchor="ctr"/>
+          <a:lstStyle/>
+          <a:p>
+            <a:pPr algn="ctr"/>
+          </a:p>
+        </p:txBody>
+      </p:sp>
+      <p:sp>
+        <p:nvSpPr>
+          <p:cNvPr id="3" name="TextBox 2"/>
+          <p:cNvSpPr txBox="1"/>
+          <p:nvPr/>
+        </p:nvSpPr>
+        <p:spPr>
+          <a:xfrm>
+            <a:off x="548640" y="91440"/>
+            <a:ext cx="10972800" cy="777240"/>
+          </a:xfrm>
+          <a:prstGeom prst="rect">
+            <a:avLst/>
+          </a:prstGeom>
+          <a:noFill/>
+        </p:spPr>
+        <p:txBody>
+          <a:bodyPr wrap="square">
+            <a:spAutoFit/>
+          </a:bodyPr>
+          <a:lstStyle/>
+          <a:p>
+            <a:pPr algn="l">
+              <a:spcAft>
+                <a:spcPts val="600"/>
+              </a:spcAft>
+            </a:pPr>
+            <a:r>
+              <a:rPr sz="2600" b="1">
+                <a:solidFill>
+                  <a:srgbClr val="FFFFFF"/>
+                </a:solidFill>
+                <a:latin typeface="맑은 고딕"/>
+              </a:rPr>
+              <a:t>요약</a:t>
+            </a:r>
+          </a:p>
+        </p:txBody>
+      </p:sp>
+      <p:sp>
+        <p:nvSpPr>
+          <p:cNvPr id="4" name="TextBox 3"/>
+          <p:cNvSpPr txBox="1"/>
+          <p:nvPr/>
+        </p:nvSpPr>
+        <p:spPr>
+          <a:xfrm>
+            <a:off x="640080" y="1371600"/>
+            <a:ext cx="10881360" cy="5120640"/>
+          </a:xfrm>
+          <a:prstGeom prst="rect">
+            <a:avLst/>
+          </a:prstGeom>
+          <a:noFill/>
+        </p:spPr>
+        <p:txBody>
+          <a:bodyPr wrap="square">
+            <a:spAutoFit/>
+          </a:bodyPr>
+          <a:lstStyle/>
+          <a:p>
+            <a:pPr algn="l">
+              <a:spcAft>
+                <a:spcPts val="1000"/>
+              </a:spcAft>
+            </a:pPr>
+            <a:r>
+              <a:rPr sz="1600" b="0">
+                <a:solidFill>
+                  <a:srgbClr val="222222"/>
+                </a:solidFill>
+                <a:latin typeface="맑은 고딕"/>
+              </a:rPr>
+              <a:t>•  동기화 = 전송(도착) + Redo Apply(반영)</a:t>
+            </a:r>
+          </a:p>
+          <a:p>
+            <a:pPr algn="l">
+              <a:spcAft>
+                <a:spcPts val="1000"/>
+              </a:spcAft>
+            </a:pPr>
+            <a:r>
+              <a:rPr sz="1600" b="0">
+                <a:solidFill>
+                  <a:srgbClr val="222222"/>
+                </a:solidFill>
+                <a:latin typeface="맑은 고딕"/>
+              </a:rPr>
+              <a:t>•  MRP0가 조율, 복구 슬레이브가 병렬 적용</a:t>
+            </a:r>
+          </a:p>
+          <a:p>
+            <a:pPr algn="l">
+              <a:spcAft>
+                <a:spcPts val="1000"/>
+              </a:spcAft>
+            </a:pPr>
+            <a:r>
+              <a:rPr sz="1600" b="0">
+                <a:solidFill>
+                  <a:srgbClr val="222222"/>
+                </a:solidFill>
+                <a:latin typeface="맑은 고딕"/>
+              </a:rPr>
+              <a:t>•  기동 DISCONNECT, 중지 CANCEL / 01153·16136</a:t>
+            </a:r>
+          </a:p>
+          <a:p>
+            <a:pPr algn="l">
+              <a:spcAft>
+                <a:spcPts val="1000"/>
+              </a:spcAft>
+            </a:pPr>
+            <a:r>
+              <a:rPr sz="1600" b="0">
+                <a:solidFill>
+                  <a:srgbClr val="222222"/>
+                </a:solidFill>
+                <a:latin typeface="맑은 고딕"/>
+              </a:rPr>
+              <a:t>•  19c는 실시간 적용 기본, SRL이 전제, RECOVERY_MODE로 판별</a:t>
+            </a:r>
+          </a:p>
+          <a:p>
+            <a:pPr algn="l">
+              <a:spcAft>
+                <a:spcPts val="1000"/>
+              </a:spcAft>
+            </a:pPr>
+            <a:r>
+              <a:rPr sz="1600" b="0">
+                <a:solidFill>
+                  <a:srgbClr val="222222"/>
+                </a:solidFill>
+                <a:latin typeface="맑은 고딕"/>
+              </a:rPr>
+              <a:t>•  갭은 ARCn ping·FAL로 자동 해소, DELAY는 적용만 늦춤</a:t>
+            </a:r>
+          </a:p>
+          <a:p>
+            <a:pPr algn="l">
+              <a:spcAft>
+                <a:spcPts val="1000"/>
+              </a:spcAft>
+            </a:pPr>
+            <a:r>
+              <a:rPr sz="1600" b="0">
+                <a:solidFill>
+                  <a:srgbClr val="222222"/>
+                </a:solidFill>
+                <a:latin typeface="맑은 고딕"/>
+              </a:rPr>
+              <a:t>•  transport lag는 손실, apply lag는 과거 정도, 신선도 함께</a:t>
+            </a:r>
+          </a:p>
+        </p:txBody>
+      </p:sp>
+    </p:spTree>
+  </p:cSld>
+  <p:clrMapOvr>
+    <a:masterClrMapping/>
+  </p:clrMapOvr>
+</p:sld>
+</file>
+
+<file path=ppt/slides/slide52.xml><?xml version="1.0" encoding="utf-8"?>
+<p:sld xmlns:a="http://schemas.openxmlformats.org/drawingml/2006/main" xmlns:p="http://schemas.openxmlformats.org/presentationml/2006/main" xmlns:r="http://schemas.openxmlformats.org/officeDocument/2006/relationships">
+  <p:cSld>
+    <p:spTree>
+      <p:nvGrpSpPr>
+        <p:cNvPr id="1" name=""/>
+        <p:cNvGrpSpPr/>
+        <p:nvPr/>
+      </p:nvGrpSpPr>
+      <p:grpSpPr/>
+      <p:sp>
+        <p:nvSpPr>
+          <p:cNvPr id="2" name="Rectangle 1"/>
+          <p:cNvSpPr/>
+          <p:nvPr/>
+        </p:nvSpPr>
+        <p:spPr>
+          <a:xfrm>
+            <a:off x="0" y="0"/>
+            <a:ext cx="12191695" cy="1005840"/>
+          </a:xfrm>
+          <a:prstGeom prst="rect">
+            <a:avLst/>
+          </a:prstGeom>
+          <a:solidFill>
+            <a:srgbClr val="C0392B"/>
+          </a:solidFill>
+          <a:ln>
+            <a:noFill/>
+          </a:ln>
+          <a:effectLst/>
+        </p:spPr>
+        <p:style>
+          <a:lnRef idx="1">
+            <a:schemeClr val="accent1"/>
+          </a:lnRef>
+          <a:fillRef idx="3">
+            <a:schemeClr val="accent1"/>
+          </a:fillRef>
+          <a:effectRef idx="2">
+            <a:schemeClr val="accent1"/>
+          </a:effectRef>
+          <a:fontRef idx="minor">
+            <a:schemeClr val="lt1"/>
+          </a:fontRef>
+        </p:style>
+        <p:txBody>
+          <a:bodyPr rtlCol="0" anchor="ctr"/>
+          <a:lstStyle/>
+          <a:p>
+            <a:pPr algn="ctr"/>
+          </a:p>
+        </p:txBody>
+      </p:sp>
+      <p:sp>
+        <p:nvSpPr>
+          <p:cNvPr id="3" name="TextBox 2"/>
+          <p:cNvSpPr txBox="1"/>
+          <p:nvPr/>
+        </p:nvSpPr>
+        <p:spPr>
+          <a:xfrm>
+            <a:off x="548640" y="91440"/>
+            <a:ext cx="10972800" cy="777240"/>
+          </a:xfrm>
+          <a:prstGeom prst="rect">
+            <a:avLst/>
+          </a:prstGeom>
+          <a:noFill/>
+        </p:spPr>
+        <p:txBody>
+          <a:bodyPr wrap="square">
+            <a:spAutoFit/>
+          </a:bodyPr>
+          <a:lstStyle/>
+          <a:p>
+            <a:pPr algn="l">
+              <a:spcAft>
+                <a:spcPts val="600"/>
+              </a:spcAft>
+            </a:pPr>
+            <a:r>
+              <a:rPr sz="2600" b="1">
+                <a:solidFill>
+                  <a:srgbClr val="FFFFFF"/>
+                </a:solidFill>
+                <a:latin typeface="맑은 고딕"/>
+              </a:rPr>
+              <a:t>퀴즈 (1/2)</a:t>
+            </a:r>
+          </a:p>
+        </p:txBody>
+      </p:sp>
+      <p:sp>
+        <p:nvSpPr>
+          <p:cNvPr id="4" name="TextBox 3"/>
+          <p:cNvSpPr txBox="1"/>
+          <p:nvPr/>
+        </p:nvSpPr>
+        <p:spPr>
+          <a:xfrm>
+            <a:off x="640080" y="1371600"/>
+            <a:ext cx="10881360" cy="5120640"/>
+          </a:xfrm>
+          <a:prstGeom prst="rect">
+            <a:avLst/>
+          </a:prstGeom>
+          <a:noFill/>
+        </p:spPr>
+        <p:txBody>
+          <a:bodyPr wrap="square">
+            <a:spAutoFit/>
+          </a:bodyPr>
+          <a:lstStyle/>
+          <a:p>
+            <a:pPr algn="l">
+              <a:spcAft>
+                <a:spcPts val="1000"/>
+              </a:spcAft>
+            </a:pPr>
+            <a:r>
+              <a:rPr sz="1600" b="0">
+                <a:solidFill>
+                  <a:srgbClr val="222222"/>
+                </a:solidFill>
+                <a:latin typeface="맑은 고딕"/>
+              </a:rPr>
+              <a:t>•  Q1. 적용 중에 다시 기동하면? → ORA-01153</a:t>
+            </a:r>
+          </a:p>
+          <a:p>
+            <a:pPr algn="l">
+              <a:spcAft>
+                <a:spcPts val="1000"/>
+              </a:spcAft>
+            </a:pPr>
+            <a:r>
+              <a:rPr sz="1600" b="0">
+                <a:solidFill>
+                  <a:srgbClr val="222222"/>
+                </a:solidFill>
+                <a:latin typeface="맑은 고딕"/>
+              </a:rPr>
+              <a:t>•  Q2. 19c 실시간 적용의 필수 조건은? → 알맞은 크기의 SRL</a:t>
+            </a:r>
+          </a:p>
+          <a:p>
+            <a:pPr algn="l">
+              <a:spcAft>
+                <a:spcPts val="1000"/>
+              </a:spcAft>
+            </a:pPr>
+            <a:r>
+              <a:rPr sz="1600" b="0">
+                <a:solidFill>
+                  <a:srgbClr val="222222"/>
+                </a:solidFill>
+                <a:latin typeface="맑은 고딕"/>
+              </a:rPr>
+              <a:t>•  Q3. RECOVERY_MODE가 MANAGED이면? → 아카이브 기반 적용 중</a:t>
+            </a:r>
+          </a:p>
+        </p:txBody>
+      </p:sp>
+    </p:spTree>
+  </p:cSld>
+  <p:clrMapOvr>
+    <a:masterClrMapping/>
+  </p:clrMapOvr>
+</p:sld>
+</file>
+
+<file path=ppt/slides/slide53.xml><?xml version="1.0" encoding="utf-8"?>
+<p:sld xmlns:a="http://schemas.openxmlformats.org/drawingml/2006/main" xmlns:p="http://schemas.openxmlformats.org/presentationml/2006/main" xmlns:r="http://schemas.openxmlformats.org/officeDocument/2006/relationships">
+  <p:cSld>
+    <p:spTree>
+      <p:nvGrpSpPr>
+        <p:cNvPr id="1" name=""/>
+        <p:cNvGrpSpPr/>
+        <p:nvPr/>
+      </p:nvGrpSpPr>
+      <p:grpSpPr/>
+      <p:sp>
+        <p:nvSpPr>
+          <p:cNvPr id="2" name="Rectangle 1"/>
+          <p:cNvSpPr/>
+          <p:nvPr/>
+        </p:nvSpPr>
+        <p:spPr>
+          <a:xfrm>
+            <a:off x="0" y="0"/>
+            <a:ext cx="12191695" cy="1005840"/>
+          </a:xfrm>
+          <a:prstGeom prst="rect">
+            <a:avLst/>
+          </a:prstGeom>
+          <a:solidFill>
+            <a:srgbClr val="C0392B"/>
+          </a:solidFill>
+          <a:ln>
+            <a:noFill/>
+          </a:ln>
+          <a:effectLst/>
+        </p:spPr>
+        <p:style>
+          <a:lnRef idx="1">
+            <a:schemeClr val="accent1"/>
+          </a:lnRef>
+          <a:fillRef idx="3">
+            <a:schemeClr val="accent1"/>
+          </a:fillRef>
+          <a:effectRef idx="2">
+            <a:schemeClr val="accent1"/>
+          </a:effectRef>
+          <a:fontRef idx="minor">
+            <a:schemeClr val="lt1"/>
+          </a:fontRef>
+        </p:style>
+        <p:txBody>
+          <a:bodyPr rtlCol="0" anchor="ctr"/>
+          <a:lstStyle/>
+          <a:p>
+            <a:pPr algn="ctr"/>
+          </a:p>
+        </p:txBody>
+      </p:sp>
+      <p:sp>
+        <p:nvSpPr>
+          <p:cNvPr id="3" name="TextBox 2"/>
+          <p:cNvSpPr txBox="1"/>
+          <p:nvPr/>
+        </p:nvSpPr>
+        <p:spPr>
+          <a:xfrm>
+            <a:off x="548640" y="91440"/>
+            <a:ext cx="10972800" cy="777240"/>
+          </a:xfrm>
+          <a:prstGeom prst="rect">
+            <a:avLst/>
+          </a:prstGeom>
+          <a:noFill/>
+        </p:spPr>
+        <p:txBody>
+          <a:bodyPr wrap="square">
+            <a:spAutoFit/>
+          </a:bodyPr>
+          <a:lstStyle/>
+          <a:p>
+            <a:pPr algn="l">
+              <a:spcAft>
+                <a:spcPts val="600"/>
+              </a:spcAft>
+            </a:pPr>
+            <a:r>
+              <a:rPr sz="2600" b="1">
+                <a:solidFill>
+                  <a:srgbClr val="FFFFFF"/>
+                </a:solidFill>
+                <a:latin typeface="맑은 고딕"/>
+              </a:rPr>
+              <a:t>퀴즈 (2/2)</a:t>
+            </a:r>
+          </a:p>
+        </p:txBody>
+      </p:sp>
+      <p:sp>
+        <p:nvSpPr>
+          <p:cNvPr id="4" name="TextBox 3"/>
+          <p:cNvSpPr txBox="1"/>
+          <p:nvPr/>
+        </p:nvSpPr>
+        <p:spPr>
+          <a:xfrm>
+            <a:off x="640080" y="1371600"/>
+            <a:ext cx="10881360" cy="5120640"/>
+          </a:xfrm>
+          <a:prstGeom prst="rect">
+            <a:avLst/>
+          </a:prstGeom>
+          <a:noFill/>
+        </p:spPr>
+        <p:txBody>
+          <a:bodyPr wrap="square">
+            <a:spAutoFit/>
+          </a:bodyPr>
+          <a:lstStyle/>
+          <a:p>
+            <a:pPr algn="l">
+              <a:spcAft>
+                <a:spcPts val="1000"/>
+              </a:spcAft>
+            </a:pPr>
+            <a:r>
+              <a:rPr sz="1600" b="0">
+                <a:solidFill>
+                  <a:srgbClr val="222222"/>
+                </a:solidFill>
+                <a:latin typeface="맑은 고딕"/>
+              </a:rPr>
+              <a:t>•  Q4. Primary에서 지워진 로그도 FAL로 복구되나? → 아니다</a:t>
+            </a:r>
+          </a:p>
+          <a:p>
+            <a:pPr algn="l">
+              <a:spcAft>
+                <a:spcPts val="1000"/>
+              </a:spcAft>
+            </a:pPr>
+            <a:r>
+              <a:rPr sz="1600" b="0">
+                <a:solidFill>
+                  <a:srgbClr val="222222"/>
+                </a:solidFill>
+                <a:latin typeface="맑은 고딕"/>
+              </a:rPr>
+              <a:t>•  Q5. DELAY=240의 효과는? → 전송은 즉시, 적용만 240분 지연</a:t>
+            </a:r>
+          </a:p>
+          <a:p>
+            <a:pPr algn="l">
+              <a:spcAft>
+                <a:spcPts val="1000"/>
+              </a:spcAft>
+            </a:pPr>
+            <a:r>
+              <a:rPr sz="1600" b="0">
+                <a:solidFill>
+                  <a:srgbClr val="222222"/>
+                </a:solidFill>
+                <a:latin typeface="맑은 고딕"/>
+              </a:rPr>
+              <a:t>•  Q6. lag 0초인데 DATUM_TIME이 20분 전이면? → 연결 단절 의심</a:t>
+            </a:r>
+          </a:p>
+        </p:txBody>
+      </p:sp>
+    </p:spTree>
+  </p:cSld>
+  <p:clrMapOvr>
+    <a:masterClrMapping/>
+  </p:clrMapOvr>
+</p:sld>
+</file>
+
+<file path=ppt/slides/slide54.xml><?xml version="1.0" encoding="utf-8"?>
+<p:sld xmlns:a="http://schemas.openxmlformats.org/drawingml/2006/main" xmlns:p="http://schemas.openxmlformats.org/presentationml/2006/main" xmlns:r="http://schemas.openxmlformats.org/officeDocument/2006/relationships">
+  <p:cSld>
+    <p:spTree>
+      <p:nvGrpSpPr>
+        <p:cNvPr id="1" name=""/>
+        <p:cNvGrpSpPr/>
+        <p:nvPr/>
+      </p:nvGrpSpPr>
+      <p:grpSpPr/>
+      <p:sp>
+        <p:nvSpPr>
+          <p:cNvPr id="2" name="Rectangle 1"/>
+          <p:cNvSpPr/>
+          <p:nvPr/>
+        </p:nvSpPr>
+        <p:spPr>
+          <a:xfrm>
+            <a:off x="0" y="0"/>
+            <a:ext cx="12191695" cy="1005840"/>
+          </a:xfrm>
+          <a:prstGeom prst="rect">
+            <a:avLst/>
+          </a:prstGeom>
+          <a:solidFill>
+            <a:srgbClr val="C0392B"/>
+          </a:solidFill>
+          <a:ln>
+            <a:noFill/>
+          </a:ln>
+          <a:effectLst/>
+        </p:spPr>
+        <p:style>
+          <a:lnRef idx="1">
+            <a:schemeClr val="accent1"/>
+          </a:lnRef>
+          <a:fillRef idx="3">
+            <a:schemeClr val="accent1"/>
+          </a:fillRef>
+          <a:effectRef idx="2">
+            <a:schemeClr val="accent1"/>
+          </a:effectRef>
+          <a:fontRef idx="minor">
+            <a:schemeClr val="lt1"/>
+          </a:fontRef>
+        </p:style>
+        <p:txBody>
+          <a:bodyPr rtlCol="0" anchor="ctr"/>
+          <a:lstStyle/>
+          <a:p>
+            <a:pPr algn="ctr"/>
+          </a:p>
+        </p:txBody>
+      </p:sp>
+      <p:sp>
+        <p:nvSpPr>
+          <p:cNvPr id="3" name="TextBox 2"/>
+          <p:cNvSpPr txBox="1"/>
+          <p:nvPr/>
+        </p:nvSpPr>
+        <p:spPr>
+          <a:xfrm>
+            <a:off x="548640" y="91440"/>
+            <a:ext cx="10972800" cy="777240"/>
+          </a:xfrm>
+          <a:prstGeom prst="rect">
+            <a:avLst/>
+          </a:prstGeom>
+          <a:noFill/>
+        </p:spPr>
+        <p:txBody>
+          <a:bodyPr wrap="square">
+            <a:spAutoFit/>
+          </a:bodyPr>
+          <a:lstStyle/>
+          <a:p>
+            <a:pPr algn="l">
+              <a:spcAft>
+                <a:spcPts val="600"/>
+              </a:spcAft>
+            </a:pPr>
+            <a:r>
+              <a:rPr sz="2600" b="1">
+                <a:solidFill>
+                  <a:srgbClr val="FFFFFF"/>
+                </a:solidFill>
+                <a:latin typeface="맑은 고딕"/>
+              </a:rPr>
+              <a:t>실습 개요</a:t>
+            </a:r>
+          </a:p>
+        </p:txBody>
+      </p:sp>
+      <p:sp>
+        <p:nvSpPr>
+          <p:cNvPr id="4" name="TextBox 3"/>
+          <p:cNvSpPr txBox="1"/>
+          <p:nvPr/>
+        </p:nvSpPr>
+        <p:spPr>
+          <a:xfrm>
+            <a:off x="640080" y="1371600"/>
+            <a:ext cx="10881360" cy="5120640"/>
+          </a:xfrm>
+          <a:prstGeom prst="rect">
+            <a:avLst/>
+          </a:prstGeom>
+          <a:noFill/>
+        </p:spPr>
+        <p:txBody>
+          <a:bodyPr wrap="square">
+            <a:spAutoFit/>
+          </a:bodyPr>
+          <a:lstStyle/>
+          <a:p>
+            <a:pPr algn="l">
+              <a:spcAft>
+                <a:spcPts val="1000"/>
+              </a:spcAft>
+            </a:pPr>
+            <a:r>
+              <a:rPr sz="1600" b="0">
+                <a:solidFill>
+                  <a:srgbClr val="222222"/>
+                </a:solidFill>
+                <a:latin typeface="맑은 고딕"/>
+              </a:rPr>
+              <a:t>•  01 적용 프로세스 관찰: RFS·MRP0·ACTION (7.2, 7.3)</a:t>
+            </a:r>
+          </a:p>
+          <a:p>
+            <a:pPr algn="l">
+              <a:spcAft>
+                <a:spcPts val="1000"/>
+              </a:spcAft>
+            </a:pPr>
+            <a:r>
+              <a:rPr sz="1600" b="0">
+                <a:solidFill>
+                  <a:srgbClr val="222222"/>
+                </a:solidFill>
+                <a:latin typeface="맑은 고딕"/>
+              </a:rPr>
+              <a:t>•  02 적용 제어와 오류: ORA-01153, ORA-16136 (7.3)</a:t>
+            </a:r>
+          </a:p>
+          <a:p>
+            <a:pPr algn="l">
+              <a:spcAft>
+                <a:spcPts val="1000"/>
+              </a:spcAft>
+            </a:pPr>
+            <a:r>
+              <a:rPr sz="1600" b="0">
+                <a:solidFill>
+                  <a:srgbClr val="222222"/>
+                </a:solidFill>
+                <a:latin typeface="맑은 고딕"/>
+              </a:rPr>
+              <a:t>•  03 BAD PARAM 진단과 교정: 로컬 목적지, FAL (7.5)</a:t>
+            </a:r>
+          </a:p>
+          <a:p>
+            <a:pPr algn="l">
+              <a:spcAft>
+                <a:spcPts val="1000"/>
+              </a:spcAft>
+            </a:pPr>
+            <a:r>
+              <a:rPr sz="1600" b="0">
+                <a:solidFill>
+                  <a:srgbClr val="222222"/>
+                </a:solidFill>
+                <a:latin typeface="맑은 고딕"/>
+              </a:rPr>
+              <a:t>•  04 실시간 적용 판별 / 05 갭 만들기와 해소 (7.4, 7.6)</a:t>
+            </a:r>
+          </a:p>
+          <a:p>
+            <a:pPr algn="l">
+              <a:spcAft>
+                <a:spcPts val="1000"/>
+              </a:spcAft>
+            </a:pPr>
+            <a:r>
+              <a:rPr sz="1600" b="0">
+                <a:solidFill>
+                  <a:srgbClr val="222222"/>
+                </a:solidFill>
+                <a:latin typeface="맑은 고딕"/>
+              </a:rPr>
+              <a:t>•  06 지연 읽기: 네 지표와 신선도 (7.8)</a:t>
+            </a:r>
+          </a:p>
+          <a:p>
+            <a:pPr algn="l">
+              <a:spcAft>
+                <a:spcPts val="1000"/>
+              </a:spcAft>
+            </a:pPr>
+            <a:r>
+              <a:rPr sz="1600" b="0">
+                <a:solidFill>
+                  <a:srgbClr val="222222"/>
+                </a:solidFill>
+                <a:latin typeface="맑은 고딕"/>
+              </a:rPr>
+              <a:t>•  07 SRL과 적용: 실시간 적용의 전제 (7.4)</a:t>
             </a:r>
           </a:p>
         </p:txBody>
@@ -12919,7 +18054,7 @@
                 </a:solidFill>
                 <a:latin typeface="맑은 고딕"/>
               </a:rPr>
-              <a:t>V$MANAGED_STANDBY 9행</a:t>
+              <a:t>미디어 복구로서의 Redo Apply</a:t>
             </a:r>
           </a:p>
         </p:txBody>
@@ -12958,7 +18093,7 @@
                 </a:solidFill>
                 <a:latin typeface="맑은 고딕"/>
               </a:rPr>
-              <a:t>누가 무엇을 하는가</a:t>
+              <a:t>백업 복구와 원리가 같고, 끝나지 않을 뿐</a:t>
             </a:r>
           </a:p>
         </p:txBody>
@@ -12997,7 +18132,7 @@
                 </a:solidFill>
                 <a:latin typeface="맑은 고딕"/>
               </a:rPr>
-              <a:t>•  `RFS` — Primary의 리두를 받아 SRL에 쓴다. 개수 유동적</a:t>
+              <a:t>•  물리 Standby는 미디어 복구 기술로 적용</a:t>
             </a:r>
           </a:p>
           <a:p>
@@ -13013,7 +18148,7 @@
                 </a:solidFill>
                 <a:latin typeface="맑은 고딕"/>
               </a:rPr>
-              <a:t>•  `MRP0` — SRL을 읽어 데이터 파일에 적용한다. **항상 하나**</a:t>
+              <a:t>•  목표 시점 없이 다음 리두를 기다리며 계속</a:t>
             </a:r>
           </a:p>
           <a:p>
@@ -13029,7 +18164,7 @@
                 </a:solidFill>
                 <a:latin typeface="맑은 고딕"/>
               </a:rPr>
-              <a:t>•  `ARCH` — 아카이브 담당. 실측 4개 (`LOG_ARCHIVE_MAX_PROCESSES=4`)</a:t>
+              <a:t>•  블록 수준에서 Primary와 동일, 데이터 유형 제약 없음</a:t>
             </a:r>
           </a:p>
           <a:p>
@@ -13045,7 +18180,23 @@
                 </a:solidFill>
                 <a:latin typeface="맑은 고딕"/>
               </a:rPr>
-              <a:t>•  `DGRD` — 관리용 보조. 실측 2개</a:t>
+              <a:t>•  논리 Standby의 SQL Apply와는 구조가 다름</a:t>
+            </a:r>
+          </a:p>
+          <a:p>
+            <a:pPr algn="l">
+              <a:spcAft>
+                <a:spcPts val="1000"/>
+              </a:spcAft>
+            </a:pPr>
+            <a:r>
+              <a:rPr sz="1700" b="0">
+                <a:solidFill>
+                  <a:srgbClr val="222222"/>
+                </a:solidFill>
+                <a:latin typeface="맑은 고딕"/>
+              </a:rPr>
+              <a:t>•  Snapshot Standby는 받기만 하고 적용하지 않음</a:t>
             </a:r>
           </a:p>
         </p:txBody>
@@ -13146,7 +18297,7 @@
                 </a:solidFill>
                 <a:latin typeface="맑은 고딕"/>
               </a:rPr>
-              <a:t>결정적 관찰</a:t>
+              <a:t>Standby 쪽 프로세스</a:t>
             </a:r>
           </a:p>
         </p:txBody>
@@ -13185,7 +18336,7 @@
                 </a:solidFill>
                 <a:latin typeface="맑은 고딕"/>
               </a:rPr>
-              <a:t>두 시퀀스가 같다</a:t>
+              <a:t>적용의 주체는 MRP0와 복구 슬레이브</a:t>
             </a:r>
           </a:p>
         </p:txBody>
@@ -13224,7 +18375,7 @@
                 </a:solidFill>
                 <a:latin typeface="맑은 고딕"/>
               </a:rPr>
-              <a:t>•  MRP0 : thread 1, sequence 64, block 2285</a:t>
+              <a:t>•  RFS: Primary의 전송 프로세스와 짝을 이뤄 수신</a:t>
             </a:r>
           </a:p>
           <a:p>
@@ -13240,7 +18391,7 @@
                 </a:solidFill>
                 <a:latin typeface="맑은 고딕"/>
               </a:rPr>
-              <a:t>•  RFS  : thread 1, sequence 64, block 2285</a:t>
+              <a:t>•  ARCn: 다 찬 SRL을 아카이브 로그로 만듦</a:t>
             </a:r>
           </a:p>
           <a:p>
@@ -13256,7 +18407,7 @@
                 </a:solidFill>
                 <a:latin typeface="맑은 고딕"/>
               </a:rPr>
-              <a:t>•  **받는 지점과 적용하는 지점이 같다**</a:t>
+              <a:t>•  MRP0: Redo Apply 전체를 조율하는 코디네이터</a:t>
             </a:r>
           </a:p>
           <a:p>
@@ -13272,7 +18423,23 @@
                 </a:solidFill>
                 <a:latin typeface="맑은 고딕"/>
               </a:rPr>
-              <a:t>•  실시간 적용의 직접 증거. MOUNTED 상태에서도 쓸 수 있다</a:t>
+              <a:t>•  PRnn: logmerger와 apply slave로 병렬 적용</a:t>
+            </a:r>
+          </a:p>
+          <a:p>
+            <a:pPr algn="l">
+              <a:spcAft>
+                <a:spcPts val="1000"/>
+              </a:spcAft>
+            </a:pPr>
+            <a:r>
+              <a:rPr sz="1700" b="0">
+                <a:solidFill>
+                  <a:srgbClr val="222222"/>
+                </a:solidFill>
+                <a:latin typeface="맑은 고딕"/>
+              </a:rPr>
+              <a:t>•  MRP0가 없으면 적용이 돌지 않는 것으로 판단</a:t>
             </a:r>
           </a:p>
         </p:txBody>
@@ -13373,7 +18540,7 @@
                 </a:solidFill>
                 <a:latin typeface="맑은 고딕"/>
               </a:rPr>
-              <a:t>MRP0이 사라지면</a:t>
+              <a:t>V$DATAGUARD_PROCESS로 보는 역할</a:t>
             </a:r>
           </a:p>
         </p:txBody>
@@ -13412,7 +18579,7 @@
                 </a:solidFill>
                 <a:latin typeface="맑은 고딕"/>
               </a:rPr>
-              <a:t>꼬리표도 사라진다</a:t>
+              <a:t>12.2 이후 권장 뷰</a:t>
             </a:r>
           </a:p>
         </p:txBody>
@@ -13451,7 +18618,7 @@
                 </a:solidFill>
                 <a:latin typeface="맑은 고딕"/>
               </a:rPr>
-              <a:t>•  적용 중지 → `V$MANAGED_STANDBY`에서 MRP0이 없어진다</a:t>
+              <a:t>•  ROLE 열: managed recovery, recovery logmerger 등</a:t>
             </a:r>
           </a:p>
           <a:p>
@@ -13467,7 +18634,7 @@
                 </a:solidFill>
                 <a:latin typeface="맑은 고딕"/>
               </a:rPr>
-              <a:t>•  `OPEN_MODE` : READ ONLY WITH APPLY → **READ ONLY**</a:t>
+              <a:t>•  ACTION 열: 지금 하는 일(APPLYING_LOG 등)</a:t>
             </a:r>
           </a:p>
           <a:p>
@@ -13483,7 +18650,7 @@
                 </a:solidFill>
                 <a:latin typeface="맑은 고딕"/>
               </a:rPr>
-              <a:t>•  그런데 두 지연은 **0으로 보인다**</a:t>
+              <a:t>•  V$MANAGED_STANDBY는 19c에서 디프리케이트</a:t>
             </a:r>
           </a:p>
           <a:p>
@@ -13499,7 +18666,7 @@
                 </a:solidFill>
                 <a:latin typeface="맑은 고딕"/>
               </a:rPr>
-              <a:t>•  적용할 것이 없으니 뒤처질 것도 없다는 계산</a:t>
+              <a:t>•  새 점검 스크립트는 V$DATAGUARD_PROCESS 기준</a:t>
             </a:r>
           </a:p>
         </p:txBody>
@@ -13531,7 +18698,7 @@
         <p:spPr>
           <a:xfrm>
             <a:off x="0" y="0"/>
-            <a:ext cx="12191695" cy="6858000"/>
+            <a:ext cx="12191695" cy="1005840"/>
           </a:xfrm>
           <a:prstGeom prst="rect">
             <a:avLst/>
@@ -13574,8 +18741,8 @@
         </p:nvSpPr>
         <p:spPr>
           <a:xfrm>
-            <a:off x="822960" y="2011680"/>
-            <a:ext cx="10515600" cy="1097280"/>
+            <a:off x="548640" y="91440"/>
+            <a:ext cx="10972800" cy="777240"/>
           </a:xfrm>
           <a:prstGeom prst="rect">
             <a:avLst/>
@@ -13594,13 +18761,13 @@
               </a:spcAft>
             </a:pPr>
             <a:r>
-              <a:rPr sz="4000" b="1">
+              <a:rPr sz="2600" b="1">
                 <a:solidFill>
                   <a:srgbClr val="FFFFFF"/>
                 </a:solidFill>
                 <a:latin typeface="맑은 고딕"/>
               </a:rPr>
-              <a:t>7.3</a:t>
+              <a:t>적용 속도를 좌우하는 요소</a:t>
             </a:r>
           </a:p>
         </p:txBody>
@@ -13613,8 +18780,8 @@
         </p:nvSpPr>
         <p:spPr>
           <a:xfrm>
-            <a:off x="822960" y="3017520"/>
-            <a:ext cx="10515600" cy="914400"/>
+            <a:off x="640080" y="1078992"/>
+            <a:ext cx="10881360" cy="457200"/>
           </a:xfrm>
           <a:prstGeom prst="rect">
             <a:avLst/>
@@ -13633,71 +18800,27 @@
               </a:spcAft>
             </a:pPr>
             <a:r>
-              <a:rPr sz="2800" b="1">
-                <a:solidFill>
-                  <a:srgbClr val="FFFFFF"/>
-                </a:solidFill>
-                <a:latin typeface="맑은 고딕"/>
-              </a:rPr>
-              <a:t>적용 제어</a:t>
-            </a:r>
-          </a:p>
-        </p:txBody>
-      </p:sp>
-      <p:sp>
-        <p:nvSpPr>
-          <p:cNvPr id="5" name="Rectangle 4"/>
-          <p:cNvSpPr/>
-          <p:nvPr/>
-        </p:nvSpPr>
-        <p:spPr>
-          <a:xfrm>
-            <a:off x="822960" y="4114800"/>
-            <a:ext cx="5486400" cy="54864"/>
-          </a:xfrm>
-          <a:prstGeom prst="rect">
-            <a:avLst/>
-          </a:prstGeom>
-          <a:solidFill>
-            <a:srgbClr val="FFFFFF"/>
-          </a:solidFill>
-          <a:ln>
-            <a:noFill/>
-          </a:ln>
-          <a:effectLst/>
-        </p:spPr>
-        <p:style>
-          <a:lnRef idx="1">
-            <a:schemeClr val="accent1"/>
-          </a:lnRef>
-          <a:fillRef idx="3">
-            <a:schemeClr val="accent1"/>
-          </a:fillRef>
-          <a:effectRef idx="2">
-            <a:schemeClr val="accent1"/>
-          </a:effectRef>
-          <a:fontRef idx="minor">
-            <a:schemeClr val="lt1"/>
-          </a:fontRef>
-        </p:style>
-        <p:txBody>
-          <a:bodyPr rtlCol="0" anchor="ctr"/>
-          <a:lstStyle/>
-          <a:p>
-            <a:pPr algn="ctr"/>
-          </a:p>
-        </p:txBody>
-      </p:sp>
-      <p:sp>
-        <p:nvSpPr>
-          <p:cNvPr id="6" name="TextBox 5"/>
+              <a:rPr sz="1500" b="0">
+                <a:solidFill>
+                  <a:srgbClr val="5A6672"/>
+                </a:solidFill>
+                <a:latin typeface="맑은 고딕"/>
+              </a:rPr>
+              <a:t>Primary보다 적용 쪽에 부담이 몰리는 순간</a:t>
+            </a:r>
+          </a:p>
+        </p:txBody>
+      </p:sp>
+      <p:sp>
+        <p:nvSpPr>
+          <p:cNvPr id="5" name="TextBox 4"/>
           <p:cNvSpPr txBox="1"/>
           <p:nvPr/>
         </p:nvSpPr>
         <p:spPr>
           <a:xfrm>
-            <a:off x="822960" y="4297680"/>
-            <a:ext cx="10058400" cy="2011680"/>
+            <a:off x="640080" y="1737360"/>
+            <a:ext cx="10881360" cy="4754880"/>
           </a:xfrm>
           <a:prstGeom prst="rect">
             <a:avLst/>
@@ -13712,49 +18835,65 @@
           <a:p>
             <a:pPr algn="l">
               <a:spcAft>
-                <a:spcPts val="800"/>
-              </a:spcAft>
-            </a:pPr>
-            <a:r>
-              <a:rPr sz="1600" b="0">
-                <a:solidFill>
-                  <a:srgbClr val="FFFFFF"/>
-                </a:solidFill>
-                <a:latin typeface="맑은 고딕"/>
-              </a:rPr>
-              <a:t>•  세 가지 명령</a:t>
-            </a:r>
-          </a:p>
-          <a:p>
-            <a:pPr algn="l">
-              <a:spcAft>
-                <a:spcPts val="800"/>
-              </a:spcAft>
-            </a:pPr>
-            <a:r>
-              <a:rPr sz="1600" b="0">
-                <a:solidFill>
-                  <a:srgbClr val="FFFFFF"/>
-                </a:solidFill>
-                <a:latin typeface="맑은 고딕"/>
-              </a:rPr>
-              <a:t>•  두 가지 오류</a:t>
-            </a:r>
-          </a:p>
-          <a:p>
-            <a:pPr algn="l">
-              <a:spcAft>
-                <a:spcPts val="800"/>
-              </a:spcAft>
-            </a:pPr>
-            <a:r>
-              <a:rPr sz="1600" b="0">
-                <a:solidFill>
-                  <a:srgbClr val="FFFFFF"/>
-                </a:solidFill>
-                <a:latin typeface="맑은 고딕"/>
-              </a:rPr>
-              <a:t>•  안전한 재기동 순서</a:t>
+                <a:spcPts val="1000"/>
+              </a:spcAft>
+            </a:pPr>
+            <a:r>
+              <a:rPr sz="1700" b="0">
+                <a:solidFill>
+                  <a:srgbClr val="222222"/>
+                </a:solidFill>
+                <a:latin typeface="맑은 고딕"/>
+              </a:rPr>
+              <a:t>•  Standby I/O: 캐시에 없는 블록을 읽어야 함</a:t>
+            </a:r>
+          </a:p>
+          <a:p>
+            <a:pPr algn="l">
+              <a:spcAft>
+                <a:spcPts val="1000"/>
+              </a:spcAft>
+            </a:pPr>
+            <a:r>
+              <a:rPr sz="1700" b="0">
+                <a:solidFill>
+                  <a:srgbClr val="222222"/>
+                </a:solidFill>
+                <a:latin typeface="맑은 고딕"/>
+              </a:rPr>
+              <a:t>•  CPU 수: 복구 슬레이브 병렬도에 영향</a:t>
+            </a:r>
+          </a:p>
+          <a:p>
+            <a:pPr algn="l">
+              <a:spcAft>
+                <a:spcPts val="1000"/>
+              </a:spcAft>
+            </a:pPr>
+            <a:r>
+              <a:rPr sz="1700" b="0">
+                <a:solidFill>
+                  <a:srgbClr val="222222"/>
+                </a:solidFill>
+                <a:latin typeface="맑은 고딕"/>
+              </a:rPr>
+              <a:t>•  리두의 성격: 인덱스 많은 대량 DML, LOB 변경</a:t>
+            </a:r>
+          </a:p>
+          <a:p>
+            <a:pPr algn="l">
+              <a:spcAft>
+                <a:spcPts val="1000"/>
+              </a:spcAft>
+            </a:pPr>
+            <a:r>
+              <a:rPr sz="1700" b="0">
+                <a:solidFill>
+                  <a:srgbClr val="222222"/>
+                </a:solidFill>
+                <a:latin typeface="맑은 고딕"/>
+              </a:rPr>
+              <a:t>•  Broker의 Apply Rate로 처리 속도 확인</a:t>
             </a:r>
           </a:p>
         </p:txBody>
